--- a/生成AIの追加学習による問題.pptx
+++ b/生成AIの追加学習による問題.pptx
@@ -4,6 +4,12 @@
   <p:sldMasterIdLst>
     <p:sldMasterId id="2147483648" r:id="rId1"/>
   </p:sldMasterIdLst>
+  <p:notesMasterIdLst>
+    <p:notesMasterId r:id="rId26"/>
+  </p:notesMasterIdLst>
+  <p:handoutMasterIdLst>
+    <p:handoutMasterId r:id="rId27"/>
+  </p:handoutMasterIdLst>
   <p:sldIdLst>
     <p:sldId id="256" r:id="rId2"/>
     <p:sldId id="257" r:id="rId3"/>
@@ -24,6 +30,11 @@
     <p:sldId id="275" r:id="rId18"/>
     <p:sldId id="276" r:id="rId19"/>
     <p:sldId id="277" r:id="rId20"/>
+    <p:sldId id="278" r:id="rId21"/>
+    <p:sldId id="279" r:id="rId22"/>
+    <p:sldId id="281" r:id="rId23"/>
+    <p:sldId id="282" r:id="rId24"/>
+    <p:sldId id="283" r:id="rId25"/>
   </p:sldIdLst>
   <p:sldSz cx="12192000" cy="6858000"/>
   <p:notesSz cx="6858000" cy="9144000"/>
@@ -130,6 +141,578 @@
 </p:presentation>
 </file>
 
+<file path=ppt/handoutMasters/handoutMaster1.xml><?xml version="1.0" encoding="utf-8"?>
+<p:handoutMaster xmlns:a="http://schemas.openxmlformats.org/drawingml/2006/main" xmlns:r="http://schemas.openxmlformats.org/officeDocument/2006/relationships" xmlns:p="http://schemas.openxmlformats.org/presentationml/2006/main">
+  <p:cSld>
+    <p:bg>
+      <p:bgRef idx="1001">
+        <a:schemeClr val="bg1"/>
+      </p:bgRef>
+    </p:bg>
+    <p:spTree>
+      <p:nvGrpSpPr>
+        <p:cNvPr id="1" name=""/>
+        <p:cNvGrpSpPr/>
+        <p:nvPr/>
+      </p:nvGrpSpPr>
+      <p:grpSpPr>
+        <a:xfrm>
+          <a:off x="0" y="0"/>
+          <a:ext cx="0" cy="0"/>
+          <a:chOff x="0" y="0"/>
+          <a:chExt cx="0" cy="0"/>
+        </a:xfrm>
+      </p:grpSpPr>
+      <p:sp>
+        <p:nvSpPr>
+          <p:cNvPr id="2" name="ヘッダー プレースホルダー 1">
+            <a:extLst>
+              <a:ext uri="{FF2B5EF4-FFF2-40B4-BE49-F238E27FC236}">
+                <a16:creationId xmlns:a16="http://schemas.microsoft.com/office/drawing/2014/main" id="{A1C62D9E-085A-E766-4459-84109B96012A}"/>
+              </a:ext>
+            </a:extLst>
+          </p:cNvPr>
+          <p:cNvSpPr>
+            <a:spLocks noGrp="1"/>
+          </p:cNvSpPr>
+          <p:nvPr>
+            <p:ph type="hdr" sz="quarter"/>
+          </p:nvPr>
+        </p:nvSpPr>
+        <p:spPr>
+          <a:xfrm>
+            <a:off x="0" y="0"/>
+            <a:ext cx="2971800" cy="458788"/>
+          </a:xfrm>
+          <a:prstGeom prst="rect">
+            <a:avLst/>
+          </a:prstGeom>
+        </p:spPr>
+        <p:txBody>
+          <a:bodyPr vert="horz" lIns="91440" tIns="45720" rIns="91440" bIns="45720" rtlCol="0"/>
+          <a:lstStyle>
+            <a:lvl1pPr algn="l">
+              <a:defRPr sz="1200"/>
+            </a:lvl1pPr>
+          </a:lstStyle>
+          <a:p>
+            <a:endParaRPr kumimoji="1" lang="ja-JP" altLang="en-US"/>
+          </a:p>
+        </p:txBody>
+      </p:sp>
+      <p:sp>
+        <p:nvSpPr>
+          <p:cNvPr id="3" name="日付プレースホルダー 2">
+            <a:extLst>
+              <a:ext uri="{FF2B5EF4-FFF2-40B4-BE49-F238E27FC236}">
+                <a16:creationId xmlns:a16="http://schemas.microsoft.com/office/drawing/2014/main" id="{A26E88DC-CA8F-B845-ED88-928A9EBD45DD}"/>
+              </a:ext>
+            </a:extLst>
+          </p:cNvPr>
+          <p:cNvSpPr>
+            <a:spLocks noGrp="1"/>
+          </p:cNvSpPr>
+          <p:nvPr>
+            <p:ph type="dt" sz="quarter" idx="1"/>
+          </p:nvPr>
+        </p:nvSpPr>
+        <p:spPr>
+          <a:xfrm>
+            <a:off x="3884613" y="0"/>
+            <a:ext cx="2971800" cy="458788"/>
+          </a:xfrm>
+          <a:prstGeom prst="rect">
+            <a:avLst/>
+          </a:prstGeom>
+        </p:spPr>
+        <p:txBody>
+          <a:bodyPr vert="horz" lIns="91440" tIns="45720" rIns="91440" bIns="45720" rtlCol="0"/>
+          <a:lstStyle>
+            <a:lvl1pPr algn="r">
+              <a:defRPr sz="1200"/>
+            </a:lvl1pPr>
+          </a:lstStyle>
+          <a:p>
+            <a:fld id="{3D0BDCF3-6838-49F9-878F-F13A4D3F69AF}" type="datetimeFigureOut">
+              <a:rPr kumimoji="1" lang="ja-JP" altLang="en-US" smtClean="0"/>
+              <a:t>2026/9/8</a:t>
+            </a:fld>
+            <a:endParaRPr kumimoji="1" lang="ja-JP" altLang="en-US"/>
+          </a:p>
+        </p:txBody>
+      </p:sp>
+      <p:sp>
+        <p:nvSpPr>
+          <p:cNvPr id="4" name="フッター プレースホルダー 3">
+            <a:extLst>
+              <a:ext uri="{FF2B5EF4-FFF2-40B4-BE49-F238E27FC236}">
+                <a16:creationId xmlns:a16="http://schemas.microsoft.com/office/drawing/2014/main" id="{6BA09338-4410-469A-C088-1E372AB4CB06}"/>
+              </a:ext>
+            </a:extLst>
+          </p:cNvPr>
+          <p:cNvSpPr>
+            <a:spLocks noGrp="1"/>
+          </p:cNvSpPr>
+          <p:nvPr>
+            <p:ph type="ftr" sz="quarter" idx="2"/>
+          </p:nvPr>
+        </p:nvSpPr>
+        <p:spPr>
+          <a:xfrm>
+            <a:off x="0" y="8685213"/>
+            <a:ext cx="2971800" cy="458787"/>
+          </a:xfrm>
+          <a:prstGeom prst="rect">
+            <a:avLst/>
+          </a:prstGeom>
+        </p:spPr>
+        <p:txBody>
+          <a:bodyPr vert="horz" lIns="91440" tIns="45720" rIns="91440" bIns="45720" rtlCol="0" anchor="b"/>
+          <a:lstStyle>
+            <a:lvl1pPr algn="l">
+              <a:defRPr sz="1200"/>
+            </a:lvl1pPr>
+          </a:lstStyle>
+          <a:p>
+            <a:endParaRPr kumimoji="1" lang="ja-JP" altLang="en-US"/>
+          </a:p>
+        </p:txBody>
+      </p:sp>
+      <p:sp>
+        <p:nvSpPr>
+          <p:cNvPr id="5" name="スライド番号プレースホルダー 4">
+            <a:extLst>
+              <a:ext uri="{FF2B5EF4-FFF2-40B4-BE49-F238E27FC236}">
+                <a16:creationId xmlns:a16="http://schemas.microsoft.com/office/drawing/2014/main" id="{34043C3C-3033-6782-5183-13BB271C2AB5}"/>
+              </a:ext>
+            </a:extLst>
+          </p:cNvPr>
+          <p:cNvSpPr>
+            <a:spLocks noGrp="1"/>
+          </p:cNvSpPr>
+          <p:nvPr>
+            <p:ph type="sldNum" sz="quarter" idx="3"/>
+          </p:nvPr>
+        </p:nvSpPr>
+        <p:spPr>
+          <a:xfrm>
+            <a:off x="3884613" y="8685213"/>
+            <a:ext cx="2971800" cy="458787"/>
+          </a:xfrm>
+          <a:prstGeom prst="rect">
+            <a:avLst/>
+          </a:prstGeom>
+        </p:spPr>
+        <p:txBody>
+          <a:bodyPr vert="horz" lIns="91440" tIns="45720" rIns="91440" bIns="45720" rtlCol="0" anchor="b"/>
+          <a:lstStyle>
+            <a:lvl1pPr algn="r">
+              <a:defRPr sz="1200"/>
+            </a:lvl1pPr>
+          </a:lstStyle>
+          <a:p>
+            <a:fld id="{0416AACF-0064-475C-82B7-308A3EEA8AD9}" type="slidenum">
+              <a:rPr kumimoji="1" lang="ja-JP" altLang="en-US" smtClean="0"/>
+              <a:t>‹#›</a:t>
+            </a:fld>
+            <a:endParaRPr kumimoji="1" lang="ja-JP" altLang="en-US"/>
+          </a:p>
+        </p:txBody>
+      </p:sp>
+    </p:spTree>
+    <p:extLst>
+      <p:ext uri="{BB962C8B-B14F-4D97-AF65-F5344CB8AC3E}">
+        <p14:creationId xmlns:p14="http://schemas.microsoft.com/office/powerpoint/2010/main" val="2993582919"/>
+      </p:ext>
+    </p:extLst>
+  </p:cSld>
+  <p:clrMap bg1="lt1" tx1="dk1" bg2="lt2" tx2="dk2" accent1="accent1" accent2="accent2" accent3="accent3" accent4="accent4" accent5="accent5" accent6="accent6" hlink="hlink" folHlink="folHlink"/>
+  <p:hf hdr="0" ftr="0" dt="0"/>
+</p:handoutMaster>
+</file>
+
+<file path=ppt/notesMasters/notesMaster1.xml><?xml version="1.0" encoding="utf-8"?>
+<p:notesMaster xmlns:a="http://schemas.openxmlformats.org/drawingml/2006/main" xmlns:r="http://schemas.openxmlformats.org/officeDocument/2006/relationships" xmlns:p="http://schemas.openxmlformats.org/presentationml/2006/main">
+  <p:cSld>
+    <p:bg>
+      <p:bgRef idx="1001">
+        <a:schemeClr val="bg1"/>
+      </p:bgRef>
+    </p:bg>
+    <p:spTree>
+      <p:nvGrpSpPr>
+        <p:cNvPr id="1" name=""/>
+        <p:cNvGrpSpPr/>
+        <p:nvPr/>
+      </p:nvGrpSpPr>
+      <p:grpSpPr>
+        <a:xfrm>
+          <a:off x="0" y="0"/>
+          <a:ext cx="0" cy="0"/>
+          <a:chOff x="0" y="0"/>
+          <a:chExt cx="0" cy="0"/>
+        </a:xfrm>
+      </p:grpSpPr>
+      <p:sp>
+        <p:nvSpPr>
+          <p:cNvPr id="2" name="ヘッダー プレースホルダー 1"/>
+          <p:cNvSpPr>
+            <a:spLocks noGrp="1"/>
+          </p:cNvSpPr>
+          <p:nvPr>
+            <p:ph type="hdr" sz="quarter"/>
+          </p:nvPr>
+        </p:nvSpPr>
+        <p:spPr>
+          <a:xfrm>
+            <a:off x="0" y="0"/>
+            <a:ext cx="2971800" cy="458788"/>
+          </a:xfrm>
+          <a:prstGeom prst="rect">
+            <a:avLst/>
+          </a:prstGeom>
+        </p:spPr>
+        <p:txBody>
+          <a:bodyPr vert="horz" lIns="91440" tIns="45720" rIns="91440" bIns="45720" rtlCol="0"/>
+          <a:lstStyle>
+            <a:lvl1pPr algn="l">
+              <a:defRPr sz="1200"/>
+            </a:lvl1pPr>
+          </a:lstStyle>
+          <a:p>
+            <a:endParaRPr kumimoji="1" lang="ja-JP" altLang="en-US"/>
+          </a:p>
+        </p:txBody>
+      </p:sp>
+      <p:sp>
+        <p:nvSpPr>
+          <p:cNvPr id="3" name="日付プレースホルダー 2"/>
+          <p:cNvSpPr>
+            <a:spLocks noGrp="1"/>
+          </p:cNvSpPr>
+          <p:nvPr>
+            <p:ph type="dt" idx="1"/>
+          </p:nvPr>
+        </p:nvSpPr>
+        <p:spPr>
+          <a:xfrm>
+            <a:off x="3884613" y="0"/>
+            <a:ext cx="2971800" cy="458788"/>
+          </a:xfrm>
+          <a:prstGeom prst="rect">
+            <a:avLst/>
+          </a:prstGeom>
+        </p:spPr>
+        <p:txBody>
+          <a:bodyPr vert="horz" lIns="91440" tIns="45720" rIns="91440" bIns="45720" rtlCol="0"/>
+          <a:lstStyle>
+            <a:lvl1pPr algn="r">
+              <a:defRPr sz="1200"/>
+            </a:lvl1pPr>
+          </a:lstStyle>
+          <a:p>
+            <a:fld id="{F3D7D25B-E7F4-42EB-A3A2-379C00250A8D}" type="datetimeFigureOut">
+              <a:rPr kumimoji="1" lang="ja-JP" altLang="en-US" smtClean="0"/>
+              <a:t>2026/9/8</a:t>
+            </a:fld>
+            <a:endParaRPr kumimoji="1" lang="ja-JP" altLang="en-US"/>
+          </a:p>
+        </p:txBody>
+      </p:sp>
+      <p:sp>
+        <p:nvSpPr>
+          <p:cNvPr id="4" name="スライド イメージ プレースホルダー 3"/>
+          <p:cNvSpPr>
+            <a:spLocks noGrp="1" noRot="1" noChangeAspect="1"/>
+          </p:cNvSpPr>
+          <p:nvPr>
+            <p:ph type="sldImg" idx="2"/>
+          </p:nvPr>
+        </p:nvSpPr>
+        <p:spPr>
+          <a:xfrm>
+            <a:off x="685800" y="1143000"/>
+            <a:ext cx="5486400" cy="3086100"/>
+          </a:xfrm>
+          <a:prstGeom prst="rect">
+            <a:avLst/>
+          </a:prstGeom>
+          <a:noFill/>
+          <a:ln w="12700">
+            <a:solidFill>
+              <a:prstClr val="black"/>
+            </a:solidFill>
+          </a:ln>
+        </p:spPr>
+        <p:txBody>
+          <a:bodyPr vert="horz" lIns="91440" tIns="45720" rIns="91440" bIns="45720" rtlCol="0" anchor="ctr"/>
+          <a:lstStyle/>
+          <a:p>
+            <a:endParaRPr lang="ja-JP" altLang="en-US"/>
+          </a:p>
+        </p:txBody>
+      </p:sp>
+      <p:sp>
+        <p:nvSpPr>
+          <p:cNvPr id="5" name="ノート プレースホルダー 4"/>
+          <p:cNvSpPr>
+            <a:spLocks noGrp="1"/>
+          </p:cNvSpPr>
+          <p:nvPr>
+            <p:ph type="body" sz="quarter" idx="3"/>
+          </p:nvPr>
+        </p:nvSpPr>
+        <p:spPr>
+          <a:xfrm>
+            <a:off x="685800" y="4400550"/>
+            <a:ext cx="5486400" cy="3600450"/>
+          </a:xfrm>
+          <a:prstGeom prst="rect">
+            <a:avLst/>
+          </a:prstGeom>
+        </p:spPr>
+        <p:txBody>
+          <a:bodyPr vert="horz" lIns="91440" tIns="45720" rIns="91440" bIns="45720" rtlCol="0"/>
+          <a:lstStyle/>
+          <a:p>
+            <a:pPr lvl="0"/>
+            <a:r>
+              <a:rPr kumimoji="1" lang="ja-JP" altLang="en-US"/>
+              <a:t>マスター テキストの書式設定</a:t>
+            </a:r>
+          </a:p>
+          <a:p>
+            <a:pPr lvl="1"/>
+            <a:r>
+              <a:rPr kumimoji="1" lang="ja-JP" altLang="en-US"/>
+              <a:t>第 </a:t>
+            </a:r>
+            <a:r>
+              <a:rPr kumimoji="1" lang="en-US" altLang="ja-JP"/>
+              <a:t>2 </a:t>
+            </a:r>
+            <a:r>
+              <a:rPr kumimoji="1" lang="ja-JP" altLang="en-US"/>
+              <a:t>レベル</a:t>
+            </a:r>
+          </a:p>
+          <a:p>
+            <a:pPr lvl="2"/>
+            <a:r>
+              <a:rPr kumimoji="1" lang="ja-JP" altLang="en-US"/>
+              <a:t>第 </a:t>
+            </a:r>
+            <a:r>
+              <a:rPr kumimoji="1" lang="en-US" altLang="ja-JP"/>
+              <a:t>3 </a:t>
+            </a:r>
+            <a:r>
+              <a:rPr kumimoji="1" lang="ja-JP" altLang="en-US"/>
+              <a:t>レベル</a:t>
+            </a:r>
+          </a:p>
+          <a:p>
+            <a:pPr lvl="3"/>
+            <a:r>
+              <a:rPr kumimoji="1" lang="ja-JP" altLang="en-US"/>
+              <a:t>第 </a:t>
+            </a:r>
+            <a:r>
+              <a:rPr kumimoji="1" lang="en-US" altLang="ja-JP"/>
+              <a:t>4 </a:t>
+            </a:r>
+            <a:r>
+              <a:rPr kumimoji="1" lang="ja-JP" altLang="en-US"/>
+              <a:t>レベル</a:t>
+            </a:r>
+          </a:p>
+          <a:p>
+            <a:pPr lvl="4"/>
+            <a:r>
+              <a:rPr kumimoji="1" lang="ja-JP" altLang="en-US"/>
+              <a:t>第 </a:t>
+            </a:r>
+            <a:r>
+              <a:rPr kumimoji="1" lang="en-US" altLang="ja-JP"/>
+              <a:t>5 </a:t>
+            </a:r>
+            <a:r>
+              <a:rPr kumimoji="1" lang="ja-JP" altLang="en-US"/>
+              <a:t>レベル</a:t>
+            </a:r>
+          </a:p>
+        </p:txBody>
+      </p:sp>
+      <p:sp>
+        <p:nvSpPr>
+          <p:cNvPr id="6" name="フッター プレースホルダー 5"/>
+          <p:cNvSpPr>
+            <a:spLocks noGrp="1"/>
+          </p:cNvSpPr>
+          <p:nvPr>
+            <p:ph type="ftr" sz="quarter" idx="4"/>
+          </p:nvPr>
+        </p:nvSpPr>
+        <p:spPr>
+          <a:xfrm>
+            <a:off x="0" y="8685213"/>
+            <a:ext cx="2971800" cy="458787"/>
+          </a:xfrm>
+          <a:prstGeom prst="rect">
+            <a:avLst/>
+          </a:prstGeom>
+        </p:spPr>
+        <p:txBody>
+          <a:bodyPr vert="horz" lIns="91440" tIns="45720" rIns="91440" bIns="45720" rtlCol="0" anchor="b"/>
+          <a:lstStyle>
+            <a:lvl1pPr algn="l">
+              <a:defRPr sz="1200"/>
+            </a:lvl1pPr>
+          </a:lstStyle>
+          <a:p>
+            <a:endParaRPr kumimoji="1" lang="ja-JP" altLang="en-US"/>
+          </a:p>
+        </p:txBody>
+      </p:sp>
+      <p:sp>
+        <p:nvSpPr>
+          <p:cNvPr id="7" name="スライド番号プレースホルダー 6"/>
+          <p:cNvSpPr>
+            <a:spLocks noGrp="1"/>
+          </p:cNvSpPr>
+          <p:nvPr>
+            <p:ph type="sldNum" sz="quarter" idx="5"/>
+          </p:nvPr>
+        </p:nvSpPr>
+        <p:spPr>
+          <a:xfrm>
+            <a:off x="3884613" y="8685213"/>
+            <a:ext cx="2971800" cy="458787"/>
+          </a:xfrm>
+          <a:prstGeom prst="rect">
+            <a:avLst/>
+          </a:prstGeom>
+        </p:spPr>
+        <p:txBody>
+          <a:bodyPr vert="horz" lIns="91440" tIns="45720" rIns="91440" bIns="45720" rtlCol="0" anchor="b"/>
+          <a:lstStyle>
+            <a:lvl1pPr algn="r">
+              <a:defRPr sz="1200"/>
+            </a:lvl1pPr>
+          </a:lstStyle>
+          <a:p>
+            <a:fld id="{68DA8E0A-CFBF-4245-917B-805B87964056}" type="slidenum">
+              <a:rPr kumimoji="1" lang="ja-JP" altLang="en-US" smtClean="0"/>
+              <a:t>‹#›</a:t>
+            </a:fld>
+            <a:endParaRPr kumimoji="1" lang="ja-JP" altLang="en-US"/>
+          </a:p>
+        </p:txBody>
+      </p:sp>
+    </p:spTree>
+    <p:extLst>
+      <p:ext uri="{BB962C8B-B14F-4D97-AF65-F5344CB8AC3E}">
+        <p14:creationId xmlns:p14="http://schemas.microsoft.com/office/powerpoint/2010/main" val="1221789192"/>
+      </p:ext>
+    </p:extLst>
+  </p:cSld>
+  <p:clrMap bg1="lt1" tx1="dk1" bg2="lt2" tx2="dk2" accent1="accent1" accent2="accent2" accent3="accent3" accent4="accent4" accent5="accent5" accent6="accent6" hlink="hlink" folHlink="folHlink"/>
+  <p:hf hdr="0" ftr="0" dt="0"/>
+  <p:notesStyle>
+    <a:lvl1pPr marL="0" algn="l" defTabSz="914400" rtl="0" eaLnBrk="1" latinLnBrk="0" hangingPunct="1">
+      <a:defRPr kumimoji="1" sz="1200" kern="1200">
+        <a:solidFill>
+          <a:schemeClr val="tx1"/>
+        </a:solidFill>
+        <a:latin typeface="+mn-lt"/>
+        <a:ea typeface="+mn-ea"/>
+        <a:cs typeface="+mn-cs"/>
+      </a:defRPr>
+    </a:lvl1pPr>
+    <a:lvl2pPr marL="457200" algn="l" defTabSz="914400" rtl="0" eaLnBrk="1" latinLnBrk="0" hangingPunct="1">
+      <a:defRPr kumimoji="1" sz="1200" kern="1200">
+        <a:solidFill>
+          <a:schemeClr val="tx1"/>
+        </a:solidFill>
+        <a:latin typeface="+mn-lt"/>
+        <a:ea typeface="+mn-ea"/>
+        <a:cs typeface="+mn-cs"/>
+      </a:defRPr>
+    </a:lvl2pPr>
+    <a:lvl3pPr marL="914400" algn="l" defTabSz="914400" rtl="0" eaLnBrk="1" latinLnBrk="0" hangingPunct="1">
+      <a:defRPr kumimoji="1" sz="1200" kern="1200">
+        <a:solidFill>
+          <a:schemeClr val="tx1"/>
+        </a:solidFill>
+        <a:latin typeface="+mn-lt"/>
+        <a:ea typeface="+mn-ea"/>
+        <a:cs typeface="+mn-cs"/>
+      </a:defRPr>
+    </a:lvl3pPr>
+    <a:lvl4pPr marL="1371600" algn="l" defTabSz="914400" rtl="0" eaLnBrk="1" latinLnBrk="0" hangingPunct="1">
+      <a:defRPr kumimoji="1" sz="1200" kern="1200">
+        <a:solidFill>
+          <a:schemeClr val="tx1"/>
+        </a:solidFill>
+        <a:latin typeface="+mn-lt"/>
+        <a:ea typeface="+mn-ea"/>
+        <a:cs typeface="+mn-cs"/>
+      </a:defRPr>
+    </a:lvl4pPr>
+    <a:lvl5pPr marL="1828800" algn="l" defTabSz="914400" rtl="0" eaLnBrk="1" latinLnBrk="0" hangingPunct="1">
+      <a:defRPr kumimoji="1" sz="1200" kern="1200">
+        <a:solidFill>
+          <a:schemeClr val="tx1"/>
+        </a:solidFill>
+        <a:latin typeface="+mn-lt"/>
+        <a:ea typeface="+mn-ea"/>
+        <a:cs typeface="+mn-cs"/>
+      </a:defRPr>
+    </a:lvl5pPr>
+    <a:lvl6pPr marL="2286000" algn="l" defTabSz="914400" rtl="0" eaLnBrk="1" latinLnBrk="0" hangingPunct="1">
+      <a:defRPr kumimoji="1" sz="1200" kern="1200">
+        <a:solidFill>
+          <a:schemeClr val="tx1"/>
+        </a:solidFill>
+        <a:latin typeface="+mn-lt"/>
+        <a:ea typeface="+mn-ea"/>
+        <a:cs typeface="+mn-cs"/>
+      </a:defRPr>
+    </a:lvl6pPr>
+    <a:lvl7pPr marL="2743200" algn="l" defTabSz="914400" rtl="0" eaLnBrk="1" latinLnBrk="0" hangingPunct="1">
+      <a:defRPr kumimoji="1" sz="1200" kern="1200">
+        <a:solidFill>
+          <a:schemeClr val="tx1"/>
+        </a:solidFill>
+        <a:latin typeface="+mn-lt"/>
+        <a:ea typeface="+mn-ea"/>
+        <a:cs typeface="+mn-cs"/>
+      </a:defRPr>
+    </a:lvl7pPr>
+    <a:lvl8pPr marL="3200400" algn="l" defTabSz="914400" rtl="0" eaLnBrk="1" latinLnBrk="0" hangingPunct="1">
+      <a:defRPr kumimoji="1" sz="1200" kern="1200">
+        <a:solidFill>
+          <a:schemeClr val="tx1"/>
+        </a:solidFill>
+        <a:latin typeface="+mn-lt"/>
+        <a:ea typeface="+mn-ea"/>
+        <a:cs typeface="+mn-cs"/>
+      </a:defRPr>
+    </a:lvl8pPr>
+    <a:lvl9pPr marL="3657600" algn="l" defTabSz="914400" rtl="0" eaLnBrk="1" latinLnBrk="0" hangingPunct="1">
+      <a:defRPr kumimoji="1" sz="1200" kern="1200">
+        <a:solidFill>
+          <a:schemeClr val="tx1"/>
+        </a:solidFill>
+        <a:latin typeface="+mn-lt"/>
+        <a:ea typeface="+mn-ea"/>
+        <a:cs typeface="+mn-cs"/>
+      </a:defRPr>
+    </a:lvl9pPr>
+  </p:notesStyle>
+</p:notesMaster>
+</file>
+
 <file path=ppt/slideLayouts/slideLayout1.xml><?xml version="1.0" encoding="utf-8"?>
 <p:sldLayout xmlns:a="http://schemas.openxmlformats.org/drawingml/2006/main" xmlns:r="http://schemas.openxmlformats.org/officeDocument/2006/relationships" xmlns:p="http://schemas.openxmlformats.org/presentationml/2006/main" type="title" preserve="1">
   <p:cSld name="タイトル スライド">
@@ -275,7 +858,7 @@
           <a:bodyPr/>
           <a:lstStyle/>
           <a:p>
-            <a:fld id="{2B617AA2-9AE0-4EF4-8CB8-4A4F9870E7AC}" type="datetimeFigureOut">
+            <a:fld id="{A3A6DBD2-DA0F-4369-AACF-DF8255168190}" type="datetime1">
               <a:rPr kumimoji="1" lang="ja-JP" altLang="en-US" smtClean="0"/>
               <a:t>2026/9/8</a:t>
             </a:fld>
@@ -304,6 +887,10 @@
           <a:bodyPr/>
           <a:lstStyle/>
           <a:p>
+            <a:r>
+              <a:rPr kumimoji="1" lang="en-US" altLang="ja-JP"/>
+              <a:t>1. Banh &amp; Strobel (2023). “Generative artificial intelligence” 2. Lopez-Lira &amp; Tang (2026). “Can ChatGPT Forecast Stock Price Movements?” 3. Lai et al. (2025). “A Survey of Post-Training Scaling in Large Language Models”</a:t>
+            </a:r>
             <a:endParaRPr kumimoji="1" lang="ja-JP" altLang="en-US"/>
           </a:p>
         </p:txBody>
@@ -505,7 +1092,7 @@
           <a:bodyPr/>
           <a:lstStyle/>
           <a:p>
-            <a:fld id="{2B617AA2-9AE0-4EF4-8CB8-4A4F9870E7AC}" type="datetimeFigureOut">
+            <a:fld id="{6D55F33B-3C44-4800-AEBE-821A56E94784}" type="datetime1">
               <a:rPr kumimoji="1" lang="ja-JP" altLang="en-US" smtClean="0"/>
               <a:t>2026/9/8</a:t>
             </a:fld>
@@ -534,6 +1121,10 @@
           <a:bodyPr/>
           <a:lstStyle/>
           <a:p>
+            <a:r>
+              <a:rPr kumimoji="1" lang="en-US" altLang="ja-JP"/>
+              <a:t>1. Banh &amp; Strobel (2023). “Generative artificial intelligence” 2. Lopez-Lira &amp; Tang (2026). “Can ChatGPT Forecast Stock Price Movements?” 3. Lai et al. (2025). “A Survey of Post-Training Scaling in Large Language Models”</a:t>
+            </a:r>
             <a:endParaRPr kumimoji="1" lang="ja-JP" altLang="en-US"/>
           </a:p>
         </p:txBody>
@@ -745,7 +1336,7 @@
           <a:bodyPr/>
           <a:lstStyle/>
           <a:p>
-            <a:fld id="{2B617AA2-9AE0-4EF4-8CB8-4A4F9870E7AC}" type="datetimeFigureOut">
+            <a:fld id="{3D39F1BD-DB4A-41B8-812B-24EA046BEB95}" type="datetime1">
               <a:rPr kumimoji="1" lang="ja-JP" altLang="en-US" smtClean="0"/>
               <a:t>2026/9/8</a:t>
             </a:fld>
@@ -774,6 +1365,10 @@
           <a:bodyPr/>
           <a:lstStyle/>
           <a:p>
+            <a:r>
+              <a:rPr kumimoji="1" lang="en-US" altLang="ja-JP"/>
+              <a:t>1. Banh &amp; Strobel (2023). “Generative artificial intelligence” 2. Lopez-Lira &amp; Tang (2026). “Can ChatGPT Forecast Stock Price Movements?” 3. Lai et al. (2025). “A Survey of Post-Training Scaling in Large Language Models”</a:t>
+            </a:r>
             <a:endParaRPr kumimoji="1" lang="ja-JP" altLang="en-US"/>
           </a:p>
         </p:txBody>
@@ -975,7 +1570,7 @@
           <a:bodyPr/>
           <a:lstStyle/>
           <a:p>
-            <a:fld id="{2B617AA2-9AE0-4EF4-8CB8-4A4F9870E7AC}" type="datetimeFigureOut">
+            <a:fld id="{DB0EC384-A088-42ED-AC29-547DFB1F70D3}" type="datetime1">
               <a:rPr kumimoji="1" lang="ja-JP" altLang="en-US" smtClean="0"/>
               <a:t>2026/9/8</a:t>
             </a:fld>
@@ -1004,6 +1599,10 @@
           <a:bodyPr/>
           <a:lstStyle/>
           <a:p>
+            <a:r>
+              <a:rPr kumimoji="1" lang="en-US" altLang="ja-JP"/>
+              <a:t>1. Banh &amp; Strobel (2023). “Generative artificial intelligence” 2. Lopez-Lira &amp; Tang (2026). “Can ChatGPT Forecast Stock Price Movements?” 3. Lai et al. (2025). “A Survey of Post-Training Scaling in Large Language Models”</a:t>
+            </a:r>
             <a:endParaRPr kumimoji="1" lang="ja-JP" altLang="en-US"/>
           </a:p>
         </p:txBody>
@@ -1250,7 +1849,7 @@
           <a:bodyPr/>
           <a:lstStyle/>
           <a:p>
-            <a:fld id="{2B617AA2-9AE0-4EF4-8CB8-4A4F9870E7AC}" type="datetimeFigureOut">
+            <a:fld id="{72396E98-BCEA-43E3-A527-8B3F64AC7C63}" type="datetime1">
               <a:rPr kumimoji="1" lang="ja-JP" altLang="en-US" smtClean="0"/>
               <a:t>2026/9/8</a:t>
             </a:fld>
@@ -1279,6 +1878,10 @@
           <a:bodyPr/>
           <a:lstStyle/>
           <a:p>
+            <a:r>
+              <a:rPr kumimoji="1" lang="en-US" altLang="ja-JP"/>
+              <a:t>1. Banh &amp; Strobel (2023). “Generative artificial intelligence” 2. Lopez-Lira &amp; Tang (2026). “Can ChatGPT Forecast Stock Price Movements?” 3. Lai et al. (2025). “A Survey of Post-Training Scaling in Large Language Models”</a:t>
+            </a:r>
             <a:endParaRPr kumimoji="1" lang="ja-JP" altLang="en-US"/>
           </a:p>
         </p:txBody>
@@ -1579,7 +2182,7 @@
           <a:bodyPr/>
           <a:lstStyle/>
           <a:p>
-            <a:fld id="{2B617AA2-9AE0-4EF4-8CB8-4A4F9870E7AC}" type="datetimeFigureOut">
+            <a:fld id="{1FEB46E7-DFC0-4570-B8A6-AF34C134E007}" type="datetime1">
               <a:rPr kumimoji="1" lang="ja-JP" altLang="en-US" smtClean="0"/>
               <a:t>2026/9/8</a:t>
             </a:fld>
@@ -1608,6 +2211,10 @@
           <a:bodyPr/>
           <a:lstStyle/>
           <a:p>
+            <a:r>
+              <a:rPr kumimoji="1" lang="en-US" altLang="ja-JP"/>
+              <a:t>1. Banh &amp; Strobel (2023). “Generative artificial intelligence” 2. Lopez-Lira &amp; Tang (2026). “Can ChatGPT Forecast Stock Price Movements?” 3. Lai et al. (2025). “A Survey of Post-Training Scaling in Large Language Models”</a:t>
+            </a:r>
             <a:endParaRPr kumimoji="1" lang="ja-JP" altLang="en-US"/>
           </a:p>
         </p:txBody>
@@ -2055,7 +2662,7 @@
           <a:bodyPr/>
           <a:lstStyle/>
           <a:p>
-            <a:fld id="{2B617AA2-9AE0-4EF4-8CB8-4A4F9870E7AC}" type="datetimeFigureOut">
+            <a:fld id="{D3810E2D-B8D9-4D54-BDF3-688F00317A31}" type="datetime1">
               <a:rPr kumimoji="1" lang="ja-JP" altLang="en-US" smtClean="0"/>
               <a:t>2026/9/8</a:t>
             </a:fld>
@@ -2084,6 +2691,10 @@
           <a:bodyPr/>
           <a:lstStyle/>
           <a:p>
+            <a:r>
+              <a:rPr kumimoji="1" lang="en-US" altLang="ja-JP"/>
+              <a:t>1. Banh &amp; Strobel (2023). “Generative artificial intelligence” 2. Lopez-Lira &amp; Tang (2026). “Can ChatGPT Forecast Stock Price Movements?” 3. Lai et al. (2025). “A Survey of Post-Training Scaling in Large Language Models”</a:t>
+            </a:r>
             <a:endParaRPr kumimoji="1" lang="ja-JP" altLang="en-US"/>
           </a:p>
         </p:txBody>
@@ -2196,7 +2807,7 @@
           <a:bodyPr/>
           <a:lstStyle/>
           <a:p>
-            <a:fld id="{2B617AA2-9AE0-4EF4-8CB8-4A4F9870E7AC}" type="datetimeFigureOut">
+            <a:fld id="{79343A81-EC42-4B0B-B788-83B2979B1AC0}" type="datetime1">
               <a:rPr kumimoji="1" lang="ja-JP" altLang="en-US" smtClean="0"/>
               <a:t>2026/9/8</a:t>
             </a:fld>
@@ -2225,6 +2836,10 @@
           <a:bodyPr/>
           <a:lstStyle/>
           <a:p>
+            <a:r>
+              <a:rPr kumimoji="1" lang="en-US" altLang="ja-JP"/>
+              <a:t>1. Banh &amp; Strobel (2023). “Generative artificial intelligence” 2. Lopez-Lira &amp; Tang (2026). “Can ChatGPT Forecast Stock Price Movements?” 3. Lai et al. (2025). “A Survey of Post-Training Scaling in Large Language Models”</a:t>
+            </a:r>
             <a:endParaRPr kumimoji="1" lang="ja-JP" altLang="en-US"/>
           </a:p>
         </p:txBody>
@@ -2309,7 +2924,7 @@
           <a:bodyPr/>
           <a:lstStyle/>
           <a:p>
-            <a:fld id="{2B617AA2-9AE0-4EF4-8CB8-4A4F9870E7AC}" type="datetimeFigureOut">
+            <a:fld id="{9748B458-1745-45CB-B123-B28D42A66973}" type="datetime1">
               <a:rPr kumimoji="1" lang="ja-JP" altLang="en-US" smtClean="0"/>
               <a:t>2026/9/8</a:t>
             </a:fld>
@@ -2338,6 +2953,10 @@
           <a:bodyPr/>
           <a:lstStyle/>
           <a:p>
+            <a:r>
+              <a:rPr kumimoji="1" lang="en-US" altLang="ja-JP"/>
+              <a:t>1. Banh &amp; Strobel (2023). “Generative artificial intelligence” 2. Lopez-Lira &amp; Tang (2026). “Can ChatGPT Forecast Stock Price Movements?” 3. Lai et al. (2025). “A Survey of Post-Training Scaling in Large Language Models”</a:t>
+            </a:r>
             <a:endParaRPr kumimoji="1" lang="ja-JP" altLang="en-US"/>
           </a:p>
         </p:txBody>
@@ -2652,7 +3271,7 @@
           <a:bodyPr/>
           <a:lstStyle/>
           <a:p>
-            <a:fld id="{2B617AA2-9AE0-4EF4-8CB8-4A4F9870E7AC}" type="datetimeFigureOut">
+            <a:fld id="{170F0C33-9C7C-4089-8659-3DECCBA36575}" type="datetime1">
               <a:rPr kumimoji="1" lang="ja-JP" altLang="en-US" smtClean="0"/>
               <a:t>2026/9/8</a:t>
             </a:fld>
@@ -2681,6 +3300,10 @@
           <a:bodyPr/>
           <a:lstStyle/>
           <a:p>
+            <a:r>
+              <a:rPr kumimoji="1" lang="en-US" altLang="ja-JP"/>
+              <a:t>1. Banh &amp; Strobel (2023). “Generative artificial intelligence” 2. Lopez-Lira &amp; Tang (2026). “Can ChatGPT Forecast Stock Price Movements?” 3. Lai et al. (2025). “A Survey of Post-Training Scaling in Large Language Models”</a:t>
+            </a:r>
             <a:endParaRPr kumimoji="1" lang="ja-JP" altLang="en-US"/>
           </a:p>
         </p:txBody>
@@ -2940,7 +3563,7 @@
           <a:bodyPr/>
           <a:lstStyle/>
           <a:p>
-            <a:fld id="{2B617AA2-9AE0-4EF4-8CB8-4A4F9870E7AC}" type="datetimeFigureOut">
+            <a:fld id="{5B765AC1-2970-4943-B44F-799C74942DCC}" type="datetime1">
               <a:rPr kumimoji="1" lang="ja-JP" altLang="en-US" smtClean="0"/>
               <a:t>2026/9/8</a:t>
             </a:fld>
@@ -2969,6 +3592,10 @@
           <a:bodyPr/>
           <a:lstStyle/>
           <a:p>
+            <a:r>
+              <a:rPr kumimoji="1" lang="en-US" altLang="ja-JP"/>
+              <a:t>1. Banh &amp; Strobel (2023). “Generative artificial intelligence” 2. Lopez-Lira &amp; Tang (2026). “Can ChatGPT Forecast Stock Price Movements?” 3. Lai et al. (2025). “A Survey of Post-Training Scaling in Large Language Models”</a:t>
+            </a:r>
             <a:endParaRPr kumimoji="1" lang="ja-JP" altLang="en-US"/>
           </a:p>
         </p:txBody>
@@ -3213,7 +3840,7 @@
             </a:lvl1pPr>
           </a:lstStyle>
           <a:p>
-            <a:fld id="{2B617AA2-9AE0-4EF4-8CB8-4A4F9870E7AC}" type="datetimeFigureOut">
+            <a:fld id="{2E1D47AA-5221-48CA-B202-E9B9DD006441}" type="datetime1">
               <a:rPr kumimoji="1" lang="ja-JP" altLang="en-US" smtClean="0"/>
               <a:t>2026/9/8</a:t>
             </a:fld>
@@ -3260,6 +3887,10 @@
             </a:lvl1pPr>
           </a:lstStyle>
           <a:p>
+            <a:r>
+              <a:rPr kumimoji="1" lang="en-US" altLang="ja-JP"/>
+              <a:t>1. Banh &amp; Strobel (2023). “Generative artificial intelligence” 2. Lopez-Lira &amp; Tang (2026). “Can ChatGPT Forecast Stock Price Movements?” 3. Lai et al. (2025). “A Survey of Post-Training Scaling in Large Language Models”</a:t>
+            </a:r>
             <a:endParaRPr kumimoji="1" lang="ja-JP" altLang="en-US"/>
           </a:p>
         </p:txBody>
@@ -3332,6 +3963,7 @@
     <p:sldLayoutId id="2147483658" r:id="rId10"/>
     <p:sldLayoutId id="2147483659" r:id="rId11"/>
   </p:sldLayoutIdLst>
+  <p:hf hdr="0" ftr="0" dt="0"/>
   <p:txStyles>
     <p:titleStyle>
       <a:lvl1pPr algn="l" defTabSz="914400" rtl="0" eaLnBrk="1" latinLnBrk="0" hangingPunct="1">
@@ -3713,6 +4345,35 @@
           </a:p>
         </p:txBody>
       </p:sp>
+      <p:sp>
+        <p:nvSpPr>
+          <p:cNvPr id="7" name="スライド番号プレースホルダー 6">
+            <a:extLst>
+              <a:ext uri="{FF2B5EF4-FFF2-40B4-BE49-F238E27FC236}">
+                <a16:creationId xmlns:a16="http://schemas.microsoft.com/office/drawing/2014/main" id="{51D03811-63CF-FD27-4E55-56B57D713C01}"/>
+              </a:ext>
+            </a:extLst>
+          </p:cNvPr>
+          <p:cNvSpPr>
+            <a:spLocks noGrp="1"/>
+          </p:cNvSpPr>
+          <p:nvPr>
+            <p:ph type="sldNum" sz="quarter" idx="12"/>
+          </p:nvPr>
+        </p:nvSpPr>
+        <p:spPr/>
+        <p:txBody>
+          <a:bodyPr/>
+          <a:lstStyle/>
+          <a:p>
+            <a:fld id="{10649E7B-FC1B-418B-9B6A-00859DB1DEE8}" type="slidenum">
+              <a:rPr kumimoji="1" lang="ja-JP" altLang="en-US" smtClean="0"/>
+              <a:t>1</a:t>
+            </a:fld>
+            <a:endParaRPr kumimoji="1" lang="ja-JP" altLang="en-US"/>
+          </a:p>
+        </p:txBody>
+      </p:sp>
     </p:spTree>
     <p:extLst>
       <p:ext uri="{BB962C8B-B14F-4D97-AF65-F5344CB8AC3E}">
@@ -3794,6 +4455,14 @@
           <a:p>
             <a:r>
               <a:rPr kumimoji="1" lang="en-US" altLang="ja-JP" dirty="0"/>
+              <a:t>RQ1</a:t>
+            </a:r>
+            <a:r>
+              <a:rPr kumimoji="1" lang="ja-JP" altLang="en-US" dirty="0"/>
+              <a:t>：</a:t>
+            </a:r>
+            <a:r>
+              <a:rPr kumimoji="1" lang="en-US" altLang="ja-JP" dirty="0"/>
               <a:t>SFT</a:t>
             </a:r>
             <a:r>
@@ -3808,26 +4477,58 @@
           <a:p>
             <a:r>
               <a:rPr kumimoji="1" lang="en-US" altLang="ja-JP" dirty="0"/>
-              <a:t>SFT</a:t>
+              <a:t>RQ2</a:t>
             </a:r>
             <a:r>
               <a:rPr kumimoji="1" lang="ja-JP" altLang="en-US" dirty="0"/>
-              <a:t>における教師信号の違いは、この問題解決能力の獲得にどのような影響を与えるのか？</a:t>
-            </a:r>
-            <a:endParaRPr kumimoji="1" lang="en-US" altLang="ja-JP" dirty="0"/>
-          </a:p>
-          <a:p>
-            <a:endParaRPr kumimoji="1" lang="en-US" altLang="ja-JP" dirty="0"/>
-          </a:p>
-          <a:p>
+              <a:t>：</a:t>
+            </a:r>
             <a:r>
               <a:rPr kumimoji="1" lang="en-US" altLang="ja-JP" dirty="0"/>
               <a:t>SFT</a:t>
             </a:r>
             <a:r>
               <a:rPr kumimoji="1" lang="ja-JP" altLang="en-US" dirty="0"/>
-              <a:t>によって、問題解決過程のどの部分が変化するのか？</a:t>
-            </a:r>
+              <a:t>における教師</a:t>
+            </a:r>
+            <a:r>
+              <a:rPr lang="ja-JP" altLang="en-US" dirty="0"/>
+              <a:t>データ</a:t>
+            </a:r>
+            <a:r>
+              <a:rPr kumimoji="1" lang="ja-JP" altLang="en-US" dirty="0"/>
+              <a:t>の違いは、この問題解決能力の獲得にどのような影響を与えるのか？</a:t>
+            </a:r>
+            <a:endParaRPr kumimoji="1" lang="en-US" altLang="ja-JP" dirty="0"/>
+          </a:p>
+        </p:txBody>
+      </p:sp>
+      <p:sp>
+        <p:nvSpPr>
+          <p:cNvPr id="7" name="スライド番号プレースホルダー 6">
+            <a:extLst>
+              <a:ext uri="{FF2B5EF4-FFF2-40B4-BE49-F238E27FC236}">
+                <a16:creationId xmlns:a16="http://schemas.microsoft.com/office/drawing/2014/main" id="{A95ABCF3-37CD-9944-1EC4-60D6EFC8CF3E}"/>
+              </a:ext>
+            </a:extLst>
+          </p:cNvPr>
+          <p:cNvSpPr>
+            <a:spLocks noGrp="1"/>
+          </p:cNvSpPr>
+          <p:nvPr>
+            <p:ph type="sldNum" sz="quarter" idx="12"/>
+          </p:nvPr>
+        </p:nvSpPr>
+        <p:spPr/>
+        <p:txBody>
+          <a:bodyPr/>
+          <a:lstStyle/>
+          <a:p>
+            <a:fld id="{10649E7B-FC1B-418B-9B6A-00859DB1DEE8}" type="slidenum">
+              <a:rPr kumimoji="1" lang="ja-JP" altLang="en-US" smtClean="0"/>
+              <a:t>10</a:t>
+            </a:fld>
+            <a:endParaRPr kumimoji="1" lang="ja-JP" altLang="en-US"/>
           </a:p>
         </p:txBody>
       </p:sp>
@@ -3956,6 +4657,35 @@
           </a:p>
         </p:txBody>
       </p:sp>
+      <p:sp>
+        <p:nvSpPr>
+          <p:cNvPr id="7" name="スライド番号プレースホルダー 6">
+            <a:extLst>
+              <a:ext uri="{FF2B5EF4-FFF2-40B4-BE49-F238E27FC236}">
+                <a16:creationId xmlns:a16="http://schemas.microsoft.com/office/drawing/2014/main" id="{2729DF3B-155E-F4CB-FFB2-E2D94119F0E7}"/>
+              </a:ext>
+            </a:extLst>
+          </p:cNvPr>
+          <p:cNvSpPr>
+            <a:spLocks noGrp="1"/>
+          </p:cNvSpPr>
+          <p:nvPr>
+            <p:ph type="sldNum" sz="quarter" idx="12"/>
+          </p:nvPr>
+        </p:nvSpPr>
+        <p:spPr/>
+        <p:txBody>
+          <a:bodyPr/>
+          <a:lstStyle/>
+          <a:p>
+            <a:fld id="{10649E7B-FC1B-418B-9B6A-00859DB1DEE8}" type="slidenum">
+              <a:rPr kumimoji="1" lang="ja-JP" altLang="en-US" smtClean="0"/>
+              <a:t>11</a:t>
+            </a:fld>
+            <a:endParaRPr kumimoji="1" lang="ja-JP" altLang="en-US"/>
+          </a:p>
+        </p:txBody>
+      </p:sp>
     </p:spTree>
     <p:extLst>
       <p:ext uri="{BB962C8B-B14F-4D97-AF65-F5344CB8AC3E}">
@@ -4292,6 +5022,35 @@
           </a:p>
         </p:txBody>
       </p:sp>
+      <p:sp>
+        <p:nvSpPr>
+          <p:cNvPr id="11" name="スライド番号プレースホルダー 10">
+            <a:extLst>
+              <a:ext uri="{FF2B5EF4-FFF2-40B4-BE49-F238E27FC236}">
+                <a16:creationId xmlns:a16="http://schemas.microsoft.com/office/drawing/2014/main" id="{E0E3275A-AE5D-09BB-0752-49B39B2F21EE}"/>
+              </a:ext>
+            </a:extLst>
+          </p:cNvPr>
+          <p:cNvSpPr>
+            <a:spLocks noGrp="1"/>
+          </p:cNvSpPr>
+          <p:nvPr>
+            <p:ph type="sldNum" sz="quarter" idx="12"/>
+          </p:nvPr>
+        </p:nvSpPr>
+        <p:spPr/>
+        <p:txBody>
+          <a:bodyPr/>
+          <a:lstStyle/>
+          <a:p>
+            <a:fld id="{10649E7B-FC1B-418B-9B6A-00859DB1DEE8}" type="slidenum">
+              <a:rPr kumimoji="1" lang="ja-JP" altLang="en-US" smtClean="0"/>
+              <a:t>12</a:t>
+            </a:fld>
+            <a:endParaRPr kumimoji="1" lang="ja-JP" altLang="en-US"/>
+          </a:p>
+        </p:txBody>
+      </p:sp>
     </p:spTree>
     <p:extLst>
       <p:ext uri="{BB962C8B-B14F-4D97-AF65-F5344CB8AC3E}">
@@ -4789,6 +5548,35 @@
           </a:p>
         </p:txBody>
       </p:sp>
+      <p:sp>
+        <p:nvSpPr>
+          <p:cNvPr id="11" name="スライド番号プレースホルダー 10">
+            <a:extLst>
+              <a:ext uri="{FF2B5EF4-FFF2-40B4-BE49-F238E27FC236}">
+                <a16:creationId xmlns:a16="http://schemas.microsoft.com/office/drawing/2014/main" id="{C1144DF9-FE90-6675-B8E5-CA11C506E70F}"/>
+              </a:ext>
+            </a:extLst>
+          </p:cNvPr>
+          <p:cNvSpPr>
+            <a:spLocks noGrp="1"/>
+          </p:cNvSpPr>
+          <p:nvPr>
+            <p:ph type="sldNum" sz="quarter" idx="12"/>
+          </p:nvPr>
+        </p:nvSpPr>
+        <p:spPr/>
+        <p:txBody>
+          <a:bodyPr/>
+          <a:lstStyle/>
+          <a:p>
+            <a:fld id="{10649E7B-FC1B-418B-9B6A-00859DB1DEE8}" type="slidenum">
+              <a:rPr kumimoji="1" lang="ja-JP" altLang="en-US" smtClean="0"/>
+              <a:t>13</a:t>
+            </a:fld>
+            <a:endParaRPr kumimoji="1" lang="ja-JP" altLang="en-US"/>
+          </a:p>
+        </p:txBody>
+      </p:sp>
     </p:spTree>
     <p:extLst>
       <p:ext uri="{BB962C8B-B14F-4D97-AF65-F5344CB8AC3E}">
@@ -5228,6 +6016,35 @@
           </a:p>
         </p:txBody>
       </p:sp>
+      <p:sp>
+        <p:nvSpPr>
+          <p:cNvPr id="12" name="スライド番号プレースホルダー 11">
+            <a:extLst>
+              <a:ext uri="{FF2B5EF4-FFF2-40B4-BE49-F238E27FC236}">
+                <a16:creationId xmlns:a16="http://schemas.microsoft.com/office/drawing/2014/main" id="{3771BADB-5335-E51D-48A8-03D3623986BF}"/>
+              </a:ext>
+            </a:extLst>
+          </p:cNvPr>
+          <p:cNvSpPr>
+            <a:spLocks noGrp="1"/>
+          </p:cNvSpPr>
+          <p:nvPr>
+            <p:ph type="sldNum" sz="quarter" idx="12"/>
+          </p:nvPr>
+        </p:nvSpPr>
+        <p:spPr/>
+        <p:txBody>
+          <a:bodyPr/>
+          <a:lstStyle/>
+          <a:p>
+            <a:fld id="{10649E7B-FC1B-418B-9B6A-00859DB1DEE8}" type="slidenum">
+              <a:rPr kumimoji="1" lang="ja-JP" altLang="en-US" smtClean="0"/>
+              <a:t>14</a:t>
+            </a:fld>
+            <a:endParaRPr kumimoji="1" lang="ja-JP" altLang="en-US"/>
+          </a:p>
+        </p:txBody>
+      </p:sp>
     </p:spTree>
     <p:extLst>
       <p:ext uri="{BB962C8B-B14F-4D97-AF65-F5344CB8AC3E}">
@@ -5350,6 +6167,35 @@
           </a:p>
         </p:txBody>
       </p:sp>
+      <p:sp>
+        <p:nvSpPr>
+          <p:cNvPr id="7" name="スライド番号プレースホルダー 6">
+            <a:extLst>
+              <a:ext uri="{FF2B5EF4-FFF2-40B4-BE49-F238E27FC236}">
+                <a16:creationId xmlns:a16="http://schemas.microsoft.com/office/drawing/2014/main" id="{5661278E-6E6F-0F9A-13E9-DB8B232991DB}"/>
+              </a:ext>
+            </a:extLst>
+          </p:cNvPr>
+          <p:cNvSpPr>
+            <a:spLocks noGrp="1"/>
+          </p:cNvSpPr>
+          <p:nvPr>
+            <p:ph type="sldNum" sz="quarter" idx="12"/>
+          </p:nvPr>
+        </p:nvSpPr>
+        <p:spPr/>
+        <p:txBody>
+          <a:bodyPr/>
+          <a:lstStyle/>
+          <a:p>
+            <a:fld id="{10649E7B-FC1B-418B-9B6A-00859DB1DEE8}" type="slidenum">
+              <a:rPr kumimoji="1" lang="ja-JP" altLang="en-US" smtClean="0"/>
+              <a:t>15</a:t>
+            </a:fld>
+            <a:endParaRPr kumimoji="1" lang="ja-JP" altLang="en-US"/>
+          </a:p>
+        </p:txBody>
+      </p:sp>
     </p:spTree>
     <p:extLst>
       <p:ext uri="{BB962C8B-B14F-4D97-AF65-F5344CB8AC3E}">
@@ -5452,6 +6298,35 @@
           </a:p>
         </p:txBody>
       </p:sp>
+      <p:sp>
+        <p:nvSpPr>
+          <p:cNvPr id="7" name="スライド番号プレースホルダー 6">
+            <a:extLst>
+              <a:ext uri="{FF2B5EF4-FFF2-40B4-BE49-F238E27FC236}">
+                <a16:creationId xmlns:a16="http://schemas.microsoft.com/office/drawing/2014/main" id="{18721A68-7548-9ECB-9266-57577E546E2E}"/>
+              </a:ext>
+            </a:extLst>
+          </p:cNvPr>
+          <p:cNvSpPr>
+            <a:spLocks noGrp="1"/>
+          </p:cNvSpPr>
+          <p:nvPr>
+            <p:ph type="sldNum" sz="quarter" idx="12"/>
+          </p:nvPr>
+        </p:nvSpPr>
+        <p:spPr/>
+        <p:txBody>
+          <a:bodyPr/>
+          <a:lstStyle/>
+          <a:p>
+            <a:fld id="{10649E7B-FC1B-418B-9B6A-00859DB1DEE8}" type="slidenum">
+              <a:rPr kumimoji="1" lang="ja-JP" altLang="en-US" smtClean="0"/>
+              <a:t>16</a:t>
+            </a:fld>
+            <a:endParaRPr kumimoji="1" lang="ja-JP" altLang="en-US"/>
+          </a:p>
+        </p:txBody>
+      </p:sp>
     </p:spTree>
     <p:extLst>
       <p:ext uri="{BB962C8B-B14F-4D97-AF65-F5344CB8AC3E}">
@@ -5843,6 +6718,35 @@
           </a:p>
         </p:txBody>
       </p:sp>
+      <p:sp>
+        <p:nvSpPr>
+          <p:cNvPr id="9" name="スライド番号プレースホルダー 8">
+            <a:extLst>
+              <a:ext uri="{FF2B5EF4-FFF2-40B4-BE49-F238E27FC236}">
+                <a16:creationId xmlns:a16="http://schemas.microsoft.com/office/drawing/2014/main" id="{DEBC53A1-4340-00B3-3815-E19B445A14A5}"/>
+              </a:ext>
+            </a:extLst>
+          </p:cNvPr>
+          <p:cNvSpPr>
+            <a:spLocks noGrp="1"/>
+          </p:cNvSpPr>
+          <p:nvPr>
+            <p:ph type="sldNum" sz="quarter" idx="12"/>
+          </p:nvPr>
+        </p:nvSpPr>
+        <p:spPr/>
+        <p:txBody>
+          <a:bodyPr/>
+          <a:lstStyle/>
+          <a:p>
+            <a:fld id="{10649E7B-FC1B-418B-9B6A-00859DB1DEE8}" type="slidenum">
+              <a:rPr kumimoji="1" lang="ja-JP" altLang="en-US" smtClean="0"/>
+              <a:t>17</a:t>
+            </a:fld>
+            <a:endParaRPr kumimoji="1" lang="ja-JP" altLang="en-US"/>
+          </a:p>
+        </p:txBody>
+      </p:sp>
     </p:spTree>
     <p:extLst>
       <p:ext uri="{BB962C8B-B14F-4D97-AF65-F5344CB8AC3E}">
@@ -5924,9 +6828,12 @@
           <a:p>
             <a:r>
               <a:rPr lang="ja-JP" altLang="en-US" dirty="0"/>
-              <a:t>訓練用のデータ</a:t>
-            </a:r>
-            <a:endParaRPr lang="en-US" altLang="ja-JP" dirty="0"/>
+              <a:t>訓練用のデータその</a:t>
+            </a:r>
+            <a:r>
+              <a:rPr lang="en-US" altLang="ja-JP" dirty="0"/>
+              <a:t>1</a:t>
+            </a:r>
           </a:p>
           <a:p>
             <a:pPr lvl="1"/>
@@ -5996,8 +6903,63 @@
             <a:endParaRPr kumimoji="1" lang="en-US" altLang="ja-JP" dirty="0"/>
           </a:p>
           <a:p>
+            <a:r>
+              <a:rPr lang="ja-JP" altLang="en-US" dirty="0"/>
+              <a:t>訓練用のデータその</a:t>
+            </a:r>
+            <a:r>
+              <a:rPr lang="en-US" altLang="ja-JP" dirty="0"/>
+              <a:t>2</a:t>
+            </a:r>
+          </a:p>
+          <a:p>
+            <a:pPr lvl="1"/>
+            <a:r>
+              <a:rPr lang="ja-JP" altLang="en-US" dirty="0"/>
+              <a:t>処理の過程を答えの部分に含めたもの</a:t>
+            </a:r>
+            <a:endParaRPr lang="en-US" altLang="ja-JP" dirty="0"/>
+          </a:p>
+          <a:p>
+            <a:pPr lvl="1"/>
+            <a:r>
+              <a:rPr kumimoji="1" lang="ja-JP" altLang="en-US" dirty="0"/>
+              <a:t>あとは全部同じ</a:t>
+            </a:r>
+            <a:endParaRPr kumimoji="1" lang="en-US" altLang="ja-JP" dirty="0"/>
+          </a:p>
+          <a:p>
             <a:pPr lvl="1"/>
             <a:endParaRPr kumimoji="1" lang="ja-JP" altLang="en-US" dirty="0"/>
+          </a:p>
+        </p:txBody>
+      </p:sp>
+      <p:sp>
+        <p:nvSpPr>
+          <p:cNvPr id="7" name="スライド番号プレースホルダー 6">
+            <a:extLst>
+              <a:ext uri="{FF2B5EF4-FFF2-40B4-BE49-F238E27FC236}">
+                <a16:creationId xmlns:a16="http://schemas.microsoft.com/office/drawing/2014/main" id="{7854548C-5AEC-242E-9B89-31DA1338A7CE}"/>
+              </a:ext>
+            </a:extLst>
+          </p:cNvPr>
+          <p:cNvSpPr>
+            <a:spLocks noGrp="1"/>
+          </p:cNvSpPr>
+          <p:nvPr>
+            <p:ph type="sldNum" sz="quarter" idx="12"/>
+          </p:nvPr>
+        </p:nvSpPr>
+        <p:spPr/>
+        <p:txBody>
+          <a:bodyPr/>
+          <a:lstStyle/>
+          <a:p>
+            <a:fld id="{10649E7B-FC1B-418B-9B6A-00859DB1DEE8}" type="slidenum">
+              <a:rPr kumimoji="1" lang="ja-JP" altLang="en-US" smtClean="0"/>
+              <a:t>18</a:t>
+            </a:fld>
+            <a:endParaRPr kumimoji="1" lang="ja-JP" altLang="en-US"/>
           </a:p>
         </p:txBody>
       </p:sp>
@@ -6077,20 +7039,25 @@
         </p:nvSpPr>
         <p:spPr/>
         <p:txBody>
-          <a:bodyPr/>
+          <a:bodyPr>
+            <a:normAutofit/>
+          </a:bodyPr>
           <a:lstStyle/>
           <a:p>
             <a:r>
               <a:rPr lang="ja-JP" altLang="en-US" dirty="0"/>
-              <a:t>テスト用のデータその１</a:t>
-            </a:r>
-            <a:endParaRPr lang="en-US" altLang="ja-JP" dirty="0"/>
+              <a:t>テストデータその</a:t>
+            </a:r>
+            <a:r>
+              <a:rPr lang="en-US" altLang="ja-JP" dirty="0"/>
+              <a:t>1</a:t>
+            </a:r>
           </a:p>
           <a:p>
             <a:pPr lvl="1"/>
             <a:r>
               <a:rPr lang="ja-JP" altLang="en-US" dirty="0"/>
-              <a:t>訓練用のデータの問題と同じルールで</a:t>
+              <a:t>訓練用のデータの問題と同じ処理とその組み合わせで</a:t>
             </a:r>
             <a:r>
               <a:rPr lang="en-US" altLang="ja-JP" dirty="0"/>
@@ -6121,15 +7088,22 @@
           <a:p>
             <a:r>
               <a:rPr lang="ja-JP" altLang="en-US" dirty="0"/>
-              <a:t>テスト用のデータその２</a:t>
-            </a:r>
-            <a:endParaRPr lang="en-US" altLang="ja-JP" dirty="0"/>
+              <a:t>テストデータその</a:t>
+            </a:r>
+            <a:r>
+              <a:rPr lang="en-US" altLang="ja-JP" dirty="0"/>
+              <a:t>2</a:t>
+            </a:r>
           </a:p>
           <a:p>
             <a:pPr lvl="1"/>
             <a:r>
+              <a:rPr lang="ja-JP" altLang="ja-JP" dirty="0"/>
+              <a:t>処理単体としては同じだけど</a:t>
+            </a:r>
+            <a:r>
               <a:rPr lang="ja-JP" altLang="en-US" dirty="0"/>
-              <a:t>訓練用のデータでは出なかったルールを</a:t>
+              <a:t>訓練用のデータでは出なかった組み合わせを</a:t>
             </a:r>
             <a:r>
               <a:rPr lang="en-US" altLang="ja-JP" dirty="0"/>
@@ -6161,6 +7135,22 @@
             <a:pPr lvl="1"/>
             <a:r>
               <a:rPr lang="ja-JP" altLang="en-US" dirty="0"/>
+              <a:t>全部の問題が</a:t>
+            </a:r>
+            <a:r>
+              <a:rPr lang="en-US" altLang="ja-JP" dirty="0"/>
+              <a:t>2</a:t>
+            </a:r>
+            <a:r>
+              <a:rPr lang="ja-JP" altLang="en-US" dirty="0"/>
+              <a:t>つの処理の組み合わせ</a:t>
+            </a:r>
+            <a:endParaRPr lang="en-US" altLang="ja-JP" dirty="0"/>
+          </a:p>
+          <a:p>
+            <a:pPr lvl="1"/>
+            <a:r>
+              <a:rPr lang="ja-JP" altLang="en-US" dirty="0"/>
               <a:t>全部で</a:t>
             </a:r>
             <a:r>
@@ -6175,6 +7165,35 @@
           </a:p>
           <a:p>
             <a:endParaRPr kumimoji="1" lang="ja-JP" altLang="en-US" dirty="0"/>
+          </a:p>
+        </p:txBody>
+      </p:sp>
+      <p:sp>
+        <p:nvSpPr>
+          <p:cNvPr id="7" name="スライド番号プレースホルダー 6">
+            <a:extLst>
+              <a:ext uri="{FF2B5EF4-FFF2-40B4-BE49-F238E27FC236}">
+                <a16:creationId xmlns:a16="http://schemas.microsoft.com/office/drawing/2014/main" id="{FAF1A290-0D02-0678-26FA-CBBE52D54C4F}"/>
+              </a:ext>
+            </a:extLst>
+          </p:cNvPr>
+          <p:cNvSpPr>
+            <a:spLocks noGrp="1"/>
+          </p:cNvSpPr>
+          <p:nvPr>
+            <p:ph type="sldNum" sz="quarter" idx="12"/>
+          </p:nvPr>
+        </p:nvSpPr>
+        <p:spPr/>
+        <p:txBody>
+          <a:bodyPr/>
+          <a:lstStyle/>
+          <a:p>
+            <a:fld id="{10649E7B-FC1B-418B-9B6A-00859DB1DEE8}" type="slidenum">
+              <a:rPr kumimoji="1" lang="ja-JP" altLang="en-US" smtClean="0"/>
+              <a:t>19</a:t>
+            </a:fld>
+            <a:endParaRPr kumimoji="1" lang="ja-JP" altLang="en-US"/>
           </a:p>
         </p:txBody>
       </p:sp>
@@ -6289,10 +7308,1458 @@
           </a:p>
         </p:txBody>
       </p:sp>
+      <p:sp>
+        <p:nvSpPr>
+          <p:cNvPr id="7" name="スライド番号プレースホルダー 6">
+            <a:extLst>
+              <a:ext uri="{FF2B5EF4-FFF2-40B4-BE49-F238E27FC236}">
+                <a16:creationId xmlns:a16="http://schemas.microsoft.com/office/drawing/2014/main" id="{C1AF13FE-0158-1890-C46B-9CD1B7BE5DC3}"/>
+              </a:ext>
+            </a:extLst>
+          </p:cNvPr>
+          <p:cNvSpPr>
+            <a:spLocks noGrp="1"/>
+          </p:cNvSpPr>
+          <p:nvPr>
+            <p:ph type="sldNum" sz="quarter" idx="12"/>
+          </p:nvPr>
+        </p:nvSpPr>
+        <p:spPr/>
+        <p:txBody>
+          <a:bodyPr/>
+          <a:lstStyle/>
+          <a:p>
+            <a:fld id="{10649E7B-FC1B-418B-9B6A-00859DB1DEE8}" type="slidenum">
+              <a:rPr kumimoji="1" lang="ja-JP" altLang="en-US" smtClean="0"/>
+              <a:t>2</a:t>
+            </a:fld>
+            <a:endParaRPr kumimoji="1" lang="ja-JP" altLang="en-US"/>
+          </a:p>
+        </p:txBody>
+      </p:sp>
     </p:spTree>
     <p:extLst>
       <p:ext uri="{BB962C8B-B14F-4D97-AF65-F5344CB8AC3E}">
         <p14:creationId xmlns:p14="http://schemas.microsoft.com/office/powerpoint/2010/main" val="959673867"/>
+      </p:ext>
+    </p:extLst>
+  </p:cSld>
+  <p:clrMapOvr>
+    <a:masterClrMapping/>
+  </p:clrMapOvr>
+</p:sld>
+</file>
+
+<file path=ppt/slides/slide20.xml><?xml version="1.0" encoding="utf-8"?>
+<p:sld xmlns:a="http://schemas.openxmlformats.org/drawingml/2006/main" xmlns:r="http://schemas.openxmlformats.org/officeDocument/2006/relationships" xmlns:p="http://schemas.openxmlformats.org/presentationml/2006/main">
+  <p:cSld>
+    <p:spTree>
+      <p:nvGrpSpPr>
+        <p:cNvPr id="1" name=""/>
+        <p:cNvGrpSpPr/>
+        <p:nvPr/>
+      </p:nvGrpSpPr>
+      <p:grpSpPr>
+        <a:xfrm>
+          <a:off x="0" y="0"/>
+          <a:ext cx="0" cy="0"/>
+          <a:chOff x="0" y="0"/>
+          <a:chExt cx="0" cy="0"/>
+        </a:xfrm>
+      </p:grpSpPr>
+      <p:sp>
+        <p:nvSpPr>
+          <p:cNvPr id="2" name="タイトル 1">
+            <a:extLst>
+              <a:ext uri="{FF2B5EF4-FFF2-40B4-BE49-F238E27FC236}">
+                <a16:creationId xmlns:a16="http://schemas.microsoft.com/office/drawing/2014/main" id="{2416D31E-A5EE-23C4-F54C-70F14FF6C2DA}"/>
+              </a:ext>
+            </a:extLst>
+          </p:cNvPr>
+          <p:cNvSpPr>
+            <a:spLocks noGrp="1"/>
+          </p:cNvSpPr>
+          <p:nvPr>
+            <p:ph type="title"/>
+          </p:nvPr>
+        </p:nvSpPr>
+        <p:spPr/>
+        <p:txBody>
+          <a:bodyPr/>
+          <a:lstStyle/>
+          <a:p>
+            <a:r>
+              <a:rPr kumimoji="1" lang="ja-JP" altLang="en-US" dirty="0"/>
+              <a:t>研究方法</a:t>
+            </a:r>
+          </a:p>
+        </p:txBody>
+      </p:sp>
+      <p:sp>
+        <p:nvSpPr>
+          <p:cNvPr id="3" name="コンテンツ プレースホルダー 2">
+            <a:extLst>
+              <a:ext uri="{FF2B5EF4-FFF2-40B4-BE49-F238E27FC236}">
+                <a16:creationId xmlns:a16="http://schemas.microsoft.com/office/drawing/2014/main" id="{00BCF77C-138A-4D71-F231-909965A04834}"/>
+              </a:ext>
+            </a:extLst>
+          </p:cNvPr>
+          <p:cNvSpPr>
+            <a:spLocks noGrp="1"/>
+          </p:cNvSpPr>
+          <p:nvPr>
+            <p:ph idx="1"/>
+          </p:nvPr>
+        </p:nvSpPr>
+        <p:spPr>
+          <a:xfrm>
+            <a:off x="838200" y="1825625"/>
+            <a:ext cx="10515600" cy="4581312"/>
+          </a:xfrm>
+        </p:spPr>
+        <p:txBody>
+          <a:bodyPr>
+            <a:normAutofit/>
+          </a:bodyPr>
+          <a:lstStyle/>
+          <a:p>
+            <a:r>
+              <a:rPr lang="en-US" altLang="ja-JP" dirty="0"/>
+              <a:t>Qwen3-4b</a:t>
+            </a:r>
+            <a:r>
+              <a:rPr lang="en-US" altLang="ja-JP" baseline="30000" dirty="0"/>
+              <a:t>8</a:t>
+            </a:r>
+          </a:p>
+          <a:p>
+            <a:pPr lvl="1"/>
+            <a:r>
+              <a:rPr lang="en-US" altLang="ja-JP" dirty="0"/>
+              <a:t>4B</a:t>
+            </a:r>
+            <a:r>
+              <a:rPr lang="ja-JP" altLang="en-US" dirty="0"/>
+              <a:t>パラメータの比較的小規模な</a:t>
+            </a:r>
+            <a:r>
+              <a:rPr lang="en-US" altLang="ja-JP" dirty="0"/>
+              <a:t>LLM </a:t>
+            </a:r>
+          </a:p>
+          <a:p>
+            <a:pPr lvl="1"/>
+            <a:r>
+              <a:rPr lang="ja-JP" altLang="en-US" dirty="0"/>
+              <a:t>推論・問題解決能力を持つモデル </a:t>
+            </a:r>
+          </a:p>
+          <a:p>
+            <a:pPr lvl="1"/>
+            <a:r>
+              <a:rPr lang="ja-JP" altLang="en-US" dirty="0"/>
+              <a:t>追加学習を用いた近年の研究でも採用されている </a:t>
+            </a:r>
+          </a:p>
+          <a:p>
+            <a:pPr lvl="3"/>
+            <a:r>
+              <a:rPr lang="ja-JP" altLang="en-US" dirty="0">
+                <a:solidFill>
+                  <a:srgbClr val="FF0000"/>
+                </a:solidFill>
+              </a:rPr>
+              <a:t>引用</a:t>
+            </a:r>
+            <a:endParaRPr lang="en-US" altLang="ja-JP" dirty="0">
+              <a:solidFill>
+                <a:srgbClr val="FF0000"/>
+              </a:solidFill>
+            </a:endParaRPr>
+          </a:p>
+          <a:p>
+            <a:pPr lvl="3"/>
+            <a:r>
+              <a:rPr lang="ja-JP" altLang="en-US" dirty="0">
+                <a:solidFill>
+                  <a:srgbClr val="FF0000"/>
+                </a:solidFill>
+              </a:rPr>
+              <a:t>引用</a:t>
+            </a:r>
+            <a:endParaRPr lang="en-US" altLang="ja-JP" dirty="0">
+              <a:solidFill>
+                <a:srgbClr val="FF0000"/>
+              </a:solidFill>
+            </a:endParaRPr>
+          </a:p>
+          <a:p>
+            <a:endParaRPr lang="en-US" altLang="ja-JP" dirty="0"/>
+          </a:p>
+          <a:p>
+            <a:r>
+              <a:rPr lang="en-US" altLang="ja-JP" dirty="0"/>
+              <a:t>LoRA</a:t>
+            </a:r>
+            <a:r>
+              <a:rPr lang="en-US" altLang="ja-JP" baseline="30000" dirty="0"/>
+              <a:t>9</a:t>
+            </a:r>
+            <a:r>
+              <a:rPr lang="ja-JP" altLang="en-US" dirty="0"/>
+              <a:t>（</a:t>
+            </a:r>
+            <a:r>
+              <a:rPr lang="en-US" altLang="ja-JP" dirty="0"/>
+              <a:t>Low-Rank Adaptation</a:t>
+            </a:r>
+            <a:r>
+              <a:rPr lang="ja-JP" altLang="en-US" dirty="0"/>
+              <a:t>）</a:t>
+            </a:r>
+          </a:p>
+          <a:p>
+            <a:pPr lvl="1"/>
+            <a:r>
+              <a:rPr lang="ja-JP" altLang="en-US" dirty="0"/>
+              <a:t>ベースモデルのパラメータを固定 </a:t>
+            </a:r>
+          </a:p>
+          <a:p>
+            <a:pPr lvl="1"/>
+            <a:r>
+              <a:rPr lang="ja-JP" altLang="en-US" dirty="0"/>
+              <a:t>追加した小規模なパラメータのみを学習 </a:t>
+            </a:r>
+          </a:p>
+          <a:p>
+            <a:pPr lvl="1"/>
+            <a:r>
+              <a:rPr lang="ja-JP" altLang="en-US" dirty="0"/>
+              <a:t>計算資源を抑えながら追加学習が可能 </a:t>
+            </a:r>
+          </a:p>
+        </p:txBody>
+      </p:sp>
+      <p:sp>
+        <p:nvSpPr>
+          <p:cNvPr id="7" name="スライド番号プレースホルダー 6">
+            <a:extLst>
+              <a:ext uri="{FF2B5EF4-FFF2-40B4-BE49-F238E27FC236}">
+                <a16:creationId xmlns:a16="http://schemas.microsoft.com/office/drawing/2014/main" id="{3DEBCE74-92D5-17FD-334F-EECEFCD9655F}"/>
+              </a:ext>
+            </a:extLst>
+          </p:cNvPr>
+          <p:cNvSpPr>
+            <a:spLocks noGrp="1"/>
+          </p:cNvSpPr>
+          <p:nvPr>
+            <p:ph type="sldNum" sz="quarter" idx="12"/>
+          </p:nvPr>
+        </p:nvSpPr>
+        <p:spPr/>
+        <p:txBody>
+          <a:bodyPr/>
+          <a:lstStyle/>
+          <a:p>
+            <a:fld id="{10649E7B-FC1B-418B-9B6A-00859DB1DEE8}" type="slidenum">
+              <a:rPr kumimoji="1" lang="ja-JP" altLang="en-US" smtClean="0"/>
+              <a:t>20</a:t>
+            </a:fld>
+            <a:endParaRPr kumimoji="1" lang="ja-JP" altLang="en-US"/>
+          </a:p>
+        </p:txBody>
+      </p:sp>
+      <p:sp>
+        <p:nvSpPr>
+          <p:cNvPr id="8" name="フッター プレースホルダー 7">
+            <a:extLst>
+              <a:ext uri="{FF2B5EF4-FFF2-40B4-BE49-F238E27FC236}">
+                <a16:creationId xmlns:a16="http://schemas.microsoft.com/office/drawing/2014/main" id="{BBDD8DBE-9470-9F25-8BED-23FBFA421258}"/>
+              </a:ext>
+            </a:extLst>
+          </p:cNvPr>
+          <p:cNvSpPr>
+            <a:spLocks noGrp="1"/>
+          </p:cNvSpPr>
+          <p:nvPr>
+            <p:ph type="ftr" sz="quarter" idx="11"/>
+          </p:nvPr>
+        </p:nvSpPr>
+        <p:spPr>
+          <a:xfrm>
+            <a:off x="1115291" y="6356350"/>
+            <a:ext cx="9961418" cy="365125"/>
+          </a:xfrm>
+        </p:spPr>
+        <p:txBody>
+          <a:bodyPr/>
+          <a:lstStyle/>
+          <a:p>
+            <a:r>
+              <a:rPr lang="en-US" altLang="ja-JP" dirty="0"/>
+              <a:t>8.  </a:t>
+            </a:r>
+            <a:r>
+              <a:rPr lang="ja-JP" altLang="ja-JP" dirty="0"/>
+              <a:t>Yang et al. (2025). “Qwen3 Technical Report”</a:t>
+            </a:r>
+            <a:endParaRPr lang="en-US" altLang="ja-JP" dirty="0"/>
+          </a:p>
+          <a:p>
+            <a:r>
+              <a:rPr lang="en-US" altLang="ja-JP" dirty="0"/>
+              <a:t>9.  </a:t>
+            </a:r>
+            <a:r>
+              <a:rPr lang="ja-JP" altLang="ja-JP" dirty="0"/>
+              <a:t>Hu et al. (2021). “LoRA: Low-Rank Adaptation of Large Language Models”</a:t>
+            </a:r>
+            <a:endParaRPr kumimoji="1" lang="ja-JP" altLang="en-US" dirty="0"/>
+          </a:p>
+        </p:txBody>
+      </p:sp>
+    </p:spTree>
+    <p:extLst>
+      <p:ext uri="{BB962C8B-B14F-4D97-AF65-F5344CB8AC3E}">
+        <p14:creationId xmlns:p14="http://schemas.microsoft.com/office/powerpoint/2010/main" val="2706631715"/>
+      </p:ext>
+    </p:extLst>
+  </p:cSld>
+  <p:clrMapOvr>
+    <a:masterClrMapping/>
+  </p:clrMapOvr>
+</p:sld>
+</file>
+
+<file path=ppt/slides/slide21.xml><?xml version="1.0" encoding="utf-8"?>
+<p:sld xmlns:a="http://schemas.openxmlformats.org/drawingml/2006/main" xmlns:r="http://schemas.openxmlformats.org/officeDocument/2006/relationships" xmlns:p="http://schemas.openxmlformats.org/presentationml/2006/main">
+  <p:cSld>
+    <p:spTree>
+      <p:nvGrpSpPr>
+        <p:cNvPr id="1" name=""/>
+        <p:cNvGrpSpPr/>
+        <p:nvPr/>
+      </p:nvGrpSpPr>
+      <p:grpSpPr>
+        <a:xfrm>
+          <a:off x="0" y="0"/>
+          <a:ext cx="0" cy="0"/>
+          <a:chOff x="0" y="0"/>
+          <a:chExt cx="0" cy="0"/>
+        </a:xfrm>
+      </p:grpSpPr>
+      <p:sp>
+        <p:nvSpPr>
+          <p:cNvPr id="2" name="タイトル 1">
+            <a:extLst>
+              <a:ext uri="{FF2B5EF4-FFF2-40B4-BE49-F238E27FC236}">
+                <a16:creationId xmlns:a16="http://schemas.microsoft.com/office/drawing/2014/main" id="{529C3507-C858-E7FB-8C2B-B137888B6CBE}"/>
+              </a:ext>
+            </a:extLst>
+          </p:cNvPr>
+          <p:cNvSpPr>
+            <a:spLocks noGrp="1"/>
+          </p:cNvSpPr>
+          <p:nvPr>
+            <p:ph type="title"/>
+          </p:nvPr>
+        </p:nvSpPr>
+        <p:spPr/>
+        <p:txBody>
+          <a:bodyPr/>
+          <a:lstStyle/>
+          <a:p>
+            <a:r>
+              <a:rPr kumimoji="1" lang="ja-JP" altLang="en-US" dirty="0"/>
+              <a:t>研究方法</a:t>
+            </a:r>
+          </a:p>
+        </p:txBody>
+      </p:sp>
+      <p:sp>
+        <p:nvSpPr>
+          <p:cNvPr id="3" name="コンテンツ プレースホルダー 2">
+            <a:extLst>
+              <a:ext uri="{FF2B5EF4-FFF2-40B4-BE49-F238E27FC236}">
+                <a16:creationId xmlns:a16="http://schemas.microsoft.com/office/drawing/2014/main" id="{7DCF728F-7A8E-D155-9908-5D10C399EBDA}"/>
+              </a:ext>
+            </a:extLst>
+          </p:cNvPr>
+          <p:cNvSpPr>
+            <a:spLocks noGrp="1"/>
+          </p:cNvSpPr>
+          <p:nvPr>
+            <p:ph idx="1"/>
+          </p:nvPr>
+        </p:nvSpPr>
+        <p:spPr/>
+        <p:txBody>
+          <a:bodyPr/>
+          <a:lstStyle/>
+          <a:p>
+            <a:r>
+              <a:rPr kumimoji="1" lang="ja-JP" altLang="en-US" dirty="0"/>
+              <a:t>テスト用の問題を解くモデル</a:t>
+            </a:r>
+            <a:endParaRPr kumimoji="1" lang="en-US" altLang="ja-JP" dirty="0"/>
+          </a:p>
+          <a:p>
+            <a:pPr lvl="1"/>
+            <a:r>
+              <a:rPr kumimoji="1" lang="ja-JP" altLang="en-US" dirty="0"/>
+              <a:t>追加の学習を行わず、そのままのモデル</a:t>
+            </a:r>
+            <a:endParaRPr kumimoji="1" lang="en-US" altLang="ja-JP" dirty="0"/>
+          </a:p>
+          <a:p>
+            <a:pPr lvl="1"/>
+            <a:r>
+              <a:rPr lang="ja-JP" altLang="en-US" dirty="0"/>
+              <a:t>問題文と答えのみを用いて調整した</a:t>
+            </a:r>
+            <a:r>
+              <a:rPr lang="en-US" altLang="ja-JP" dirty="0" err="1"/>
+              <a:t>LoRA</a:t>
+            </a:r>
+            <a:r>
+              <a:rPr lang="ja-JP" altLang="en-US" dirty="0"/>
+              <a:t>を適用したモデル</a:t>
+            </a:r>
+            <a:endParaRPr lang="en-US" altLang="ja-JP" dirty="0"/>
+          </a:p>
+          <a:p>
+            <a:pPr lvl="1"/>
+            <a:r>
+              <a:rPr kumimoji="1" lang="ja-JP" altLang="en-US" dirty="0"/>
+              <a:t>問題文と処理の過程と答えを用いて調整した</a:t>
+            </a:r>
+            <a:r>
+              <a:rPr kumimoji="1" lang="en-US" altLang="ja-JP" dirty="0" err="1"/>
+              <a:t>LoRA</a:t>
+            </a:r>
+            <a:r>
+              <a:rPr kumimoji="1" lang="ja-JP" altLang="en-US" dirty="0"/>
+              <a:t>を適用したモデル</a:t>
+            </a:r>
+          </a:p>
+        </p:txBody>
+      </p:sp>
+      <p:sp>
+        <p:nvSpPr>
+          <p:cNvPr id="7" name="スライド番号プレースホルダー 6">
+            <a:extLst>
+              <a:ext uri="{FF2B5EF4-FFF2-40B4-BE49-F238E27FC236}">
+                <a16:creationId xmlns:a16="http://schemas.microsoft.com/office/drawing/2014/main" id="{53AF5688-701B-92A6-35E7-48E50D62A7E0}"/>
+              </a:ext>
+            </a:extLst>
+          </p:cNvPr>
+          <p:cNvSpPr>
+            <a:spLocks noGrp="1"/>
+          </p:cNvSpPr>
+          <p:nvPr>
+            <p:ph type="sldNum" sz="quarter" idx="12"/>
+          </p:nvPr>
+        </p:nvSpPr>
+        <p:spPr/>
+        <p:txBody>
+          <a:bodyPr/>
+          <a:lstStyle/>
+          <a:p>
+            <a:fld id="{10649E7B-FC1B-418B-9B6A-00859DB1DEE8}" type="slidenum">
+              <a:rPr kumimoji="1" lang="ja-JP" altLang="en-US" smtClean="0"/>
+              <a:t>21</a:t>
+            </a:fld>
+            <a:endParaRPr kumimoji="1" lang="ja-JP" altLang="en-US"/>
+          </a:p>
+        </p:txBody>
+      </p:sp>
+    </p:spTree>
+    <p:extLst>
+      <p:ext uri="{BB962C8B-B14F-4D97-AF65-F5344CB8AC3E}">
+        <p14:creationId xmlns:p14="http://schemas.microsoft.com/office/powerpoint/2010/main" val="2274011375"/>
+      </p:ext>
+    </p:extLst>
+  </p:cSld>
+  <p:clrMapOvr>
+    <a:masterClrMapping/>
+  </p:clrMapOvr>
+</p:sld>
+</file>
+
+<file path=ppt/slides/slide22.xml><?xml version="1.0" encoding="utf-8"?>
+<p:sld xmlns:a="http://schemas.openxmlformats.org/drawingml/2006/main" xmlns:r="http://schemas.openxmlformats.org/officeDocument/2006/relationships" xmlns:p="http://schemas.openxmlformats.org/presentationml/2006/main">
+  <p:cSld>
+    <p:spTree>
+      <p:nvGrpSpPr>
+        <p:cNvPr id="1" name="">
+          <a:extLst>
+            <a:ext uri="{FF2B5EF4-FFF2-40B4-BE49-F238E27FC236}">
+              <a16:creationId xmlns:a16="http://schemas.microsoft.com/office/drawing/2014/main" id="{584B61B6-66A2-0A58-BB76-B2A30AD07437}"/>
+            </a:ext>
+          </a:extLst>
+        </p:cNvPr>
+        <p:cNvGrpSpPr/>
+        <p:nvPr/>
+      </p:nvGrpSpPr>
+      <p:grpSpPr>
+        <a:xfrm>
+          <a:off x="0" y="0"/>
+          <a:ext cx="0" cy="0"/>
+          <a:chOff x="0" y="0"/>
+          <a:chExt cx="0" cy="0"/>
+        </a:xfrm>
+      </p:grpSpPr>
+      <p:sp>
+        <p:nvSpPr>
+          <p:cNvPr id="2" name="タイトル 1">
+            <a:extLst>
+              <a:ext uri="{FF2B5EF4-FFF2-40B4-BE49-F238E27FC236}">
+                <a16:creationId xmlns:a16="http://schemas.microsoft.com/office/drawing/2014/main" id="{905C5D35-FB9C-551A-D458-E59CEE1628CB}"/>
+              </a:ext>
+            </a:extLst>
+          </p:cNvPr>
+          <p:cNvSpPr>
+            <a:spLocks noGrp="1"/>
+          </p:cNvSpPr>
+          <p:nvPr>
+            <p:ph type="title"/>
+          </p:nvPr>
+        </p:nvSpPr>
+        <p:spPr/>
+        <p:txBody>
+          <a:bodyPr/>
+          <a:lstStyle/>
+          <a:p>
+            <a:r>
+              <a:rPr kumimoji="1" lang="ja-JP" altLang="en-US" dirty="0"/>
+              <a:t>目次</a:t>
+            </a:r>
+          </a:p>
+        </p:txBody>
+      </p:sp>
+      <p:sp>
+        <p:nvSpPr>
+          <p:cNvPr id="3" name="コンテンツ プレースホルダー 2">
+            <a:extLst>
+              <a:ext uri="{FF2B5EF4-FFF2-40B4-BE49-F238E27FC236}">
+                <a16:creationId xmlns:a16="http://schemas.microsoft.com/office/drawing/2014/main" id="{C90A61F5-BD53-6DE3-9CA6-96621426DFA4}"/>
+              </a:ext>
+            </a:extLst>
+          </p:cNvPr>
+          <p:cNvSpPr>
+            <a:spLocks noGrp="1"/>
+          </p:cNvSpPr>
+          <p:nvPr>
+            <p:ph idx="1"/>
+          </p:nvPr>
+        </p:nvSpPr>
+        <p:spPr/>
+        <p:txBody>
+          <a:bodyPr/>
+          <a:lstStyle/>
+          <a:p>
+            <a:r>
+              <a:rPr kumimoji="1" lang="ja-JP" altLang="en-US" dirty="0"/>
+              <a:t>研究背景</a:t>
+            </a:r>
+            <a:endParaRPr kumimoji="1" lang="en-US" altLang="ja-JP" dirty="0"/>
+          </a:p>
+          <a:p>
+            <a:r>
+              <a:rPr lang="ja-JP" altLang="en-US" dirty="0"/>
+              <a:t>研究方法</a:t>
+            </a:r>
+            <a:endParaRPr lang="en-US" altLang="ja-JP" dirty="0"/>
+          </a:p>
+          <a:p>
+            <a:r>
+              <a:rPr kumimoji="1" lang="ja-JP" altLang="en-US" dirty="0">
+                <a:solidFill>
+                  <a:srgbClr val="FF0000"/>
+                </a:solidFill>
+              </a:rPr>
+              <a:t>問題解決</a:t>
+            </a:r>
+            <a:r>
+              <a:rPr lang="ja-JP" altLang="en-US" dirty="0">
+                <a:solidFill>
+                  <a:srgbClr val="FF0000"/>
+                </a:solidFill>
+              </a:rPr>
+              <a:t>能力の評価実験</a:t>
+            </a:r>
+            <a:endParaRPr lang="en-US" altLang="ja-JP" dirty="0">
+              <a:solidFill>
+                <a:srgbClr val="FF0000"/>
+              </a:solidFill>
+            </a:endParaRPr>
+          </a:p>
+          <a:p>
+            <a:r>
+              <a:rPr kumimoji="1" lang="ja-JP" altLang="en-US" dirty="0"/>
+              <a:t>分析と考察</a:t>
+            </a:r>
+          </a:p>
+        </p:txBody>
+      </p:sp>
+      <p:sp>
+        <p:nvSpPr>
+          <p:cNvPr id="7" name="スライド番号プレースホルダー 6">
+            <a:extLst>
+              <a:ext uri="{FF2B5EF4-FFF2-40B4-BE49-F238E27FC236}">
+                <a16:creationId xmlns:a16="http://schemas.microsoft.com/office/drawing/2014/main" id="{A928F3DB-D95F-4508-8B9A-EB5087C3C212}"/>
+              </a:ext>
+            </a:extLst>
+          </p:cNvPr>
+          <p:cNvSpPr>
+            <a:spLocks noGrp="1"/>
+          </p:cNvSpPr>
+          <p:nvPr>
+            <p:ph type="sldNum" sz="quarter" idx="12"/>
+          </p:nvPr>
+        </p:nvSpPr>
+        <p:spPr/>
+        <p:txBody>
+          <a:bodyPr/>
+          <a:lstStyle/>
+          <a:p>
+            <a:fld id="{10649E7B-FC1B-418B-9B6A-00859DB1DEE8}" type="slidenum">
+              <a:rPr kumimoji="1" lang="ja-JP" altLang="en-US" smtClean="0"/>
+              <a:t>22</a:t>
+            </a:fld>
+            <a:endParaRPr kumimoji="1" lang="ja-JP" altLang="en-US"/>
+          </a:p>
+        </p:txBody>
+      </p:sp>
+    </p:spTree>
+    <p:extLst>
+      <p:ext uri="{BB962C8B-B14F-4D97-AF65-F5344CB8AC3E}">
+        <p14:creationId xmlns:p14="http://schemas.microsoft.com/office/powerpoint/2010/main" val="1391512888"/>
+      </p:ext>
+    </p:extLst>
+  </p:cSld>
+  <p:clrMapOvr>
+    <a:masterClrMapping/>
+  </p:clrMapOvr>
+</p:sld>
+</file>
+
+<file path=ppt/slides/slide23.xml><?xml version="1.0" encoding="utf-8"?>
+<p:sld xmlns:a="http://schemas.openxmlformats.org/drawingml/2006/main" xmlns:r="http://schemas.openxmlformats.org/officeDocument/2006/relationships" xmlns:p="http://schemas.openxmlformats.org/presentationml/2006/main">
+  <p:cSld>
+    <p:spTree>
+      <p:nvGrpSpPr>
+        <p:cNvPr id="1" name=""/>
+        <p:cNvGrpSpPr/>
+        <p:nvPr/>
+      </p:nvGrpSpPr>
+      <p:grpSpPr>
+        <a:xfrm>
+          <a:off x="0" y="0"/>
+          <a:ext cx="0" cy="0"/>
+          <a:chOff x="0" y="0"/>
+          <a:chExt cx="0" cy="0"/>
+        </a:xfrm>
+      </p:grpSpPr>
+      <p:sp>
+        <p:nvSpPr>
+          <p:cNvPr id="2" name="タイトル 1">
+            <a:extLst>
+              <a:ext uri="{FF2B5EF4-FFF2-40B4-BE49-F238E27FC236}">
+                <a16:creationId xmlns:a16="http://schemas.microsoft.com/office/drawing/2014/main" id="{2EF2B9B9-5A20-1DA4-20B2-6EDE1D38AF2B}"/>
+              </a:ext>
+            </a:extLst>
+          </p:cNvPr>
+          <p:cNvSpPr>
+            <a:spLocks noGrp="1"/>
+          </p:cNvSpPr>
+          <p:nvPr>
+            <p:ph type="title"/>
+          </p:nvPr>
+        </p:nvSpPr>
+        <p:spPr/>
+        <p:txBody>
+          <a:bodyPr/>
+          <a:lstStyle/>
+          <a:p>
+            <a:r>
+              <a:rPr lang="ja-JP" altLang="en-US" dirty="0"/>
+              <a:t>問題解決能力の評価実験</a:t>
+            </a:r>
+            <a:r>
+              <a:rPr lang="en-US" altLang="ja-JP" dirty="0">
+                <a:solidFill>
+                  <a:srgbClr val="FF0000"/>
+                </a:solidFill>
+              </a:rPr>
+              <a:t>(</a:t>
+            </a:r>
+            <a:r>
+              <a:rPr lang="ja-JP" altLang="en-US" dirty="0">
+                <a:solidFill>
+                  <a:srgbClr val="FF0000"/>
+                </a:solidFill>
+              </a:rPr>
+              <a:t>やり直し中</a:t>
+            </a:r>
+            <a:r>
+              <a:rPr lang="en-US" altLang="ja-JP" dirty="0">
+                <a:solidFill>
+                  <a:srgbClr val="FF0000"/>
+                </a:solidFill>
+              </a:rPr>
+              <a:t>)</a:t>
+            </a:r>
+            <a:endParaRPr kumimoji="1" lang="ja-JP" altLang="en-US" dirty="0">
+              <a:solidFill>
+                <a:srgbClr val="FF0000"/>
+              </a:solidFill>
+            </a:endParaRPr>
+          </a:p>
+        </p:txBody>
+      </p:sp>
+      <p:sp>
+        <p:nvSpPr>
+          <p:cNvPr id="3" name="コンテンツ プレースホルダー 2">
+            <a:extLst>
+              <a:ext uri="{FF2B5EF4-FFF2-40B4-BE49-F238E27FC236}">
+                <a16:creationId xmlns:a16="http://schemas.microsoft.com/office/drawing/2014/main" id="{1B65EE80-A1F3-CD84-8EC6-F7B443DA312F}"/>
+              </a:ext>
+            </a:extLst>
+          </p:cNvPr>
+          <p:cNvSpPr>
+            <a:spLocks noGrp="1"/>
+          </p:cNvSpPr>
+          <p:nvPr>
+            <p:ph idx="1"/>
+          </p:nvPr>
+        </p:nvSpPr>
+        <p:spPr>
+          <a:xfrm>
+            <a:off x="838200" y="1825625"/>
+            <a:ext cx="10515600" cy="4108881"/>
+          </a:xfrm>
+        </p:spPr>
+        <p:txBody>
+          <a:bodyPr/>
+          <a:lstStyle/>
+          <a:p>
+            <a:pPr marL="0" indent="0">
+              <a:buNone/>
+            </a:pPr>
+            <a:endParaRPr kumimoji="1" lang="ja-JP" altLang="en-US" dirty="0"/>
+          </a:p>
+        </p:txBody>
+      </p:sp>
+      <p:sp>
+        <p:nvSpPr>
+          <p:cNvPr id="7" name="スライド番号プレースホルダー 6">
+            <a:extLst>
+              <a:ext uri="{FF2B5EF4-FFF2-40B4-BE49-F238E27FC236}">
+                <a16:creationId xmlns:a16="http://schemas.microsoft.com/office/drawing/2014/main" id="{4B57D73E-58AB-D751-B9BF-FC3CAB7D00B3}"/>
+              </a:ext>
+            </a:extLst>
+          </p:cNvPr>
+          <p:cNvSpPr>
+            <a:spLocks noGrp="1"/>
+          </p:cNvSpPr>
+          <p:nvPr>
+            <p:ph type="sldNum" sz="quarter" idx="12"/>
+          </p:nvPr>
+        </p:nvSpPr>
+        <p:spPr/>
+        <p:txBody>
+          <a:bodyPr/>
+          <a:lstStyle/>
+          <a:p>
+            <a:fld id="{10649E7B-FC1B-418B-9B6A-00859DB1DEE8}" type="slidenum">
+              <a:rPr kumimoji="1" lang="ja-JP" altLang="en-US" smtClean="0"/>
+              <a:t>23</a:t>
+            </a:fld>
+            <a:endParaRPr kumimoji="1" lang="ja-JP" altLang="en-US"/>
+          </a:p>
+        </p:txBody>
+      </p:sp>
+      <p:graphicFrame>
+        <p:nvGraphicFramePr>
+          <p:cNvPr id="8" name="表 7">
+            <a:extLst>
+              <a:ext uri="{FF2B5EF4-FFF2-40B4-BE49-F238E27FC236}">
+                <a16:creationId xmlns:a16="http://schemas.microsoft.com/office/drawing/2014/main" id="{C3857E26-20FC-DDF3-7A9A-B61AE700B84D}"/>
+              </a:ext>
+            </a:extLst>
+          </p:cNvPr>
+          <p:cNvGraphicFramePr>
+            <a:graphicFrameLocks noGrp="1"/>
+          </p:cNvGraphicFramePr>
+          <p:nvPr>
+            <p:extLst>
+              <p:ext uri="{D42A27DB-BD31-4B8C-83A1-F6EECF244321}">
+                <p14:modId xmlns:p14="http://schemas.microsoft.com/office/powerpoint/2010/main" val="565062704"/>
+              </p:ext>
+            </p:extLst>
+          </p:nvPr>
+        </p:nvGraphicFramePr>
+        <p:xfrm>
+          <a:off x="838200" y="1583169"/>
+          <a:ext cx="10515600" cy="4351337"/>
+        </p:xfrm>
+        <a:graphic>
+          <a:graphicData uri="http://schemas.openxmlformats.org/drawingml/2006/table">
+            <a:tbl>
+              <a:tblPr firstRow="1" bandRow="1">
+                <a:tableStyleId>{5C22544A-7EE6-4342-B048-85BDC9FD1C3A}</a:tableStyleId>
+              </a:tblPr>
+              <a:tblGrid>
+                <a:gridCol w="2628900">
+                  <a:extLst>
+                    <a:ext uri="{9D8B030D-6E8A-4147-A177-3AD203B41FA5}">
+                      <a16:colId xmlns:a16="http://schemas.microsoft.com/office/drawing/2014/main" val="2577893348"/>
+                    </a:ext>
+                  </a:extLst>
+                </a:gridCol>
+                <a:gridCol w="2628900">
+                  <a:extLst>
+                    <a:ext uri="{9D8B030D-6E8A-4147-A177-3AD203B41FA5}">
+                      <a16:colId xmlns:a16="http://schemas.microsoft.com/office/drawing/2014/main" val="2053877159"/>
+                    </a:ext>
+                  </a:extLst>
+                </a:gridCol>
+                <a:gridCol w="2628900">
+                  <a:extLst>
+                    <a:ext uri="{9D8B030D-6E8A-4147-A177-3AD203B41FA5}">
+                      <a16:colId xmlns:a16="http://schemas.microsoft.com/office/drawing/2014/main" val="2672482506"/>
+                    </a:ext>
+                  </a:extLst>
+                </a:gridCol>
+                <a:gridCol w="2628900">
+                  <a:extLst>
+                    <a:ext uri="{9D8B030D-6E8A-4147-A177-3AD203B41FA5}">
+                      <a16:colId xmlns:a16="http://schemas.microsoft.com/office/drawing/2014/main" val="1596151943"/>
+                    </a:ext>
+                  </a:extLst>
+                </a:gridCol>
+              </a:tblGrid>
+              <a:tr h="1811409">
+                <a:tc>
+                  <a:txBody>
+                    <a:bodyPr/>
+                    <a:lstStyle/>
+                    <a:p>
+                      <a:pPr algn="ctr"/>
+                      <a:endParaRPr kumimoji="1" lang="ja-JP" altLang="en-US" sz="2100" dirty="0"/>
+                    </a:p>
+                  </a:txBody>
+                  <a:tcPr anchor="ctr"/>
+                </a:tc>
+                <a:tc>
+                  <a:txBody>
+                    <a:bodyPr/>
+                    <a:lstStyle/>
+                    <a:p>
+                      <a:pPr algn="ctr"/>
+                      <a:r>
+                        <a:rPr kumimoji="1" lang="ja-JP" altLang="en-US" sz="2100" dirty="0"/>
+                        <a:t>ベースモデル</a:t>
+                      </a:r>
+                    </a:p>
+                  </a:txBody>
+                  <a:tcPr anchor="ctr"/>
+                </a:tc>
+                <a:tc>
+                  <a:txBody>
+                    <a:bodyPr/>
+                    <a:lstStyle/>
+                    <a:p>
+                      <a:pPr algn="ctr"/>
+                      <a:r>
+                        <a:rPr kumimoji="1" lang="ja-JP" altLang="en-US" sz="2100" dirty="0"/>
+                        <a:t>答えのみ</a:t>
+                      </a:r>
+                      <a:r>
+                        <a:rPr kumimoji="1" lang="en-US" altLang="ja-JP" sz="2100" dirty="0"/>
+                        <a:t>SFT</a:t>
+                      </a:r>
+                      <a:endParaRPr kumimoji="1" lang="ja-JP" altLang="en-US" sz="2100" dirty="0"/>
+                    </a:p>
+                  </a:txBody>
+                  <a:tcPr anchor="ctr"/>
+                </a:tc>
+                <a:tc>
+                  <a:txBody>
+                    <a:bodyPr/>
+                    <a:lstStyle/>
+                    <a:p>
+                      <a:pPr algn="ctr"/>
+                      <a:r>
+                        <a:rPr lang="ja-JP" altLang="ja-JP" sz="2100" dirty="0"/>
+                        <a:t>答え＋処理過程SFT</a:t>
+                      </a:r>
+                      <a:endParaRPr kumimoji="1" lang="ja-JP" altLang="en-US" sz="2100" dirty="0"/>
+                    </a:p>
+                  </a:txBody>
+                  <a:tcPr anchor="ctr"/>
+                </a:tc>
+                <a:extLst>
+                  <a:ext uri="{0D108BD9-81ED-4DB2-BD59-A6C34878D82A}">
+                    <a16:rowId xmlns:a16="http://schemas.microsoft.com/office/drawing/2014/main" val="3196805259"/>
+                  </a:ext>
+                </a:extLst>
+              </a:tr>
+              <a:tr h="1269964">
+                <a:tc>
+                  <a:txBody>
+                    <a:bodyPr/>
+                    <a:lstStyle/>
+                    <a:p>
+                      <a:pPr marL="0" marR="0" lvl="0" indent="0" algn="ctr" defTabSz="914400" rtl="0" eaLnBrk="1" fontAlgn="auto" latinLnBrk="0" hangingPunct="1">
+                        <a:lnSpc>
+                          <a:spcPct val="100000"/>
+                        </a:lnSpc>
+                        <a:spcBef>
+                          <a:spcPts val="0"/>
+                        </a:spcBef>
+                        <a:spcAft>
+                          <a:spcPts val="0"/>
+                        </a:spcAft>
+                        <a:buClrTx/>
+                        <a:buSzTx/>
+                        <a:buFontTx/>
+                        <a:buNone/>
+                        <a:tabLst/>
+                        <a:defRPr/>
+                      </a:pPr>
+                      <a:r>
+                        <a:rPr lang="ja-JP" altLang="en-US" sz="2100" dirty="0"/>
+                        <a:t>テストデータその</a:t>
+                      </a:r>
+                      <a:r>
+                        <a:rPr lang="en-US" altLang="ja-JP" sz="2100" dirty="0"/>
+                        <a:t>1</a:t>
+                      </a:r>
+                    </a:p>
+                  </a:txBody>
+                  <a:tcPr anchor="ctr"/>
+                </a:tc>
+                <a:tc>
+                  <a:txBody>
+                    <a:bodyPr/>
+                    <a:lstStyle/>
+                    <a:p>
+                      <a:pPr algn="ctr"/>
+                      <a:r>
+                        <a:rPr kumimoji="1" lang="en-US" altLang="ja-JP" sz="2100" dirty="0"/>
+                        <a:t>277/680</a:t>
+                      </a:r>
+                    </a:p>
+                    <a:p>
+                      <a:pPr algn="ctr"/>
+                      <a:r>
+                        <a:rPr kumimoji="1" lang="ja-JP" altLang="en-US" sz="2100" dirty="0"/>
+                        <a:t>約</a:t>
+                      </a:r>
+                      <a:r>
+                        <a:rPr kumimoji="1" lang="en-US" altLang="ja-JP" sz="2100" dirty="0"/>
+                        <a:t>40</a:t>
+                      </a:r>
+                      <a:r>
+                        <a:rPr kumimoji="1" lang="ja-JP" altLang="en-US" sz="2100" dirty="0"/>
+                        <a:t>％</a:t>
+                      </a:r>
+                    </a:p>
+                  </a:txBody>
+                  <a:tcPr anchor="ctr"/>
+                </a:tc>
+                <a:tc>
+                  <a:txBody>
+                    <a:bodyPr/>
+                    <a:lstStyle/>
+                    <a:p>
+                      <a:pPr algn="ctr"/>
+                      <a:r>
+                        <a:rPr kumimoji="1" lang="en-US" altLang="ja-JP" sz="2100" dirty="0"/>
+                        <a:t>484/680</a:t>
+                      </a:r>
+                    </a:p>
+                    <a:p>
+                      <a:pPr algn="ctr"/>
+                      <a:r>
+                        <a:rPr kumimoji="1" lang="ja-JP" altLang="en-US" sz="2100" dirty="0"/>
+                        <a:t>約</a:t>
+                      </a:r>
+                      <a:r>
+                        <a:rPr kumimoji="1" lang="en-US" altLang="ja-JP" sz="2100" dirty="0"/>
+                        <a:t>71</a:t>
+                      </a:r>
+                      <a:r>
+                        <a:rPr kumimoji="1" lang="ja-JP" altLang="en-US" sz="2100" dirty="0"/>
+                        <a:t>％</a:t>
+                      </a:r>
+                    </a:p>
+                  </a:txBody>
+                  <a:tcPr anchor="ctr"/>
+                </a:tc>
+                <a:tc>
+                  <a:txBody>
+                    <a:bodyPr/>
+                    <a:lstStyle/>
+                    <a:p>
+                      <a:pPr algn="ctr"/>
+                      <a:r>
+                        <a:rPr kumimoji="1" lang="ja-JP" altLang="ja-JP" sz="2100" b="0" i="0" kern="1200" dirty="0">
+                          <a:solidFill>
+                            <a:schemeClr val="dk1"/>
+                          </a:solidFill>
+                          <a:effectLst/>
+                          <a:latin typeface="+mn-lt"/>
+                          <a:ea typeface="+mn-ea"/>
+                          <a:cs typeface="+mn-cs"/>
+                        </a:rPr>
+                        <a:t>548</a:t>
+                      </a:r>
+                      <a:r>
+                        <a:rPr kumimoji="1" lang="en-US" altLang="ja-JP" sz="2100" b="0" i="0" kern="1200" dirty="0">
+                          <a:solidFill>
+                            <a:schemeClr val="dk1"/>
+                          </a:solidFill>
+                          <a:effectLst/>
+                          <a:latin typeface="+mn-lt"/>
+                          <a:ea typeface="+mn-ea"/>
+                          <a:cs typeface="+mn-cs"/>
+                        </a:rPr>
+                        <a:t>/680</a:t>
+                      </a:r>
+                    </a:p>
+                    <a:p>
+                      <a:pPr algn="ctr"/>
+                      <a:r>
+                        <a:rPr kumimoji="1" lang="ja-JP" altLang="en-US" sz="2100" b="0" i="0" kern="1200" dirty="0">
+                          <a:solidFill>
+                            <a:schemeClr val="dk1"/>
+                          </a:solidFill>
+                          <a:effectLst/>
+                          <a:latin typeface="+mn-lt"/>
+                          <a:ea typeface="+mn-ea"/>
+                          <a:cs typeface="+mn-cs"/>
+                        </a:rPr>
+                        <a:t>約</a:t>
+                      </a:r>
+                      <a:r>
+                        <a:rPr kumimoji="1" lang="en-US" altLang="ja-JP" sz="2100" b="0" i="0" kern="1200" dirty="0">
+                          <a:solidFill>
+                            <a:schemeClr val="dk1"/>
+                          </a:solidFill>
+                          <a:effectLst/>
+                          <a:latin typeface="+mn-lt"/>
+                          <a:ea typeface="+mn-ea"/>
+                          <a:cs typeface="+mn-cs"/>
+                        </a:rPr>
+                        <a:t>80</a:t>
+                      </a:r>
+                      <a:r>
+                        <a:rPr kumimoji="1" lang="ja-JP" altLang="en-US" sz="2100" b="0" i="0" kern="1200" dirty="0">
+                          <a:solidFill>
+                            <a:schemeClr val="dk1"/>
+                          </a:solidFill>
+                          <a:effectLst/>
+                          <a:latin typeface="+mn-lt"/>
+                          <a:ea typeface="+mn-ea"/>
+                          <a:cs typeface="+mn-cs"/>
+                        </a:rPr>
+                        <a:t>％</a:t>
+                      </a:r>
+                      <a:endParaRPr kumimoji="1" lang="ja-JP" altLang="en-US" sz="2100" dirty="0"/>
+                    </a:p>
+                  </a:txBody>
+                  <a:tcPr anchor="ctr"/>
+                </a:tc>
+                <a:extLst>
+                  <a:ext uri="{0D108BD9-81ED-4DB2-BD59-A6C34878D82A}">
+                    <a16:rowId xmlns:a16="http://schemas.microsoft.com/office/drawing/2014/main" val="2722267845"/>
+                  </a:ext>
+                </a:extLst>
+              </a:tr>
+              <a:tr h="1269964">
+                <a:tc>
+                  <a:txBody>
+                    <a:bodyPr/>
+                    <a:lstStyle/>
+                    <a:p>
+                      <a:pPr marL="0" marR="0" lvl="0" indent="0" algn="ctr" defTabSz="914400" rtl="0" eaLnBrk="1" fontAlgn="auto" latinLnBrk="0" hangingPunct="1">
+                        <a:lnSpc>
+                          <a:spcPct val="100000"/>
+                        </a:lnSpc>
+                        <a:spcBef>
+                          <a:spcPts val="0"/>
+                        </a:spcBef>
+                        <a:spcAft>
+                          <a:spcPts val="0"/>
+                        </a:spcAft>
+                        <a:buClrTx/>
+                        <a:buSzTx/>
+                        <a:buFontTx/>
+                        <a:buNone/>
+                        <a:tabLst/>
+                        <a:defRPr/>
+                      </a:pPr>
+                      <a:r>
+                        <a:rPr lang="ja-JP" altLang="en-US" sz="2100" dirty="0"/>
+                        <a:t>テストデータその</a:t>
+                      </a:r>
+                      <a:r>
+                        <a:rPr lang="en-US" altLang="ja-JP" sz="2100" dirty="0"/>
+                        <a:t>2</a:t>
+                      </a:r>
+                    </a:p>
+                  </a:txBody>
+                  <a:tcPr anchor="ctr"/>
+                </a:tc>
+                <a:tc>
+                  <a:txBody>
+                    <a:bodyPr/>
+                    <a:lstStyle/>
+                    <a:p>
+                      <a:pPr algn="ctr"/>
+                      <a:r>
+                        <a:rPr kumimoji="1" lang="ja-JP" altLang="ja-JP" sz="2100" b="0" i="0" kern="1200" dirty="0">
+                          <a:solidFill>
+                            <a:schemeClr val="dk1"/>
+                          </a:solidFill>
+                          <a:effectLst/>
+                          <a:latin typeface="+mn-lt"/>
+                          <a:ea typeface="+mn-ea"/>
+                          <a:cs typeface="+mn-cs"/>
+                        </a:rPr>
+                        <a:t>67</a:t>
+                      </a:r>
+                      <a:r>
+                        <a:rPr kumimoji="1" lang="en-US" altLang="ja-JP" sz="2100" dirty="0"/>
+                        <a:t>/480</a:t>
+                      </a:r>
+                    </a:p>
+                    <a:p>
+                      <a:pPr algn="ctr"/>
+                      <a:r>
+                        <a:rPr kumimoji="1" lang="ja-JP" altLang="en-US" sz="2100" dirty="0"/>
+                        <a:t>約</a:t>
+                      </a:r>
+                      <a:r>
+                        <a:rPr kumimoji="1" lang="en-US" altLang="ja-JP" sz="2100" dirty="0"/>
+                        <a:t>13</a:t>
+                      </a:r>
+                      <a:r>
+                        <a:rPr kumimoji="1" lang="ja-JP" altLang="en-US" sz="2100" dirty="0"/>
+                        <a:t>％</a:t>
+                      </a:r>
+                    </a:p>
+                  </a:txBody>
+                  <a:tcPr anchor="ctr"/>
+                </a:tc>
+                <a:tc>
+                  <a:txBody>
+                    <a:bodyPr/>
+                    <a:lstStyle/>
+                    <a:p>
+                      <a:pPr algn="ctr"/>
+                      <a:r>
+                        <a:rPr kumimoji="1" lang="en-US" altLang="ja-JP" sz="2100" dirty="0"/>
+                        <a:t>201/480</a:t>
+                      </a:r>
+                    </a:p>
+                    <a:p>
+                      <a:pPr algn="ctr"/>
+                      <a:r>
+                        <a:rPr kumimoji="1" lang="ja-JP" altLang="en-US" sz="2100" dirty="0"/>
+                        <a:t>約</a:t>
+                      </a:r>
+                      <a:r>
+                        <a:rPr kumimoji="1" lang="en-US" altLang="ja-JP" sz="2100" dirty="0"/>
+                        <a:t>41</a:t>
+                      </a:r>
+                      <a:r>
+                        <a:rPr kumimoji="1" lang="ja-JP" altLang="en-US" sz="2100" dirty="0"/>
+                        <a:t>％</a:t>
+                      </a:r>
+                    </a:p>
+                  </a:txBody>
+                  <a:tcPr anchor="ctr"/>
+                </a:tc>
+                <a:tc>
+                  <a:txBody>
+                    <a:bodyPr/>
+                    <a:lstStyle/>
+                    <a:p>
+                      <a:pPr algn="ctr"/>
+                      <a:r>
+                        <a:rPr kumimoji="1" lang="ja-JP" altLang="ja-JP" sz="2100" b="0" i="0" kern="1200" dirty="0">
+                          <a:solidFill>
+                            <a:schemeClr val="dk1"/>
+                          </a:solidFill>
+                          <a:effectLst/>
+                          <a:latin typeface="+mn-lt"/>
+                          <a:ea typeface="+mn-ea"/>
+                          <a:cs typeface="+mn-cs"/>
+                        </a:rPr>
+                        <a:t>98</a:t>
+                      </a:r>
+                      <a:r>
+                        <a:rPr kumimoji="1" lang="en-US" altLang="ja-JP" sz="2100" b="0" i="0" kern="1200" dirty="0">
+                          <a:solidFill>
+                            <a:schemeClr val="dk1"/>
+                          </a:solidFill>
+                          <a:effectLst/>
+                          <a:latin typeface="+mn-lt"/>
+                          <a:ea typeface="+mn-ea"/>
+                          <a:cs typeface="+mn-cs"/>
+                        </a:rPr>
+                        <a:t>/480</a:t>
+                      </a:r>
+                    </a:p>
+                    <a:p>
+                      <a:pPr algn="ctr"/>
+                      <a:r>
+                        <a:rPr kumimoji="1" lang="ja-JP" altLang="en-US" sz="2100" b="0" i="0" kern="1200" dirty="0">
+                          <a:solidFill>
+                            <a:schemeClr val="dk1"/>
+                          </a:solidFill>
+                          <a:effectLst/>
+                          <a:latin typeface="+mn-lt"/>
+                          <a:ea typeface="+mn-ea"/>
+                          <a:cs typeface="+mn-cs"/>
+                        </a:rPr>
+                        <a:t>約</a:t>
+                      </a:r>
+                      <a:r>
+                        <a:rPr kumimoji="1" lang="en-US" altLang="ja-JP" sz="2100" b="0" i="0" kern="1200" dirty="0">
+                          <a:solidFill>
+                            <a:schemeClr val="dk1"/>
+                          </a:solidFill>
+                          <a:effectLst/>
+                          <a:latin typeface="+mn-lt"/>
+                          <a:ea typeface="+mn-ea"/>
+                          <a:cs typeface="+mn-cs"/>
+                        </a:rPr>
+                        <a:t>20</a:t>
+                      </a:r>
+                      <a:r>
+                        <a:rPr kumimoji="1" lang="ja-JP" altLang="en-US" sz="2100" b="0" i="0" kern="1200" dirty="0">
+                          <a:solidFill>
+                            <a:schemeClr val="dk1"/>
+                          </a:solidFill>
+                          <a:effectLst/>
+                          <a:latin typeface="+mn-lt"/>
+                          <a:ea typeface="+mn-ea"/>
+                          <a:cs typeface="+mn-cs"/>
+                        </a:rPr>
+                        <a:t>％</a:t>
+                      </a:r>
+                      <a:endParaRPr kumimoji="1" lang="ja-JP" altLang="en-US" sz="2100" dirty="0"/>
+                    </a:p>
+                  </a:txBody>
+                  <a:tcPr anchor="ctr"/>
+                </a:tc>
+                <a:extLst>
+                  <a:ext uri="{0D108BD9-81ED-4DB2-BD59-A6C34878D82A}">
+                    <a16:rowId xmlns:a16="http://schemas.microsoft.com/office/drawing/2014/main" val="2618271811"/>
+                  </a:ext>
+                </a:extLst>
+              </a:tr>
+            </a:tbl>
+          </a:graphicData>
+        </a:graphic>
+      </p:graphicFrame>
+      <p:sp>
+        <p:nvSpPr>
+          <p:cNvPr id="9" name="テキスト ボックス 8">
+            <a:extLst>
+              <a:ext uri="{FF2B5EF4-FFF2-40B4-BE49-F238E27FC236}">
+                <a16:creationId xmlns:a16="http://schemas.microsoft.com/office/drawing/2014/main" id="{A6C7B1B2-2AA4-0DEF-7433-FF0399B47C9B}"/>
+              </a:ext>
+            </a:extLst>
+          </p:cNvPr>
+          <p:cNvSpPr txBox="1"/>
+          <p:nvPr/>
+        </p:nvSpPr>
+        <p:spPr>
+          <a:xfrm>
+            <a:off x="928255" y="6077247"/>
+            <a:ext cx="9985663" cy="923330"/>
+          </a:xfrm>
+          <a:prstGeom prst="rect">
+            <a:avLst/>
+          </a:prstGeom>
+          <a:noFill/>
+        </p:spPr>
+        <p:txBody>
+          <a:bodyPr wrap="square" rtlCol="0">
+            <a:spAutoFit/>
+          </a:bodyPr>
+          <a:lstStyle/>
+          <a:p>
+            <a:r>
+              <a:rPr kumimoji="1" lang="ja-JP" altLang="en-US" dirty="0"/>
+              <a:t>テストデータその</a:t>
+            </a:r>
+            <a:r>
+              <a:rPr kumimoji="1" lang="en-US" altLang="ja-JP" dirty="0"/>
+              <a:t>1</a:t>
+            </a:r>
+            <a:r>
+              <a:rPr kumimoji="1" lang="ja-JP" altLang="en-US" dirty="0"/>
+              <a:t>：</a:t>
+            </a:r>
+            <a:r>
+              <a:rPr lang="ja-JP" altLang="en-US" dirty="0"/>
+              <a:t>訓練用のデータの問題と同じルール</a:t>
+            </a:r>
+            <a:endParaRPr lang="en-US" altLang="ja-JP" dirty="0"/>
+          </a:p>
+          <a:p>
+            <a:r>
+              <a:rPr lang="ja-JP" altLang="en-US" dirty="0"/>
+              <a:t>テストデータその</a:t>
+            </a:r>
+            <a:r>
+              <a:rPr lang="en-US" altLang="ja-JP" dirty="0"/>
+              <a:t>2</a:t>
+            </a:r>
+            <a:r>
+              <a:rPr lang="ja-JP" altLang="en-US" dirty="0"/>
+              <a:t>：</a:t>
+            </a:r>
+            <a:r>
+              <a:rPr lang="ja-JP" altLang="ja-JP" dirty="0"/>
+              <a:t>処理単体としては同じだけど</a:t>
+            </a:r>
+            <a:r>
+              <a:rPr lang="ja-JP" altLang="en-US" dirty="0"/>
+              <a:t>訓練用のデータでは出なかった組み合わせ</a:t>
+            </a:r>
+            <a:endParaRPr lang="en-US" altLang="ja-JP" dirty="0"/>
+          </a:p>
+          <a:p>
+            <a:endParaRPr kumimoji="1" lang="ja-JP" altLang="en-US" dirty="0"/>
+          </a:p>
+        </p:txBody>
+      </p:sp>
+    </p:spTree>
+    <p:extLst>
+      <p:ext uri="{BB962C8B-B14F-4D97-AF65-F5344CB8AC3E}">
+        <p14:creationId xmlns:p14="http://schemas.microsoft.com/office/powerpoint/2010/main" val="21569033"/>
+      </p:ext>
+    </p:extLst>
+  </p:cSld>
+  <p:clrMapOvr>
+    <a:masterClrMapping/>
+  </p:clrMapOvr>
+</p:sld>
+</file>
+
+<file path=ppt/slides/slide24.xml><?xml version="1.0" encoding="utf-8"?>
+<p:sld xmlns:a="http://schemas.openxmlformats.org/drawingml/2006/main" xmlns:r="http://schemas.openxmlformats.org/officeDocument/2006/relationships" xmlns:p="http://schemas.openxmlformats.org/presentationml/2006/main">
+  <p:cSld>
+    <p:spTree>
+      <p:nvGrpSpPr>
+        <p:cNvPr id="1" name=""/>
+        <p:cNvGrpSpPr/>
+        <p:nvPr/>
+      </p:nvGrpSpPr>
+      <p:grpSpPr>
+        <a:xfrm>
+          <a:off x="0" y="0"/>
+          <a:ext cx="0" cy="0"/>
+          <a:chOff x="0" y="0"/>
+          <a:chExt cx="0" cy="0"/>
+        </a:xfrm>
+      </p:grpSpPr>
+      <p:sp>
+        <p:nvSpPr>
+          <p:cNvPr id="2" name="タイトル 1">
+            <a:extLst>
+              <a:ext uri="{FF2B5EF4-FFF2-40B4-BE49-F238E27FC236}">
+                <a16:creationId xmlns:a16="http://schemas.microsoft.com/office/drawing/2014/main" id="{CB17FC67-421D-54F2-1BEE-EAE5769FFEF2}"/>
+              </a:ext>
+            </a:extLst>
+          </p:cNvPr>
+          <p:cNvSpPr>
+            <a:spLocks noGrp="1"/>
+          </p:cNvSpPr>
+          <p:nvPr>
+            <p:ph type="title"/>
+          </p:nvPr>
+        </p:nvSpPr>
+        <p:spPr/>
+        <p:txBody>
+          <a:bodyPr/>
+          <a:lstStyle/>
+          <a:p>
+            <a:r>
+              <a:rPr lang="ja-JP" altLang="en-US" dirty="0"/>
+              <a:t>問題解決能力の評価実験</a:t>
+            </a:r>
+            <a:endParaRPr kumimoji="1" lang="ja-JP" altLang="en-US" dirty="0"/>
+          </a:p>
+        </p:txBody>
+      </p:sp>
+      <p:sp>
+        <p:nvSpPr>
+          <p:cNvPr id="3" name="コンテンツ プレースホルダー 2">
+            <a:extLst>
+              <a:ext uri="{FF2B5EF4-FFF2-40B4-BE49-F238E27FC236}">
+                <a16:creationId xmlns:a16="http://schemas.microsoft.com/office/drawing/2014/main" id="{4B21DC81-254B-4357-7900-4994D496D353}"/>
+              </a:ext>
+            </a:extLst>
+          </p:cNvPr>
+          <p:cNvSpPr>
+            <a:spLocks noGrp="1"/>
+          </p:cNvSpPr>
+          <p:nvPr>
+            <p:ph idx="1"/>
+          </p:nvPr>
+        </p:nvSpPr>
+        <p:spPr/>
+        <p:txBody>
+          <a:bodyPr/>
+          <a:lstStyle/>
+          <a:p>
+            <a:endParaRPr kumimoji="1" lang="ja-JP" altLang="en-US"/>
+          </a:p>
+        </p:txBody>
+      </p:sp>
+      <p:sp>
+        <p:nvSpPr>
+          <p:cNvPr id="4" name="スライド番号プレースホルダー 3">
+            <a:extLst>
+              <a:ext uri="{FF2B5EF4-FFF2-40B4-BE49-F238E27FC236}">
+                <a16:creationId xmlns:a16="http://schemas.microsoft.com/office/drawing/2014/main" id="{67DF5970-CA74-5E3E-9472-A3480A45816E}"/>
+              </a:ext>
+            </a:extLst>
+          </p:cNvPr>
+          <p:cNvSpPr>
+            <a:spLocks noGrp="1"/>
+          </p:cNvSpPr>
+          <p:nvPr>
+            <p:ph type="sldNum" sz="quarter" idx="12"/>
+          </p:nvPr>
+        </p:nvSpPr>
+        <p:spPr/>
+        <p:txBody>
+          <a:bodyPr/>
+          <a:lstStyle/>
+          <a:p>
+            <a:fld id="{10649E7B-FC1B-418B-9B6A-00859DB1DEE8}" type="slidenum">
+              <a:rPr kumimoji="1" lang="ja-JP" altLang="en-US" smtClean="0"/>
+              <a:t>24</a:t>
+            </a:fld>
+            <a:endParaRPr kumimoji="1" lang="ja-JP" altLang="en-US"/>
+          </a:p>
+        </p:txBody>
+      </p:sp>
+    </p:spTree>
+    <p:extLst>
+      <p:ext uri="{BB962C8B-B14F-4D97-AF65-F5344CB8AC3E}">
+        <p14:creationId xmlns:p14="http://schemas.microsoft.com/office/powerpoint/2010/main" val="238480291"/>
       </p:ext>
     </p:extLst>
   </p:cSld>
@@ -6414,6 +8881,35 @@
           </a:p>
         </p:txBody>
       </p:sp>
+      <p:sp>
+        <p:nvSpPr>
+          <p:cNvPr id="7" name="スライド番号プレースホルダー 6">
+            <a:extLst>
+              <a:ext uri="{FF2B5EF4-FFF2-40B4-BE49-F238E27FC236}">
+                <a16:creationId xmlns:a16="http://schemas.microsoft.com/office/drawing/2014/main" id="{665DCAC2-8785-1720-63B5-0814DF17D33C}"/>
+              </a:ext>
+            </a:extLst>
+          </p:cNvPr>
+          <p:cNvSpPr>
+            <a:spLocks noGrp="1"/>
+          </p:cNvSpPr>
+          <p:nvPr>
+            <p:ph type="sldNum" sz="quarter" idx="12"/>
+          </p:nvPr>
+        </p:nvSpPr>
+        <p:spPr/>
+        <p:txBody>
+          <a:bodyPr/>
+          <a:lstStyle/>
+          <a:p>
+            <a:fld id="{10649E7B-FC1B-418B-9B6A-00859DB1DEE8}" type="slidenum">
+              <a:rPr kumimoji="1" lang="ja-JP" altLang="en-US" smtClean="0"/>
+              <a:t>3</a:t>
+            </a:fld>
+            <a:endParaRPr kumimoji="1" lang="ja-JP" altLang="en-US"/>
+          </a:p>
+        </p:txBody>
+      </p:sp>
     </p:spTree>
     <p:extLst>
       <p:ext uri="{BB962C8B-B14F-4D97-AF65-F5344CB8AC3E}">
@@ -6521,6 +9017,10 @@
               <a:rPr lang="en-US" altLang="ja-JP" dirty="0"/>
               <a:t>AI</a:t>
             </a:r>
+            <a:r>
+              <a:rPr lang="en-US" altLang="ja-JP" baseline="30000" dirty="0"/>
+              <a:t>1</a:t>
+            </a:r>
           </a:p>
           <a:p>
             <a:pPr lvl="1"/>
@@ -6528,6 +9028,7 @@
               <a:rPr lang="en-US" altLang="ja-JP" dirty="0"/>
               <a:t>LLM</a:t>
             </a:r>
+            <a:endParaRPr lang="en-US" altLang="ja-JP" baseline="30000" dirty="0"/>
           </a:p>
           <a:p>
             <a:pPr lvl="2"/>
@@ -6535,7 +9036,10 @@
               <a:rPr lang="ja-JP" altLang="en-US" dirty="0"/>
               <a:t>大量のデータで事前学習された、大規模な言語モデル</a:t>
             </a:r>
-            <a:endParaRPr lang="en-US" altLang="ja-JP" dirty="0"/>
+            <a:r>
+              <a:rPr lang="en-US" altLang="ja-JP" baseline="30000" dirty="0"/>
+              <a:t>2</a:t>
+            </a:r>
           </a:p>
           <a:p>
             <a:pPr lvl="1"/>
@@ -6566,7 +9070,10 @@
               <a:rPr lang="ja-JP" altLang="en-US" dirty="0"/>
               <a:t>を特定の目的に適応させるための学習</a:t>
             </a:r>
-            <a:endParaRPr lang="en-US" altLang="ja-JP" dirty="0"/>
+            <a:r>
+              <a:rPr lang="en-US" altLang="ja-JP" baseline="30000" dirty="0"/>
+              <a:t>3</a:t>
+            </a:r>
           </a:p>
           <a:p>
             <a:pPr lvl="1"/>
@@ -6593,10 +9100,97 @@
               <a:rPr kumimoji="1" lang="ja-JP" altLang="en-US" dirty="0"/>
               <a:t>に入力された指示と、それに対応する出力の関係を学習させる手法</a:t>
             </a:r>
-            <a:endParaRPr kumimoji="1" lang="en-US" altLang="ja-JP" dirty="0"/>
+            <a:r>
+              <a:rPr kumimoji="1" lang="en-US" altLang="ja-JP" baseline="30000" dirty="0"/>
+              <a:t>3</a:t>
+            </a:r>
           </a:p>
           <a:p>
             <a:pPr lvl="1"/>
+            <a:endParaRPr kumimoji="1" lang="ja-JP" altLang="en-US" dirty="0"/>
+          </a:p>
+        </p:txBody>
+      </p:sp>
+      <p:sp>
+        <p:nvSpPr>
+          <p:cNvPr id="5" name="スライド番号プレースホルダー 4">
+            <a:extLst>
+              <a:ext uri="{FF2B5EF4-FFF2-40B4-BE49-F238E27FC236}">
+                <a16:creationId xmlns:a16="http://schemas.microsoft.com/office/drawing/2014/main" id="{8B99BE1C-0773-C3D6-9793-540B41CED105}"/>
+              </a:ext>
+            </a:extLst>
+          </p:cNvPr>
+          <p:cNvSpPr>
+            <a:spLocks noGrp="1"/>
+          </p:cNvSpPr>
+          <p:nvPr>
+            <p:ph type="sldNum" sz="quarter" idx="12"/>
+          </p:nvPr>
+        </p:nvSpPr>
+        <p:spPr/>
+        <p:txBody>
+          <a:bodyPr/>
+          <a:lstStyle/>
+          <a:p>
+            <a:fld id="{10649E7B-FC1B-418B-9B6A-00859DB1DEE8}" type="slidenum">
+              <a:rPr kumimoji="1" lang="ja-JP" altLang="en-US" smtClean="0"/>
+              <a:t>4</a:t>
+            </a:fld>
+            <a:endParaRPr kumimoji="1" lang="ja-JP" altLang="en-US" dirty="0"/>
+          </a:p>
+        </p:txBody>
+      </p:sp>
+      <p:sp>
+        <p:nvSpPr>
+          <p:cNvPr id="6" name="フッター プレースホルダー 5">
+            <a:extLst>
+              <a:ext uri="{FF2B5EF4-FFF2-40B4-BE49-F238E27FC236}">
+                <a16:creationId xmlns:a16="http://schemas.microsoft.com/office/drawing/2014/main" id="{D7C39388-F272-0374-8C4A-880189C87223}"/>
+              </a:ext>
+            </a:extLst>
+          </p:cNvPr>
+          <p:cNvSpPr>
+            <a:spLocks noGrp="1"/>
+          </p:cNvSpPr>
+          <p:nvPr>
+            <p:ph type="ftr" sz="quarter" idx="11"/>
+          </p:nvPr>
+        </p:nvSpPr>
+        <p:spPr>
+          <a:xfrm>
+            <a:off x="183572" y="5977803"/>
+            <a:ext cx="11824855" cy="757094"/>
+          </a:xfrm>
+        </p:spPr>
+        <p:txBody>
+          <a:bodyPr/>
+          <a:lstStyle/>
+          <a:p>
+            <a:pPr marL="228600" indent="-228600">
+              <a:buAutoNum type="arabicPeriod"/>
+            </a:pPr>
+            <a:r>
+              <a:rPr kumimoji="1" lang="en-US" altLang="ja-JP" dirty="0"/>
+              <a:t>Banh &amp; Strobel (2023). “Generative artificial intelligence” </a:t>
+            </a:r>
+          </a:p>
+          <a:p>
+            <a:pPr marL="228600" indent="-228600">
+              <a:buAutoNum type="arabicPeriod"/>
+            </a:pPr>
+            <a:r>
+              <a:rPr kumimoji="1" lang="en-US" altLang="ja-JP" dirty="0"/>
+              <a:t>Lopez-Lira &amp; Tang (2026). “Can ChatGPT Forecast Stock Price Movements?” </a:t>
+            </a:r>
+          </a:p>
+          <a:p>
+            <a:pPr marL="228600" indent="-228600">
+              <a:buAutoNum type="arabicPeriod"/>
+            </a:pPr>
+            <a:r>
+              <a:rPr kumimoji="1" lang="en-US" altLang="ja-JP" dirty="0"/>
+              <a:t>Lai et al. (2025). “A Survey of Post-Training Scaling in Large Language Models”</a:t>
+            </a:r>
             <a:endParaRPr kumimoji="1" lang="ja-JP" altLang="en-US" dirty="0"/>
           </a:p>
         </p:txBody>
@@ -7009,6 +9603,35 @@
           </a:p>
         </p:txBody>
       </p:sp>
+      <p:sp>
+        <p:nvSpPr>
+          <p:cNvPr id="11" name="スライド番号プレースホルダー 10">
+            <a:extLst>
+              <a:ext uri="{FF2B5EF4-FFF2-40B4-BE49-F238E27FC236}">
+                <a16:creationId xmlns:a16="http://schemas.microsoft.com/office/drawing/2014/main" id="{B9AA247A-442C-D923-4626-FF2E59D28201}"/>
+              </a:ext>
+            </a:extLst>
+          </p:cNvPr>
+          <p:cNvSpPr>
+            <a:spLocks noGrp="1"/>
+          </p:cNvSpPr>
+          <p:nvPr>
+            <p:ph type="sldNum" sz="quarter" idx="12"/>
+          </p:nvPr>
+        </p:nvSpPr>
+        <p:spPr/>
+        <p:txBody>
+          <a:bodyPr/>
+          <a:lstStyle/>
+          <a:p>
+            <a:fld id="{10649E7B-FC1B-418B-9B6A-00859DB1DEE8}" type="slidenum">
+              <a:rPr kumimoji="1" lang="ja-JP" altLang="en-US" smtClean="0"/>
+              <a:t>5</a:t>
+            </a:fld>
+            <a:endParaRPr kumimoji="1" lang="ja-JP" altLang="en-US"/>
+          </a:p>
+        </p:txBody>
+      </p:sp>
     </p:spTree>
     <p:extLst>
       <p:ext uri="{BB962C8B-B14F-4D97-AF65-F5344CB8AC3E}">
@@ -7090,7 +9713,15 @@
           <a:p>
             <a:r>
               <a:rPr lang="ja-JP" altLang="ja-JP" dirty="0"/>
-              <a:t>Chu et al. (2025)：SFTとRL</a:t>
+              <a:t>Chu et al. (2025)</a:t>
+            </a:r>
+            <a:r>
+              <a:rPr lang="en-US" altLang="ja-JP" baseline="30000" dirty="0"/>
+              <a:t>4</a:t>
+            </a:r>
+            <a:r>
+              <a:rPr lang="ja-JP" altLang="ja-JP" dirty="0"/>
+              <a:t>：SFTとRL</a:t>
             </a:r>
             <a:r>
               <a:rPr lang="en-US" altLang="ja-JP" dirty="0"/>
@@ -7108,7 +9739,7 @@
               <a:rPr lang="ja-JP" altLang="ja-JP" dirty="0"/>
               <a:t>の汎化能力を比較し、SFTが学習データを記憶する傾向を示した研究</a:t>
             </a:r>
-            <a:endParaRPr lang="en-US" altLang="ja-JP" dirty="0"/>
+            <a:endParaRPr lang="en-US" altLang="ja-JP" baseline="30000" dirty="0"/>
           </a:p>
           <a:p>
             <a:pPr lvl="1"/>
@@ -7140,6 +9771,10 @@
               <a:t>Ren et al. (2026)</a:t>
             </a:r>
             <a:r>
+              <a:rPr lang="en-US" altLang="ja-JP" baseline="30000" dirty="0"/>
+              <a:t>5</a:t>
+            </a:r>
+            <a:r>
               <a:rPr lang="ja-JP" altLang="en-US" dirty="0"/>
               <a:t>：推論</a:t>
             </a:r>
@@ -7151,7 +9786,7 @@
               <a:rPr lang="ja-JP" altLang="en-US" dirty="0"/>
               <a:t>の汎化能力を分析し、最適化・学習データ・モデル能力などの条件によって汎化性能が変化することを示した研究</a:t>
             </a:r>
-            <a:endParaRPr lang="en-US" altLang="ja-JP" dirty="0"/>
+            <a:endParaRPr lang="en-US" altLang="ja-JP" baseline="30000" dirty="0"/>
           </a:p>
           <a:p>
             <a:pPr lvl="1"/>
@@ -7171,6 +9806,80 @@
           </a:p>
           <a:p>
             <a:pPr lvl="1"/>
+            <a:endParaRPr kumimoji="1" lang="ja-JP" altLang="en-US" dirty="0"/>
+          </a:p>
+        </p:txBody>
+      </p:sp>
+      <p:sp>
+        <p:nvSpPr>
+          <p:cNvPr id="8" name="スライド番号プレースホルダー 7">
+            <a:extLst>
+              <a:ext uri="{FF2B5EF4-FFF2-40B4-BE49-F238E27FC236}">
+                <a16:creationId xmlns:a16="http://schemas.microsoft.com/office/drawing/2014/main" id="{D062BAA2-568C-F449-CED1-D2702F507E00}"/>
+              </a:ext>
+            </a:extLst>
+          </p:cNvPr>
+          <p:cNvSpPr>
+            <a:spLocks noGrp="1"/>
+          </p:cNvSpPr>
+          <p:nvPr>
+            <p:ph type="sldNum" sz="quarter" idx="12"/>
+          </p:nvPr>
+        </p:nvSpPr>
+        <p:spPr/>
+        <p:txBody>
+          <a:bodyPr/>
+          <a:lstStyle/>
+          <a:p>
+            <a:fld id="{10649E7B-FC1B-418B-9B6A-00859DB1DEE8}" type="slidenum">
+              <a:rPr kumimoji="1" lang="ja-JP" altLang="en-US" smtClean="0"/>
+              <a:t>6</a:t>
+            </a:fld>
+            <a:endParaRPr kumimoji="1" lang="ja-JP" altLang="en-US"/>
+          </a:p>
+        </p:txBody>
+      </p:sp>
+      <p:sp>
+        <p:nvSpPr>
+          <p:cNvPr id="9" name="フッター プレースホルダー 8">
+            <a:extLst>
+              <a:ext uri="{FF2B5EF4-FFF2-40B4-BE49-F238E27FC236}">
+                <a16:creationId xmlns:a16="http://schemas.microsoft.com/office/drawing/2014/main" id="{5C030DF3-D23A-EEA0-AF9D-6A8E7204086A}"/>
+              </a:ext>
+            </a:extLst>
+          </p:cNvPr>
+          <p:cNvSpPr>
+            <a:spLocks noGrp="1"/>
+          </p:cNvSpPr>
+          <p:nvPr>
+            <p:ph type="ftr" sz="quarter" idx="11"/>
+          </p:nvPr>
+        </p:nvSpPr>
+        <p:spPr>
+          <a:xfrm>
+            <a:off x="838200" y="6356350"/>
+            <a:ext cx="11090564" cy="365125"/>
+          </a:xfrm>
+        </p:spPr>
+        <p:txBody>
+          <a:bodyPr/>
+          <a:lstStyle/>
+          <a:p>
+            <a:r>
+              <a:rPr lang="en-US" altLang="ja-JP" dirty="0"/>
+              <a:t>4.  </a:t>
+            </a:r>
+            <a:r>
+              <a:rPr lang="ja-JP" altLang="ja-JP" dirty="0"/>
+              <a:t>Chu et al. (2025). “SFT Memorizes, RL Generalizes”</a:t>
+            </a:r>
+            <a:endParaRPr lang="en-US" altLang="ja-JP" dirty="0"/>
+          </a:p>
+          <a:p>
+            <a:r>
+              <a:rPr kumimoji="1" lang="en-US" altLang="ja-JP" dirty="0"/>
+              <a:t>5.  Ren et al. (2026). “Rethinking Generalization in Reasoning SFT”</a:t>
+            </a:r>
             <a:endParaRPr kumimoji="1" lang="ja-JP" altLang="en-US" dirty="0"/>
           </a:p>
         </p:txBody>
@@ -7305,6 +10014,35 @@
           </a:p>
         </p:txBody>
       </p:sp>
+      <p:sp>
+        <p:nvSpPr>
+          <p:cNvPr id="7" name="スライド番号プレースホルダー 6">
+            <a:extLst>
+              <a:ext uri="{FF2B5EF4-FFF2-40B4-BE49-F238E27FC236}">
+                <a16:creationId xmlns:a16="http://schemas.microsoft.com/office/drawing/2014/main" id="{840381B9-E1D0-E8C8-0E15-866A737B83C4}"/>
+              </a:ext>
+            </a:extLst>
+          </p:cNvPr>
+          <p:cNvSpPr>
+            <a:spLocks noGrp="1"/>
+          </p:cNvSpPr>
+          <p:nvPr>
+            <p:ph type="sldNum" sz="quarter" idx="12"/>
+          </p:nvPr>
+        </p:nvSpPr>
+        <p:spPr/>
+        <p:txBody>
+          <a:bodyPr/>
+          <a:lstStyle/>
+          <a:p>
+            <a:fld id="{10649E7B-FC1B-418B-9B6A-00859DB1DEE8}" type="slidenum">
+              <a:rPr kumimoji="1" lang="ja-JP" altLang="en-US" smtClean="0"/>
+              <a:t>7</a:t>
+            </a:fld>
+            <a:endParaRPr kumimoji="1" lang="ja-JP" altLang="en-US"/>
+          </a:p>
+        </p:txBody>
+      </p:sp>
     </p:spTree>
     <p:extLst>
       <p:ext uri="{BB962C8B-B14F-4D97-AF65-F5344CB8AC3E}">
@@ -7416,14 +10154,21 @@
           <a:p>
             <a:pPr lvl="1"/>
             <a:r>
+              <a:rPr lang="ja-JP" altLang="en-US" dirty="0"/>
+              <a:t>「</a:t>
+            </a:r>
+            <a:r>
               <a:rPr lang="ja-JP" altLang="ja-JP" dirty="0"/>
               <a:t>既知の単純な処理から、それらを組み合わせた複雑な処理への汎化は、LLMのOOD汎化の重要な側面である</a:t>
             </a:r>
             <a:r>
               <a:rPr lang="ja-JP" altLang="en-US" dirty="0"/>
-              <a:t>（ここ引用）</a:t>
-            </a:r>
-            <a:endParaRPr lang="en-US" altLang="ja-JP" dirty="0"/>
+              <a:t>」</a:t>
+            </a:r>
+            <a:r>
+              <a:rPr lang="en-US" altLang="ja-JP" baseline="30000" dirty="0"/>
+              <a:t>6</a:t>
+            </a:r>
           </a:p>
           <a:p>
             <a:r>
@@ -7460,6 +10205,77 @@
             <a:endParaRPr lang="ja-JP" altLang="en-US" dirty="0"/>
           </a:p>
           <a:p>
+            <a:endParaRPr kumimoji="1" lang="ja-JP" altLang="en-US" dirty="0"/>
+          </a:p>
+        </p:txBody>
+      </p:sp>
+      <p:sp>
+        <p:nvSpPr>
+          <p:cNvPr id="7" name="スライド番号プレースホルダー 6">
+            <a:extLst>
+              <a:ext uri="{FF2B5EF4-FFF2-40B4-BE49-F238E27FC236}">
+                <a16:creationId xmlns:a16="http://schemas.microsoft.com/office/drawing/2014/main" id="{C15F63CA-2E0A-92A9-B6CB-9B6B33283112}"/>
+              </a:ext>
+            </a:extLst>
+          </p:cNvPr>
+          <p:cNvSpPr>
+            <a:spLocks noGrp="1"/>
+          </p:cNvSpPr>
+          <p:nvPr>
+            <p:ph type="sldNum" sz="quarter" idx="12"/>
+          </p:nvPr>
+        </p:nvSpPr>
+        <p:spPr/>
+        <p:txBody>
+          <a:bodyPr/>
+          <a:lstStyle/>
+          <a:p>
+            <a:fld id="{10649E7B-FC1B-418B-9B6A-00859DB1DEE8}" type="slidenum">
+              <a:rPr kumimoji="1" lang="ja-JP" altLang="en-US" smtClean="0"/>
+              <a:t>8</a:t>
+            </a:fld>
+            <a:endParaRPr kumimoji="1" lang="ja-JP" altLang="en-US"/>
+          </a:p>
+        </p:txBody>
+      </p:sp>
+      <p:sp>
+        <p:nvSpPr>
+          <p:cNvPr id="8" name="フッター プレースホルダー 7">
+            <a:extLst>
+              <a:ext uri="{FF2B5EF4-FFF2-40B4-BE49-F238E27FC236}">
+                <a16:creationId xmlns:a16="http://schemas.microsoft.com/office/drawing/2014/main" id="{A2370C04-5D16-8D22-97BE-759091EE577F}"/>
+              </a:ext>
+            </a:extLst>
+          </p:cNvPr>
+          <p:cNvSpPr>
+            <a:spLocks noGrp="1"/>
+          </p:cNvSpPr>
+          <p:nvPr>
+            <p:ph type="ftr" sz="quarter" idx="11"/>
+          </p:nvPr>
+        </p:nvSpPr>
+        <p:spPr>
+          <a:xfrm>
+            <a:off x="1" y="6356350"/>
+            <a:ext cx="12192000" cy="365125"/>
+          </a:xfrm>
+        </p:spPr>
+        <p:txBody>
+          <a:bodyPr/>
+          <a:lstStyle/>
+          <a:p>
+            <a:r>
+              <a:rPr lang="en-US" altLang="ja-JP" dirty="0"/>
+              <a:t>6</a:t>
+            </a:r>
+            <a:r>
+              <a:rPr kumimoji="1" lang="en-US" altLang="ja-JP" dirty="0"/>
+              <a:t>.  </a:t>
+            </a:r>
+            <a:r>
+              <a:rPr lang="ja-JP" altLang="ja-JP" dirty="0"/>
+              <a:t>Yang et al. (2024). “Exploring Compositional Generalization of Large Language Models”</a:t>
+            </a:r>
             <a:endParaRPr kumimoji="1" lang="ja-JP" altLang="en-US" dirty="0"/>
           </a:p>
         </p:txBody>
@@ -7565,8 +10381,12 @@
               <a:t>Yang et al. (2024)</a:t>
             </a:r>
             <a:r>
+              <a:rPr kumimoji="1" lang="en-US" altLang="ja-JP" baseline="30000" dirty="0"/>
+              <a:t>6</a:t>
+            </a:r>
+            <a:r>
               <a:rPr kumimoji="1" lang="ja-JP" altLang="en-US" dirty="0"/>
-              <a:t>：複数の単純な指示からなる「複雑な指示」に、</a:t>
+              <a:t>：複数の単純な指示からなる複雑な指示に、</a:t>
             </a:r>
             <a:r>
               <a:rPr kumimoji="1" lang="en-US" altLang="ja-JP" dirty="0"/>
@@ -7595,8 +10415,20 @@
               <a:t>Hayati et al. (2025)</a:t>
             </a:r>
             <a:r>
+              <a:rPr kumimoji="1" lang="en-US" altLang="ja-JP" baseline="30000" dirty="0"/>
+              <a:t>7</a:t>
+            </a:r>
+            <a:r>
               <a:rPr kumimoji="1" lang="ja-JP" altLang="en-US" dirty="0"/>
-              <a:t>：複数の処理を連鎖させた問題を</a:t>
+              <a:t>：複数の処理を</a:t>
+            </a:r>
+            <a:r>
+              <a:rPr lang="ja-JP" altLang="en-US" dirty="0"/>
+              <a:t>組み合わせた</a:t>
+            </a:r>
+            <a:r>
+              <a:rPr kumimoji="1" lang="ja-JP" altLang="en-US" dirty="0"/>
+              <a:t>問題を</a:t>
             </a:r>
             <a:r>
               <a:rPr kumimoji="1" lang="en-US" altLang="ja-JP" dirty="0"/>
@@ -7606,6 +10438,73 @@
               <a:rPr kumimoji="1" lang="ja-JP" altLang="en-US" dirty="0"/>
               <a:t>し、学習時よりも長い未知の処理への汎化を検証</a:t>
             </a:r>
+          </a:p>
+        </p:txBody>
+      </p:sp>
+      <p:sp>
+        <p:nvSpPr>
+          <p:cNvPr id="7" name="スライド番号プレースホルダー 6">
+            <a:extLst>
+              <a:ext uri="{FF2B5EF4-FFF2-40B4-BE49-F238E27FC236}">
+                <a16:creationId xmlns:a16="http://schemas.microsoft.com/office/drawing/2014/main" id="{2B1821E7-7C8C-2831-B55A-1D57515001BF}"/>
+              </a:ext>
+            </a:extLst>
+          </p:cNvPr>
+          <p:cNvSpPr>
+            <a:spLocks noGrp="1"/>
+          </p:cNvSpPr>
+          <p:nvPr>
+            <p:ph type="sldNum" sz="quarter" idx="12"/>
+          </p:nvPr>
+        </p:nvSpPr>
+        <p:spPr/>
+        <p:txBody>
+          <a:bodyPr/>
+          <a:lstStyle/>
+          <a:p>
+            <a:fld id="{10649E7B-FC1B-418B-9B6A-00859DB1DEE8}" type="slidenum">
+              <a:rPr kumimoji="1" lang="ja-JP" altLang="en-US" smtClean="0"/>
+              <a:t>9</a:t>
+            </a:fld>
+            <a:endParaRPr kumimoji="1" lang="ja-JP" altLang="en-US"/>
+          </a:p>
+        </p:txBody>
+      </p:sp>
+      <p:sp>
+        <p:nvSpPr>
+          <p:cNvPr id="8" name="フッター プレースホルダー 7">
+            <a:extLst>
+              <a:ext uri="{FF2B5EF4-FFF2-40B4-BE49-F238E27FC236}">
+                <a16:creationId xmlns:a16="http://schemas.microsoft.com/office/drawing/2014/main" id="{A5405178-DE17-ACF4-EDCB-AF4B078DBF09}"/>
+              </a:ext>
+            </a:extLst>
+          </p:cNvPr>
+          <p:cNvSpPr>
+            <a:spLocks noGrp="1"/>
+          </p:cNvSpPr>
+          <p:nvPr>
+            <p:ph type="ftr" sz="quarter" idx="11"/>
+          </p:nvPr>
+        </p:nvSpPr>
+        <p:spPr>
+          <a:xfrm>
+            <a:off x="491836" y="5798128"/>
+            <a:ext cx="11208328" cy="923348"/>
+          </a:xfrm>
+        </p:spPr>
+        <p:txBody>
+          <a:bodyPr/>
+          <a:lstStyle/>
+          <a:p>
+            <a:r>
+              <a:rPr lang="en-US" altLang="ja-JP" dirty="0"/>
+              <a:t>7</a:t>
+            </a:r>
+            <a:r>
+              <a:rPr kumimoji="1" lang="en-US" altLang="ja-JP" dirty="0"/>
+              <a:t>.  Hayati et al. (2025). “Chain-of-Instructions: Compositional Instruction Tuning on Large Language Models”</a:t>
+            </a:r>
+            <a:endParaRPr kumimoji="1" lang="ja-JP" altLang="en-US" dirty="0"/>
           </a:p>
         </p:txBody>
       </p:sp>
@@ -7935,4 +10834,634 @@
     </a:ext>
   </a:extLst>
 </a:theme>
+</file>
+
+<file path=ppt/theme/theme2.xml><?xml version="1.0" encoding="utf-8"?>
+<a:theme xmlns:a="http://schemas.openxmlformats.org/drawingml/2006/main" name="Office テーマ">
+  <a:themeElements>
+    <a:clrScheme name="Office">
+      <a:dk1>
+        <a:sysClr val="windowText" lastClr="000000"/>
+      </a:dk1>
+      <a:lt1>
+        <a:sysClr val="window" lastClr="FFFFFF"/>
+      </a:lt1>
+      <a:dk2>
+        <a:srgbClr val="0E2841"/>
+      </a:dk2>
+      <a:lt2>
+        <a:srgbClr val="E8E8E8"/>
+      </a:lt2>
+      <a:accent1>
+        <a:srgbClr val="156082"/>
+      </a:accent1>
+      <a:accent2>
+        <a:srgbClr val="E97132"/>
+      </a:accent2>
+      <a:accent3>
+        <a:srgbClr val="196B24"/>
+      </a:accent3>
+      <a:accent4>
+        <a:srgbClr val="0F9ED5"/>
+      </a:accent4>
+      <a:accent5>
+        <a:srgbClr val="A02B93"/>
+      </a:accent5>
+      <a:accent6>
+        <a:srgbClr val="4EA72E"/>
+      </a:accent6>
+      <a:hlink>
+        <a:srgbClr val="467886"/>
+      </a:hlink>
+      <a:folHlink>
+        <a:srgbClr val="96607D"/>
+      </a:folHlink>
+    </a:clrScheme>
+    <a:fontScheme name="Office">
+      <a:majorFont>
+        <a:latin typeface="游ゴシック Light" panose="02110004020202020204"/>
+        <a:ea typeface=""/>
+        <a:cs typeface=""/>
+        <a:font script="Jpan" typeface="游ゴシック Light"/>
+        <a:font script="Hang" typeface="맑은 고딕"/>
+        <a:font script="Hans" typeface="等线 Light"/>
+        <a:font script="Hant" typeface="新細明體"/>
+        <a:font script="Arab" typeface="Times New Roman"/>
+        <a:font script="Hebr" typeface="Times New Roman"/>
+        <a:font script="Thai" typeface="Angsana New"/>
+        <a:font script="Ethi" typeface="Nyala"/>
+        <a:font script="Beng" typeface="Vrinda"/>
+        <a:font script="Gujr" typeface="Shruti"/>
+        <a:font script="Khmr" typeface="MoolBoran"/>
+        <a:font script="Knda" typeface="Tunga"/>
+        <a:font script="Guru" typeface="Raavi"/>
+        <a:font script="Cans" typeface="Euphemia"/>
+        <a:font script="Cher" typeface="Plantagenet Cherokee"/>
+        <a:font script="Yiii" typeface="Microsoft Yi Baiti"/>
+        <a:font script="Tibt" typeface="Microsoft Himalaya"/>
+        <a:font script="Thaa" typeface="MV Boli"/>
+        <a:font script="Deva" typeface="Mangal"/>
+        <a:font script="Telu" typeface="Gautami"/>
+        <a:font script="Taml" typeface="Latha"/>
+        <a:font script="Syrc" typeface="Estrangelo Edessa"/>
+        <a:font script="Orya" typeface="Kalinga"/>
+        <a:font script="Mlym" typeface="Kartika"/>
+        <a:font script="Laoo" typeface="DokChampa"/>
+        <a:font script="Sinh" typeface="Iskoola Pota"/>
+        <a:font script="Mong" typeface="Mongolian Baiti"/>
+        <a:font script="Viet" typeface="Times New Roman"/>
+        <a:font script="Uigh" typeface="Microsoft Uighur"/>
+        <a:font script="Geor" typeface="Sylfaen"/>
+        <a:font script="Armn" typeface="Arial"/>
+        <a:font script="Bugi" typeface="Leelawadee UI"/>
+        <a:font script="Bopo" typeface="Microsoft JhengHei"/>
+        <a:font script="Java" typeface="Javanese Text"/>
+        <a:font script="Lisu" typeface="Segoe UI"/>
+        <a:font script="Mymr" typeface="Myanmar Text"/>
+        <a:font script="Nkoo" typeface="Ebrima"/>
+        <a:font script="Olck" typeface="Nirmala UI"/>
+        <a:font script="Osma" typeface="Ebrima"/>
+        <a:font script="Phag" typeface="Phagspa"/>
+        <a:font script="Syrn" typeface="Estrangelo Edessa"/>
+        <a:font script="Syrj" typeface="Estrangelo Edessa"/>
+        <a:font script="Syre" typeface="Estrangelo Edessa"/>
+        <a:font script="Sora" typeface="Nirmala UI"/>
+        <a:font script="Tale" typeface="Microsoft Tai Le"/>
+        <a:font script="Talu" typeface="Microsoft New Tai Lue"/>
+        <a:font script="Tfng" typeface="Ebrima"/>
+      </a:majorFont>
+      <a:minorFont>
+        <a:latin typeface="游ゴシック" panose="02110004020202020204"/>
+        <a:ea typeface=""/>
+        <a:cs typeface=""/>
+        <a:font script="Jpan" typeface="游ゴシック"/>
+        <a:font script="Hang" typeface="맑은 고딕"/>
+        <a:font script="Hans" typeface="等线"/>
+        <a:font script="Hant" typeface="新細明體"/>
+        <a:font script="Arab" typeface="Arial"/>
+        <a:font script="Hebr" typeface="Arial"/>
+        <a:font script="Thai" typeface="Cordia New"/>
+        <a:font script="Ethi" typeface="Nyala"/>
+        <a:font script="Beng" typeface="Vrinda"/>
+        <a:font script="Gujr" typeface="Shruti"/>
+        <a:font script="Khmr" typeface="DaunPenh"/>
+        <a:font script="Knda" typeface="Tunga"/>
+        <a:font script="Guru" typeface="Raavi"/>
+        <a:font script="Cans" typeface="Euphemia"/>
+        <a:font script="Cher" typeface="Plantagenet Cherokee"/>
+        <a:font script="Yiii" typeface="Microsoft Yi Baiti"/>
+        <a:font script="Tibt" typeface="Microsoft Himalaya"/>
+        <a:font script="Thaa" typeface="MV Boli"/>
+        <a:font script="Deva" typeface="Mangal"/>
+        <a:font script="Telu" typeface="Gautami"/>
+        <a:font script="Taml" typeface="Latha"/>
+        <a:font script="Syrc" typeface="Estrangelo Edessa"/>
+        <a:font script="Orya" typeface="Kalinga"/>
+        <a:font script="Mlym" typeface="Kartika"/>
+        <a:font script="Laoo" typeface="DokChampa"/>
+        <a:font script="Sinh" typeface="Iskoola Pota"/>
+        <a:font script="Mong" typeface="Mongolian Baiti"/>
+        <a:font script="Viet" typeface="Arial"/>
+        <a:font script="Uigh" typeface="Microsoft Uighur"/>
+        <a:font script="Geor" typeface="Sylfaen"/>
+        <a:font script="Armn" typeface="Arial"/>
+        <a:font script="Bugi" typeface="Leelawadee UI"/>
+        <a:font script="Bopo" typeface="Microsoft JhengHei"/>
+        <a:font script="Java" typeface="Javanese Text"/>
+        <a:font script="Lisu" typeface="Segoe UI"/>
+        <a:font script="Mymr" typeface="Myanmar Text"/>
+        <a:font script="Nkoo" typeface="Ebrima"/>
+        <a:font script="Olck" typeface="Nirmala UI"/>
+        <a:font script="Osma" typeface="Ebrima"/>
+        <a:font script="Phag" typeface="Phagspa"/>
+        <a:font script="Syrn" typeface="Estrangelo Edessa"/>
+        <a:font script="Syrj" typeface="Estrangelo Edessa"/>
+        <a:font script="Syre" typeface="Estrangelo Edessa"/>
+        <a:font script="Sora" typeface="Nirmala UI"/>
+        <a:font script="Tale" typeface="Microsoft Tai Le"/>
+        <a:font script="Talu" typeface="Microsoft New Tai Lue"/>
+        <a:font script="Tfng" typeface="Ebrima"/>
+      </a:minorFont>
+    </a:fontScheme>
+    <a:fmtScheme name="Office">
+      <a:fillStyleLst>
+        <a:solidFill>
+          <a:schemeClr val="phClr"/>
+        </a:solidFill>
+        <a:gradFill rotWithShape="1">
+          <a:gsLst>
+            <a:gs pos="0">
+              <a:schemeClr val="phClr">
+                <a:lumMod val="110000"/>
+                <a:satMod val="105000"/>
+                <a:tint val="67000"/>
+              </a:schemeClr>
+            </a:gs>
+            <a:gs pos="50000">
+              <a:schemeClr val="phClr">
+                <a:lumMod val="105000"/>
+                <a:satMod val="103000"/>
+                <a:tint val="73000"/>
+              </a:schemeClr>
+            </a:gs>
+            <a:gs pos="100000">
+              <a:schemeClr val="phClr">
+                <a:lumMod val="105000"/>
+                <a:satMod val="109000"/>
+                <a:tint val="81000"/>
+              </a:schemeClr>
+            </a:gs>
+          </a:gsLst>
+          <a:lin ang="5400000" scaled="0"/>
+        </a:gradFill>
+        <a:gradFill rotWithShape="1">
+          <a:gsLst>
+            <a:gs pos="0">
+              <a:schemeClr val="phClr">
+                <a:satMod val="103000"/>
+                <a:lumMod val="102000"/>
+                <a:tint val="94000"/>
+              </a:schemeClr>
+            </a:gs>
+            <a:gs pos="50000">
+              <a:schemeClr val="phClr">
+                <a:satMod val="110000"/>
+                <a:lumMod val="100000"/>
+                <a:shade val="100000"/>
+              </a:schemeClr>
+            </a:gs>
+            <a:gs pos="100000">
+              <a:schemeClr val="phClr">
+                <a:lumMod val="99000"/>
+                <a:satMod val="120000"/>
+                <a:shade val="78000"/>
+              </a:schemeClr>
+            </a:gs>
+          </a:gsLst>
+          <a:lin ang="5400000" scaled="0"/>
+        </a:gradFill>
+      </a:fillStyleLst>
+      <a:lnStyleLst>
+        <a:ln w="12700" cap="flat" cmpd="sng" algn="ctr">
+          <a:solidFill>
+            <a:schemeClr val="phClr"/>
+          </a:solidFill>
+          <a:prstDash val="solid"/>
+          <a:miter lim="800000"/>
+        </a:ln>
+        <a:ln w="19050" cap="flat" cmpd="sng" algn="ctr">
+          <a:solidFill>
+            <a:schemeClr val="phClr"/>
+          </a:solidFill>
+          <a:prstDash val="solid"/>
+          <a:miter lim="800000"/>
+        </a:ln>
+        <a:ln w="25400" cap="flat" cmpd="sng" algn="ctr">
+          <a:solidFill>
+            <a:schemeClr val="phClr"/>
+          </a:solidFill>
+          <a:prstDash val="solid"/>
+          <a:miter lim="800000"/>
+        </a:ln>
+      </a:lnStyleLst>
+      <a:effectStyleLst>
+        <a:effectStyle>
+          <a:effectLst/>
+        </a:effectStyle>
+        <a:effectStyle>
+          <a:effectLst/>
+        </a:effectStyle>
+        <a:effectStyle>
+          <a:effectLst>
+            <a:outerShdw blurRad="57150" dist="19050" dir="5400000" algn="ctr" rotWithShape="0">
+              <a:srgbClr val="000000">
+                <a:alpha val="63000"/>
+              </a:srgbClr>
+            </a:outerShdw>
+          </a:effectLst>
+        </a:effectStyle>
+      </a:effectStyleLst>
+      <a:bgFillStyleLst>
+        <a:solidFill>
+          <a:schemeClr val="phClr"/>
+        </a:solidFill>
+        <a:solidFill>
+          <a:schemeClr val="phClr">
+            <a:tint val="95000"/>
+            <a:satMod val="170000"/>
+          </a:schemeClr>
+        </a:solidFill>
+        <a:gradFill rotWithShape="1">
+          <a:gsLst>
+            <a:gs pos="0">
+              <a:schemeClr val="phClr">
+                <a:tint val="93000"/>
+                <a:satMod val="150000"/>
+                <a:shade val="98000"/>
+                <a:lumMod val="102000"/>
+              </a:schemeClr>
+            </a:gs>
+            <a:gs pos="50000">
+              <a:schemeClr val="phClr">
+                <a:tint val="98000"/>
+                <a:satMod val="130000"/>
+                <a:shade val="90000"/>
+                <a:lumMod val="103000"/>
+              </a:schemeClr>
+            </a:gs>
+            <a:gs pos="100000">
+              <a:schemeClr val="phClr">
+                <a:shade val="63000"/>
+                <a:satMod val="120000"/>
+              </a:schemeClr>
+            </a:gs>
+          </a:gsLst>
+          <a:lin ang="5400000" scaled="0"/>
+        </a:gradFill>
+      </a:bgFillStyleLst>
+    </a:fmtScheme>
+  </a:themeElements>
+  <a:objectDefaults>
+    <a:lnDef>
+      <a:spPr/>
+      <a:bodyPr/>
+      <a:lstStyle/>
+      <a:style>
+        <a:lnRef idx="2">
+          <a:schemeClr val="accent1"/>
+        </a:lnRef>
+        <a:fillRef idx="0">
+          <a:schemeClr val="accent1"/>
+        </a:fillRef>
+        <a:effectRef idx="1">
+          <a:schemeClr val="accent1"/>
+        </a:effectRef>
+        <a:fontRef idx="minor">
+          <a:schemeClr val="tx1"/>
+        </a:fontRef>
+      </a:style>
+    </a:lnDef>
+  </a:objectDefaults>
+  <a:extraClrSchemeLst/>
+  <a:extLst>
+    <a:ext uri="{05A4C25C-085E-4340-85A3-A5531E510DB2}">
+      <thm15:themeFamily xmlns:thm15="http://schemas.microsoft.com/office/thememl/2012/main" name="Office Theme" id="{2E142A2C-CD16-42D6-873A-C26D2A0506FA}" vid="{1BDDFF52-6CD6-40A5-AB3C-68EB2F1E4D0A}"/>
+    </a:ext>
+  </a:extLst>
+</a:theme>
+</file>
+
+<file path=ppt/theme/theme3.xml><?xml version="1.0" encoding="utf-8"?>
+<a:theme xmlns:a="http://schemas.openxmlformats.org/drawingml/2006/main" name="Office テーマ">
+  <a:themeElements>
+    <a:clrScheme name="Office">
+      <a:dk1>
+        <a:sysClr val="windowText" lastClr="000000"/>
+      </a:dk1>
+      <a:lt1>
+        <a:sysClr val="window" lastClr="FFFFFF"/>
+      </a:lt1>
+      <a:dk2>
+        <a:srgbClr val="0E2841"/>
+      </a:dk2>
+      <a:lt2>
+        <a:srgbClr val="E8E8E8"/>
+      </a:lt2>
+      <a:accent1>
+        <a:srgbClr val="156082"/>
+      </a:accent1>
+      <a:accent2>
+        <a:srgbClr val="E97132"/>
+      </a:accent2>
+      <a:accent3>
+        <a:srgbClr val="196B24"/>
+      </a:accent3>
+      <a:accent4>
+        <a:srgbClr val="0F9ED5"/>
+      </a:accent4>
+      <a:accent5>
+        <a:srgbClr val="A02B93"/>
+      </a:accent5>
+      <a:accent6>
+        <a:srgbClr val="4EA72E"/>
+      </a:accent6>
+      <a:hlink>
+        <a:srgbClr val="467886"/>
+      </a:hlink>
+      <a:folHlink>
+        <a:srgbClr val="96607D"/>
+      </a:folHlink>
+    </a:clrScheme>
+    <a:fontScheme name="Office">
+      <a:majorFont>
+        <a:latin typeface="游ゴシック Light" panose="02110004020202020204"/>
+        <a:ea typeface=""/>
+        <a:cs typeface=""/>
+        <a:font script="Jpan" typeface="游ゴシック Light"/>
+        <a:font script="Hang" typeface="맑은 고딕"/>
+        <a:font script="Hans" typeface="等线 Light"/>
+        <a:font script="Hant" typeface="新細明體"/>
+        <a:font script="Arab" typeface="Times New Roman"/>
+        <a:font script="Hebr" typeface="Times New Roman"/>
+        <a:font script="Thai" typeface="Angsana New"/>
+        <a:font script="Ethi" typeface="Nyala"/>
+        <a:font script="Beng" typeface="Vrinda"/>
+        <a:font script="Gujr" typeface="Shruti"/>
+        <a:font script="Khmr" typeface="MoolBoran"/>
+        <a:font script="Knda" typeface="Tunga"/>
+        <a:font script="Guru" typeface="Raavi"/>
+        <a:font script="Cans" typeface="Euphemia"/>
+        <a:font script="Cher" typeface="Plantagenet Cherokee"/>
+        <a:font script="Yiii" typeface="Microsoft Yi Baiti"/>
+        <a:font script="Tibt" typeface="Microsoft Himalaya"/>
+        <a:font script="Thaa" typeface="MV Boli"/>
+        <a:font script="Deva" typeface="Mangal"/>
+        <a:font script="Telu" typeface="Gautami"/>
+        <a:font script="Taml" typeface="Latha"/>
+        <a:font script="Syrc" typeface="Estrangelo Edessa"/>
+        <a:font script="Orya" typeface="Kalinga"/>
+        <a:font script="Mlym" typeface="Kartika"/>
+        <a:font script="Laoo" typeface="DokChampa"/>
+        <a:font script="Sinh" typeface="Iskoola Pota"/>
+        <a:font script="Mong" typeface="Mongolian Baiti"/>
+        <a:font script="Viet" typeface="Times New Roman"/>
+        <a:font script="Uigh" typeface="Microsoft Uighur"/>
+        <a:font script="Geor" typeface="Sylfaen"/>
+        <a:font script="Armn" typeface="Arial"/>
+        <a:font script="Bugi" typeface="Leelawadee UI"/>
+        <a:font script="Bopo" typeface="Microsoft JhengHei"/>
+        <a:font script="Java" typeface="Javanese Text"/>
+        <a:font script="Lisu" typeface="Segoe UI"/>
+        <a:font script="Mymr" typeface="Myanmar Text"/>
+        <a:font script="Nkoo" typeface="Ebrima"/>
+        <a:font script="Olck" typeface="Nirmala UI"/>
+        <a:font script="Osma" typeface="Ebrima"/>
+        <a:font script="Phag" typeface="Phagspa"/>
+        <a:font script="Syrn" typeface="Estrangelo Edessa"/>
+        <a:font script="Syrj" typeface="Estrangelo Edessa"/>
+        <a:font script="Syre" typeface="Estrangelo Edessa"/>
+        <a:font script="Sora" typeface="Nirmala UI"/>
+        <a:font script="Tale" typeface="Microsoft Tai Le"/>
+        <a:font script="Talu" typeface="Microsoft New Tai Lue"/>
+        <a:font script="Tfng" typeface="Ebrima"/>
+      </a:majorFont>
+      <a:minorFont>
+        <a:latin typeface="游ゴシック" panose="02110004020202020204"/>
+        <a:ea typeface=""/>
+        <a:cs typeface=""/>
+        <a:font script="Jpan" typeface="游ゴシック"/>
+        <a:font script="Hang" typeface="맑은 고딕"/>
+        <a:font script="Hans" typeface="等线"/>
+        <a:font script="Hant" typeface="新細明體"/>
+        <a:font script="Arab" typeface="Arial"/>
+        <a:font script="Hebr" typeface="Arial"/>
+        <a:font script="Thai" typeface="Cordia New"/>
+        <a:font script="Ethi" typeface="Nyala"/>
+        <a:font script="Beng" typeface="Vrinda"/>
+        <a:font script="Gujr" typeface="Shruti"/>
+        <a:font script="Khmr" typeface="DaunPenh"/>
+        <a:font script="Knda" typeface="Tunga"/>
+        <a:font script="Guru" typeface="Raavi"/>
+        <a:font script="Cans" typeface="Euphemia"/>
+        <a:font script="Cher" typeface="Plantagenet Cherokee"/>
+        <a:font script="Yiii" typeface="Microsoft Yi Baiti"/>
+        <a:font script="Tibt" typeface="Microsoft Himalaya"/>
+        <a:font script="Thaa" typeface="MV Boli"/>
+        <a:font script="Deva" typeface="Mangal"/>
+        <a:font script="Telu" typeface="Gautami"/>
+        <a:font script="Taml" typeface="Latha"/>
+        <a:font script="Syrc" typeface="Estrangelo Edessa"/>
+        <a:font script="Orya" typeface="Kalinga"/>
+        <a:font script="Mlym" typeface="Kartika"/>
+        <a:font script="Laoo" typeface="DokChampa"/>
+        <a:font script="Sinh" typeface="Iskoola Pota"/>
+        <a:font script="Mong" typeface="Mongolian Baiti"/>
+        <a:font script="Viet" typeface="Arial"/>
+        <a:font script="Uigh" typeface="Microsoft Uighur"/>
+        <a:font script="Geor" typeface="Sylfaen"/>
+        <a:font script="Armn" typeface="Arial"/>
+        <a:font script="Bugi" typeface="Leelawadee UI"/>
+        <a:font script="Bopo" typeface="Microsoft JhengHei"/>
+        <a:font script="Java" typeface="Javanese Text"/>
+        <a:font script="Lisu" typeface="Segoe UI"/>
+        <a:font script="Mymr" typeface="Myanmar Text"/>
+        <a:font script="Nkoo" typeface="Ebrima"/>
+        <a:font script="Olck" typeface="Nirmala UI"/>
+        <a:font script="Osma" typeface="Ebrima"/>
+        <a:font script="Phag" typeface="Phagspa"/>
+        <a:font script="Syrn" typeface="Estrangelo Edessa"/>
+        <a:font script="Syrj" typeface="Estrangelo Edessa"/>
+        <a:font script="Syre" typeface="Estrangelo Edessa"/>
+        <a:font script="Sora" typeface="Nirmala UI"/>
+        <a:font script="Tale" typeface="Microsoft Tai Le"/>
+        <a:font script="Talu" typeface="Microsoft New Tai Lue"/>
+        <a:font script="Tfng" typeface="Ebrima"/>
+      </a:minorFont>
+    </a:fontScheme>
+    <a:fmtScheme name="Office">
+      <a:fillStyleLst>
+        <a:solidFill>
+          <a:schemeClr val="phClr"/>
+        </a:solidFill>
+        <a:gradFill rotWithShape="1">
+          <a:gsLst>
+            <a:gs pos="0">
+              <a:schemeClr val="phClr">
+                <a:lumMod val="110000"/>
+                <a:satMod val="105000"/>
+                <a:tint val="67000"/>
+              </a:schemeClr>
+            </a:gs>
+            <a:gs pos="50000">
+              <a:schemeClr val="phClr">
+                <a:lumMod val="105000"/>
+                <a:satMod val="103000"/>
+                <a:tint val="73000"/>
+              </a:schemeClr>
+            </a:gs>
+            <a:gs pos="100000">
+              <a:schemeClr val="phClr">
+                <a:lumMod val="105000"/>
+                <a:satMod val="109000"/>
+                <a:tint val="81000"/>
+              </a:schemeClr>
+            </a:gs>
+          </a:gsLst>
+          <a:lin ang="5400000" scaled="0"/>
+        </a:gradFill>
+        <a:gradFill rotWithShape="1">
+          <a:gsLst>
+            <a:gs pos="0">
+              <a:schemeClr val="phClr">
+                <a:satMod val="103000"/>
+                <a:lumMod val="102000"/>
+                <a:tint val="94000"/>
+              </a:schemeClr>
+            </a:gs>
+            <a:gs pos="50000">
+              <a:schemeClr val="phClr">
+                <a:satMod val="110000"/>
+                <a:lumMod val="100000"/>
+                <a:shade val="100000"/>
+              </a:schemeClr>
+            </a:gs>
+            <a:gs pos="100000">
+              <a:schemeClr val="phClr">
+                <a:lumMod val="99000"/>
+                <a:satMod val="120000"/>
+                <a:shade val="78000"/>
+              </a:schemeClr>
+            </a:gs>
+          </a:gsLst>
+          <a:lin ang="5400000" scaled="0"/>
+        </a:gradFill>
+      </a:fillStyleLst>
+      <a:lnStyleLst>
+        <a:ln w="12700" cap="flat" cmpd="sng" algn="ctr">
+          <a:solidFill>
+            <a:schemeClr val="phClr"/>
+          </a:solidFill>
+          <a:prstDash val="solid"/>
+          <a:miter lim="800000"/>
+        </a:ln>
+        <a:ln w="19050" cap="flat" cmpd="sng" algn="ctr">
+          <a:solidFill>
+            <a:schemeClr val="phClr"/>
+          </a:solidFill>
+          <a:prstDash val="solid"/>
+          <a:miter lim="800000"/>
+        </a:ln>
+        <a:ln w="25400" cap="flat" cmpd="sng" algn="ctr">
+          <a:solidFill>
+            <a:schemeClr val="phClr"/>
+          </a:solidFill>
+          <a:prstDash val="solid"/>
+          <a:miter lim="800000"/>
+        </a:ln>
+      </a:lnStyleLst>
+      <a:effectStyleLst>
+        <a:effectStyle>
+          <a:effectLst/>
+        </a:effectStyle>
+        <a:effectStyle>
+          <a:effectLst/>
+        </a:effectStyle>
+        <a:effectStyle>
+          <a:effectLst>
+            <a:outerShdw blurRad="57150" dist="19050" dir="5400000" algn="ctr" rotWithShape="0">
+              <a:srgbClr val="000000">
+                <a:alpha val="63000"/>
+              </a:srgbClr>
+            </a:outerShdw>
+          </a:effectLst>
+        </a:effectStyle>
+      </a:effectStyleLst>
+      <a:bgFillStyleLst>
+        <a:solidFill>
+          <a:schemeClr val="phClr"/>
+        </a:solidFill>
+        <a:solidFill>
+          <a:schemeClr val="phClr">
+            <a:tint val="95000"/>
+            <a:satMod val="170000"/>
+          </a:schemeClr>
+        </a:solidFill>
+        <a:gradFill rotWithShape="1">
+          <a:gsLst>
+            <a:gs pos="0">
+              <a:schemeClr val="phClr">
+                <a:tint val="93000"/>
+                <a:satMod val="150000"/>
+                <a:shade val="98000"/>
+                <a:lumMod val="102000"/>
+              </a:schemeClr>
+            </a:gs>
+            <a:gs pos="50000">
+              <a:schemeClr val="phClr">
+                <a:tint val="98000"/>
+                <a:satMod val="130000"/>
+                <a:shade val="90000"/>
+                <a:lumMod val="103000"/>
+              </a:schemeClr>
+            </a:gs>
+            <a:gs pos="100000">
+              <a:schemeClr val="phClr">
+                <a:shade val="63000"/>
+                <a:satMod val="120000"/>
+              </a:schemeClr>
+            </a:gs>
+          </a:gsLst>
+          <a:lin ang="5400000" scaled="0"/>
+        </a:gradFill>
+      </a:bgFillStyleLst>
+    </a:fmtScheme>
+  </a:themeElements>
+  <a:objectDefaults>
+    <a:lnDef>
+      <a:spPr/>
+      <a:bodyPr/>
+      <a:lstStyle/>
+      <a:style>
+        <a:lnRef idx="2">
+          <a:schemeClr val="accent1"/>
+        </a:lnRef>
+        <a:fillRef idx="0">
+          <a:schemeClr val="accent1"/>
+        </a:fillRef>
+        <a:effectRef idx="1">
+          <a:schemeClr val="accent1"/>
+        </a:effectRef>
+        <a:fontRef idx="minor">
+          <a:schemeClr val="tx1"/>
+        </a:fontRef>
+      </a:style>
+    </a:lnDef>
+  </a:objectDefaults>
+  <a:extraClrSchemeLst/>
+  <a:extLst>
+    <a:ext uri="{05A4C25C-085E-4340-85A3-A5531E510DB2}">
+      <thm15:themeFamily xmlns:thm15="http://schemas.microsoft.com/office/thememl/2012/main" name="Office Theme" id="{2E142A2C-CD16-42D6-873A-C26D2A0506FA}" vid="{1BDDFF52-6CD6-40A5-AB3C-68EB2F1E4D0A}"/>
+    </a:ext>
+  </a:extLst>
+</a:theme>
 </file>
--- a/生成AIの追加学習による問題.pptx
+++ b/生成AIの追加学習による問題.pptx
@@ -5,10 +5,10 @@
     <p:sldMasterId id="2147483648" r:id="rId1"/>
   </p:sldMasterIdLst>
   <p:notesMasterIdLst>
-    <p:notesMasterId r:id="rId26"/>
+    <p:notesMasterId r:id="rId27"/>
   </p:notesMasterIdLst>
   <p:handoutMasterIdLst>
-    <p:handoutMasterId r:id="rId27"/>
+    <p:handoutMasterId r:id="rId28"/>
   </p:handoutMasterIdLst>
   <p:sldIdLst>
     <p:sldId id="256" r:id="rId2"/>
@@ -35,6 +35,7 @@
     <p:sldId id="281" r:id="rId23"/>
     <p:sldId id="282" r:id="rId24"/>
     <p:sldId id="283" r:id="rId25"/>
+    <p:sldId id="284" r:id="rId26"/>
   </p:sldIdLst>
   <p:sldSz cx="12192000" cy="6858000"/>
   <p:notesSz cx="6858000" cy="9144000"/>
@@ -235,7 +236,7 @@
           <a:p>
             <a:fld id="{3D0BDCF3-6838-49F9-878F-F13A4D3F69AF}" type="datetimeFigureOut">
               <a:rPr kumimoji="1" lang="ja-JP" altLang="en-US" smtClean="0"/>
-              <a:t>2026/9/8</a:t>
+              <a:t>2026/9/9</a:t>
             </a:fld>
             <a:endParaRPr kumimoji="1" lang="ja-JP" altLang="en-US"/>
           </a:p>
@@ -413,7 +414,7 @@
           <a:p>
             <a:fld id="{F3D7D25B-E7F4-42EB-A3A2-379C00250A8D}" type="datetimeFigureOut">
               <a:rPr kumimoji="1" lang="ja-JP" altLang="en-US" smtClean="0"/>
-              <a:t>2026/9/8</a:t>
+              <a:t>2026/9/9</a:t>
             </a:fld>
             <a:endParaRPr kumimoji="1" lang="ja-JP" altLang="en-US"/>
           </a:p>
@@ -860,7 +861,7 @@
           <a:p>
             <a:fld id="{A3A6DBD2-DA0F-4369-AACF-DF8255168190}" type="datetime1">
               <a:rPr kumimoji="1" lang="ja-JP" altLang="en-US" smtClean="0"/>
-              <a:t>2026/9/8</a:t>
+              <a:t>2026/9/9</a:t>
             </a:fld>
             <a:endParaRPr kumimoji="1" lang="ja-JP" altLang="en-US"/>
           </a:p>
@@ -1094,7 +1095,7 @@
           <a:p>
             <a:fld id="{6D55F33B-3C44-4800-AEBE-821A56E94784}" type="datetime1">
               <a:rPr kumimoji="1" lang="ja-JP" altLang="en-US" smtClean="0"/>
-              <a:t>2026/9/8</a:t>
+              <a:t>2026/9/9</a:t>
             </a:fld>
             <a:endParaRPr kumimoji="1" lang="ja-JP" altLang="en-US"/>
           </a:p>
@@ -1338,7 +1339,7 @@
           <a:p>
             <a:fld id="{3D39F1BD-DB4A-41B8-812B-24EA046BEB95}" type="datetime1">
               <a:rPr kumimoji="1" lang="ja-JP" altLang="en-US" smtClean="0"/>
-              <a:t>2026/9/8</a:t>
+              <a:t>2026/9/9</a:t>
             </a:fld>
             <a:endParaRPr kumimoji="1" lang="ja-JP" altLang="en-US"/>
           </a:p>
@@ -1572,7 +1573,7 @@
           <a:p>
             <a:fld id="{DB0EC384-A088-42ED-AC29-547DFB1F70D3}" type="datetime1">
               <a:rPr kumimoji="1" lang="ja-JP" altLang="en-US" smtClean="0"/>
-              <a:t>2026/9/8</a:t>
+              <a:t>2026/9/9</a:t>
             </a:fld>
             <a:endParaRPr kumimoji="1" lang="ja-JP" altLang="en-US"/>
           </a:p>
@@ -1851,7 +1852,7 @@
           <a:p>
             <a:fld id="{72396E98-BCEA-43E3-A527-8B3F64AC7C63}" type="datetime1">
               <a:rPr kumimoji="1" lang="ja-JP" altLang="en-US" smtClean="0"/>
-              <a:t>2026/9/8</a:t>
+              <a:t>2026/9/9</a:t>
             </a:fld>
             <a:endParaRPr kumimoji="1" lang="ja-JP" altLang="en-US"/>
           </a:p>
@@ -2184,7 +2185,7 @@
           <a:p>
             <a:fld id="{1FEB46E7-DFC0-4570-B8A6-AF34C134E007}" type="datetime1">
               <a:rPr kumimoji="1" lang="ja-JP" altLang="en-US" smtClean="0"/>
-              <a:t>2026/9/8</a:t>
+              <a:t>2026/9/9</a:t>
             </a:fld>
             <a:endParaRPr kumimoji="1" lang="ja-JP" altLang="en-US"/>
           </a:p>
@@ -2664,7 +2665,7 @@
           <a:p>
             <a:fld id="{D3810E2D-B8D9-4D54-BDF3-688F00317A31}" type="datetime1">
               <a:rPr kumimoji="1" lang="ja-JP" altLang="en-US" smtClean="0"/>
-              <a:t>2026/9/8</a:t>
+              <a:t>2026/9/9</a:t>
             </a:fld>
             <a:endParaRPr kumimoji="1" lang="ja-JP" altLang="en-US"/>
           </a:p>
@@ -2809,7 +2810,7 @@
           <a:p>
             <a:fld id="{79343A81-EC42-4B0B-B788-83B2979B1AC0}" type="datetime1">
               <a:rPr kumimoji="1" lang="ja-JP" altLang="en-US" smtClean="0"/>
-              <a:t>2026/9/8</a:t>
+              <a:t>2026/9/9</a:t>
             </a:fld>
             <a:endParaRPr kumimoji="1" lang="ja-JP" altLang="en-US"/>
           </a:p>
@@ -2926,7 +2927,7 @@
           <a:p>
             <a:fld id="{9748B458-1745-45CB-B123-B28D42A66973}" type="datetime1">
               <a:rPr kumimoji="1" lang="ja-JP" altLang="en-US" smtClean="0"/>
-              <a:t>2026/9/8</a:t>
+              <a:t>2026/9/9</a:t>
             </a:fld>
             <a:endParaRPr kumimoji="1" lang="ja-JP" altLang="en-US"/>
           </a:p>
@@ -3273,7 +3274,7 @@
           <a:p>
             <a:fld id="{170F0C33-9C7C-4089-8659-3DECCBA36575}" type="datetime1">
               <a:rPr kumimoji="1" lang="ja-JP" altLang="en-US" smtClean="0"/>
-              <a:t>2026/9/8</a:t>
+              <a:t>2026/9/9</a:t>
             </a:fld>
             <a:endParaRPr kumimoji="1" lang="ja-JP" altLang="en-US"/>
           </a:p>
@@ -3565,7 +3566,7 @@
           <a:p>
             <a:fld id="{5B765AC1-2970-4943-B44F-799C74942DCC}" type="datetime1">
               <a:rPr kumimoji="1" lang="ja-JP" altLang="en-US" smtClean="0"/>
-              <a:t>2026/9/8</a:t>
+              <a:t>2026/9/9</a:t>
             </a:fld>
             <a:endParaRPr kumimoji="1" lang="ja-JP" altLang="en-US"/>
           </a:p>
@@ -3842,7 +3843,7 @@
           <a:p>
             <a:fld id="{2E1D47AA-5221-48CA-B202-E9B9DD006441}" type="datetime1">
               <a:rPr kumimoji="1" lang="ja-JP" altLang="en-US" smtClean="0"/>
-              <a:t>2026/9/8</a:t>
+              <a:t>2026/9/9</a:t>
             </a:fld>
             <a:endParaRPr kumimoji="1" lang="ja-JP" altLang="en-US"/>
           </a:p>
@@ -6125,8 +6126,16 @@
           <a:lstStyle/>
           <a:p>
             <a:r>
+              <a:rPr lang="ja-JP" altLang="en-US"/>
+              <a:t>前述</a:t>
+            </a:r>
+            <a:r>
+              <a:rPr kumimoji="1" lang="ja-JP" altLang="en-US"/>
+              <a:t>のような</a:t>
+            </a:r>
+            <a:r>
               <a:rPr kumimoji="1" lang="ja-JP" altLang="en-US" dirty="0"/>
-              <a:t>さっきのような簡単な処理を２０種類用意</a:t>
+              <a:t>簡単な処理を２０種類用意</a:t>
             </a:r>
             <a:endParaRPr kumimoji="1" lang="en-US" altLang="ja-JP" dirty="0"/>
           </a:p>
@@ -6162,8 +6171,13 @@
             </a:r>
             <a:r>
               <a:rPr kumimoji="1" lang="ja-JP" altLang="en-US" dirty="0"/>
-              <a:t>種類と、組み合わせた処理を４２種類用意しました。</a:t>
-            </a:r>
+              <a:t>種類と、組み合わせた処理を４２</a:t>
+            </a:r>
+            <a:r>
+              <a:rPr kumimoji="1" lang="ja-JP" altLang="en-US"/>
+              <a:t>種類用意</a:t>
+            </a:r>
+            <a:endParaRPr kumimoji="1" lang="ja-JP" altLang="en-US" dirty="0"/>
           </a:p>
         </p:txBody>
       </p:sp>
@@ -6839,9 +6853,75 @@
             <a:pPr lvl="1"/>
             <a:r>
               <a:rPr lang="ja-JP" altLang="en-US" dirty="0"/>
-              <a:t>問題文と答えだけのセット</a:t>
+              <a:t>問題文と答えだけ</a:t>
+            </a:r>
+            <a:r>
+              <a:rPr lang="ja-JP" altLang="en-US"/>
+              <a:t>のセット</a:t>
+            </a:r>
+            <a:endParaRPr lang="ja-JP" altLang="en-US" dirty="0"/>
+          </a:p>
+          <a:p>
+            <a:pPr lvl="1"/>
+            <a:r>
+              <a:rPr kumimoji="1" lang="ja-JP" altLang="en-US" dirty="0"/>
+              <a:t>ルールの種類は全部で</a:t>
+            </a:r>
+            <a:r>
+              <a:rPr kumimoji="1" lang="en-US" altLang="ja-JP" dirty="0"/>
+              <a:t>72</a:t>
+            </a:r>
+            <a:r>
+              <a:rPr kumimoji="1" lang="ja-JP" altLang="en-US" dirty="0"/>
+              <a:t>種類</a:t>
+            </a:r>
+            <a:endParaRPr kumimoji="1" lang="en-US" altLang="ja-JP" dirty="0"/>
+          </a:p>
+          <a:p>
+            <a:pPr lvl="1"/>
+            <a:r>
+              <a:rPr lang="en-US" altLang="ja-JP" dirty="0"/>
+              <a:t>1</a:t>
+            </a:r>
+            <a:r>
+              <a:rPr lang="ja-JP" altLang="en-US" dirty="0"/>
+              <a:t>つのルールにつき</a:t>
+            </a:r>
+            <a:r>
+              <a:rPr lang="en-US" altLang="ja-JP" dirty="0"/>
+              <a:t>50</a:t>
+            </a:r>
+            <a:r>
+              <a:rPr lang="ja-JP" altLang="en-US" dirty="0"/>
+              <a:t>問</a:t>
             </a:r>
             <a:endParaRPr lang="en-US" altLang="ja-JP" dirty="0"/>
+          </a:p>
+          <a:p>
+            <a:pPr lvl="1"/>
+            <a:r>
+              <a:rPr kumimoji="1" lang="ja-JP" altLang="en-US" dirty="0"/>
+              <a:t>全部で</a:t>
+            </a:r>
+            <a:r>
+              <a:rPr kumimoji="1" lang="en-US" altLang="ja-JP" dirty="0"/>
+              <a:t>3600</a:t>
+            </a:r>
+            <a:r>
+              <a:rPr kumimoji="1" lang="ja-JP" altLang="en-US" dirty="0"/>
+              <a:t>問</a:t>
+            </a:r>
+            <a:endParaRPr kumimoji="1" lang="en-US" altLang="ja-JP" dirty="0"/>
+          </a:p>
+          <a:p>
+            <a:r>
+              <a:rPr lang="ja-JP" altLang="en-US" dirty="0"/>
+              <a:t>訓練用のデータその</a:t>
+            </a:r>
+            <a:r>
+              <a:rPr lang="en-US" altLang="ja-JP" dirty="0"/>
+              <a:t>2</a:t>
+            </a:r>
           </a:p>
           <a:p>
             <a:pPr lvl="1"/>
@@ -6849,84 +6929,23 @@
               <a:rPr lang="ja-JP" altLang="en-US" dirty="0"/>
               <a:t>処理の過程を答えの部分に含めたもの</a:t>
             </a:r>
+            <a:endParaRPr lang="en-US" altLang="ja-JP" dirty="0"/>
           </a:p>
           <a:p>
             <a:pPr lvl="1"/>
             <a:r>
-              <a:rPr kumimoji="1" lang="ja-JP" altLang="en-US" dirty="0"/>
-              <a:t>ルールの種類は全部で</a:t>
-            </a:r>
-            <a:r>
-              <a:rPr kumimoji="1" lang="en-US" altLang="ja-JP" dirty="0"/>
-              <a:t>72</a:t>
-            </a:r>
-            <a:r>
-              <a:rPr kumimoji="1" lang="ja-JP" altLang="en-US" dirty="0"/>
-              <a:t>種類</a:t>
-            </a:r>
-            <a:endParaRPr kumimoji="1" lang="en-US" altLang="ja-JP" dirty="0"/>
-          </a:p>
-          <a:p>
-            <a:pPr lvl="1"/>
-            <a:r>
-              <a:rPr lang="en-US" altLang="ja-JP" dirty="0"/>
-              <a:t>1</a:t>
-            </a:r>
-            <a:r>
-              <a:rPr lang="ja-JP" altLang="en-US" dirty="0"/>
-              <a:t>つのルールにつき</a:t>
-            </a:r>
-            <a:r>
-              <a:rPr lang="en-US" altLang="ja-JP" dirty="0"/>
-              <a:t>50</a:t>
-            </a:r>
-            <a:r>
-              <a:rPr lang="ja-JP" altLang="en-US" dirty="0"/>
-              <a:t>問</a:t>
-            </a:r>
-            <a:endParaRPr lang="en-US" altLang="ja-JP" dirty="0"/>
-          </a:p>
-          <a:p>
-            <a:pPr lvl="1"/>
-            <a:r>
-              <a:rPr kumimoji="1" lang="ja-JP" altLang="en-US" dirty="0"/>
-              <a:t>全部で</a:t>
-            </a:r>
-            <a:r>
-              <a:rPr kumimoji="1" lang="en-US" altLang="ja-JP" dirty="0"/>
-              <a:t>3600</a:t>
-            </a:r>
-            <a:r>
-              <a:rPr kumimoji="1" lang="ja-JP" altLang="en-US" dirty="0"/>
-              <a:t>問</a:t>
-            </a:r>
-            <a:endParaRPr kumimoji="1" lang="en-US" altLang="ja-JP" dirty="0"/>
-          </a:p>
-          <a:p>
-            <a:r>
-              <a:rPr lang="ja-JP" altLang="en-US" dirty="0"/>
-              <a:t>訓練用のデータその</a:t>
-            </a:r>
-            <a:r>
-              <a:rPr lang="en-US" altLang="ja-JP" dirty="0"/>
-              <a:t>2</a:t>
-            </a:r>
-          </a:p>
-          <a:p>
-            <a:pPr lvl="1"/>
-            <a:r>
-              <a:rPr lang="ja-JP" altLang="en-US" dirty="0"/>
-              <a:t>処理の過程を答えの部分に含めたもの</a:t>
-            </a:r>
-            <a:endParaRPr lang="en-US" altLang="ja-JP" dirty="0"/>
-          </a:p>
-          <a:p>
-            <a:pPr lvl="1"/>
-            <a:r>
-              <a:rPr kumimoji="1" lang="ja-JP" altLang="en-US" dirty="0"/>
+              <a:rPr kumimoji="1" lang="ja-JP" altLang="en-US" dirty="0">
+                <a:solidFill>
+                  <a:srgbClr val="FF0000"/>
+                </a:solidFill>
+              </a:rPr>
               <a:t>あとは全部同じ</a:t>
             </a:r>
-            <a:endParaRPr kumimoji="1" lang="en-US" altLang="ja-JP" dirty="0"/>
+            <a:endParaRPr kumimoji="1" lang="en-US" altLang="ja-JP" dirty="0">
+              <a:solidFill>
+                <a:srgbClr val="FF0000"/>
+              </a:solidFill>
+            </a:endParaRPr>
           </a:p>
           <a:p>
             <a:pPr lvl="1"/>
@@ -7150,18 +7169,34 @@
           <a:p>
             <a:pPr lvl="1"/>
             <a:r>
-              <a:rPr lang="ja-JP" altLang="en-US" dirty="0"/>
+              <a:rPr lang="ja-JP" altLang="en-US" dirty="0">
+                <a:solidFill>
+                  <a:srgbClr val="FF0000"/>
+                </a:solidFill>
+              </a:rPr>
               <a:t>全部で</a:t>
             </a:r>
             <a:r>
-              <a:rPr lang="en-US" altLang="ja-JP" dirty="0"/>
+              <a:rPr lang="en-US" altLang="ja-JP" dirty="0">
+                <a:solidFill>
+                  <a:srgbClr val="FF0000"/>
+                </a:solidFill>
+              </a:rPr>
               <a:t>480</a:t>
             </a:r>
             <a:r>
-              <a:rPr lang="ja-JP" altLang="en-US" dirty="0"/>
+              <a:rPr lang="ja-JP" altLang="en-US" dirty="0">
+                <a:solidFill>
+                  <a:srgbClr val="FF0000"/>
+                </a:solidFill>
+              </a:rPr>
               <a:t>問</a:t>
             </a:r>
-            <a:endParaRPr lang="en-US" altLang="ja-JP" dirty="0"/>
+            <a:endParaRPr lang="en-US" altLang="ja-JP" dirty="0">
+              <a:solidFill>
+                <a:srgbClr val="FF0000"/>
+              </a:solidFill>
+            </a:endParaRPr>
           </a:p>
           <a:p>
             <a:endParaRPr kumimoji="1" lang="ja-JP" altLang="en-US" dirty="0"/>
@@ -8769,6 +8804,150 @@
 </p:sld>
 </file>
 
+<file path=ppt/slides/slide25.xml><?xml version="1.0" encoding="utf-8"?>
+<p:sld xmlns:a="http://schemas.openxmlformats.org/drawingml/2006/main" xmlns:r="http://schemas.openxmlformats.org/officeDocument/2006/relationships" xmlns:p="http://schemas.openxmlformats.org/presentationml/2006/main">
+  <p:cSld>
+    <p:spTree>
+      <p:nvGrpSpPr>
+        <p:cNvPr id="1" name=""/>
+        <p:cNvGrpSpPr/>
+        <p:nvPr/>
+      </p:nvGrpSpPr>
+      <p:grpSpPr>
+        <a:xfrm>
+          <a:off x="0" y="0"/>
+          <a:ext cx="0" cy="0"/>
+          <a:chOff x="0" y="0"/>
+          <a:chExt cx="0" cy="0"/>
+        </a:xfrm>
+      </p:grpSpPr>
+      <p:sp>
+        <p:nvSpPr>
+          <p:cNvPr id="2" name="タイトル 1">
+            <a:extLst>
+              <a:ext uri="{FF2B5EF4-FFF2-40B4-BE49-F238E27FC236}">
+                <a16:creationId xmlns:a16="http://schemas.microsoft.com/office/drawing/2014/main" id="{38720CD7-B6E9-2737-5BF2-761BCC0B12C2}"/>
+              </a:ext>
+            </a:extLst>
+          </p:cNvPr>
+          <p:cNvSpPr>
+            <a:spLocks noGrp="1"/>
+          </p:cNvSpPr>
+          <p:nvPr>
+            <p:ph type="title"/>
+          </p:nvPr>
+        </p:nvSpPr>
+        <p:spPr/>
+        <p:txBody>
+          <a:bodyPr/>
+          <a:lstStyle/>
+          <a:p>
+            <a:r>
+              <a:rPr kumimoji="1" lang="ja-JP" altLang="en-US">
+                <a:solidFill>
+                  <a:srgbClr val="FF0000"/>
+                </a:solidFill>
+              </a:rPr>
+              <a:t>改善点</a:t>
+            </a:r>
+          </a:p>
+        </p:txBody>
+      </p:sp>
+      <p:sp>
+        <p:nvSpPr>
+          <p:cNvPr id="3" name="コンテンツ プレースホルダー 2">
+            <a:extLst>
+              <a:ext uri="{FF2B5EF4-FFF2-40B4-BE49-F238E27FC236}">
+                <a16:creationId xmlns:a16="http://schemas.microsoft.com/office/drawing/2014/main" id="{017B691A-46C7-600E-7022-890D1BEC509F}"/>
+              </a:ext>
+            </a:extLst>
+          </p:cNvPr>
+          <p:cNvSpPr>
+            <a:spLocks noGrp="1"/>
+          </p:cNvSpPr>
+          <p:nvPr>
+            <p:ph idx="1"/>
+          </p:nvPr>
+        </p:nvSpPr>
+        <p:spPr/>
+        <p:txBody>
+          <a:bodyPr/>
+          <a:lstStyle/>
+          <a:p>
+            <a:r>
+              <a:rPr kumimoji="1" lang="ja-JP" altLang="en-US"/>
+              <a:t>口語を改善</a:t>
+            </a:r>
+            <a:endParaRPr kumimoji="1" lang="en-US" altLang="ja-JP" dirty="0"/>
+          </a:p>
+          <a:p>
+            <a:r>
+              <a:rPr lang="ja-JP" altLang="en-US"/>
+              <a:t>全部→全体</a:t>
+            </a:r>
+            <a:endParaRPr lang="en-US" altLang="ja-JP" dirty="0"/>
+          </a:p>
+          <a:p>
+            <a:r>
+              <a:rPr kumimoji="1" lang="ja-JP" altLang="en-US"/>
+              <a:t>図版を入れる</a:t>
+            </a:r>
+            <a:endParaRPr kumimoji="1" lang="en-US" altLang="ja-JP" dirty="0"/>
+          </a:p>
+          <a:p>
+            <a:r>
+              <a:rPr kumimoji="1" lang="ja-JP" altLang="en-US"/>
+              <a:t>参考文献の引用の仕方を長くてもいいから、正式な形で</a:t>
+            </a:r>
+            <a:endParaRPr kumimoji="1" lang="en-US" altLang="ja-JP" dirty="0"/>
+          </a:p>
+          <a:p>
+            <a:endParaRPr kumimoji="1" lang="ja-JP" altLang="en-US"/>
+          </a:p>
+        </p:txBody>
+      </p:sp>
+      <p:sp>
+        <p:nvSpPr>
+          <p:cNvPr id="4" name="スライド番号プレースホルダー 3">
+            <a:extLst>
+              <a:ext uri="{FF2B5EF4-FFF2-40B4-BE49-F238E27FC236}">
+                <a16:creationId xmlns:a16="http://schemas.microsoft.com/office/drawing/2014/main" id="{93BC64FA-8AD0-6880-8F88-5A3BAAA07F95}"/>
+              </a:ext>
+            </a:extLst>
+          </p:cNvPr>
+          <p:cNvSpPr>
+            <a:spLocks noGrp="1"/>
+          </p:cNvSpPr>
+          <p:nvPr>
+            <p:ph type="sldNum" sz="quarter" idx="12"/>
+          </p:nvPr>
+        </p:nvSpPr>
+        <p:spPr/>
+        <p:txBody>
+          <a:bodyPr/>
+          <a:lstStyle/>
+          <a:p>
+            <a:fld id="{10649E7B-FC1B-418B-9B6A-00859DB1DEE8}" type="slidenum">
+              <a:rPr kumimoji="1" lang="ja-JP" altLang="en-US" smtClean="0"/>
+              <a:t>25</a:t>
+            </a:fld>
+            <a:endParaRPr kumimoji="1" lang="ja-JP" altLang="en-US"/>
+          </a:p>
+        </p:txBody>
+      </p:sp>
+    </p:spTree>
+    <p:extLst>
+      <p:ext uri="{BB962C8B-B14F-4D97-AF65-F5344CB8AC3E}">
+        <p14:creationId xmlns:p14="http://schemas.microsoft.com/office/powerpoint/2010/main" val="3091403255"/>
+      </p:ext>
+    </p:extLst>
+  </p:cSld>
+  <p:clrMapOvr>
+    <a:masterClrMapping/>
+  </p:clrMapOvr>
+</p:sld>
+</file>
+
 <file path=ppt/slides/slide3.xml><?xml version="1.0" encoding="utf-8"?>
 <p:sld xmlns:a="http://schemas.openxmlformats.org/drawingml/2006/main" xmlns:r="http://schemas.openxmlformats.org/officeDocument/2006/relationships" xmlns:p="http://schemas.openxmlformats.org/presentationml/2006/main">
   <p:cSld>
@@ -9028,7 +9207,22 @@
               <a:rPr lang="en-US" altLang="ja-JP" dirty="0"/>
               <a:t>LLM</a:t>
             </a:r>
-            <a:endParaRPr lang="en-US" altLang="ja-JP" baseline="30000" dirty="0"/>
+          </a:p>
+          <a:p>
+            <a:pPr lvl="2"/>
+            <a:r>
+              <a:rPr lang="ja-JP" altLang="en-US" baseline="30000">
+                <a:solidFill>
+                  <a:srgbClr val="FF0000"/>
+                </a:solidFill>
+              </a:rPr>
+              <a:t>前の要素との接続</a:t>
+            </a:r>
+            <a:endParaRPr lang="en-US" altLang="ja-JP" baseline="30000" dirty="0">
+              <a:solidFill>
+                <a:srgbClr val="FF0000"/>
+              </a:solidFill>
+            </a:endParaRPr>
           </a:p>
           <a:p>
             <a:pPr lvl="2"/>
@@ -9775,8 +9969,8 @@
               <a:t>5</a:t>
             </a:r>
             <a:r>
-              <a:rPr lang="ja-JP" altLang="en-US" dirty="0"/>
-              <a:t>：推論</a:t>
+              <a:rPr lang="ja-JP" altLang="en-US"/>
+              <a:t>：</a:t>
             </a:r>
             <a:r>
               <a:rPr lang="en-US" altLang="ja-JP" dirty="0"/>
@@ -10095,8 +10289,8 @@
           <a:lstStyle/>
           <a:p>
             <a:r>
-              <a:rPr lang="ja-JP" altLang="en-US" dirty="0"/>
-              <a:t>自分の調べたいこと</a:t>
+              <a:rPr lang="ja-JP" altLang="en-US"/>
+              <a:t>問題関心</a:t>
             </a:r>
             <a:endParaRPr kumimoji="1" lang="ja-JP" altLang="en-US" dirty="0"/>
           </a:p>
@@ -10131,8 +10325,12 @@
           <a:lstStyle/>
           <a:p>
             <a:r>
+              <a:rPr lang="ja-JP" altLang="en-US"/>
+              <a:t>本研究</a:t>
+            </a:r>
+            <a:r>
               <a:rPr lang="ja-JP" altLang="en-US" dirty="0"/>
-              <a:t>自分の研究では、 「何を未知とするか」を明確に設定した問題を用いて、</a:t>
+              <a:t>では、 「何を未知とするか」を明確に設定した問題を用いて、</a:t>
             </a:r>
             <a:r>
               <a:rPr lang="en-US" altLang="ja-JP" dirty="0"/>
@@ -10159,7 +10357,15 @@
             </a:r>
             <a:r>
               <a:rPr lang="ja-JP" altLang="ja-JP" dirty="0"/>
-              <a:t>既知の単純な処理から、それらを組み合わせた複雑な処理への汎化は、LLMのOOD汎化の重要な側面である</a:t>
+              <a:t>既知の単純な処理から、それらを組み合わせた複雑な処理への汎化は、</a:t>
+            </a:r>
+            <a:r>
+              <a:rPr lang="ja-JP" altLang="ja-JP"/>
+              <a:t>LLMの汎化</a:t>
+            </a:r>
+            <a:r>
+              <a:rPr lang="ja-JP" altLang="ja-JP" dirty="0"/>
+              <a:t>の重要な側面である</a:t>
             </a:r>
             <a:r>
               <a:rPr lang="ja-JP" altLang="en-US" dirty="0"/>
@@ -10502,7 +10708,15 @@
             </a:r>
             <a:r>
               <a:rPr kumimoji="1" lang="en-US" altLang="ja-JP" dirty="0"/>
-              <a:t>.  Hayati et al. (2025). “Chain-of-Instructions: Compositional Instruction Tuning on Large Language Models”</a:t>
+              <a:t>.  </a:t>
+            </a:r>
+            <a:r>
+              <a:rPr kumimoji="1" lang="en-US" altLang="ja-JP" dirty="0" err="1"/>
+              <a:t>Hayati</a:t>
+            </a:r>
+            <a:r>
+              <a:rPr kumimoji="1" lang="en-US" altLang="ja-JP" dirty="0"/>
+              <a:t> et al. (2025). “Chain-of-Instructions: Compositional Instruction Tuning on Large Language Models”</a:t>
             </a:r>
             <a:endParaRPr kumimoji="1" lang="ja-JP" altLang="en-US" dirty="0"/>
           </a:p>

--- a/生成AIの追加学習による問題.pptx
+++ b/生成AIの追加学習による問題.pptx
@@ -5,10 +5,10 @@
     <p:sldMasterId id="2147483648" r:id="rId1"/>
   </p:sldMasterIdLst>
   <p:notesMasterIdLst>
-    <p:notesMasterId r:id="rId27"/>
+    <p:notesMasterId r:id="rId34"/>
   </p:notesMasterIdLst>
   <p:handoutMasterIdLst>
-    <p:handoutMasterId r:id="rId28"/>
+    <p:handoutMasterId r:id="rId35"/>
   </p:handoutMasterIdLst>
   <p:sldIdLst>
     <p:sldId id="256" r:id="rId2"/>
@@ -35,7 +35,14 @@
     <p:sldId id="281" r:id="rId23"/>
     <p:sldId id="282" r:id="rId24"/>
     <p:sldId id="283" r:id="rId25"/>
-    <p:sldId id="284" r:id="rId26"/>
+    <p:sldId id="285" r:id="rId26"/>
+    <p:sldId id="287" r:id="rId27"/>
+    <p:sldId id="288" r:id="rId28"/>
+    <p:sldId id="290" r:id="rId29"/>
+    <p:sldId id="291" r:id="rId30"/>
+    <p:sldId id="293" r:id="rId31"/>
+    <p:sldId id="295" r:id="rId32"/>
+    <p:sldId id="284" r:id="rId33"/>
   </p:sldIdLst>
   <p:sldSz cx="12192000" cy="6858000"/>
   <p:notesSz cx="6858000" cy="9144000"/>
@@ -236,7 +243,7 @@
           <a:p>
             <a:fld id="{3D0BDCF3-6838-49F9-878F-F13A4D3F69AF}" type="datetimeFigureOut">
               <a:rPr kumimoji="1" lang="ja-JP" altLang="en-US" smtClean="0"/>
-              <a:t>2026/9/9</a:t>
+              <a:t>2026/9/11</a:t>
             </a:fld>
             <a:endParaRPr kumimoji="1" lang="ja-JP" altLang="en-US"/>
           </a:p>
@@ -414,7 +421,7 @@
           <a:p>
             <a:fld id="{F3D7D25B-E7F4-42EB-A3A2-379C00250A8D}" type="datetimeFigureOut">
               <a:rPr kumimoji="1" lang="ja-JP" altLang="en-US" smtClean="0"/>
-              <a:t>2026/9/9</a:t>
+              <a:t>2026/9/10</a:t>
             </a:fld>
             <a:endParaRPr kumimoji="1" lang="ja-JP" altLang="en-US"/>
           </a:p>
@@ -861,7 +868,7 @@
           <a:p>
             <a:fld id="{A3A6DBD2-DA0F-4369-AACF-DF8255168190}" type="datetime1">
               <a:rPr kumimoji="1" lang="ja-JP" altLang="en-US" smtClean="0"/>
-              <a:t>2026/9/9</a:t>
+              <a:t>2026/9/10</a:t>
             </a:fld>
             <a:endParaRPr kumimoji="1" lang="ja-JP" altLang="en-US"/>
           </a:p>
@@ -1095,7 +1102,7 @@
           <a:p>
             <a:fld id="{6D55F33B-3C44-4800-AEBE-821A56E94784}" type="datetime1">
               <a:rPr kumimoji="1" lang="ja-JP" altLang="en-US" smtClean="0"/>
-              <a:t>2026/9/9</a:t>
+              <a:t>2026/9/10</a:t>
             </a:fld>
             <a:endParaRPr kumimoji="1" lang="ja-JP" altLang="en-US"/>
           </a:p>
@@ -1339,7 +1346,7 @@
           <a:p>
             <a:fld id="{3D39F1BD-DB4A-41B8-812B-24EA046BEB95}" type="datetime1">
               <a:rPr kumimoji="1" lang="ja-JP" altLang="en-US" smtClean="0"/>
-              <a:t>2026/9/9</a:t>
+              <a:t>2026/9/10</a:t>
             </a:fld>
             <a:endParaRPr kumimoji="1" lang="ja-JP" altLang="en-US"/>
           </a:p>
@@ -1573,7 +1580,7 @@
           <a:p>
             <a:fld id="{DB0EC384-A088-42ED-AC29-547DFB1F70D3}" type="datetime1">
               <a:rPr kumimoji="1" lang="ja-JP" altLang="en-US" smtClean="0"/>
-              <a:t>2026/9/9</a:t>
+              <a:t>2026/9/10</a:t>
             </a:fld>
             <a:endParaRPr kumimoji="1" lang="ja-JP" altLang="en-US"/>
           </a:p>
@@ -1852,7 +1859,7 @@
           <a:p>
             <a:fld id="{72396E98-BCEA-43E3-A527-8B3F64AC7C63}" type="datetime1">
               <a:rPr kumimoji="1" lang="ja-JP" altLang="en-US" smtClean="0"/>
-              <a:t>2026/9/9</a:t>
+              <a:t>2026/9/10</a:t>
             </a:fld>
             <a:endParaRPr kumimoji="1" lang="ja-JP" altLang="en-US"/>
           </a:p>
@@ -2185,7 +2192,7 @@
           <a:p>
             <a:fld id="{1FEB46E7-DFC0-4570-B8A6-AF34C134E007}" type="datetime1">
               <a:rPr kumimoji="1" lang="ja-JP" altLang="en-US" smtClean="0"/>
-              <a:t>2026/9/9</a:t>
+              <a:t>2026/9/10</a:t>
             </a:fld>
             <a:endParaRPr kumimoji="1" lang="ja-JP" altLang="en-US"/>
           </a:p>
@@ -2665,7 +2672,7 @@
           <a:p>
             <a:fld id="{D3810E2D-B8D9-4D54-BDF3-688F00317A31}" type="datetime1">
               <a:rPr kumimoji="1" lang="ja-JP" altLang="en-US" smtClean="0"/>
-              <a:t>2026/9/9</a:t>
+              <a:t>2026/9/10</a:t>
             </a:fld>
             <a:endParaRPr kumimoji="1" lang="ja-JP" altLang="en-US"/>
           </a:p>
@@ -2810,7 +2817,7 @@
           <a:p>
             <a:fld id="{79343A81-EC42-4B0B-B788-83B2979B1AC0}" type="datetime1">
               <a:rPr kumimoji="1" lang="ja-JP" altLang="en-US" smtClean="0"/>
-              <a:t>2026/9/9</a:t>
+              <a:t>2026/9/10</a:t>
             </a:fld>
             <a:endParaRPr kumimoji="1" lang="ja-JP" altLang="en-US"/>
           </a:p>
@@ -2927,7 +2934,7 @@
           <a:p>
             <a:fld id="{9748B458-1745-45CB-B123-B28D42A66973}" type="datetime1">
               <a:rPr kumimoji="1" lang="ja-JP" altLang="en-US" smtClean="0"/>
-              <a:t>2026/9/9</a:t>
+              <a:t>2026/9/10</a:t>
             </a:fld>
             <a:endParaRPr kumimoji="1" lang="ja-JP" altLang="en-US"/>
           </a:p>
@@ -3274,7 +3281,7 @@
           <a:p>
             <a:fld id="{170F0C33-9C7C-4089-8659-3DECCBA36575}" type="datetime1">
               <a:rPr kumimoji="1" lang="ja-JP" altLang="en-US" smtClean="0"/>
-              <a:t>2026/9/9</a:t>
+              <a:t>2026/9/10</a:t>
             </a:fld>
             <a:endParaRPr kumimoji="1" lang="ja-JP" altLang="en-US"/>
           </a:p>
@@ -3566,7 +3573,7 @@
           <a:p>
             <a:fld id="{5B765AC1-2970-4943-B44F-799C74942DCC}" type="datetime1">
               <a:rPr kumimoji="1" lang="ja-JP" altLang="en-US" smtClean="0"/>
-              <a:t>2026/9/9</a:t>
+              <a:t>2026/9/10</a:t>
             </a:fld>
             <a:endParaRPr kumimoji="1" lang="ja-JP" altLang="en-US"/>
           </a:p>
@@ -3843,7 +3850,7 @@
           <a:p>
             <a:fld id="{2E1D47AA-5221-48CA-B202-E9B9DD006441}" type="datetime1">
               <a:rPr kumimoji="1" lang="ja-JP" altLang="en-US" smtClean="0"/>
-              <a:t>2026/9/9</a:t>
+              <a:t>2026/9/10</a:t>
             </a:fld>
             <a:endParaRPr kumimoji="1" lang="ja-JP" altLang="en-US"/>
           </a:p>
@@ -6126,16 +6133,12 @@
           <a:lstStyle/>
           <a:p>
             <a:r>
-              <a:rPr lang="ja-JP" altLang="en-US"/>
+              <a:rPr lang="ja-JP" altLang="en-US" dirty="0"/>
               <a:t>前述</a:t>
             </a:r>
             <a:r>
-              <a:rPr kumimoji="1" lang="ja-JP" altLang="en-US"/>
-              <a:t>のような</a:t>
-            </a:r>
-            <a:r>
               <a:rPr kumimoji="1" lang="ja-JP" altLang="en-US" dirty="0"/>
-              <a:t>簡単な処理を２０種類用意</a:t>
+              <a:t>のような簡単な処理を２０種類用意</a:t>
             </a:r>
             <a:endParaRPr kumimoji="1" lang="en-US" altLang="ja-JP" dirty="0"/>
           </a:p>
@@ -6171,11 +6174,25 @@
             </a:r>
             <a:r>
               <a:rPr kumimoji="1" lang="ja-JP" altLang="en-US" dirty="0"/>
-              <a:t>種類と、組み合わせた処理を４２</a:t>
-            </a:r>
-            <a:r>
-              <a:rPr kumimoji="1" lang="ja-JP" altLang="en-US"/>
-              <a:t>種類用意</a:t>
+              <a:t>種類と、組み合わせた処理を４２種類用意</a:t>
+            </a:r>
+            <a:endParaRPr kumimoji="1" lang="en-US" altLang="ja-JP" dirty="0"/>
+          </a:p>
+          <a:p>
+            <a:endParaRPr lang="en-US" altLang="ja-JP" dirty="0"/>
+          </a:p>
+          <a:p>
+            <a:r>
+              <a:rPr lang="ja-JP" altLang="en-US" dirty="0"/>
+              <a:t>全体で</a:t>
+            </a:r>
+            <a:r>
+              <a:rPr lang="en-US" altLang="ja-JP" dirty="0"/>
+              <a:t>72</a:t>
+            </a:r>
+            <a:r>
+              <a:rPr lang="ja-JP" altLang="en-US" dirty="0"/>
+              <a:t>種類のルール</a:t>
             </a:r>
             <a:endParaRPr kumimoji="1" lang="ja-JP" altLang="en-US" dirty="0"/>
           </a:p>
@@ -7427,6 +7444,19 @@
               <a:rPr kumimoji="1" lang="ja-JP" altLang="en-US" dirty="0"/>
               <a:t>研究方法</a:t>
             </a:r>
+            <a:r>
+              <a:rPr kumimoji="1" lang="en-US" altLang="ja-JP" dirty="0"/>
+              <a:t>(</a:t>
+            </a:r>
+            <a:r>
+              <a:rPr kumimoji="1" lang="ja-JP" altLang="en-US" dirty="0"/>
+              <a:t>モデルと学習手法</a:t>
+            </a:r>
+            <a:r>
+              <a:rPr kumimoji="1" lang="en-US" altLang="ja-JP" dirty="0"/>
+              <a:t>)</a:t>
+            </a:r>
+            <a:endParaRPr kumimoji="1" lang="ja-JP" altLang="en-US" dirty="0"/>
           </a:p>
         </p:txBody>
       </p:sp>
@@ -7466,6 +7496,18 @@
               <a:rPr lang="en-US" altLang="ja-JP" baseline="30000" dirty="0"/>
               <a:t>8</a:t>
             </a:r>
+            <a:r>
+              <a:rPr lang="en-US" altLang="ja-JP" dirty="0"/>
+              <a:t>(</a:t>
+            </a:r>
+            <a:r>
+              <a:rPr lang="ja-JP" altLang="en-US" dirty="0"/>
+              <a:t>使用するモデル</a:t>
+            </a:r>
+            <a:r>
+              <a:rPr lang="en-US" altLang="ja-JP" dirty="0"/>
+              <a:t>)</a:t>
+            </a:r>
           </a:p>
           <a:p>
             <a:pPr lvl="1"/>
@@ -7552,6 +7594,19 @@
               <a:rPr lang="ja-JP" altLang="en-US" dirty="0"/>
               <a:t>）</a:t>
             </a:r>
+            <a:r>
+              <a:rPr lang="en-US" altLang="ja-JP" dirty="0"/>
+              <a:t>(</a:t>
+            </a:r>
+            <a:r>
+              <a:rPr lang="ja-JP" altLang="en-US" dirty="0"/>
+              <a:t>学習手法</a:t>
+            </a:r>
+            <a:r>
+              <a:rPr lang="en-US" altLang="ja-JP" dirty="0"/>
+              <a:t>)</a:t>
+            </a:r>
+            <a:endParaRPr lang="ja-JP" altLang="en-US" dirty="0"/>
           </a:p>
           <a:p>
             <a:pPr lvl="1"/>
@@ -8724,41 +8779,21 @@
             <p:ph type="title"/>
           </p:nvPr>
         </p:nvSpPr>
-        <p:spPr/>
+        <p:spPr>
+          <a:xfrm>
+            <a:off x="838200" y="0"/>
+            <a:ext cx="10515600" cy="1325563"/>
+          </a:xfrm>
+        </p:spPr>
         <p:txBody>
           <a:bodyPr/>
           <a:lstStyle/>
           <a:p>
             <a:r>
               <a:rPr lang="ja-JP" altLang="en-US" dirty="0"/>
-              <a:t>問題解決能力の評価実験</a:t>
+              <a:t>ベースモデルの正解例の問題</a:t>
             </a:r>
             <a:endParaRPr kumimoji="1" lang="ja-JP" altLang="en-US" dirty="0"/>
-          </a:p>
-        </p:txBody>
-      </p:sp>
-      <p:sp>
-        <p:nvSpPr>
-          <p:cNvPr id="3" name="コンテンツ プレースホルダー 2">
-            <a:extLst>
-              <a:ext uri="{FF2B5EF4-FFF2-40B4-BE49-F238E27FC236}">
-                <a16:creationId xmlns:a16="http://schemas.microsoft.com/office/drawing/2014/main" id="{4B21DC81-254B-4357-7900-4994D496D353}"/>
-              </a:ext>
-            </a:extLst>
-          </p:cNvPr>
-          <p:cNvSpPr>
-            <a:spLocks noGrp="1"/>
-          </p:cNvSpPr>
-          <p:nvPr>
-            <p:ph idx="1"/>
-          </p:nvPr>
-        </p:nvSpPr>
-        <p:spPr/>
-        <p:txBody>
-          <a:bodyPr/>
-          <a:lstStyle/>
-          <a:p>
-            <a:endParaRPr kumimoji="1" lang="ja-JP" altLang="en-US"/>
           </a:p>
         </p:txBody>
       </p:sp>
@@ -8788,6 +8823,432 @@
               <a:t>24</a:t>
             </a:fld>
             <a:endParaRPr kumimoji="1" lang="ja-JP" altLang="en-US"/>
+          </a:p>
+        </p:txBody>
+      </p:sp>
+      <p:sp>
+        <p:nvSpPr>
+          <p:cNvPr id="5" name="四角形: 角を丸くする 4">
+            <a:extLst>
+              <a:ext uri="{FF2B5EF4-FFF2-40B4-BE49-F238E27FC236}">
+                <a16:creationId xmlns:a16="http://schemas.microsoft.com/office/drawing/2014/main" id="{DCE6EC87-0E8C-1552-8219-28686FF52C57}"/>
+              </a:ext>
+            </a:extLst>
+          </p:cNvPr>
+          <p:cNvSpPr/>
+          <p:nvPr/>
+        </p:nvSpPr>
+        <p:spPr>
+          <a:xfrm>
+            <a:off x="1067823" y="914400"/>
+            <a:ext cx="4559726" cy="5854615"/>
+          </a:xfrm>
+          <a:prstGeom prst="roundRect">
+            <a:avLst/>
+          </a:prstGeom>
+        </p:spPr>
+        <p:style>
+          <a:lnRef idx="2">
+            <a:schemeClr val="accent1"/>
+          </a:lnRef>
+          <a:fillRef idx="1">
+            <a:schemeClr val="lt1"/>
+          </a:fillRef>
+          <a:effectRef idx="0">
+            <a:schemeClr val="accent1"/>
+          </a:effectRef>
+          <a:fontRef idx="minor">
+            <a:schemeClr val="dk1"/>
+          </a:fontRef>
+        </p:style>
+        <p:txBody>
+          <a:bodyPr rtlCol="0" anchor="ctr"/>
+          <a:lstStyle/>
+          <a:p>
+            <a:r>
+              <a:rPr lang="en-US" altLang="ja-JP" dirty="0"/>
+              <a:t>Infer the transformation rule from examples.</a:t>
+            </a:r>
+          </a:p>
+          <a:p>
+            <a:r>
+              <a:rPr lang="en-US" altLang="ja-JP" dirty="0"/>
+              <a:t>Output the final array.</a:t>
+            </a:r>
+          </a:p>
+          <a:p>
+            <a:r>
+              <a:rPr lang="en-US" altLang="ja-JP" dirty="0"/>
+              <a:t>        </a:t>
+            </a:r>
+          </a:p>
+          <a:p>
+            <a:r>
+              <a:rPr lang="en-US" altLang="ja-JP" dirty="0"/>
+              <a:t>Example 1</a:t>
+            </a:r>
+          </a:p>
+          <a:p>
+            <a:r>
+              <a:rPr lang="en-US" altLang="ja-JP" dirty="0"/>
+              <a:t>Input:</a:t>
+            </a:r>
+          </a:p>
+          <a:p>
+            <a:r>
+              <a:rPr lang="en-US" altLang="ja-JP" dirty="0"/>
+              <a:t>[6, 0, 4, 8, 7, 6, 4, 7]</a:t>
+            </a:r>
+          </a:p>
+          <a:p>
+            <a:r>
+              <a:rPr lang="en-US" altLang="ja-JP" dirty="0"/>
+              <a:t>Output:</a:t>
+            </a:r>
+          </a:p>
+          <a:p>
+            <a:r>
+              <a:rPr lang="en-US" altLang="ja-JP" dirty="0"/>
+              <a:t>[7, 4, 6, 7, 8, 4, 0, 6]</a:t>
+            </a:r>
+          </a:p>
+          <a:p>
+            <a:endParaRPr lang="en-US" altLang="ja-JP" dirty="0"/>
+          </a:p>
+          <a:p>
+            <a:r>
+              <a:rPr lang="en-US" altLang="ja-JP" dirty="0"/>
+              <a:t>Example 2</a:t>
+            </a:r>
+          </a:p>
+          <a:p>
+            <a:r>
+              <a:rPr lang="en-US" altLang="ja-JP" dirty="0"/>
+              <a:t>Input:</a:t>
+            </a:r>
+          </a:p>
+          <a:p>
+            <a:r>
+              <a:rPr lang="en-US" altLang="ja-JP" dirty="0"/>
+              <a:t>[9, 3, 8, 2, 4, 2, 1]</a:t>
+            </a:r>
+          </a:p>
+          <a:p>
+            <a:r>
+              <a:rPr lang="en-US" altLang="ja-JP" dirty="0"/>
+              <a:t>Output:</a:t>
+            </a:r>
+          </a:p>
+          <a:p>
+            <a:r>
+              <a:rPr lang="en-US" altLang="ja-JP" dirty="0"/>
+              <a:t>[1, 2, 4, 2, 8, 3, 9]</a:t>
+            </a:r>
+          </a:p>
+          <a:p>
+            <a:endParaRPr lang="en-US" altLang="ja-JP" dirty="0"/>
+          </a:p>
+          <a:p>
+            <a:r>
+              <a:rPr lang="en-US" altLang="ja-JP" dirty="0"/>
+              <a:t>Query</a:t>
+            </a:r>
+          </a:p>
+          <a:p>
+            <a:r>
+              <a:rPr lang="en-US" altLang="ja-JP" dirty="0"/>
+              <a:t>Input:</a:t>
+            </a:r>
+          </a:p>
+          <a:p>
+            <a:r>
+              <a:rPr lang="en-US" altLang="ja-JP" dirty="0"/>
+              <a:t>[3, 5, 1, 3, 9, 3, 3]</a:t>
+            </a:r>
+          </a:p>
+          <a:p>
+            <a:r>
+              <a:rPr lang="en-US" altLang="ja-JP" dirty="0"/>
+              <a:t>Output:</a:t>
+            </a:r>
+            <a:endParaRPr kumimoji="1" lang="ja-JP" altLang="en-US" dirty="0"/>
+          </a:p>
+        </p:txBody>
+      </p:sp>
+      <p:sp>
+        <p:nvSpPr>
+          <p:cNvPr id="7" name="テキスト ボックス 6">
+            <a:extLst>
+              <a:ext uri="{FF2B5EF4-FFF2-40B4-BE49-F238E27FC236}">
+                <a16:creationId xmlns:a16="http://schemas.microsoft.com/office/drawing/2014/main" id="{9B9394B9-EE7C-858C-2C50-C763EF0E113C}"/>
+              </a:ext>
+            </a:extLst>
+          </p:cNvPr>
+          <p:cNvSpPr txBox="1"/>
+          <p:nvPr/>
+        </p:nvSpPr>
+        <p:spPr>
+          <a:xfrm>
+            <a:off x="284202" y="2164231"/>
+            <a:ext cx="553998" cy="2246769"/>
+          </a:xfrm>
+          <a:prstGeom prst="rect">
+            <a:avLst/>
+          </a:prstGeom>
+          <a:noFill/>
+        </p:spPr>
+        <p:txBody>
+          <a:bodyPr vert="eaVert" wrap="none" rtlCol="0">
+            <a:spAutoFit/>
+          </a:bodyPr>
+          <a:lstStyle/>
+          <a:p>
+            <a:r>
+              <a:rPr lang="ja-JP" altLang="en-US" sz="2400" dirty="0"/>
+              <a:t>実際は５つの例</a:t>
+            </a:r>
+            <a:endParaRPr kumimoji="1" lang="ja-JP" altLang="en-US" sz="2400" dirty="0"/>
+          </a:p>
+        </p:txBody>
+      </p:sp>
+      <p:sp>
+        <p:nvSpPr>
+          <p:cNvPr id="8" name="四角形: 角を丸くする 7">
+            <a:extLst>
+              <a:ext uri="{FF2B5EF4-FFF2-40B4-BE49-F238E27FC236}">
+                <a16:creationId xmlns:a16="http://schemas.microsoft.com/office/drawing/2014/main" id="{2B9D890B-89F7-CBC7-9B86-42F1877A7722}"/>
+              </a:ext>
+            </a:extLst>
+          </p:cNvPr>
+          <p:cNvSpPr/>
+          <p:nvPr/>
+        </p:nvSpPr>
+        <p:spPr>
+          <a:xfrm>
+            <a:off x="7597497" y="1919319"/>
+            <a:ext cx="3375302" cy="2025181"/>
+          </a:xfrm>
+          <a:prstGeom prst="roundRect">
+            <a:avLst/>
+          </a:prstGeom>
+        </p:spPr>
+        <p:style>
+          <a:lnRef idx="2">
+            <a:schemeClr val="accent2"/>
+          </a:lnRef>
+          <a:fillRef idx="1">
+            <a:schemeClr val="lt1"/>
+          </a:fillRef>
+          <a:effectRef idx="0">
+            <a:schemeClr val="accent2"/>
+          </a:effectRef>
+          <a:fontRef idx="minor">
+            <a:schemeClr val="dk1"/>
+          </a:fontRef>
+        </p:style>
+        <p:txBody>
+          <a:bodyPr rtlCol="0" anchor="ctr"/>
+          <a:lstStyle/>
+          <a:p>
+            <a:pPr algn="ctr"/>
+            <a:r>
+              <a:rPr lang="en-US" altLang="ja-JP" dirty="0"/>
+              <a:t>[3, 3, 9, 3, 1, 5, 3]</a:t>
+            </a:r>
+            <a:endParaRPr kumimoji="1" lang="ja-JP" altLang="en-US" dirty="0"/>
+          </a:p>
+        </p:txBody>
+      </p:sp>
+      <p:sp>
+        <p:nvSpPr>
+          <p:cNvPr id="10" name="矢印: 左カーブ 9">
+            <a:extLst>
+              <a:ext uri="{FF2B5EF4-FFF2-40B4-BE49-F238E27FC236}">
+                <a16:creationId xmlns:a16="http://schemas.microsoft.com/office/drawing/2014/main" id="{6FF7EF7A-7A8B-BD1A-C030-4D6D6641F2B3}"/>
+              </a:ext>
+            </a:extLst>
+          </p:cNvPr>
+          <p:cNvSpPr/>
+          <p:nvPr/>
+        </p:nvSpPr>
+        <p:spPr>
+          <a:xfrm>
+            <a:off x="3520287" y="2931910"/>
+            <a:ext cx="362077" cy="497090"/>
+          </a:xfrm>
+          <a:prstGeom prst="curvedLeftArrow">
+            <a:avLst/>
+          </a:prstGeom>
+        </p:spPr>
+        <p:style>
+          <a:lnRef idx="2">
+            <a:schemeClr val="accent1">
+              <a:shade val="15000"/>
+            </a:schemeClr>
+          </a:lnRef>
+          <a:fillRef idx="1">
+            <a:schemeClr val="accent1"/>
+          </a:fillRef>
+          <a:effectRef idx="0">
+            <a:schemeClr val="accent1"/>
+          </a:effectRef>
+          <a:fontRef idx="minor">
+            <a:schemeClr val="lt1"/>
+          </a:fontRef>
+        </p:style>
+        <p:txBody>
+          <a:bodyPr rtlCol="0" anchor="ctr"/>
+          <a:lstStyle/>
+          <a:p>
+            <a:pPr algn="ctr"/>
+            <a:endParaRPr kumimoji="1" lang="ja-JP" altLang="en-US" dirty="0">
+              <a:solidFill>
+                <a:schemeClr val="tx1"/>
+              </a:solidFill>
+            </a:endParaRPr>
+          </a:p>
+        </p:txBody>
+      </p:sp>
+      <p:sp>
+        <p:nvSpPr>
+          <p:cNvPr id="12" name="矢印: 左カーブ 11">
+            <a:extLst>
+              <a:ext uri="{FF2B5EF4-FFF2-40B4-BE49-F238E27FC236}">
+                <a16:creationId xmlns:a16="http://schemas.microsoft.com/office/drawing/2014/main" id="{AC798DC6-884E-FF5D-84E5-F759FA0ED399}"/>
+              </a:ext>
+            </a:extLst>
+          </p:cNvPr>
+          <p:cNvSpPr/>
+          <p:nvPr/>
+        </p:nvSpPr>
+        <p:spPr>
+          <a:xfrm>
+            <a:off x="3209607" y="4579445"/>
+            <a:ext cx="362077" cy="497090"/>
+          </a:xfrm>
+          <a:prstGeom prst="curvedLeftArrow">
+            <a:avLst/>
+          </a:prstGeom>
+        </p:spPr>
+        <p:style>
+          <a:lnRef idx="2">
+            <a:schemeClr val="accent1">
+              <a:shade val="15000"/>
+            </a:schemeClr>
+          </a:lnRef>
+          <a:fillRef idx="1">
+            <a:schemeClr val="accent1"/>
+          </a:fillRef>
+          <a:effectRef idx="0">
+            <a:schemeClr val="accent1"/>
+          </a:effectRef>
+          <a:fontRef idx="minor">
+            <a:schemeClr val="lt1"/>
+          </a:fontRef>
+        </p:style>
+        <p:txBody>
+          <a:bodyPr rtlCol="0" anchor="ctr"/>
+          <a:lstStyle/>
+          <a:p>
+            <a:pPr algn="ctr"/>
+            <a:endParaRPr kumimoji="1" lang="ja-JP" altLang="en-US">
+              <a:solidFill>
+                <a:schemeClr val="tx1"/>
+              </a:solidFill>
+            </a:endParaRPr>
+          </a:p>
+        </p:txBody>
+      </p:sp>
+      <p:sp>
+        <p:nvSpPr>
+          <p:cNvPr id="13" name="テキスト ボックス 12">
+            <a:extLst>
+              <a:ext uri="{FF2B5EF4-FFF2-40B4-BE49-F238E27FC236}">
+                <a16:creationId xmlns:a16="http://schemas.microsoft.com/office/drawing/2014/main" id="{CC544791-FC46-B4BC-1376-E7B9BFD7CB0A}"/>
+              </a:ext>
+            </a:extLst>
+          </p:cNvPr>
+          <p:cNvSpPr txBox="1"/>
+          <p:nvPr/>
+        </p:nvSpPr>
+        <p:spPr>
+          <a:xfrm>
+            <a:off x="3940663" y="2825950"/>
+            <a:ext cx="1224315" cy="646331"/>
+          </a:xfrm>
+          <a:prstGeom prst="rect">
+            <a:avLst/>
+          </a:prstGeom>
+          <a:noFill/>
+        </p:spPr>
+        <p:txBody>
+          <a:bodyPr wrap="square" rtlCol="0">
+            <a:spAutoFit/>
+          </a:bodyPr>
+          <a:lstStyle/>
+          <a:p>
+            <a:r>
+              <a:rPr kumimoji="1" lang="ja-JP" altLang="en-US" dirty="0"/>
+              <a:t>順番を</a:t>
+            </a:r>
+            <a:endParaRPr kumimoji="1" lang="en-US" altLang="ja-JP" dirty="0"/>
+          </a:p>
+          <a:p>
+            <a:r>
+              <a:rPr kumimoji="1" lang="ja-JP" altLang="en-US" dirty="0"/>
+              <a:t>逆にする</a:t>
+            </a:r>
+          </a:p>
+        </p:txBody>
+      </p:sp>
+      <p:sp>
+        <p:nvSpPr>
+          <p:cNvPr id="15" name="テキスト ボックス 14">
+            <a:extLst>
+              <a:ext uri="{FF2B5EF4-FFF2-40B4-BE49-F238E27FC236}">
+                <a16:creationId xmlns:a16="http://schemas.microsoft.com/office/drawing/2014/main" id="{1EF93AEF-924B-788A-5EFB-C92CCE1E1A2C}"/>
+              </a:ext>
+            </a:extLst>
+          </p:cNvPr>
+          <p:cNvSpPr txBox="1"/>
+          <p:nvPr/>
+        </p:nvSpPr>
+        <p:spPr>
+          <a:xfrm>
+            <a:off x="6781097" y="5156315"/>
+            <a:ext cx="5008102" cy="461665"/>
+          </a:xfrm>
+          <a:prstGeom prst="rect">
+            <a:avLst/>
+          </a:prstGeom>
+          <a:noFill/>
+        </p:spPr>
+        <p:txBody>
+          <a:bodyPr wrap="none" rtlCol="0">
+            <a:spAutoFit/>
+          </a:bodyPr>
+          <a:lstStyle/>
+          <a:p>
+            <a:r>
+              <a:rPr kumimoji="1" lang="ja-JP" altLang="en-US" sz="2400" dirty="0"/>
+              <a:t>このルールの問題は</a:t>
+            </a:r>
+            <a:r>
+              <a:rPr kumimoji="1" lang="en-US" altLang="ja-JP" sz="2400" dirty="0"/>
+              <a:t>10</a:t>
+            </a:r>
+            <a:r>
+              <a:rPr kumimoji="1" lang="ja-JP" altLang="en-US" sz="2400" dirty="0"/>
+              <a:t>問中</a:t>
+            </a:r>
+            <a:r>
+              <a:rPr kumimoji="1" lang="en-US" altLang="ja-JP" sz="2400" dirty="0"/>
+              <a:t>9</a:t>
+            </a:r>
+            <a:r>
+              <a:rPr kumimoji="1" lang="ja-JP" altLang="en-US" sz="2400" dirty="0"/>
+              <a:t>問正解</a:t>
+            </a:r>
           </a:p>
         </p:txBody>
       </p:sp>
@@ -8826,7 +9287,7 @@
           <p:cNvPr id="2" name="タイトル 1">
             <a:extLst>
               <a:ext uri="{FF2B5EF4-FFF2-40B4-BE49-F238E27FC236}">
-                <a16:creationId xmlns:a16="http://schemas.microsoft.com/office/drawing/2014/main" id="{38720CD7-B6E9-2737-5BF2-761BCC0B12C2}"/>
+                <a16:creationId xmlns:a16="http://schemas.microsoft.com/office/drawing/2014/main" id="{C412D798-2BBE-E6E3-EEA4-1903AE2CF90D}"/>
               </a:ext>
             </a:extLst>
           </p:cNvPr>
@@ -8843,12 +9304,8 @@
           <a:lstStyle/>
           <a:p>
             <a:r>
-              <a:rPr kumimoji="1" lang="ja-JP" altLang="en-US">
-                <a:solidFill>
-                  <a:srgbClr val="FF0000"/>
-                </a:solidFill>
-              </a:rPr>
-              <a:t>改善点</a:t>
+              <a:rPr kumimoji="1" lang="ja-JP" altLang="en-US" dirty="0"/>
+              <a:t>ベースモデルの正解例の出力</a:t>
             </a:r>
           </a:p>
         </p:txBody>
@@ -8858,15 +9315,109 @@
           <p:cNvPr id="3" name="コンテンツ プレースホルダー 2">
             <a:extLst>
               <a:ext uri="{FF2B5EF4-FFF2-40B4-BE49-F238E27FC236}">
-                <a16:creationId xmlns:a16="http://schemas.microsoft.com/office/drawing/2014/main" id="{017B691A-46C7-600E-7022-890D1BEC509F}"/>
-              </a:ext>
-            </a:extLst>
-          </p:cNvPr>
-          <p:cNvSpPr>
-            <a:spLocks noGrp="1"/>
-          </p:cNvSpPr>
-          <p:nvPr>
-            <p:ph idx="1"/>
+                <a16:creationId xmlns:a16="http://schemas.microsoft.com/office/drawing/2014/main" id="{D3122936-81E7-B1CF-7E17-E8438BA044A4}"/>
+              </a:ext>
+            </a:extLst>
+          </p:cNvPr>
+          <p:cNvSpPr>
+            <a:spLocks noGrp="1"/>
+          </p:cNvSpPr>
+          <p:nvPr>
+            <p:ph sz="half" idx="1"/>
+          </p:nvPr>
+        </p:nvSpPr>
+        <p:spPr>
+          <a:xfrm>
+            <a:off x="513455" y="1825625"/>
+            <a:ext cx="5506345" cy="4351338"/>
+          </a:xfrm>
+        </p:spPr>
+        <p:txBody>
+          <a:bodyPr/>
+          <a:lstStyle/>
+          <a:p>
+            <a:r>
+              <a:rPr kumimoji="1" lang="ja-JP" altLang="en-US" dirty="0"/>
+              <a:t>推論の過程を要約したもの</a:t>
+            </a:r>
+            <a:endParaRPr kumimoji="1" lang="en-US" altLang="ja-JP" dirty="0"/>
+          </a:p>
+          <a:p>
+            <a:pPr lvl="1"/>
+            <a:r>
+              <a:rPr kumimoji="1" lang="ja-JP" altLang="en-US" dirty="0"/>
+              <a:t>入出力例を比較し、数字の列の要素の位置関係を確認</a:t>
+            </a:r>
+            <a:endParaRPr kumimoji="1" lang="en-US" altLang="ja-JP" dirty="0"/>
+          </a:p>
+          <a:p>
+            <a:pPr lvl="1"/>
+            <a:r>
+              <a:rPr kumimoji="1" lang="en-US" altLang="ja-JP" dirty="0"/>
+              <a:t>Example 1</a:t>
+            </a:r>
+            <a:r>
+              <a:rPr kumimoji="1" lang="ja-JP" altLang="en-US" dirty="0"/>
+              <a:t>～</a:t>
+            </a:r>
+            <a:r>
+              <a:rPr kumimoji="1" lang="en-US" altLang="ja-JP" dirty="0"/>
+              <a:t>5</a:t>
+            </a:r>
+            <a:r>
+              <a:rPr kumimoji="1" lang="ja-JP" altLang="en-US" dirty="0"/>
+              <a:t>について、すべて入力配列の反転で出力されていることを確認</a:t>
+            </a:r>
+            <a:endParaRPr kumimoji="1" lang="en-US" altLang="ja-JP" dirty="0"/>
+          </a:p>
+          <a:p>
+            <a:pPr lvl="1"/>
+            <a:r>
+              <a:rPr lang="ja-JP" altLang="ja-JP" dirty="0"/>
+              <a:t>変換ルールを判断</a:t>
+            </a:r>
+            <a:endParaRPr lang="en-US" altLang="ja-JP" dirty="0"/>
+          </a:p>
+          <a:p>
+            <a:pPr lvl="1"/>
+            <a:r>
+              <a:rPr kumimoji="1" lang="en-US" altLang="ja-JP" dirty="0"/>
+              <a:t>Query</a:t>
+            </a:r>
+            <a:r>
+              <a:rPr lang="ja-JP" altLang="en-US" dirty="0"/>
+              <a:t>の数字の列にルール</a:t>
+            </a:r>
+            <a:r>
+              <a:rPr kumimoji="1" lang="ja-JP" altLang="en-US" dirty="0"/>
+              <a:t>を適用</a:t>
+            </a:r>
+            <a:endParaRPr kumimoji="1" lang="en-US" altLang="ja-JP" dirty="0"/>
+          </a:p>
+          <a:p>
+            <a:pPr lvl="1"/>
+            <a:r>
+              <a:rPr lang="ja-JP" altLang="en-US" dirty="0"/>
+              <a:t>これは要約したものなので本来はもっと長くて人間っぽい</a:t>
+            </a:r>
+            <a:endParaRPr kumimoji="1" lang="ja-JP" altLang="en-US" dirty="0"/>
+          </a:p>
+        </p:txBody>
+      </p:sp>
+      <p:sp>
+        <p:nvSpPr>
+          <p:cNvPr id="4" name="コンテンツ プレースホルダー 3">
+            <a:extLst>
+              <a:ext uri="{FF2B5EF4-FFF2-40B4-BE49-F238E27FC236}">
+                <a16:creationId xmlns:a16="http://schemas.microsoft.com/office/drawing/2014/main" id="{57821E49-1694-C7B2-EB7A-2B2AF23CFB5D}"/>
+              </a:ext>
+            </a:extLst>
+          </p:cNvPr>
+          <p:cNvSpPr>
+            <a:spLocks noGrp="1"/>
+          </p:cNvSpPr>
+          <p:nvPr>
+            <p:ph sz="half" idx="2"/>
           </p:nvPr>
         </p:nvSpPr>
         <p:spPr/>
@@ -8875,43 +9426,18 @@
           <a:lstStyle/>
           <a:p>
             <a:r>
-              <a:rPr kumimoji="1" lang="ja-JP" altLang="en-US"/>
-              <a:t>口語を改善</a:t>
-            </a:r>
-            <a:endParaRPr kumimoji="1" lang="en-US" altLang="ja-JP" dirty="0"/>
-          </a:p>
-          <a:p>
-            <a:r>
-              <a:rPr lang="ja-JP" altLang="en-US"/>
-              <a:t>全部→全体</a:t>
-            </a:r>
-            <a:endParaRPr lang="en-US" altLang="ja-JP" dirty="0"/>
-          </a:p>
-          <a:p>
-            <a:r>
-              <a:rPr kumimoji="1" lang="ja-JP" altLang="en-US"/>
-              <a:t>図版を入れる</a:t>
-            </a:r>
-            <a:endParaRPr kumimoji="1" lang="en-US" altLang="ja-JP" dirty="0"/>
-          </a:p>
-          <a:p>
-            <a:r>
-              <a:rPr kumimoji="1" lang="ja-JP" altLang="en-US"/>
-              <a:t>参考文献の引用の仕方を長くてもいいから、正式な形で</a:t>
-            </a:r>
-            <a:endParaRPr kumimoji="1" lang="en-US" altLang="ja-JP" dirty="0"/>
-          </a:p>
-          <a:p>
-            <a:endParaRPr kumimoji="1" lang="ja-JP" altLang="en-US"/>
-          </a:p>
-        </p:txBody>
-      </p:sp>
-      <p:sp>
-        <p:nvSpPr>
-          <p:cNvPr id="4" name="スライド番号プレースホルダー 3">
-            <a:extLst>
-              <a:ext uri="{FF2B5EF4-FFF2-40B4-BE49-F238E27FC236}">
-                <a16:creationId xmlns:a16="http://schemas.microsoft.com/office/drawing/2014/main" id="{93BC64FA-8AD0-6880-8F88-5A3BAAA07F95}"/>
+              <a:rPr kumimoji="1" lang="ja-JP" altLang="en-US" dirty="0"/>
+              <a:t>最終的な回答</a:t>
+            </a:r>
+          </a:p>
+        </p:txBody>
+      </p:sp>
+      <p:sp>
+        <p:nvSpPr>
+          <p:cNvPr id="5" name="スライド番号プレースホルダー 4">
+            <a:extLst>
+              <a:ext uri="{FF2B5EF4-FFF2-40B4-BE49-F238E27FC236}">
+                <a16:creationId xmlns:a16="http://schemas.microsoft.com/office/drawing/2014/main" id="{A1236A5F-946F-ED10-78D1-F3130C3C9978}"/>
               </a:ext>
             </a:extLst>
           </p:cNvPr>
@@ -8935,10 +9461,1415 @@
           </a:p>
         </p:txBody>
       </p:sp>
+      <p:sp>
+        <p:nvSpPr>
+          <p:cNvPr id="6" name="四角形: 角を丸くする 5">
+            <a:extLst>
+              <a:ext uri="{FF2B5EF4-FFF2-40B4-BE49-F238E27FC236}">
+                <a16:creationId xmlns:a16="http://schemas.microsoft.com/office/drawing/2014/main" id="{58790FD5-3AC8-2E2B-DE89-52E22E6F82BF}"/>
+              </a:ext>
+            </a:extLst>
+          </p:cNvPr>
+          <p:cNvSpPr/>
+          <p:nvPr/>
+        </p:nvSpPr>
+        <p:spPr>
+          <a:xfrm>
+            <a:off x="6321020" y="2460902"/>
+            <a:ext cx="5357525" cy="3895448"/>
+          </a:xfrm>
+          <a:prstGeom prst="roundRect">
+            <a:avLst/>
+          </a:prstGeom>
+        </p:spPr>
+        <p:style>
+          <a:lnRef idx="2">
+            <a:schemeClr val="accent2"/>
+          </a:lnRef>
+          <a:fillRef idx="1">
+            <a:schemeClr val="lt1"/>
+          </a:fillRef>
+          <a:effectRef idx="0">
+            <a:schemeClr val="accent2"/>
+          </a:effectRef>
+          <a:fontRef idx="minor">
+            <a:schemeClr val="dk1"/>
+          </a:fontRef>
+        </p:style>
+        <p:txBody>
+          <a:bodyPr rtlCol="0" anchor="ctr"/>
+          <a:lstStyle/>
+          <a:p>
+            <a:r>
+              <a:rPr lang="en-US" altLang="ja-JP" dirty="0"/>
+              <a:t>The transformation rule appears to be reversing the input array. </a:t>
+            </a:r>
+          </a:p>
+          <a:p>
+            <a:endParaRPr lang="en-US" altLang="ja-JP" dirty="0"/>
+          </a:p>
+          <a:p>
+            <a:r>
+              <a:rPr lang="en-US" altLang="ja-JP" dirty="0"/>
+              <a:t>For the input `[3, 5, 1, 3, 9, 3, 3]`, reversing the elements gives:</a:t>
+            </a:r>
+          </a:p>
+          <a:p>
+            <a:endParaRPr lang="en-US" altLang="ja-JP" dirty="0"/>
+          </a:p>
+          <a:p>
+            <a:r>
+              <a:rPr lang="en-US" altLang="ja-JP" dirty="0"/>
+              <a:t>**Output:**  </a:t>
+            </a:r>
+          </a:p>
+          <a:p>
+            <a:r>
+              <a:rPr lang="en-US" altLang="ja-JP" dirty="0"/>
+              <a:t>[3, 3, 9, 3, 1, 5, 3]  </a:t>
+            </a:r>
+          </a:p>
+          <a:p>
+            <a:endParaRPr lang="en-US" altLang="ja-JP" dirty="0"/>
+          </a:p>
+          <a:p>
+            <a:r>
+              <a:rPr lang="en-US" altLang="ja-JP" dirty="0"/>
+              <a:t>**Final Answer:**  </a:t>
+            </a:r>
+          </a:p>
+          <a:p>
+            <a:r>
+              <a:rPr lang="en-US" altLang="ja-JP" dirty="0"/>
+              <a:t>[3, 3, 9, 3, 1, 5, 3]</a:t>
+            </a:r>
+            <a:endParaRPr kumimoji="1" lang="ja-JP" altLang="en-US" dirty="0"/>
+          </a:p>
+        </p:txBody>
+      </p:sp>
     </p:spTree>
     <p:extLst>
       <p:ext uri="{BB962C8B-B14F-4D97-AF65-F5344CB8AC3E}">
-        <p14:creationId xmlns:p14="http://schemas.microsoft.com/office/powerpoint/2010/main" val="3091403255"/>
+        <p14:creationId xmlns:p14="http://schemas.microsoft.com/office/powerpoint/2010/main" val="2345683214"/>
+      </p:ext>
+    </p:extLst>
+  </p:cSld>
+  <p:clrMapOvr>
+    <a:masterClrMapping/>
+  </p:clrMapOvr>
+</p:sld>
+</file>
+
+<file path=ppt/slides/slide26.xml><?xml version="1.0" encoding="utf-8"?>
+<p:sld xmlns:a="http://schemas.openxmlformats.org/drawingml/2006/main" xmlns:r="http://schemas.openxmlformats.org/officeDocument/2006/relationships" xmlns:p="http://schemas.openxmlformats.org/presentationml/2006/main">
+  <p:cSld>
+    <p:spTree>
+      <p:nvGrpSpPr>
+        <p:cNvPr id="1" name="">
+          <a:extLst>
+            <a:ext uri="{FF2B5EF4-FFF2-40B4-BE49-F238E27FC236}">
+              <a16:creationId xmlns:a16="http://schemas.microsoft.com/office/drawing/2014/main" id="{D0D68B1F-2F1B-312A-5FED-07643F9A6804}"/>
+            </a:ext>
+          </a:extLst>
+        </p:cNvPr>
+        <p:cNvGrpSpPr/>
+        <p:nvPr/>
+      </p:nvGrpSpPr>
+      <p:grpSpPr>
+        <a:xfrm>
+          <a:off x="0" y="0"/>
+          <a:ext cx="0" cy="0"/>
+          <a:chOff x="0" y="0"/>
+          <a:chExt cx="0" cy="0"/>
+        </a:xfrm>
+      </p:grpSpPr>
+      <p:sp>
+        <p:nvSpPr>
+          <p:cNvPr id="2" name="タイトル 1">
+            <a:extLst>
+              <a:ext uri="{FF2B5EF4-FFF2-40B4-BE49-F238E27FC236}">
+                <a16:creationId xmlns:a16="http://schemas.microsoft.com/office/drawing/2014/main" id="{FFA2410C-9B82-C206-0B16-F0A798FEFCA0}"/>
+              </a:ext>
+            </a:extLst>
+          </p:cNvPr>
+          <p:cNvSpPr>
+            <a:spLocks noGrp="1"/>
+          </p:cNvSpPr>
+          <p:nvPr>
+            <p:ph type="title"/>
+          </p:nvPr>
+        </p:nvSpPr>
+        <p:spPr>
+          <a:xfrm>
+            <a:off x="838200" y="0"/>
+            <a:ext cx="10515600" cy="1325563"/>
+          </a:xfrm>
+        </p:spPr>
+        <p:txBody>
+          <a:bodyPr/>
+          <a:lstStyle/>
+          <a:p>
+            <a:r>
+              <a:rPr lang="ja-JP" altLang="en-US" dirty="0"/>
+              <a:t>ベースモデルの失敗例の問題</a:t>
+            </a:r>
+            <a:endParaRPr kumimoji="1" lang="ja-JP" altLang="en-US" dirty="0"/>
+          </a:p>
+        </p:txBody>
+      </p:sp>
+      <p:sp>
+        <p:nvSpPr>
+          <p:cNvPr id="4" name="スライド番号プレースホルダー 3">
+            <a:extLst>
+              <a:ext uri="{FF2B5EF4-FFF2-40B4-BE49-F238E27FC236}">
+                <a16:creationId xmlns:a16="http://schemas.microsoft.com/office/drawing/2014/main" id="{F8619CE9-C287-0A52-9774-EB5D9EEA3E7B}"/>
+              </a:ext>
+            </a:extLst>
+          </p:cNvPr>
+          <p:cNvSpPr>
+            <a:spLocks noGrp="1"/>
+          </p:cNvSpPr>
+          <p:nvPr>
+            <p:ph type="sldNum" sz="quarter" idx="12"/>
+          </p:nvPr>
+        </p:nvSpPr>
+        <p:spPr/>
+        <p:txBody>
+          <a:bodyPr/>
+          <a:lstStyle/>
+          <a:p>
+            <a:fld id="{10649E7B-FC1B-418B-9B6A-00859DB1DEE8}" type="slidenum">
+              <a:rPr kumimoji="1" lang="ja-JP" altLang="en-US" smtClean="0"/>
+              <a:t>26</a:t>
+            </a:fld>
+            <a:endParaRPr kumimoji="1" lang="ja-JP" altLang="en-US"/>
+          </a:p>
+        </p:txBody>
+      </p:sp>
+      <p:sp>
+        <p:nvSpPr>
+          <p:cNvPr id="5" name="四角形: 角を丸くする 4">
+            <a:extLst>
+              <a:ext uri="{FF2B5EF4-FFF2-40B4-BE49-F238E27FC236}">
+                <a16:creationId xmlns:a16="http://schemas.microsoft.com/office/drawing/2014/main" id="{89275AA3-6EF3-6356-1372-08F09AA55C1C}"/>
+              </a:ext>
+            </a:extLst>
+          </p:cNvPr>
+          <p:cNvSpPr/>
+          <p:nvPr/>
+        </p:nvSpPr>
+        <p:spPr>
+          <a:xfrm>
+            <a:off x="1067823" y="914400"/>
+            <a:ext cx="4559726" cy="5854615"/>
+          </a:xfrm>
+          <a:prstGeom prst="roundRect">
+            <a:avLst/>
+          </a:prstGeom>
+        </p:spPr>
+        <p:style>
+          <a:lnRef idx="2">
+            <a:schemeClr val="accent1"/>
+          </a:lnRef>
+          <a:fillRef idx="1">
+            <a:schemeClr val="lt1"/>
+          </a:fillRef>
+          <a:effectRef idx="0">
+            <a:schemeClr val="accent1"/>
+          </a:effectRef>
+          <a:fontRef idx="minor">
+            <a:schemeClr val="dk1"/>
+          </a:fontRef>
+        </p:style>
+        <p:txBody>
+          <a:bodyPr rtlCol="0" anchor="ctr"/>
+          <a:lstStyle/>
+          <a:p>
+            <a:r>
+              <a:rPr lang="en-US" altLang="ja-JP" dirty="0"/>
+              <a:t>Infer the transformation rule from examples.</a:t>
+            </a:r>
+          </a:p>
+          <a:p>
+            <a:r>
+              <a:rPr lang="en-US" altLang="ja-JP" dirty="0"/>
+              <a:t>Output the final array.</a:t>
+            </a:r>
+          </a:p>
+          <a:p>
+            <a:r>
+              <a:rPr lang="en-US" altLang="ja-JP" dirty="0"/>
+              <a:t>        </a:t>
+            </a:r>
+          </a:p>
+          <a:p>
+            <a:r>
+              <a:rPr lang="en-US" altLang="ja-JP" dirty="0"/>
+              <a:t>Example 1</a:t>
+            </a:r>
+          </a:p>
+          <a:p>
+            <a:r>
+              <a:rPr lang="en-US" altLang="ja-JP" dirty="0"/>
+              <a:t>Input:</a:t>
+            </a:r>
+          </a:p>
+          <a:p>
+            <a:r>
+              <a:rPr lang="en-US" altLang="ja-JP" dirty="0"/>
+              <a:t>[4, 5, 8, 0, 7, 3, 0, 2, 1]</a:t>
+            </a:r>
+          </a:p>
+          <a:p>
+            <a:r>
+              <a:rPr lang="en-US" altLang="ja-JP" dirty="0"/>
+              <a:t>Output:</a:t>
+            </a:r>
+          </a:p>
+          <a:p>
+            <a:r>
+              <a:rPr lang="en-US" altLang="ja-JP" dirty="0"/>
+              <a:t>[1, 2, 0, 3, 7, 0, 8, 5, 4]</a:t>
+            </a:r>
+          </a:p>
+          <a:p>
+            <a:endParaRPr lang="en-US" altLang="ja-JP" dirty="0"/>
+          </a:p>
+          <a:p>
+            <a:r>
+              <a:rPr lang="en-US" altLang="ja-JP" dirty="0"/>
+              <a:t>Example 2</a:t>
+            </a:r>
+          </a:p>
+          <a:p>
+            <a:r>
+              <a:rPr lang="en-US" altLang="ja-JP" dirty="0"/>
+              <a:t>Input:</a:t>
+            </a:r>
+          </a:p>
+          <a:p>
+            <a:r>
+              <a:rPr lang="en-US" altLang="ja-JP" dirty="0"/>
+              <a:t>[7, 3, 6, 8, 1, 9, 3]</a:t>
+            </a:r>
+          </a:p>
+          <a:p>
+            <a:r>
+              <a:rPr lang="en-US" altLang="ja-JP" dirty="0"/>
+              <a:t>Output:</a:t>
+            </a:r>
+          </a:p>
+          <a:p>
+            <a:r>
+              <a:rPr lang="en-US" altLang="ja-JP" dirty="0"/>
+              <a:t>[3, 9, 1, 8, 6, 3, 7]</a:t>
+            </a:r>
+          </a:p>
+          <a:p>
+            <a:endParaRPr lang="en-US" altLang="ja-JP" dirty="0"/>
+          </a:p>
+          <a:p>
+            <a:r>
+              <a:rPr lang="en-US" altLang="ja-JP" dirty="0"/>
+              <a:t>Query</a:t>
+            </a:r>
+          </a:p>
+          <a:p>
+            <a:r>
+              <a:rPr lang="en-US" altLang="ja-JP" dirty="0"/>
+              <a:t>Input:</a:t>
+            </a:r>
+          </a:p>
+          <a:p>
+            <a:r>
+              <a:rPr lang="en-US" altLang="ja-JP" dirty="0"/>
+              <a:t>[5, 3, 8, 3, 2, 3, 6]</a:t>
+            </a:r>
+          </a:p>
+          <a:p>
+            <a:r>
+              <a:rPr lang="en-US" altLang="ja-JP" dirty="0"/>
+              <a:t>Output:</a:t>
+            </a:r>
+            <a:endParaRPr kumimoji="1" lang="ja-JP" altLang="en-US" dirty="0"/>
+          </a:p>
+        </p:txBody>
+      </p:sp>
+      <p:sp>
+        <p:nvSpPr>
+          <p:cNvPr id="7" name="テキスト ボックス 6">
+            <a:extLst>
+              <a:ext uri="{FF2B5EF4-FFF2-40B4-BE49-F238E27FC236}">
+                <a16:creationId xmlns:a16="http://schemas.microsoft.com/office/drawing/2014/main" id="{5E8CD76C-7B51-C504-1F58-E7C8DEAD41F3}"/>
+              </a:ext>
+            </a:extLst>
+          </p:cNvPr>
+          <p:cNvSpPr txBox="1"/>
+          <p:nvPr/>
+        </p:nvSpPr>
+        <p:spPr>
+          <a:xfrm>
+            <a:off x="284202" y="2164231"/>
+            <a:ext cx="553998" cy="2246769"/>
+          </a:xfrm>
+          <a:prstGeom prst="rect">
+            <a:avLst/>
+          </a:prstGeom>
+          <a:noFill/>
+        </p:spPr>
+        <p:txBody>
+          <a:bodyPr vert="eaVert" wrap="none" rtlCol="0">
+            <a:spAutoFit/>
+          </a:bodyPr>
+          <a:lstStyle/>
+          <a:p>
+            <a:r>
+              <a:rPr lang="ja-JP" altLang="en-US" sz="2400" dirty="0"/>
+              <a:t>実際は５つの例</a:t>
+            </a:r>
+            <a:endParaRPr kumimoji="1" lang="ja-JP" altLang="en-US" sz="2400" dirty="0"/>
+          </a:p>
+        </p:txBody>
+      </p:sp>
+      <p:sp>
+        <p:nvSpPr>
+          <p:cNvPr id="8" name="四角形: 角を丸くする 7">
+            <a:extLst>
+              <a:ext uri="{FF2B5EF4-FFF2-40B4-BE49-F238E27FC236}">
+                <a16:creationId xmlns:a16="http://schemas.microsoft.com/office/drawing/2014/main" id="{D3919A50-C0BE-99B6-36CD-302F20A8B1C7}"/>
+              </a:ext>
+            </a:extLst>
+          </p:cNvPr>
+          <p:cNvSpPr/>
+          <p:nvPr/>
+        </p:nvSpPr>
+        <p:spPr>
+          <a:xfrm>
+            <a:off x="7572950" y="2902760"/>
+            <a:ext cx="3375302" cy="2025181"/>
+          </a:xfrm>
+          <a:prstGeom prst="roundRect">
+            <a:avLst/>
+          </a:prstGeom>
+        </p:spPr>
+        <p:style>
+          <a:lnRef idx="2">
+            <a:schemeClr val="accent2"/>
+          </a:lnRef>
+          <a:fillRef idx="1">
+            <a:schemeClr val="lt1"/>
+          </a:fillRef>
+          <a:effectRef idx="0">
+            <a:schemeClr val="accent2"/>
+          </a:effectRef>
+          <a:fontRef idx="minor">
+            <a:schemeClr val="dk1"/>
+          </a:fontRef>
+        </p:style>
+        <p:txBody>
+          <a:bodyPr rtlCol="0" anchor="ctr"/>
+          <a:lstStyle/>
+          <a:p>
+            <a:pPr algn="ctr"/>
+            <a:r>
+              <a:rPr lang="en-US" altLang="ja-JP" dirty="0"/>
+              <a:t>[6, 3, 2, 3, 8, 3, 5]</a:t>
+            </a:r>
+            <a:endParaRPr kumimoji="1" lang="ja-JP" altLang="en-US" dirty="0"/>
+          </a:p>
+        </p:txBody>
+      </p:sp>
+      <p:sp>
+        <p:nvSpPr>
+          <p:cNvPr id="10" name="矢印: 左カーブ 9">
+            <a:extLst>
+              <a:ext uri="{FF2B5EF4-FFF2-40B4-BE49-F238E27FC236}">
+                <a16:creationId xmlns:a16="http://schemas.microsoft.com/office/drawing/2014/main" id="{94D615A8-F578-36A2-94AB-69D07F3F2AF3}"/>
+              </a:ext>
+            </a:extLst>
+          </p:cNvPr>
+          <p:cNvSpPr/>
+          <p:nvPr/>
+        </p:nvSpPr>
+        <p:spPr>
+          <a:xfrm>
+            <a:off x="3717177" y="2919636"/>
+            <a:ext cx="362077" cy="497090"/>
+          </a:xfrm>
+          <a:prstGeom prst="curvedLeftArrow">
+            <a:avLst/>
+          </a:prstGeom>
+        </p:spPr>
+        <p:style>
+          <a:lnRef idx="2">
+            <a:schemeClr val="accent1">
+              <a:shade val="15000"/>
+            </a:schemeClr>
+          </a:lnRef>
+          <a:fillRef idx="1">
+            <a:schemeClr val="accent1"/>
+          </a:fillRef>
+          <a:effectRef idx="0">
+            <a:schemeClr val="accent1"/>
+          </a:effectRef>
+          <a:fontRef idx="minor">
+            <a:schemeClr val="lt1"/>
+          </a:fontRef>
+        </p:style>
+        <p:txBody>
+          <a:bodyPr rtlCol="0" anchor="ctr"/>
+          <a:lstStyle/>
+          <a:p>
+            <a:pPr algn="ctr"/>
+            <a:endParaRPr kumimoji="1" lang="ja-JP" altLang="en-US" dirty="0">
+              <a:solidFill>
+                <a:schemeClr val="tx1"/>
+              </a:solidFill>
+            </a:endParaRPr>
+          </a:p>
+        </p:txBody>
+      </p:sp>
+      <p:sp>
+        <p:nvSpPr>
+          <p:cNvPr id="12" name="矢印: 左カーブ 11">
+            <a:extLst>
+              <a:ext uri="{FF2B5EF4-FFF2-40B4-BE49-F238E27FC236}">
+                <a16:creationId xmlns:a16="http://schemas.microsoft.com/office/drawing/2014/main" id="{1C430DC6-FF89-E17C-4556-7A923DCAB7FE}"/>
+              </a:ext>
+            </a:extLst>
+          </p:cNvPr>
+          <p:cNvSpPr/>
+          <p:nvPr/>
+        </p:nvSpPr>
+        <p:spPr>
+          <a:xfrm>
+            <a:off x="3209607" y="4579445"/>
+            <a:ext cx="362077" cy="497090"/>
+          </a:xfrm>
+          <a:prstGeom prst="curvedLeftArrow">
+            <a:avLst/>
+          </a:prstGeom>
+        </p:spPr>
+        <p:style>
+          <a:lnRef idx="2">
+            <a:schemeClr val="accent1">
+              <a:shade val="15000"/>
+            </a:schemeClr>
+          </a:lnRef>
+          <a:fillRef idx="1">
+            <a:schemeClr val="accent1"/>
+          </a:fillRef>
+          <a:effectRef idx="0">
+            <a:schemeClr val="accent1"/>
+          </a:effectRef>
+          <a:fontRef idx="minor">
+            <a:schemeClr val="lt1"/>
+          </a:fontRef>
+        </p:style>
+        <p:txBody>
+          <a:bodyPr rtlCol="0" anchor="ctr"/>
+          <a:lstStyle/>
+          <a:p>
+            <a:pPr algn="ctr"/>
+            <a:endParaRPr kumimoji="1" lang="ja-JP" altLang="en-US">
+              <a:solidFill>
+                <a:schemeClr val="tx1"/>
+              </a:solidFill>
+            </a:endParaRPr>
+          </a:p>
+        </p:txBody>
+      </p:sp>
+      <p:sp>
+        <p:nvSpPr>
+          <p:cNvPr id="13" name="テキスト ボックス 12">
+            <a:extLst>
+              <a:ext uri="{FF2B5EF4-FFF2-40B4-BE49-F238E27FC236}">
+                <a16:creationId xmlns:a16="http://schemas.microsoft.com/office/drawing/2014/main" id="{6B0BB685-D41D-BD05-3DE8-8719B15289CE}"/>
+              </a:ext>
+            </a:extLst>
+          </p:cNvPr>
+          <p:cNvSpPr txBox="1"/>
+          <p:nvPr/>
+        </p:nvSpPr>
+        <p:spPr>
+          <a:xfrm>
+            <a:off x="4149318" y="2845015"/>
+            <a:ext cx="1224315" cy="646331"/>
+          </a:xfrm>
+          <a:prstGeom prst="rect">
+            <a:avLst/>
+          </a:prstGeom>
+          <a:noFill/>
+        </p:spPr>
+        <p:txBody>
+          <a:bodyPr wrap="square" rtlCol="0">
+            <a:spAutoFit/>
+          </a:bodyPr>
+          <a:lstStyle/>
+          <a:p>
+            <a:r>
+              <a:rPr kumimoji="1" lang="ja-JP" altLang="en-US" dirty="0"/>
+              <a:t>順番を</a:t>
+            </a:r>
+            <a:endParaRPr kumimoji="1" lang="en-US" altLang="ja-JP" dirty="0"/>
+          </a:p>
+          <a:p>
+            <a:r>
+              <a:rPr kumimoji="1" lang="ja-JP" altLang="en-US" dirty="0"/>
+              <a:t>逆にする</a:t>
+            </a:r>
+          </a:p>
+        </p:txBody>
+      </p:sp>
+    </p:spTree>
+    <p:extLst>
+      <p:ext uri="{BB962C8B-B14F-4D97-AF65-F5344CB8AC3E}">
+        <p14:creationId xmlns:p14="http://schemas.microsoft.com/office/powerpoint/2010/main" val="350051694"/>
+      </p:ext>
+    </p:extLst>
+  </p:cSld>
+  <p:clrMapOvr>
+    <a:masterClrMapping/>
+  </p:clrMapOvr>
+</p:sld>
+</file>
+
+<file path=ppt/slides/slide27.xml><?xml version="1.0" encoding="utf-8"?>
+<p:sld xmlns:a="http://schemas.openxmlformats.org/drawingml/2006/main" xmlns:r="http://schemas.openxmlformats.org/officeDocument/2006/relationships" xmlns:p="http://schemas.openxmlformats.org/presentationml/2006/main">
+  <p:cSld>
+    <p:spTree>
+      <p:nvGrpSpPr>
+        <p:cNvPr id="1" name=""/>
+        <p:cNvGrpSpPr/>
+        <p:nvPr/>
+      </p:nvGrpSpPr>
+      <p:grpSpPr>
+        <a:xfrm>
+          <a:off x="0" y="0"/>
+          <a:ext cx="0" cy="0"/>
+          <a:chOff x="0" y="0"/>
+          <a:chExt cx="0" cy="0"/>
+        </a:xfrm>
+      </p:grpSpPr>
+      <p:sp>
+        <p:nvSpPr>
+          <p:cNvPr id="2" name="タイトル 1">
+            <a:extLst>
+              <a:ext uri="{FF2B5EF4-FFF2-40B4-BE49-F238E27FC236}">
+                <a16:creationId xmlns:a16="http://schemas.microsoft.com/office/drawing/2014/main" id="{3A6EFDDD-24EA-533A-EA8C-44F3C2BC1330}"/>
+              </a:ext>
+            </a:extLst>
+          </p:cNvPr>
+          <p:cNvSpPr>
+            <a:spLocks noGrp="1"/>
+          </p:cNvSpPr>
+          <p:nvPr>
+            <p:ph type="title"/>
+          </p:nvPr>
+        </p:nvSpPr>
+        <p:spPr/>
+        <p:txBody>
+          <a:bodyPr/>
+          <a:lstStyle/>
+          <a:p>
+            <a:r>
+              <a:rPr kumimoji="1" lang="ja-JP" altLang="en-US" dirty="0"/>
+              <a:t>ベースモデルの失敗例の出力</a:t>
+            </a:r>
+          </a:p>
+        </p:txBody>
+      </p:sp>
+      <p:sp>
+        <p:nvSpPr>
+          <p:cNvPr id="3" name="コンテンツ プレースホルダー 2">
+            <a:extLst>
+              <a:ext uri="{FF2B5EF4-FFF2-40B4-BE49-F238E27FC236}">
+                <a16:creationId xmlns:a16="http://schemas.microsoft.com/office/drawing/2014/main" id="{03F8DA47-42F0-9BA5-A0F2-8569EC45224C}"/>
+              </a:ext>
+            </a:extLst>
+          </p:cNvPr>
+          <p:cNvSpPr>
+            <a:spLocks noGrp="1"/>
+          </p:cNvSpPr>
+          <p:nvPr>
+            <p:ph idx="1"/>
+          </p:nvPr>
+        </p:nvSpPr>
+        <p:spPr/>
+        <p:txBody>
+          <a:bodyPr/>
+          <a:lstStyle/>
+          <a:p>
+            <a:r>
+              <a:rPr lang="ja-JP" altLang="en-US" dirty="0"/>
+              <a:t>推論の過程を要約したもの</a:t>
+            </a:r>
+            <a:endParaRPr lang="en-US" altLang="ja-JP" dirty="0"/>
+          </a:p>
+          <a:p>
+            <a:pPr lvl="1"/>
+            <a:r>
+              <a:rPr lang="ja-JP" altLang="ja-JP" dirty="0"/>
+              <a:t>Example 1から出力の要素位置を確認</a:t>
+            </a:r>
+            <a:endParaRPr lang="en-US" altLang="ja-JP" dirty="0"/>
+          </a:p>
+          <a:p>
+            <a:pPr lvl="1"/>
+            <a:r>
+              <a:rPr lang="ja-JP" altLang="en-US" dirty="0"/>
+              <a:t>「順序を逆にするルール」</a:t>
+            </a:r>
+            <a:r>
+              <a:rPr kumimoji="1" lang="ja-JP" altLang="en-US" dirty="0"/>
+              <a:t>の可能性を検討するが、途中で否定 </a:t>
+            </a:r>
+          </a:p>
+          <a:p>
+            <a:pPr lvl="1"/>
+            <a:r>
+              <a:rPr kumimoji="1" lang="en-US" altLang="ja-JP" dirty="0"/>
+              <a:t>Example 2</a:t>
+            </a:r>
+            <a:r>
+              <a:rPr kumimoji="1" lang="ja-JP" altLang="en-US" dirty="0"/>
+              <a:t>以降について、要素の位置関係を繰り返し検討 </a:t>
+            </a:r>
+          </a:p>
+          <a:p>
+            <a:pPr lvl="1"/>
+            <a:r>
+              <a:rPr kumimoji="1" lang="ja-JP" altLang="en-US" dirty="0"/>
+              <a:t>明確なルールを特定できないまま推論が長大化</a:t>
+            </a:r>
+            <a:endParaRPr kumimoji="1" lang="en-US" altLang="ja-JP" dirty="0"/>
+          </a:p>
+          <a:p>
+            <a:pPr lvl="2"/>
+            <a:r>
+              <a:rPr lang="ja-JP" altLang="en-US" dirty="0"/>
+              <a:t>ただ当てはまりそうなルールを提示するだけで、検証はしなくなってしまった。</a:t>
+            </a:r>
+            <a:endParaRPr lang="en-US" altLang="ja-JP" dirty="0"/>
+          </a:p>
+          <a:p>
+            <a:pPr lvl="2"/>
+            <a:r>
+              <a:rPr lang="ja-JP" altLang="en-US" dirty="0"/>
+              <a:t>トークンの上限まで</a:t>
+            </a:r>
+            <a:r>
+              <a:rPr kumimoji="1" lang="ja-JP" altLang="en-US" dirty="0"/>
+              <a:t>ひたすらルールを提示し続ける</a:t>
+            </a:r>
+          </a:p>
+          <a:p>
+            <a:pPr lvl="1"/>
+            <a:r>
+              <a:rPr kumimoji="1" lang="ja-JP" altLang="en-US" dirty="0"/>
+              <a:t>最終的な変換ルール・出力を正しく導出できず</a:t>
+            </a:r>
+          </a:p>
+          <a:p>
+            <a:pPr lvl="1"/>
+            <a:endParaRPr kumimoji="1" lang="ja-JP" altLang="en-US" dirty="0"/>
+          </a:p>
+        </p:txBody>
+      </p:sp>
+      <p:sp>
+        <p:nvSpPr>
+          <p:cNvPr id="4" name="スライド番号プレースホルダー 3">
+            <a:extLst>
+              <a:ext uri="{FF2B5EF4-FFF2-40B4-BE49-F238E27FC236}">
+                <a16:creationId xmlns:a16="http://schemas.microsoft.com/office/drawing/2014/main" id="{11297AEC-7158-508A-7075-1BAD72FE4A54}"/>
+              </a:ext>
+            </a:extLst>
+          </p:cNvPr>
+          <p:cNvSpPr>
+            <a:spLocks noGrp="1"/>
+          </p:cNvSpPr>
+          <p:nvPr>
+            <p:ph type="sldNum" sz="quarter" idx="12"/>
+          </p:nvPr>
+        </p:nvSpPr>
+        <p:spPr/>
+        <p:txBody>
+          <a:bodyPr/>
+          <a:lstStyle/>
+          <a:p>
+            <a:fld id="{10649E7B-FC1B-418B-9B6A-00859DB1DEE8}" type="slidenum">
+              <a:rPr kumimoji="1" lang="ja-JP" altLang="en-US" smtClean="0"/>
+              <a:t>27</a:t>
+            </a:fld>
+            <a:endParaRPr kumimoji="1" lang="ja-JP" altLang="en-US"/>
+          </a:p>
+        </p:txBody>
+      </p:sp>
+    </p:spTree>
+    <p:extLst>
+      <p:ext uri="{BB962C8B-B14F-4D97-AF65-F5344CB8AC3E}">
+        <p14:creationId xmlns:p14="http://schemas.microsoft.com/office/powerpoint/2010/main" val="929041699"/>
+      </p:ext>
+    </p:extLst>
+  </p:cSld>
+  <p:clrMapOvr>
+    <a:masterClrMapping/>
+  </p:clrMapOvr>
+</p:sld>
+</file>
+
+<file path=ppt/slides/slide28.xml><?xml version="1.0" encoding="utf-8"?>
+<p:sld xmlns:a="http://schemas.openxmlformats.org/drawingml/2006/main" xmlns:r="http://schemas.openxmlformats.org/officeDocument/2006/relationships" xmlns:p="http://schemas.openxmlformats.org/presentationml/2006/main">
+  <p:cSld>
+    <p:spTree>
+      <p:nvGrpSpPr>
+        <p:cNvPr id="1" name=""/>
+        <p:cNvGrpSpPr/>
+        <p:nvPr/>
+      </p:nvGrpSpPr>
+      <p:grpSpPr>
+        <a:xfrm>
+          <a:off x="0" y="0"/>
+          <a:ext cx="0" cy="0"/>
+          <a:chOff x="0" y="0"/>
+          <a:chExt cx="0" cy="0"/>
+        </a:xfrm>
+      </p:grpSpPr>
+      <p:sp>
+        <p:nvSpPr>
+          <p:cNvPr id="2" name="タイトル 1">
+            <a:extLst>
+              <a:ext uri="{FF2B5EF4-FFF2-40B4-BE49-F238E27FC236}">
+                <a16:creationId xmlns:a16="http://schemas.microsoft.com/office/drawing/2014/main" id="{9AE27B61-4FBB-E994-7E1C-334C4CEDA5D8}"/>
+              </a:ext>
+            </a:extLst>
+          </p:cNvPr>
+          <p:cNvSpPr>
+            <a:spLocks noGrp="1"/>
+          </p:cNvSpPr>
+          <p:nvPr>
+            <p:ph type="title"/>
+          </p:nvPr>
+        </p:nvSpPr>
+        <p:spPr/>
+        <p:txBody>
+          <a:bodyPr/>
+          <a:lstStyle/>
+          <a:p>
+            <a:r>
+              <a:rPr kumimoji="1" lang="ja-JP" altLang="en-US" dirty="0"/>
+              <a:t>ベースモデルの結果の詳細</a:t>
+            </a:r>
+          </a:p>
+        </p:txBody>
+      </p:sp>
+      <p:graphicFrame>
+        <p:nvGraphicFramePr>
+          <p:cNvPr id="5" name="コンテンツ プレースホルダー 4">
+            <a:extLst>
+              <a:ext uri="{FF2B5EF4-FFF2-40B4-BE49-F238E27FC236}">
+                <a16:creationId xmlns:a16="http://schemas.microsoft.com/office/drawing/2014/main" id="{7279F166-B80C-B875-0450-B896BED83A73}"/>
+              </a:ext>
+            </a:extLst>
+          </p:cNvPr>
+          <p:cNvGraphicFramePr>
+            <a:graphicFrameLocks noGrp="1"/>
+          </p:cNvGraphicFramePr>
+          <p:nvPr>
+            <p:ph idx="1"/>
+            <p:extLst>
+              <p:ext uri="{D42A27DB-BD31-4B8C-83A1-F6EECF244321}">
+                <p14:modId xmlns:p14="http://schemas.microsoft.com/office/powerpoint/2010/main" val="2570504440"/>
+              </p:ext>
+            </p:extLst>
+          </p:nvPr>
+        </p:nvGraphicFramePr>
+        <p:xfrm>
+          <a:off x="1748752" y="1969791"/>
+          <a:ext cx="8344668" cy="1583901"/>
+        </p:xfrm>
+        <a:graphic>
+          <a:graphicData uri="http://schemas.openxmlformats.org/drawingml/2006/table">
+            <a:tbl>
+              <a:tblPr firstRow="1" bandRow="1">
+                <a:tableStyleId>{5C22544A-7EE6-4342-B048-85BDC9FD1C3A}</a:tableStyleId>
+              </a:tblPr>
+              <a:tblGrid>
+                <a:gridCol w="2781556">
+                  <a:extLst>
+                    <a:ext uri="{9D8B030D-6E8A-4147-A177-3AD203B41FA5}">
+                      <a16:colId xmlns:a16="http://schemas.microsoft.com/office/drawing/2014/main" val="2394308489"/>
+                    </a:ext>
+                  </a:extLst>
+                </a:gridCol>
+                <a:gridCol w="2781556">
+                  <a:extLst>
+                    <a:ext uri="{9D8B030D-6E8A-4147-A177-3AD203B41FA5}">
+                      <a16:colId xmlns:a16="http://schemas.microsoft.com/office/drawing/2014/main" val="867807463"/>
+                    </a:ext>
+                  </a:extLst>
+                </a:gridCol>
+                <a:gridCol w="2781556">
+                  <a:extLst>
+                    <a:ext uri="{9D8B030D-6E8A-4147-A177-3AD203B41FA5}">
+                      <a16:colId xmlns:a16="http://schemas.microsoft.com/office/drawing/2014/main" val="2499767942"/>
+                    </a:ext>
+                  </a:extLst>
+                </a:gridCol>
+              </a:tblGrid>
+              <a:tr h="943821">
+                <a:tc>
+                  <a:txBody>
+                    <a:bodyPr/>
+                    <a:lstStyle/>
+                    <a:p>
+                      <a:pPr algn="ctr"/>
+                      <a:endParaRPr kumimoji="1" lang="ja-JP" altLang="en-US" dirty="0"/>
+                    </a:p>
+                  </a:txBody>
+                  <a:tcPr anchor="ctr"/>
+                </a:tc>
+                <a:tc>
+                  <a:txBody>
+                    <a:bodyPr/>
+                    <a:lstStyle/>
+                    <a:p>
+                      <a:pPr algn="ctr"/>
+                      <a:r>
+                        <a:rPr kumimoji="1" lang="ja-JP" altLang="en-US" dirty="0"/>
+                        <a:t>処理単体</a:t>
+                      </a:r>
+                    </a:p>
+                  </a:txBody>
+                  <a:tcPr anchor="ctr"/>
+                </a:tc>
+                <a:tc>
+                  <a:txBody>
+                    <a:bodyPr/>
+                    <a:lstStyle/>
+                    <a:p>
+                      <a:pPr algn="ctr"/>
+                      <a:r>
+                        <a:rPr kumimoji="1" lang="ja-JP" altLang="en-US" dirty="0"/>
+                        <a:t>２つの処理の組み合わせ</a:t>
+                      </a:r>
+                    </a:p>
+                  </a:txBody>
+                  <a:tcPr anchor="ctr"/>
+                </a:tc>
+                <a:extLst>
+                  <a:ext uri="{0D108BD9-81ED-4DB2-BD59-A6C34878D82A}">
+                    <a16:rowId xmlns:a16="http://schemas.microsoft.com/office/drawing/2014/main" val="2407331181"/>
+                  </a:ext>
+                </a:extLst>
+              </a:tr>
+              <a:tr h="546817">
+                <a:tc>
+                  <a:txBody>
+                    <a:bodyPr/>
+                    <a:lstStyle/>
+                    <a:p>
+                      <a:pPr algn="ctr"/>
+                      <a:r>
+                        <a:rPr kumimoji="1" lang="ja-JP" altLang="en-US" dirty="0"/>
+                        <a:t>テストデータその</a:t>
+                      </a:r>
+                      <a:r>
+                        <a:rPr kumimoji="1" lang="en-US" altLang="ja-JP" dirty="0"/>
+                        <a:t>1</a:t>
+                      </a:r>
+                      <a:endParaRPr kumimoji="1" lang="ja-JP" altLang="en-US" dirty="0"/>
+                    </a:p>
+                  </a:txBody>
+                  <a:tcPr anchor="ctr"/>
+                </a:tc>
+                <a:tc>
+                  <a:txBody>
+                    <a:bodyPr/>
+                    <a:lstStyle/>
+                    <a:p>
+                      <a:pPr algn="ctr"/>
+                      <a:r>
+                        <a:rPr kumimoji="1" lang="en-US" altLang="zh-TW" dirty="0"/>
+                        <a:t>205/</a:t>
+                      </a:r>
+                      <a:r>
+                        <a:rPr kumimoji="1" lang="ja-JP" altLang="ja-JP" sz="1800" b="0" i="0" kern="1200" dirty="0">
+                          <a:solidFill>
+                            <a:schemeClr val="dk1"/>
+                          </a:solidFill>
+                          <a:effectLst/>
+                          <a:latin typeface="+mn-lt"/>
+                          <a:ea typeface="+mn-ea"/>
+                          <a:cs typeface="+mn-cs"/>
+                        </a:rPr>
+                        <a:t>240</a:t>
+                      </a:r>
+                      <a:endParaRPr kumimoji="1" lang="en-US" altLang="ja-JP" sz="1800" b="0" i="0" kern="1200" dirty="0">
+                        <a:solidFill>
+                          <a:schemeClr val="dk1"/>
+                        </a:solidFill>
+                        <a:effectLst/>
+                        <a:latin typeface="+mn-lt"/>
+                        <a:ea typeface="+mn-ea"/>
+                        <a:cs typeface="+mn-cs"/>
+                      </a:endParaRPr>
+                    </a:p>
+                    <a:p>
+                      <a:pPr algn="ctr"/>
+                      <a:r>
+                        <a:rPr kumimoji="1" lang="en-US" altLang="ja-JP" sz="1800" b="0" i="0" kern="1200" dirty="0">
+                          <a:solidFill>
+                            <a:schemeClr val="dk1"/>
+                          </a:solidFill>
+                          <a:effectLst/>
+                          <a:latin typeface="+mn-lt"/>
+                          <a:ea typeface="+mn-ea"/>
+                          <a:cs typeface="+mn-cs"/>
+                        </a:rPr>
+                        <a:t>85.4%</a:t>
+                      </a:r>
+                      <a:endParaRPr kumimoji="1" lang="ja-JP" altLang="en-US" dirty="0"/>
+                    </a:p>
+                  </a:txBody>
+                  <a:tcPr anchor="ctr"/>
+                </a:tc>
+                <a:tc>
+                  <a:txBody>
+                    <a:bodyPr/>
+                    <a:lstStyle/>
+                    <a:p>
+                      <a:pPr algn="ctr"/>
+                      <a:r>
+                        <a:rPr kumimoji="1" lang="en-US" altLang="zh-TW" dirty="0"/>
+                        <a:t>106/480</a:t>
+                      </a:r>
+                    </a:p>
+                    <a:p>
+                      <a:pPr algn="ctr"/>
+                      <a:r>
+                        <a:rPr kumimoji="1" lang="en-US" altLang="ja-JP" dirty="0"/>
+                        <a:t>22.0%</a:t>
+                      </a:r>
+                      <a:endParaRPr kumimoji="1" lang="ja-JP" altLang="en-US" dirty="0"/>
+                    </a:p>
+                  </a:txBody>
+                  <a:tcPr anchor="ctr"/>
+                </a:tc>
+                <a:extLst>
+                  <a:ext uri="{0D108BD9-81ED-4DB2-BD59-A6C34878D82A}">
+                    <a16:rowId xmlns:a16="http://schemas.microsoft.com/office/drawing/2014/main" val="4205910191"/>
+                  </a:ext>
+                </a:extLst>
+              </a:tr>
+            </a:tbl>
+          </a:graphicData>
+        </a:graphic>
+      </p:graphicFrame>
+      <p:sp>
+        <p:nvSpPr>
+          <p:cNvPr id="4" name="スライド番号プレースホルダー 3">
+            <a:extLst>
+              <a:ext uri="{FF2B5EF4-FFF2-40B4-BE49-F238E27FC236}">
+                <a16:creationId xmlns:a16="http://schemas.microsoft.com/office/drawing/2014/main" id="{F799C344-A712-0077-0E44-1C8A0DE565D2}"/>
+              </a:ext>
+            </a:extLst>
+          </p:cNvPr>
+          <p:cNvSpPr>
+            <a:spLocks noGrp="1"/>
+          </p:cNvSpPr>
+          <p:nvPr>
+            <p:ph type="sldNum" sz="quarter" idx="12"/>
+          </p:nvPr>
+        </p:nvSpPr>
+        <p:spPr/>
+        <p:txBody>
+          <a:bodyPr/>
+          <a:lstStyle/>
+          <a:p>
+            <a:fld id="{10649E7B-FC1B-418B-9B6A-00859DB1DEE8}" type="slidenum">
+              <a:rPr kumimoji="1" lang="ja-JP" altLang="en-US" smtClean="0"/>
+              <a:t>28</a:t>
+            </a:fld>
+            <a:endParaRPr kumimoji="1" lang="ja-JP" altLang="en-US"/>
+          </a:p>
+        </p:txBody>
+      </p:sp>
+      <p:sp>
+        <p:nvSpPr>
+          <p:cNvPr id="7" name="テキスト ボックス 6">
+            <a:extLst>
+              <a:ext uri="{FF2B5EF4-FFF2-40B4-BE49-F238E27FC236}">
+                <a16:creationId xmlns:a16="http://schemas.microsoft.com/office/drawing/2014/main" id="{D6C6A9B0-C16C-55CF-DF0C-E86F564BC0B6}"/>
+              </a:ext>
+            </a:extLst>
+          </p:cNvPr>
+          <p:cNvSpPr txBox="1"/>
+          <p:nvPr/>
+        </p:nvSpPr>
+        <p:spPr>
+          <a:xfrm>
+            <a:off x="928255" y="6077247"/>
+            <a:ext cx="9985663" cy="369332"/>
+          </a:xfrm>
+          <a:prstGeom prst="rect">
+            <a:avLst/>
+          </a:prstGeom>
+          <a:noFill/>
+        </p:spPr>
+        <p:txBody>
+          <a:bodyPr wrap="square" rtlCol="0">
+            <a:spAutoFit/>
+          </a:bodyPr>
+          <a:lstStyle/>
+          <a:p>
+            <a:r>
+              <a:rPr kumimoji="1" lang="ja-JP" altLang="en-US" dirty="0"/>
+              <a:t>テストデータその</a:t>
+            </a:r>
+            <a:r>
+              <a:rPr kumimoji="1" lang="en-US" altLang="ja-JP" dirty="0"/>
+              <a:t>1</a:t>
+            </a:r>
+            <a:r>
+              <a:rPr kumimoji="1" lang="ja-JP" altLang="en-US" dirty="0"/>
+              <a:t>：</a:t>
+            </a:r>
+            <a:r>
+              <a:rPr lang="ja-JP" altLang="en-US" dirty="0"/>
+              <a:t>訓練用のデータの問題と同じルール</a:t>
+            </a:r>
+            <a:endParaRPr lang="en-US" altLang="ja-JP" dirty="0"/>
+          </a:p>
+        </p:txBody>
+      </p:sp>
+    </p:spTree>
+    <p:extLst>
+      <p:ext uri="{BB962C8B-B14F-4D97-AF65-F5344CB8AC3E}">
+        <p14:creationId xmlns:p14="http://schemas.microsoft.com/office/powerpoint/2010/main" val="985111080"/>
+      </p:ext>
+    </p:extLst>
+  </p:cSld>
+  <p:clrMapOvr>
+    <a:masterClrMapping/>
+  </p:clrMapOvr>
+</p:sld>
+</file>
+
+<file path=ppt/slides/slide29.xml><?xml version="1.0" encoding="utf-8"?>
+<p:sld xmlns:a="http://schemas.openxmlformats.org/drawingml/2006/main" xmlns:r="http://schemas.openxmlformats.org/officeDocument/2006/relationships" xmlns:p="http://schemas.openxmlformats.org/presentationml/2006/main">
+  <p:cSld>
+    <p:spTree>
+      <p:nvGrpSpPr>
+        <p:cNvPr id="1" name=""/>
+        <p:cNvGrpSpPr/>
+        <p:nvPr/>
+      </p:nvGrpSpPr>
+      <p:grpSpPr>
+        <a:xfrm>
+          <a:off x="0" y="0"/>
+          <a:ext cx="0" cy="0"/>
+          <a:chOff x="0" y="0"/>
+          <a:chExt cx="0" cy="0"/>
+        </a:xfrm>
+      </p:grpSpPr>
+      <p:sp>
+        <p:nvSpPr>
+          <p:cNvPr id="2" name="タイトル 1">
+            <a:extLst>
+              <a:ext uri="{FF2B5EF4-FFF2-40B4-BE49-F238E27FC236}">
+                <a16:creationId xmlns:a16="http://schemas.microsoft.com/office/drawing/2014/main" id="{1A1AAE79-F018-F4C9-B70B-A20BB0359BD1}"/>
+              </a:ext>
+            </a:extLst>
+          </p:cNvPr>
+          <p:cNvSpPr>
+            <a:spLocks noGrp="1"/>
+          </p:cNvSpPr>
+          <p:nvPr>
+            <p:ph type="title"/>
+          </p:nvPr>
+        </p:nvSpPr>
+        <p:spPr/>
+        <p:txBody>
+          <a:bodyPr/>
+          <a:lstStyle/>
+          <a:p>
+            <a:r>
+              <a:rPr lang="ja-JP" altLang="en-US" dirty="0"/>
+              <a:t>ベースモデルの結果の詳細</a:t>
+            </a:r>
+            <a:endParaRPr kumimoji="1" lang="ja-JP" altLang="en-US" dirty="0"/>
+          </a:p>
+        </p:txBody>
+      </p:sp>
+      <p:graphicFrame>
+        <p:nvGraphicFramePr>
+          <p:cNvPr id="5" name="コンテンツ プレースホルダー 4">
+            <a:extLst>
+              <a:ext uri="{FF2B5EF4-FFF2-40B4-BE49-F238E27FC236}">
+                <a16:creationId xmlns:a16="http://schemas.microsoft.com/office/drawing/2014/main" id="{4444872A-93EF-B0DE-059C-7AA2D217D043}"/>
+              </a:ext>
+            </a:extLst>
+          </p:cNvPr>
+          <p:cNvGraphicFramePr>
+            <a:graphicFrameLocks noGrp="1"/>
+          </p:cNvGraphicFramePr>
+          <p:nvPr>
+            <p:ph idx="1"/>
+            <p:extLst>
+              <p:ext uri="{D42A27DB-BD31-4B8C-83A1-F6EECF244321}">
+                <p14:modId xmlns:p14="http://schemas.microsoft.com/office/powerpoint/2010/main" val="4294731918"/>
+              </p:ext>
+            </p:extLst>
+          </p:nvPr>
+        </p:nvGraphicFramePr>
+        <p:xfrm>
+          <a:off x="838200" y="1825625"/>
+          <a:ext cx="10515597" cy="2777061"/>
+        </p:xfrm>
+        <a:graphic>
+          <a:graphicData uri="http://schemas.openxmlformats.org/drawingml/2006/table">
+            <a:tbl>
+              <a:tblPr firstRow="1" bandRow="1">
+                <a:tableStyleId>{5C22544A-7EE6-4342-B048-85BDC9FD1C3A}</a:tableStyleId>
+              </a:tblPr>
+              <a:tblGrid>
+                <a:gridCol w="3505199">
+                  <a:extLst>
+                    <a:ext uri="{9D8B030D-6E8A-4147-A177-3AD203B41FA5}">
+                      <a16:colId xmlns:a16="http://schemas.microsoft.com/office/drawing/2014/main" val="1400479776"/>
+                    </a:ext>
+                  </a:extLst>
+                </a:gridCol>
+                <a:gridCol w="3505199">
+                  <a:extLst>
+                    <a:ext uri="{9D8B030D-6E8A-4147-A177-3AD203B41FA5}">
+                      <a16:colId xmlns:a16="http://schemas.microsoft.com/office/drawing/2014/main" val="2466992613"/>
+                    </a:ext>
+                  </a:extLst>
+                </a:gridCol>
+                <a:gridCol w="3505199">
+                  <a:extLst>
+                    <a:ext uri="{9D8B030D-6E8A-4147-A177-3AD203B41FA5}">
+                      <a16:colId xmlns:a16="http://schemas.microsoft.com/office/drawing/2014/main" val="3550539996"/>
+                    </a:ext>
+                  </a:extLst>
+                </a:gridCol>
+              </a:tblGrid>
+              <a:tr h="925687">
+                <a:tc>
+                  <a:txBody>
+                    <a:bodyPr/>
+                    <a:lstStyle/>
+                    <a:p>
+                      <a:pPr algn="ctr"/>
+                      <a:endParaRPr kumimoji="1" lang="ja-JP" altLang="en-US"/>
+                    </a:p>
+                  </a:txBody>
+                  <a:tcPr anchor="ctr"/>
+                </a:tc>
+                <a:tc>
+                  <a:txBody>
+                    <a:bodyPr/>
+                    <a:lstStyle/>
+                    <a:p>
+                      <a:pPr algn="ctr"/>
+                      <a:r>
+                        <a:rPr kumimoji="1" lang="ja-JP" altLang="en-US" dirty="0"/>
+                        <a:t>通常終了</a:t>
+                      </a:r>
+                    </a:p>
+                  </a:txBody>
+                  <a:tcPr anchor="ctr"/>
+                </a:tc>
+                <a:tc>
+                  <a:txBody>
+                    <a:bodyPr/>
+                    <a:lstStyle/>
+                    <a:p>
+                      <a:pPr algn="ctr"/>
+                      <a:r>
+                        <a:rPr kumimoji="1" lang="ja-JP" altLang="en-US" dirty="0"/>
+                        <a:t>トークン上限到達</a:t>
+                      </a:r>
+                      <a:r>
+                        <a:rPr kumimoji="1" lang="en-US" altLang="ja-JP" dirty="0"/>
+                        <a:t>(</a:t>
+                      </a:r>
+                      <a:r>
+                        <a:rPr kumimoji="1" lang="ja-JP" altLang="en-US" dirty="0"/>
+                        <a:t>上限は</a:t>
+                      </a:r>
+                      <a:r>
+                        <a:rPr kumimoji="1" lang="en-US" altLang="ja-JP" dirty="0"/>
+                        <a:t>8192)</a:t>
+                      </a:r>
+                      <a:endParaRPr kumimoji="1" lang="ja-JP" altLang="en-US" dirty="0"/>
+                    </a:p>
+                  </a:txBody>
+                  <a:tcPr anchor="ctr"/>
+                </a:tc>
+                <a:extLst>
+                  <a:ext uri="{0D108BD9-81ED-4DB2-BD59-A6C34878D82A}">
+                    <a16:rowId xmlns:a16="http://schemas.microsoft.com/office/drawing/2014/main" val="275587262"/>
+                  </a:ext>
+                </a:extLst>
+              </a:tr>
+              <a:tr h="925687">
+                <a:tc>
+                  <a:txBody>
+                    <a:bodyPr/>
+                    <a:lstStyle/>
+                    <a:p>
+                      <a:pPr algn="ctr"/>
+                      <a:r>
+                        <a:rPr kumimoji="1" lang="ja-JP" altLang="en-US" dirty="0"/>
+                        <a:t>正解</a:t>
+                      </a:r>
+                    </a:p>
+                  </a:txBody>
+                  <a:tcPr anchor="ctr"/>
+                </a:tc>
+                <a:tc>
+                  <a:txBody>
+                    <a:bodyPr/>
+                    <a:lstStyle/>
+                    <a:p>
+                      <a:pPr algn="ctr"/>
+                      <a:r>
+                        <a:rPr kumimoji="1" lang="ja-JP" altLang="ja-JP" sz="1800" b="0" i="0" kern="1200" dirty="0">
+                          <a:solidFill>
+                            <a:schemeClr val="dk1"/>
+                          </a:solidFill>
+                          <a:effectLst/>
+                          <a:latin typeface="+mn-lt"/>
+                          <a:ea typeface="+mn-ea"/>
+                          <a:cs typeface="+mn-cs"/>
+                        </a:rPr>
+                        <a:t>309</a:t>
+                      </a:r>
+                      <a:endParaRPr kumimoji="1" lang="ja-JP" altLang="en-US" dirty="0"/>
+                    </a:p>
+                  </a:txBody>
+                  <a:tcPr anchor="ctr"/>
+                </a:tc>
+                <a:tc>
+                  <a:txBody>
+                    <a:bodyPr/>
+                    <a:lstStyle/>
+                    <a:p>
+                      <a:pPr algn="ctr"/>
+                      <a:r>
+                        <a:rPr kumimoji="1" lang="en-US" altLang="ja-JP" dirty="0"/>
+                        <a:t>2</a:t>
+                      </a:r>
+                      <a:endParaRPr kumimoji="1" lang="ja-JP" altLang="en-US" dirty="0"/>
+                    </a:p>
+                  </a:txBody>
+                  <a:tcPr anchor="ctr"/>
+                </a:tc>
+                <a:extLst>
+                  <a:ext uri="{0D108BD9-81ED-4DB2-BD59-A6C34878D82A}">
+                    <a16:rowId xmlns:a16="http://schemas.microsoft.com/office/drawing/2014/main" val="3511778032"/>
+                  </a:ext>
+                </a:extLst>
+              </a:tr>
+              <a:tr h="925687">
+                <a:tc>
+                  <a:txBody>
+                    <a:bodyPr/>
+                    <a:lstStyle/>
+                    <a:p>
+                      <a:pPr algn="ctr"/>
+                      <a:r>
+                        <a:rPr kumimoji="1" lang="ja-JP" altLang="en-US" dirty="0"/>
+                        <a:t>不正解</a:t>
+                      </a:r>
+                    </a:p>
+                  </a:txBody>
+                  <a:tcPr anchor="ctr"/>
+                </a:tc>
+                <a:tc>
+                  <a:txBody>
+                    <a:bodyPr/>
+                    <a:lstStyle/>
+                    <a:p>
+                      <a:pPr algn="ctr"/>
+                      <a:r>
+                        <a:rPr kumimoji="1" lang="ja-JP" altLang="ja-JP" sz="1800" b="0" i="0" kern="1200" dirty="0">
+                          <a:solidFill>
+                            <a:schemeClr val="dk1"/>
+                          </a:solidFill>
+                          <a:effectLst/>
+                          <a:latin typeface="+mn-lt"/>
+                          <a:ea typeface="+mn-ea"/>
+                          <a:cs typeface="+mn-cs"/>
+                        </a:rPr>
+                        <a:t>9</a:t>
+                      </a:r>
+                      <a:endParaRPr kumimoji="1" lang="ja-JP" altLang="en-US" dirty="0"/>
+                    </a:p>
+                  </a:txBody>
+                  <a:tcPr anchor="ctr"/>
+                </a:tc>
+                <a:tc>
+                  <a:txBody>
+                    <a:bodyPr/>
+                    <a:lstStyle/>
+                    <a:p>
+                      <a:pPr algn="ctr"/>
+                      <a:r>
+                        <a:rPr kumimoji="1" lang="en-US" altLang="ja-JP" dirty="0"/>
+                        <a:t>400</a:t>
+                      </a:r>
+                      <a:endParaRPr kumimoji="1" lang="ja-JP" altLang="en-US" dirty="0"/>
+                    </a:p>
+                  </a:txBody>
+                  <a:tcPr anchor="ctr"/>
+                </a:tc>
+                <a:extLst>
+                  <a:ext uri="{0D108BD9-81ED-4DB2-BD59-A6C34878D82A}">
+                    <a16:rowId xmlns:a16="http://schemas.microsoft.com/office/drawing/2014/main" val="2379152149"/>
+                  </a:ext>
+                </a:extLst>
+              </a:tr>
+            </a:tbl>
+          </a:graphicData>
+        </a:graphic>
+      </p:graphicFrame>
+      <p:sp>
+        <p:nvSpPr>
+          <p:cNvPr id="4" name="スライド番号プレースホルダー 3">
+            <a:extLst>
+              <a:ext uri="{FF2B5EF4-FFF2-40B4-BE49-F238E27FC236}">
+                <a16:creationId xmlns:a16="http://schemas.microsoft.com/office/drawing/2014/main" id="{71441BDE-AFD3-4444-24B2-3A8D033798CA}"/>
+              </a:ext>
+            </a:extLst>
+          </p:cNvPr>
+          <p:cNvSpPr>
+            <a:spLocks noGrp="1"/>
+          </p:cNvSpPr>
+          <p:nvPr>
+            <p:ph type="sldNum" sz="quarter" idx="12"/>
+          </p:nvPr>
+        </p:nvSpPr>
+        <p:spPr/>
+        <p:txBody>
+          <a:bodyPr/>
+          <a:lstStyle/>
+          <a:p>
+            <a:fld id="{10649E7B-FC1B-418B-9B6A-00859DB1DEE8}" type="slidenum">
+              <a:rPr kumimoji="1" lang="ja-JP" altLang="en-US" smtClean="0"/>
+              <a:t>29</a:t>
+            </a:fld>
+            <a:endParaRPr kumimoji="1" lang="ja-JP" altLang="en-US"/>
+          </a:p>
+        </p:txBody>
+      </p:sp>
+    </p:spTree>
+    <p:extLst>
+      <p:ext uri="{BB962C8B-B14F-4D97-AF65-F5344CB8AC3E}">
+        <p14:creationId xmlns:p14="http://schemas.microsoft.com/office/powerpoint/2010/main" val="52967334"/>
       </p:ext>
     </p:extLst>
   </p:cSld>
@@ -9102,6 +11033,912 @@
 </p:sld>
 </file>
 
+<file path=ppt/slides/slide30.xml><?xml version="1.0" encoding="utf-8"?>
+<p:sld xmlns:a="http://schemas.openxmlformats.org/drawingml/2006/main" xmlns:r="http://schemas.openxmlformats.org/officeDocument/2006/relationships" xmlns:p="http://schemas.openxmlformats.org/presentationml/2006/main">
+  <p:cSld>
+    <p:spTree>
+      <p:nvGrpSpPr>
+        <p:cNvPr id="1" name="">
+          <a:extLst>
+            <a:ext uri="{FF2B5EF4-FFF2-40B4-BE49-F238E27FC236}">
+              <a16:creationId xmlns:a16="http://schemas.microsoft.com/office/drawing/2014/main" id="{1F876273-9E38-5836-589B-FAF95A51CD07}"/>
+            </a:ext>
+          </a:extLst>
+        </p:cNvPr>
+        <p:cNvGrpSpPr/>
+        <p:nvPr/>
+      </p:nvGrpSpPr>
+      <p:grpSpPr>
+        <a:xfrm>
+          <a:off x="0" y="0"/>
+          <a:ext cx="0" cy="0"/>
+          <a:chOff x="0" y="0"/>
+          <a:chExt cx="0" cy="0"/>
+        </a:xfrm>
+      </p:grpSpPr>
+      <p:sp>
+        <p:nvSpPr>
+          <p:cNvPr id="2" name="タイトル 1">
+            <a:extLst>
+              <a:ext uri="{FF2B5EF4-FFF2-40B4-BE49-F238E27FC236}">
+                <a16:creationId xmlns:a16="http://schemas.microsoft.com/office/drawing/2014/main" id="{64D9EB27-D3BF-D4DC-3B0F-F4FCA1A7C969}"/>
+              </a:ext>
+            </a:extLst>
+          </p:cNvPr>
+          <p:cNvSpPr>
+            <a:spLocks noGrp="1"/>
+          </p:cNvSpPr>
+          <p:nvPr>
+            <p:ph type="title"/>
+          </p:nvPr>
+        </p:nvSpPr>
+        <p:spPr/>
+        <p:txBody>
+          <a:bodyPr/>
+          <a:lstStyle/>
+          <a:p>
+            <a:r>
+              <a:rPr kumimoji="1" lang="ja-JP" altLang="en-US" dirty="0"/>
+              <a:t>答えのみの</a:t>
+            </a:r>
+            <a:r>
+              <a:rPr kumimoji="1" lang="en-US" altLang="ja-JP" dirty="0"/>
+              <a:t>SFT</a:t>
+            </a:r>
+            <a:r>
+              <a:rPr kumimoji="1" lang="ja-JP" altLang="en-US" dirty="0"/>
+              <a:t>の結果の詳細</a:t>
+            </a:r>
+          </a:p>
+        </p:txBody>
+      </p:sp>
+      <p:graphicFrame>
+        <p:nvGraphicFramePr>
+          <p:cNvPr id="5" name="コンテンツ プレースホルダー 4">
+            <a:extLst>
+              <a:ext uri="{FF2B5EF4-FFF2-40B4-BE49-F238E27FC236}">
+                <a16:creationId xmlns:a16="http://schemas.microsoft.com/office/drawing/2014/main" id="{21C72F0C-AA25-C794-74FD-87765DB20E6C}"/>
+              </a:ext>
+            </a:extLst>
+          </p:cNvPr>
+          <p:cNvGraphicFramePr>
+            <a:graphicFrameLocks noGrp="1"/>
+          </p:cNvGraphicFramePr>
+          <p:nvPr>
+            <p:ph idx="1"/>
+            <p:extLst>
+              <p:ext uri="{D42A27DB-BD31-4B8C-83A1-F6EECF244321}">
+                <p14:modId xmlns:p14="http://schemas.microsoft.com/office/powerpoint/2010/main" val="3379968431"/>
+              </p:ext>
+            </p:extLst>
+          </p:nvPr>
+        </p:nvGraphicFramePr>
+        <p:xfrm>
+          <a:off x="1748752" y="1969791"/>
+          <a:ext cx="8344668" cy="1583901"/>
+        </p:xfrm>
+        <a:graphic>
+          <a:graphicData uri="http://schemas.openxmlformats.org/drawingml/2006/table">
+            <a:tbl>
+              <a:tblPr firstRow="1" bandRow="1">
+                <a:tableStyleId>{5C22544A-7EE6-4342-B048-85BDC9FD1C3A}</a:tableStyleId>
+              </a:tblPr>
+              <a:tblGrid>
+                <a:gridCol w="2781556">
+                  <a:extLst>
+                    <a:ext uri="{9D8B030D-6E8A-4147-A177-3AD203B41FA5}">
+                      <a16:colId xmlns:a16="http://schemas.microsoft.com/office/drawing/2014/main" val="2394308489"/>
+                    </a:ext>
+                  </a:extLst>
+                </a:gridCol>
+                <a:gridCol w="2781556">
+                  <a:extLst>
+                    <a:ext uri="{9D8B030D-6E8A-4147-A177-3AD203B41FA5}">
+                      <a16:colId xmlns:a16="http://schemas.microsoft.com/office/drawing/2014/main" val="867807463"/>
+                    </a:ext>
+                  </a:extLst>
+                </a:gridCol>
+                <a:gridCol w="2781556">
+                  <a:extLst>
+                    <a:ext uri="{9D8B030D-6E8A-4147-A177-3AD203B41FA5}">
+                      <a16:colId xmlns:a16="http://schemas.microsoft.com/office/drawing/2014/main" val="2499767942"/>
+                    </a:ext>
+                  </a:extLst>
+                </a:gridCol>
+              </a:tblGrid>
+              <a:tr h="943821">
+                <a:tc>
+                  <a:txBody>
+                    <a:bodyPr/>
+                    <a:lstStyle/>
+                    <a:p>
+                      <a:pPr algn="ctr"/>
+                      <a:endParaRPr kumimoji="1" lang="ja-JP" altLang="en-US" dirty="0"/>
+                    </a:p>
+                  </a:txBody>
+                  <a:tcPr anchor="ctr"/>
+                </a:tc>
+                <a:tc>
+                  <a:txBody>
+                    <a:bodyPr/>
+                    <a:lstStyle/>
+                    <a:p>
+                      <a:pPr algn="ctr"/>
+                      <a:r>
+                        <a:rPr kumimoji="1" lang="ja-JP" altLang="en-US" dirty="0"/>
+                        <a:t>処理単体</a:t>
+                      </a:r>
+                    </a:p>
+                  </a:txBody>
+                  <a:tcPr anchor="ctr"/>
+                </a:tc>
+                <a:tc>
+                  <a:txBody>
+                    <a:bodyPr/>
+                    <a:lstStyle/>
+                    <a:p>
+                      <a:pPr algn="ctr"/>
+                      <a:r>
+                        <a:rPr kumimoji="1" lang="ja-JP" altLang="en-US" dirty="0"/>
+                        <a:t>２つの処理の組み合わせ</a:t>
+                      </a:r>
+                    </a:p>
+                  </a:txBody>
+                  <a:tcPr anchor="ctr"/>
+                </a:tc>
+                <a:extLst>
+                  <a:ext uri="{0D108BD9-81ED-4DB2-BD59-A6C34878D82A}">
+                    <a16:rowId xmlns:a16="http://schemas.microsoft.com/office/drawing/2014/main" val="2407331181"/>
+                  </a:ext>
+                </a:extLst>
+              </a:tr>
+              <a:tr h="546817">
+                <a:tc>
+                  <a:txBody>
+                    <a:bodyPr/>
+                    <a:lstStyle/>
+                    <a:p>
+                      <a:pPr algn="ctr"/>
+                      <a:r>
+                        <a:rPr kumimoji="1" lang="ja-JP" altLang="en-US" dirty="0"/>
+                        <a:t>テストデータその</a:t>
+                      </a:r>
+                      <a:r>
+                        <a:rPr kumimoji="1" lang="en-US" altLang="ja-JP" dirty="0"/>
+                        <a:t>1</a:t>
+                      </a:r>
+                      <a:endParaRPr kumimoji="1" lang="ja-JP" altLang="en-US" dirty="0"/>
+                    </a:p>
+                  </a:txBody>
+                  <a:tcPr anchor="ctr"/>
+                </a:tc>
+                <a:tc>
+                  <a:txBody>
+                    <a:bodyPr/>
+                    <a:lstStyle/>
+                    <a:p>
+                      <a:pPr algn="ctr"/>
+                      <a:r>
+                        <a:rPr kumimoji="1" lang="ja-JP" altLang="ja-JP" sz="1800" b="0" i="0" kern="1200" dirty="0">
+                          <a:solidFill>
+                            <a:schemeClr val="dk1"/>
+                          </a:solidFill>
+                          <a:effectLst/>
+                          <a:latin typeface="+mn-lt"/>
+                          <a:ea typeface="+mn-ea"/>
+                          <a:cs typeface="+mn-cs"/>
+                        </a:rPr>
+                        <a:t>208</a:t>
+                      </a:r>
+                      <a:r>
+                        <a:rPr kumimoji="1" lang="en-US" altLang="zh-TW" dirty="0"/>
+                        <a:t>/</a:t>
+                      </a:r>
+                      <a:r>
+                        <a:rPr kumimoji="1" lang="ja-JP" altLang="ja-JP" sz="1800" b="0" i="0" kern="1200" dirty="0">
+                          <a:solidFill>
+                            <a:schemeClr val="dk1"/>
+                          </a:solidFill>
+                          <a:effectLst/>
+                          <a:latin typeface="+mn-lt"/>
+                          <a:ea typeface="+mn-ea"/>
+                          <a:cs typeface="+mn-cs"/>
+                        </a:rPr>
+                        <a:t>240</a:t>
+                      </a:r>
+                      <a:endParaRPr kumimoji="1" lang="en-US" altLang="ja-JP" sz="1800" b="0" i="0" kern="1200" dirty="0">
+                        <a:solidFill>
+                          <a:schemeClr val="dk1"/>
+                        </a:solidFill>
+                        <a:effectLst/>
+                        <a:latin typeface="+mn-lt"/>
+                        <a:ea typeface="+mn-ea"/>
+                        <a:cs typeface="+mn-cs"/>
+                      </a:endParaRPr>
+                    </a:p>
+                    <a:p>
+                      <a:pPr algn="ctr"/>
+                      <a:r>
+                        <a:rPr kumimoji="1" lang="en-US" altLang="ja-JP" sz="1800" b="0" i="0" kern="1200" dirty="0">
+                          <a:solidFill>
+                            <a:schemeClr val="dk1"/>
+                          </a:solidFill>
+                          <a:effectLst/>
+                          <a:latin typeface="+mn-lt"/>
+                          <a:ea typeface="+mn-ea"/>
+                          <a:cs typeface="+mn-cs"/>
+                        </a:rPr>
+                        <a:t>86.6%</a:t>
+                      </a:r>
+                      <a:endParaRPr kumimoji="1" lang="ja-JP" altLang="en-US" dirty="0"/>
+                    </a:p>
+                  </a:txBody>
+                  <a:tcPr anchor="ctr"/>
+                </a:tc>
+                <a:tc>
+                  <a:txBody>
+                    <a:bodyPr/>
+                    <a:lstStyle/>
+                    <a:p>
+                      <a:pPr algn="ctr"/>
+                      <a:r>
+                        <a:rPr kumimoji="1" lang="ja-JP" altLang="ja-JP" sz="1800" b="0" i="0" kern="1200" dirty="0">
+                          <a:solidFill>
+                            <a:schemeClr val="dk1"/>
+                          </a:solidFill>
+                          <a:effectLst/>
+                          <a:latin typeface="+mn-lt"/>
+                          <a:ea typeface="+mn-ea"/>
+                          <a:cs typeface="+mn-cs"/>
+                        </a:rPr>
+                        <a:t>276</a:t>
+                      </a:r>
+                      <a:r>
+                        <a:rPr kumimoji="1" lang="en-US" altLang="zh-TW" dirty="0"/>
+                        <a:t>/480</a:t>
+                      </a:r>
+                    </a:p>
+                    <a:p>
+                      <a:pPr algn="ctr"/>
+                      <a:r>
+                        <a:rPr kumimoji="1" lang="en-US" altLang="ja-JP" dirty="0"/>
+                        <a:t>62.7%</a:t>
+                      </a:r>
+                      <a:endParaRPr kumimoji="1" lang="ja-JP" altLang="en-US" dirty="0"/>
+                    </a:p>
+                  </a:txBody>
+                  <a:tcPr anchor="ctr"/>
+                </a:tc>
+                <a:extLst>
+                  <a:ext uri="{0D108BD9-81ED-4DB2-BD59-A6C34878D82A}">
+                    <a16:rowId xmlns:a16="http://schemas.microsoft.com/office/drawing/2014/main" val="4205910191"/>
+                  </a:ext>
+                </a:extLst>
+              </a:tr>
+            </a:tbl>
+          </a:graphicData>
+        </a:graphic>
+      </p:graphicFrame>
+      <p:sp>
+        <p:nvSpPr>
+          <p:cNvPr id="4" name="スライド番号プレースホルダー 3">
+            <a:extLst>
+              <a:ext uri="{FF2B5EF4-FFF2-40B4-BE49-F238E27FC236}">
+                <a16:creationId xmlns:a16="http://schemas.microsoft.com/office/drawing/2014/main" id="{C06F8090-52BC-B7F4-7C3F-F22AD41B5D03}"/>
+              </a:ext>
+            </a:extLst>
+          </p:cNvPr>
+          <p:cNvSpPr>
+            <a:spLocks noGrp="1"/>
+          </p:cNvSpPr>
+          <p:nvPr>
+            <p:ph type="sldNum" sz="quarter" idx="12"/>
+          </p:nvPr>
+        </p:nvSpPr>
+        <p:spPr/>
+        <p:txBody>
+          <a:bodyPr/>
+          <a:lstStyle/>
+          <a:p>
+            <a:fld id="{10649E7B-FC1B-418B-9B6A-00859DB1DEE8}" type="slidenum">
+              <a:rPr kumimoji="1" lang="ja-JP" altLang="en-US" smtClean="0"/>
+              <a:t>30</a:t>
+            </a:fld>
+            <a:endParaRPr kumimoji="1" lang="ja-JP" altLang="en-US"/>
+          </a:p>
+        </p:txBody>
+      </p:sp>
+      <p:sp>
+        <p:nvSpPr>
+          <p:cNvPr id="7" name="テキスト ボックス 6">
+            <a:extLst>
+              <a:ext uri="{FF2B5EF4-FFF2-40B4-BE49-F238E27FC236}">
+                <a16:creationId xmlns:a16="http://schemas.microsoft.com/office/drawing/2014/main" id="{9D00563A-92EA-A4FF-316A-84B64C7B8BDC}"/>
+              </a:ext>
+            </a:extLst>
+          </p:cNvPr>
+          <p:cNvSpPr txBox="1"/>
+          <p:nvPr/>
+        </p:nvSpPr>
+        <p:spPr>
+          <a:xfrm>
+            <a:off x="928255" y="6077247"/>
+            <a:ext cx="9985663" cy="369332"/>
+          </a:xfrm>
+          <a:prstGeom prst="rect">
+            <a:avLst/>
+          </a:prstGeom>
+          <a:noFill/>
+        </p:spPr>
+        <p:txBody>
+          <a:bodyPr wrap="square" rtlCol="0">
+            <a:spAutoFit/>
+          </a:bodyPr>
+          <a:lstStyle/>
+          <a:p>
+            <a:r>
+              <a:rPr kumimoji="1" lang="ja-JP" altLang="en-US" dirty="0"/>
+              <a:t>テストデータその</a:t>
+            </a:r>
+            <a:r>
+              <a:rPr kumimoji="1" lang="en-US" altLang="ja-JP" dirty="0"/>
+              <a:t>1</a:t>
+            </a:r>
+            <a:r>
+              <a:rPr kumimoji="1" lang="ja-JP" altLang="en-US" dirty="0"/>
+              <a:t>：</a:t>
+            </a:r>
+            <a:r>
+              <a:rPr lang="ja-JP" altLang="en-US" dirty="0"/>
+              <a:t>訓練用のデータの問題と同じルール</a:t>
+            </a:r>
+            <a:endParaRPr lang="en-US" altLang="ja-JP" dirty="0"/>
+          </a:p>
+        </p:txBody>
+      </p:sp>
+    </p:spTree>
+    <p:extLst>
+      <p:ext uri="{BB962C8B-B14F-4D97-AF65-F5344CB8AC3E}">
+        <p14:creationId xmlns:p14="http://schemas.microsoft.com/office/powerpoint/2010/main" val="412510388"/>
+      </p:ext>
+    </p:extLst>
+  </p:cSld>
+  <p:clrMapOvr>
+    <a:masterClrMapping/>
+  </p:clrMapOvr>
+</p:sld>
+</file>
+
+<file path=ppt/slides/slide31.xml><?xml version="1.0" encoding="utf-8"?>
+<p:sld xmlns:a="http://schemas.openxmlformats.org/drawingml/2006/main" xmlns:r="http://schemas.openxmlformats.org/officeDocument/2006/relationships" xmlns:p="http://schemas.openxmlformats.org/presentationml/2006/main">
+  <p:cSld>
+    <p:spTree>
+      <p:nvGrpSpPr>
+        <p:cNvPr id="1" name="">
+          <a:extLst>
+            <a:ext uri="{FF2B5EF4-FFF2-40B4-BE49-F238E27FC236}">
+              <a16:creationId xmlns:a16="http://schemas.microsoft.com/office/drawing/2014/main" id="{105C9D1E-0A8A-4BEF-5870-8915B22AD63B}"/>
+            </a:ext>
+          </a:extLst>
+        </p:cNvPr>
+        <p:cNvGrpSpPr/>
+        <p:nvPr/>
+      </p:nvGrpSpPr>
+      <p:grpSpPr>
+        <a:xfrm>
+          <a:off x="0" y="0"/>
+          <a:ext cx="0" cy="0"/>
+          <a:chOff x="0" y="0"/>
+          <a:chExt cx="0" cy="0"/>
+        </a:xfrm>
+      </p:grpSpPr>
+      <p:sp>
+        <p:nvSpPr>
+          <p:cNvPr id="2" name="タイトル 1">
+            <a:extLst>
+              <a:ext uri="{FF2B5EF4-FFF2-40B4-BE49-F238E27FC236}">
+                <a16:creationId xmlns:a16="http://schemas.microsoft.com/office/drawing/2014/main" id="{E3B02451-6D6B-D759-81D3-43AA21AE2526}"/>
+              </a:ext>
+            </a:extLst>
+          </p:cNvPr>
+          <p:cNvSpPr>
+            <a:spLocks noGrp="1"/>
+          </p:cNvSpPr>
+          <p:nvPr>
+            <p:ph type="title"/>
+          </p:nvPr>
+        </p:nvSpPr>
+        <p:spPr/>
+        <p:txBody>
+          <a:bodyPr/>
+          <a:lstStyle/>
+          <a:p>
+            <a:r>
+              <a:rPr kumimoji="1" lang="ja-JP" altLang="en-US" dirty="0"/>
+              <a:t>答え＋処理過程の</a:t>
+            </a:r>
+            <a:r>
+              <a:rPr kumimoji="1" lang="en-US" altLang="ja-JP" dirty="0"/>
+              <a:t>SFT</a:t>
+            </a:r>
+            <a:r>
+              <a:rPr kumimoji="1" lang="ja-JP" altLang="en-US" dirty="0"/>
+              <a:t>の結果の詳細</a:t>
+            </a:r>
+          </a:p>
+        </p:txBody>
+      </p:sp>
+      <p:graphicFrame>
+        <p:nvGraphicFramePr>
+          <p:cNvPr id="5" name="コンテンツ プレースホルダー 4">
+            <a:extLst>
+              <a:ext uri="{FF2B5EF4-FFF2-40B4-BE49-F238E27FC236}">
+                <a16:creationId xmlns:a16="http://schemas.microsoft.com/office/drawing/2014/main" id="{526011ED-6CCB-5AB2-F23F-5AF06DBEE8BD}"/>
+              </a:ext>
+            </a:extLst>
+          </p:cNvPr>
+          <p:cNvGraphicFramePr>
+            <a:graphicFrameLocks noGrp="1"/>
+          </p:cNvGraphicFramePr>
+          <p:nvPr>
+            <p:ph idx="1"/>
+          </p:nvPr>
+        </p:nvGraphicFramePr>
+        <p:xfrm>
+          <a:off x="1748752" y="1969791"/>
+          <a:ext cx="8344668" cy="1583901"/>
+        </p:xfrm>
+        <a:graphic>
+          <a:graphicData uri="http://schemas.openxmlformats.org/drawingml/2006/table">
+            <a:tbl>
+              <a:tblPr firstRow="1" bandRow="1">
+                <a:tableStyleId>{5C22544A-7EE6-4342-B048-85BDC9FD1C3A}</a:tableStyleId>
+              </a:tblPr>
+              <a:tblGrid>
+                <a:gridCol w="2781556">
+                  <a:extLst>
+                    <a:ext uri="{9D8B030D-6E8A-4147-A177-3AD203B41FA5}">
+                      <a16:colId xmlns:a16="http://schemas.microsoft.com/office/drawing/2014/main" val="2394308489"/>
+                    </a:ext>
+                  </a:extLst>
+                </a:gridCol>
+                <a:gridCol w="2781556">
+                  <a:extLst>
+                    <a:ext uri="{9D8B030D-6E8A-4147-A177-3AD203B41FA5}">
+                      <a16:colId xmlns:a16="http://schemas.microsoft.com/office/drawing/2014/main" val="867807463"/>
+                    </a:ext>
+                  </a:extLst>
+                </a:gridCol>
+                <a:gridCol w="2781556">
+                  <a:extLst>
+                    <a:ext uri="{9D8B030D-6E8A-4147-A177-3AD203B41FA5}">
+                      <a16:colId xmlns:a16="http://schemas.microsoft.com/office/drawing/2014/main" val="2499767942"/>
+                    </a:ext>
+                  </a:extLst>
+                </a:gridCol>
+              </a:tblGrid>
+              <a:tr h="943821">
+                <a:tc>
+                  <a:txBody>
+                    <a:bodyPr/>
+                    <a:lstStyle/>
+                    <a:p>
+                      <a:pPr algn="ctr"/>
+                      <a:endParaRPr kumimoji="1" lang="ja-JP" altLang="en-US" dirty="0"/>
+                    </a:p>
+                  </a:txBody>
+                  <a:tcPr anchor="ctr"/>
+                </a:tc>
+                <a:tc>
+                  <a:txBody>
+                    <a:bodyPr/>
+                    <a:lstStyle/>
+                    <a:p>
+                      <a:pPr algn="ctr"/>
+                      <a:r>
+                        <a:rPr kumimoji="1" lang="ja-JP" altLang="en-US" dirty="0"/>
+                        <a:t>処理単体</a:t>
+                      </a:r>
+                    </a:p>
+                  </a:txBody>
+                  <a:tcPr anchor="ctr"/>
+                </a:tc>
+                <a:tc>
+                  <a:txBody>
+                    <a:bodyPr/>
+                    <a:lstStyle/>
+                    <a:p>
+                      <a:pPr algn="ctr"/>
+                      <a:r>
+                        <a:rPr kumimoji="1" lang="ja-JP" altLang="en-US" dirty="0"/>
+                        <a:t>２つの処理の組み合わせ</a:t>
+                      </a:r>
+                    </a:p>
+                  </a:txBody>
+                  <a:tcPr anchor="ctr"/>
+                </a:tc>
+                <a:extLst>
+                  <a:ext uri="{0D108BD9-81ED-4DB2-BD59-A6C34878D82A}">
+                    <a16:rowId xmlns:a16="http://schemas.microsoft.com/office/drawing/2014/main" val="2407331181"/>
+                  </a:ext>
+                </a:extLst>
+              </a:tr>
+              <a:tr h="546817">
+                <a:tc>
+                  <a:txBody>
+                    <a:bodyPr/>
+                    <a:lstStyle/>
+                    <a:p>
+                      <a:pPr algn="ctr"/>
+                      <a:r>
+                        <a:rPr kumimoji="1" lang="ja-JP" altLang="en-US" dirty="0"/>
+                        <a:t>テストデータその</a:t>
+                      </a:r>
+                      <a:r>
+                        <a:rPr kumimoji="1" lang="en-US" altLang="ja-JP" dirty="0"/>
+                        <a:t>1</a:t>
+                      </a:r>
+                      <a:endParaRPr kumimoji="1" lang="ja-JP" altLang="en-US" dirty="0"/>
+                    </a:p>
+                  </a:txBody>
+                  <a:tcPr anchor="ctr"/>
+                </a:tc>
+                <a:tc>
+                  <a:txBody>
+                    <a:bodyPr/>
+                    <a:lstStyle/>
+                    <a:p>
+                      <a:pPr algn="ctr"/>
+                      <a:r>
+                        <a:rPr kumimoji="1" lang="ja-JP" altLang="ja-JP" sz="1800" b="0" i="0" kern="1200" dirty="0">
+                          <a:solidFill>
+                            <a:schemeClr val="dk1"/>
+                          </a:solidFill>
+                          <a:effectLst/>
+                          <a:latin typeface="+mn-lt"/>
+                          <a:ea typeface="+mn-ea"/>
+                          <a:cs typeface="+mn-cs"/>
+                        </a:rPr>
+                        <a:t>208</a:t>
+                      </a:r>
+                      <a:r>
+                        <a:rPr kumimoji="1" lang="en-US" altLang="zh-TW" dirty="0"/>
+                        <a:t>/</a:t>
+                      </a:r>
+                      <a:r>
+                        <a:rPr kumimoji="1" lang="ja-JP" altLang="ja-JP" sz="1800" b="0" i="0" kern="1200" dirty="0">
+                          <a:solidFill>
+                            <a:schemeClr val="dk1"/>
+                          </a:solidFill>
+                          <a:effectLst/>
+                          <a:latin typeface="+mn-lt"/>
+                          <a:ea typeface="+mn-ea"/>
+                          <a:cs typeface="+mn-cs"/>
+                        </a:rPr>
+                        <a:t>240</a:t>
+                      </a:r>
+                      <a:endParaRPr kumimoji="1" lang="en-US" altLang="ja-JP" sz="1800" b="0" i="0" kern="1200" dirty="0">
+                        <a:solidFill>
+                          <a:schemeClr val="dk1"/>
+                        </a:solidFill>
+                        <a:effectLst/>
+                        <a:latin typeface="+mn-lt"/>
+                        <a:ea typeface="+mn-ea"/>
+                        <a:cs typeface="+mn-cs"/>
+                      </a:endParaRPr>
+                    </a:p>
+                    <a:p>
+                      <a:pPr algn="ctr"/>
+                      <a:r>
+                        <a:rPr kumimoji="1" lang="en-US" altLang="ja-JP" sz="1800" b="0" i="0" kern="1200" dirty="0">
+                          <a:solidFill>
+                            <a:schemeClr val="dk1"/>
+                          </a:solidFill>
+                          <a:effectLst/>
+                          <a:latin typeface="+mn-lt"/>
+                          <a:ea typeface="+mn-ea"/>
+                          <a:cs typeface="+mn-cs"/>
+                        </a:rPr>
+                        <a:t>86.6%</a:t>
+                      </a:r>
+                      <a:endParaRPr kumimoji="1" lang="ja-JP" altLang="en-US" dirty="0"/>
+                    </a:p>
+                  </a:txBody>
+                  <a:tcPr anchor="ctr"/>
+                </a:tc>
+                <a:tc>
+                  <a:txBody>
+                    <a:bodyPr/>
+                    <a:lstStyle/>
+                    <a:p>
+                      <a:pPr algn="ctr"/>
+                      <a:r>
+                        <a:rPr kumimoji="1" lang="ja-JP" altLang="ja-JP" sz="1800" b="0" i="0" kern="1200" dirty="0">
+                          <a:solidFill>
+                            <a:schemeClr val="dk1"/>
+                          </a:solidFill>
+                          <a:effectLst/>
+                          <a:latin typeface="+mn-lt"/>
+                          <a:ea typeface="+mn-ea"/>
+                          <a:cs typeface="+mn-cs"/>
+                        </a:rPr>
+                        <a:t>276</a:t>
+                      </a:r>
+                      <a:r>
+                        <a:rPr kumimoji="1" lang="en-US" altLang="zh-TW" dirty="0"/>
+                        <a:t>/480</a:t>
+                      </a:r>
+                    </a:p>
+                    <a:p>
+                      <a:pPr algn="ctr"/>
+                      <a:r>
+                        <a:rPr kumimoji="1" lang="en-US" altLang="ja-JP" dirty="0"/>
+                        <a:t>62.7%</a:t>
+                      </a:r>
+                      <a:endParaRPr kumimoji="1" lang="ja-JP" altLang="en-US" dirty="0"/>
+                    </a:p>
+                  </a:txBody>
+                  <a:tcPr anchor="ctr"/>
+                </a:tc>
+                <a:extLst>
+                  <a:ext uri="{0D108BD9-81ED-4DB2-BD59-A6C34878D82A}">
+                    <a16:rowId xmlns:a16="http://schemas.microsoft.com/office/drawing/2014/main" val="4205910191"/>
+                  </a:ext>
+                </a:extLst>
+              </a:tr>
+            </a:tbl>
+          </a:graphicData>
+        </a:graphic>
+      </p:graphicFrame>
+      <p:sp>
+        <p:nvSpPr>
+          <p:cNvPr id="4" name="スライド番号プレースホルダー 3">
+            <a:extLst>
+              <a:ext uri="{FF2B5EF4-FFF2-40B4-BE49-F238E27FC236}">
+                <a16:creationId xmlns:a16="http://schemas.microsoft.com/office/drawing/2014/main" id="{B493540B-A119-3FD0-F87F-84C1545AECC5}"/>
+              </a:ext>
+            </a:extLst>
+          </p:cNvPr>
+          <p:cNvSpPr>
+            <a:spLocks noGrp="1"/>
+          </p:cNvSpPr>
+          <p:nvPr>
+            <p:ph type="sldNum" sz="quarter" idx="12"/>
+          </p:nvPr>
+        </p:nvSpPr>
+        <p:spPr/>
+        <p:txBody>
+          <a:bodyPr/>
+          <a:lstStyle/>
+          <a:p>
+            <a:fld id="{10649E7B-FC1B-418B-9B6A-00859DB1DEE8}" type="slidenum">
+              <a:rPr kumimoji="1" lang="ja-JP" altLang="en-US" smtClean="0"/>
+              <a:t>31</a:t>
+            </a:fld>
+            <a:endParaRPr kumimoji="1" lang="ja-JP" altLang="en-US"/>
+          </a:p>
+        </p:txBody>
+      </p:sp>
+      <p:sp>
+        <p:nvSpPr>
+          <p:cNvPr id="7" name="テキスト ボックス 6">
+            <a:extLst>
+              <a:ext uri="{FF2B5EF4-FFF2-40B4-BE49-F238E27FC236}">
+                <a16:creationId xmlns:a16="http://schemas.microsoft.com/office/drawing/2014/main" id="{199EE5DD-4D38-045A-947D-B8B5063C9BBC}"/>
+              </a:ext>
+            </a:extLst>
+          </p:cNvPr>
+          <p:cNvSpPr txBox="1"/>
+          <p:nvPr/>
+        </p:nvSpPr>
+        <p:spPr>
+          <a:xfrm>
+            <a:off x="928255" y="6077247"/>
+            <a:ext cx="9985663" cy="369332"/>
+          </a:xfrm>
+          <a:prstGeom prst="rect">
+            <a:avLst/>
+          </a:prstGeom>
+          <a:noFill/>
+        </p:spPr>
+        <p:txBody>
+          <a:bodyPr wrap="square" rtlCol="0">
+            <a:spAutoFit/>
+          </a:bodyPr>
+          <a:lstStyle/>
+          <a:p>
+            <a:r>
+              <a:rPr kumimoji="1" lang="ja-JP" altLang="en-US" dirty="0"/>
+              <a:t>テストデータその</a:t>
+            </a:r>
+            <a:r>
+              <a:rPr kumimoji="1" lang="en-US" altLang="ja-JP" dirty="0"/>
+              <a:t>1</a:t>
+            </a:r>
+            <a:r>
+              <a:rPr kumimoji="1" lang="ja-JP" altLang="en-US" dirty="0"/>
+              <a:t>：</a:t>
+            </a:r>
+            <a:r>
+              <a:rPr lang="ja-JP" altLang="en-US" dirty="0"/>
+              <a:t>訓練用のデータの問題と同じルール</a:t>
+            </a:r>
+            <a:endParaRPr lang="en-US" altLang="ja-JP" dirty="0"/>
+          </a:p>
+        </p:txBody>
+      </p:sp>
+    </p:spTree>
+    <p:extLst>
+      <p:ext uri="{BB962C8B-B14F-4D97-AF65-F5344CB8AC3E}">
+        <p14:creationId xmlns:p14="http://schemas.microsoft.com/office/powerpoint/2010/main" val="3060401301"/>
+      </p:ext>
+    </p:extLst>
+  </p:cSld>
+  <p:clrMapOvr>
+    <a:masterClrMapping/>
+  </p:clrMapOvr>
+</p:sld>
+</file>
+
+<file path=ppt/slides/slide32.xml><?xml version="1.0" encoding="utf-8"?>
+<p:sld xmlns:a="http://schemas.openxmlformats.org/drawingml/2006/main" xmlns:r="http://schemas.openxmlformats.org/officeDocument/2006/relationships" xmlns:p="http://schemas.openxmlformats.org/presentationml/2006/main">
+  <p:cSld>
+    <p:spTree>
+      <p:nvGrpSpPr>
+        <p:cNvPr id="1" name=""/>
+        <p:cNvGrpSpPr/>
+        <p:nvPr/>
+      </p:nvGrpSpPr>
+      <p:grpSpPr>
+        <a:xfrm>
+          <a:off x="0" y="0"/>
+          <a:ext cx="0" cy="0"/>
+          <a:chOff x="0" y="0"/>
+          <a:chExt cx="0" cy="0"/>
+        </a:xfrm>
+      </p:grpSpPr>
+      <p:sp>
+        <p:nvSpPr>
+          <p:cNvPr id="2" name="タイトル 1">
+            <a:extLst>
+              <a:ext uri="{FF2B5EF4-FFF2-40B4-BE49-F238E27FC236}">
+                <a16:creationId xmlns:a16="http://schemas.microsoft.com/office/drawing/2014/main" id="{38720CD7-B6E9-2737-5BF2-761BCC0B12C2}"/>
+              </a:ext>
+            </a:extLst>
+          </p:cNvPr>
+          <p:cNvSpPr>
+            <a:spLocks noGrp="1"/>
+          </p:cNvSpPr>
+          <p:nvPr>
+            <p:ph type="title"/>
+          </p:nvPr>
+        </p:nvSpPr>
+        <p:spPr/>
+        <p:txBody>
+          <a:bodyPr/>
+          <a:lstStyle/>
+          <a:p>
+            <a:r>
+              <a:rPr kumimoji="1" lang="ja-JP" altLang="en-US">
+                <a:solidFill>
+                  <a:srgbClr val="FF0000"/>
+                </a:solidFill>
+              </a:rPr>
+              <a:t>改善点</a:t>
+            </a:r>
+          </a:p>
+        </p:txBody>
+      </p:sp>
+      <p:sp>
+        <p:nvSpPr>
+          <p:cNvPr id="3" name="コンテンツ プレースホルダー 2">
+            <a:extLst>
+              <a:ext uri="{FF2B5EF4-FFF2-40B4-BE49-F238E27FC236}">
+                <a16:creationId xmlns:a16="http://schemas.microsoft.com/office/drawing/2014/main" id="{017B691A-46C7-600E-7022-890D1BEC509F}"/>
+              </a:ext>
+            </a:extLst>
+          </p:cNvPr>
+          <p:cNvSpPr>
+            <a:spLocks noGrp="1"/>
+          </p:cNvSpPr>
+          <p:nvPr>
+            <p:ph idx="1"/>
+          </p:nvPr>
+        </p:nvSpPr>
+        <p:spPr/>
+        <p:txBody>
+          <a:bodyPr/>
+          <a:lstStyle/>
+          <a:p>
+            <a:r>
+              <a:rPr kumimoji="1" lang="ja-JP" altLang="en-US" dirty="0"/>
+              <a:t>口語を改善</a:t>
+            </a:r>
+            <a:endParaRPr kumimoji="1" lang="en-US" altLang="ja-JP" dirty="0"/>
+          </a:p>
+          <a:p>
+            <a:r>
+              <a:rPr lang="ja-JP" altLang="en-US" dirty="0"/>
+              <a:t>全部→全体</a:t>
+            </a:r>
+            <a:endParaRPr lang="en-US" altLang="ja-JP" dirty="0"/>
+          </a:p>
+          <a:p>
+            <a:r>
+              <a:rPr kumimoji="1" lang="ja-JP" altLang="en-US" dirty="0"/>
+              <a:t>図版を入れる</a:t>
+            </a:r>
+            <a:endParaRPr kumimoji="1" lang="en-US" altLang="ja-JP" dirty="0"/>
+          </a:p>
+          <a:p>
+            <a:r>
+              <a:rPr kumimoji="1" lang="ja-JP" altLang="en-US" dirty="0"/>
+              <a:t>参考文献の引用の仕方を長くてもいいから、正式な形で</a:t>
+            </a:r>
+            <a:endParaRPr kumimoji="1" lang="en-US" altLang="ja-JP" dirty="0"/>
+          </a:p>
+          <a:p>
+            <a:r>
+              <a:rPr kumimoji="1" lang="ja-JP" altLang="en-US" dirty="0">
+                <a:solidFill>
+                  <a:srgbClr val="FF0000"/>
+                </a:solidFill>
+              </a:rPr>
+              <a:t>今のところばらばらの実験でやってるから最後はちゃんと同じ結果を入れる</a:t>
+            </a:r>
+            <a:endParaRPr kumimoji="1" lang="en-US" altLang="ja-JP" dirty="0">
+              <a:solidFill>
+                <a:srgbClr val="FF0000"/>
+              </a:solidFill>
+            </a:endParaRPr>
+          </a:p>
+          <a:p>
+            <a:endParaRPr kumimoji="1" lang="ja-JP" altLang="en-US" dirty="0"/>
+          </a:p>
+        </p:txBody>
+      </p:sp>
+      <p:sp>
+        <p:nvSpPr>
+          <p:cNvPr id="4" name="スライド番号プレースホルダー 3">
+            <a:extLst>
+              <a:ext uri="{FF2B5EF4-FFF2-40B4-BE49-F238E27FC236}">
+                <a16:creationId xmlns:a16="http://schemas.microsoft.com/office/drawing/2014/main" id="{93BC64FA-8AD0-6880-8F88-5A3BAAA07F95}"/>
+              </a:ext>
+            </a:extLst>
+          </p:cNvPr>
+          <p:cNvSpPr>
+            <a:spLocks noGrp="1"/>
+          </p:cNvSpPr>
+          <p:nvPr>
+            <p:ph type="sldNum" sz="quarter" idx="12"/>
+          </p:nvPr>
+        </p:nvSpPr>
+        <p:spPr/>
+        <p:txBody>
+          <a:bodyPr/>
+          <a:lstStyle/>
+          <a:p>
+            <a:fld id="{10649E7B-FC1B-418B-9B6A-00859DB1DEE8}" type="slidenum">
+              <a:rPr kumimoji="1" lang="ja-JP" altLang="en-US" smtClean="0"/>
+              <a:t>32</a:t>
+            </a:fld>
+            <a:endParaRPr kumimoji="1" lang="ja-JP" altLang="en-US"/>
+          </a:p>
+        </p:txBody>
+      </p:sp>
+    </p:spTree>
+    <p:extLst>
+      <p:ext uri="{BB962C8B-B14F-4D97-AF65-F5344CB8AC3E}">
+        <p14:creationId xmlns:p14="http://schemas.microsoft.com/office/powerpoint/2010/main" val="3091403255"/>
+      </p:ext>
+    </p:extLst>
+  </p:cSld>
+  <p:clrMapOvr>
+    <a:masterClrMapping/>
+  </p:clrMapOvr>
+</p:sld>
+</file>
+
 <file path=ppt/slides/slide4.xml><?xml version="1.0" encoding="utf-8"?>
 <p:sld xmlns:a="http://schemas.openxmlformats.org/drawingml/2006/main" xmlns:r="http://schemas.openxmlformats.org/officeDocument/2006/relationships" xmlns:p="http://schemas.openxmlformats.org/presentationml/2006/main">
   <p:cSld>
@@ -9166,7 +12003,9 @@
         </p:nvSpPr>
         <p:spPr/>
         <p:txBody>
-          <a:bodyPr/>
+          <a:bodyPr>
+            <a:normAutofit/>
+          </a:bodyPr>
           <a:lstStyle/>
           <a:p>
             <a:r>
@@ -9205,13 +12044,21 @@
             <a:pPr lvl="1"/>
             <a:r>
               <a:rPr lang="en-US" altLang="ja-JP" dirty="0"/>
-              <a:t>LLM</a:t>
+              <a:t>LLM(</a:t>
+            </a:r>
+            <a:r>
+              <a:rPr lang="ja-JP" altLang="en-US" dirty="0"/>
+              <a:t>大規模言語モデル</a:t>
+            </a:r>
+            <a:r>
+              <a:rPr lang="en-US" altLang="ja-JP" dirty="0"/>
+              <a:t>)</a:t>
             </a:r>
           </a:p>
           <a:p>
             <a:pPr lvl="2"/>
             <a:r>
-              <a:rPr lang="ja-JP" altLang="en-US" baseline="30000">
+              <a:rPr lang="ja-JP" altLang="en-US" baseline="30000" dirty="0">
                 <a:solidFill>
                   <a:srgbClr val="FF0000"/>
                 </a:solidFill>
@@ -9287,12 +12134,16 @@
           <a:p>
             <a:pPr lvl="2"/>
             <a:r>
+              <a:rPr kumimoji="1" lang="ja-JP" altLang="en-US" dirty="0"/>
+              <a:t>入力された指示と、それに対応する出力の関係を</a:t>
+            </a:r>
+            <a:r>
               <a:rPr kumimoji="1" lang="en-US" altLang="ja-JP" dirty="0"/>
               <a:t>LLM</a:t>
             </a:r>
             <a:r>
               <a:rPr kumimoji="1" lang="ja-JP" altLang="en-US" dirty="0"/>
-              <a:t>に入力された指示と、それに対応する出力の関係を学習させる手法</a:t>
+              <a:t>に学習させる手法</a:t>
             </a:r>
             <a:r>
               <a:rPr kumimoji="1" lang="en-US" altLang="ja-JP" baseline="30000" dirty="0"/>

--- a/生成AIの追加学習による問題.pptx
+++ b/生成AIの追加学習による問題.pptx
@@ -5,10 +5,10 @@
     <p:sldMasterId id="2147483648" r:id="rId1"/>
   </p:sldMasterIdLst>
   <p:notesMasterIdLst>
-    <p:notesMasterId r:id="rId34"/>
+    <p:notesMasterId r:id="rId49"/>
   </p:notesMasterIdLst>
   <p:handoutMasterIdLst>
-    <p:handoutMasterId r:id="rId35"/>
+    <p:handoutMasterId r:id="rId50"/>
   </p:handoutMasterIdLst>
   <p:sldIdLst>
     <p:sldId id="256" r:id="rId2"/>
@@ -39,10 +39,25 @@
     <p:sldId id="287" r:id="rId27"/>
     <p:sldId id="288" r:id="rId28"/>
     <p:sldId id="290" r:id="rId29"/>
-    <p:sldId id="291" r:id="rId30"/>
-    <p:sldId id="293" r:id="rId31"/>
-    <p:sldId id="295" r:id="rId32"/>
-    <p:sldId id="284" r:id="rId33"/>
+    <p:sldId id="293" r:id="rId30"/>
+    <p:sldId id="295" r:id="rId31"/>
+    <p:sldId id="296" r:id="rId32"/>
+    <p:sldId id="297" r:id="rId33"/>
+    <p:sldId id="298" r:id="rId34"/>
+    <p:sldId id="299" r:id="rId35"/>
+    <p:sldId id="300" r:id="rId36"/>
+    <p:sldId id="301" r:id="rId37"/>
+    <p:sldId id="302" r:id="rId38"/>
+    <p:sldId id="303" r:id="rId39"/>
+    <p:sldId id="304" r:id="rId40"/>
+    <p:sldId id="305" r:id="rId41"/>
+    <p:sldId id="307" r:id="rId42"/>
+    <p:sldId id="306" r:id="rId43"/>
+    <p:sldId id="308" r:id="rId44"/>
+    <p:sldId id="309" r:id="rId45"/>
+    <p:sldId id="310" r:id="rId46"/>
+    <p:sldId id="311" r:id="rId47"/>
+    <p:sldId id="284" r:id="rId48"/>
   </p:sldIdLst>
   <p:sldSz cx="12192000" cy="6858000"/>
   <p:notesSz cx="6858000" cy="9144000"/>
@@ -421,7 +436,7 @@
           <a:p>
             <a:fld id="{F3D7D25B-E7F4-42EB-A3A2-379C00250A8D}" type="datetimeFigureOut">
               <a:rPr kumimoji="1" lang="ja-JP" altLang="en-US" smtClean="0"/>
-              <a:t>2026/9/10</a:t>
+              <a:t>2026/9/11</a:t>
             </a:fld>
             <a:endParaRPr kumimoji="1" lang="ja-JP" altLang="en-US"/>
           </a:p>
@@ -868,7 +883,7 @@
           <a:p>
             <a:fld id="{A3A6DBD2-DA0F-4369-AACF-DF8255168190}" type="datetime1">
               <a:rPr kumimoji="1" lang="ja-JP" altLang="en-US" smtClean="0"/>
-              <a:t>2026/9/10</a:t>
+              <a:t>2026/9/11</a:t>
             </a:fld>
             <a:endParaRPr kumimoji="1" lang="ja-JP" altLang="en-US"/>
           </a:p>
@@ -1102,7 +1117,7 @@
           <a:p>
             <a:fld id="{6D55F33B-3C44-4800-AEBE-821A56E94784}" type="datetime1">
               <a:rPr kumimoji="1" lang="ja-JP" altLang="en-US" smtClean="0"/>
-              <a:t>2026/9/10</a:t>
+              <a:t>2026/9/11</a:t>
             </a:fld>
             <a:endParaRPr kumimoji="1" lang="ja-JP" altLang="en-US"/>
           </a:p>
@@ -1346,7 +1361,7 @@
           <a:p>
             <a:fld id="{3D39F1BD-DB4A-41B8-812B-24EA046BEB95}" type="datetime1">
               <a:rPr kumimoji="1" lang="ja-JP" altLang="en-US" smtClean="0"/>
-              <a:t>2026/9/10</a:t>
+              <a:t>2026/9/11</a:t>
             </a:fld>
             <a:endParaRPr kumimoji="1" lang="ja-JP" altLang="en-US"/>
           </a:p>
@@ -1580,7 +1595,7 @@
           <a:p>
             <a:fld id="{DB0EC384-A088-42ED-AC29-547DFB1F70D3}" type="datetime1">
               <a:rPr kumimoji="1" lang="ja-JP" altLang="en-US" smtClean="0"/>
-              <a:t>2026/9/10</a:t>
+              <a:t>2026/9/11</a:t>
             </a:fld>
             <a:endParaRPr kumimoji="1" lang="ja-JP" altLang="en-US"/>
           </a:p>
@@ -1859,7 +1874,7 @@
           <a:p>
             <a:fld id="{72396E98-BCEA-43E3-A527-8B3F64AC7C63}" type="datetime1">
               <a:rPr kumimoji="1" lang="ja-JP" altLang="en-US" smtClean="0"/>
-              <a:t>2026/9/10</a:t>
+              <a:t>2026/9/11</a:t>
             </a:fld>
             <a:endParaRPr kumimoji="1" lang="ja-JP" altLang="en-US"/>
           </a:p>
@@ -2192,7 +2207,7 @@
           <a:p>
             <a:fld id="{1FEB46E7-DFC0-4570-B8A6-AF34C134E007}" type="datetime1">
               <a:rPr kumimoji="1" lang="ja-JP" altLang="en-US" smtClean="0"/>
-              <a:t>2026/9/10</a:t>
+              <a:t>2026/9/11</a:t>
             </a:fld>
             <a:endParaRPr kumimoji="1" lang="ja-JP" altLang="en-US"/>
           </a:p>
@@ -2672,7 +2687,7 @@
           <a:p>
             <a:fld id="{D3810E2D-B8D9-4D54-BDF3-688F00317A31}" type="datetime1">
               <a:rPr kumimoji="1" lang="ja-JP" altLang="en-US" smtClean="0"/>
-              <a:t>2026/9/10</a:t>
+              <a:t>2026/9/11</a:t>
             </a:fld>
             <a:endParaRPr kumimoji="1" lang="ja-JP" altLang="en-US"/>
           </a:p>
@@ -2817,7 +2832,7 @@
           <a:p>
             <a:fld id="{79343A81-EC42-4B0B-B788-83B2979B1AC0}" type="datetime1">
               <a:rPr kumimoji="1" lang="ja-JP" altLang="en-US" smtClean="0"/>
-              <a:t>2026/9/10</a:t>
+              <a:t>2026/9/11</a:t>
             </a:fld>
             <a:endParaRPr kumimoji="1" lang="ja-JP" altLang="en-US"/>
           </a:p>
@@ -2934,7 +2949,7 @@
           <a:p>
             <a:fld id="{9748B458-1745-45CB-B123-B28D42A66973}" type="datetime1">
               <a:rPr kumimoji="1" lang="ja-JP" altLang="en-US" smtClean="0"/>
-              <a:t>2026/9/10</a:t>
+              <a:t>2026/9/11</a:t>
             </a:fld>
             <a:endParaRPr kumimoji="1" lang="ja-JP" altLang="en-US"/>
           </a:p>
@@ -3281,7 +3296,7 @@
           <a:p>
             <a:fld id="{170F0C33-9C7C-4089-8659-3DECCBA36575}" type="datetime1">
               <a:rPr kumimoji="1" lang="ja-JP" altLang="en-US" smtClean="0"/>
-              <a:t>2026/9/10</a:t>
+              <a:t>2026/9/11</a:t>
             </a:fld>
             <a:endParaRPr kumimoji="1" lang="ja-JP" altLang="en-US"/>
           </a:p>
@@ -3573,7 +3588,7 @@
           <a:p>
             <a:fld id="{5B765AC1-2970-4943-B44F-799C74942DCC}" type="datetime1">
               <a:rPr kumimoji="1" lang="ja-JP" altLang="en-US" smtClean="0"/>
-              <a:t>2026/9/10</a:t>
+              <a:t>2026/9/11</a:t>
             </a:fld>
             <a:endParaRPr kumimoji="1" lang="ja-JP" altLang="en-US"/>
           </a:p>
@@ -3850,7 +3865,7 @@
           <a:p>
             <a:fld id="{2E1D47AA-5221-48CA-B202-E9B9DD006441}" type="datetime1">
               <a:rPr kumimoji="1" lang="ja-JP" altLang="en-US" smtClean="0"/>
-              <a:t>2026/9/10</a:t>
+              <a:t>2026/9/11</a:t>
             </a:fld>
             <a:endParaRPr kumimoji="1" lang="ja-JP" altLang="en-US"/>
           </a:p>
@@ -6174,7 +6189,19 @@
             </a:r>
             <a:r>
               <a:rPr kumimoji="1" lang="ja-JP" altLang="en-US" dirty="0"/>
-              <a:t>種類と、組み合わせた処理を４２種類用意</a:t>
+              <a:t>種類と、組み合わせた処理を</a:t>
+            </a:r>
+            <a:r>
+              <a:rPr kumimoji="1" lang="en-US" altLang="ja-JP" dirty="0"/>
+              <a:t>5</a:t>
+            </a:r>
+            <a:r>
+              <a:rPr lang="en-US" altLang="ja-JP" dirty="0"/>
+              <a:t>2</a:t>
+            </a:r>
+            <a:r>
+              <a:rPr kumimoji="1" lang="ja-JP" altLang="en-US" dirty="0"/>
+              <a:t>種類用意</a:t>
             </a:r>
             <a:endParaRPr kumimoji="1" lang="en-US" altLang="ja-JP" dirty="0"/>
           </a:p>
@@ -7093,7 +7120,7 @@
             <a:pPr lvl="1"/>
             <a:r>
               <a:rPr lang="ja-JP" altLang="en-US" dirty="0"/>
-              <a:t>訓練用のデータの問題と同じ処理とその組み合わせで</a:t>
+              <a:t>訓練用のデータの問題と同じ処理単体と同じ組み合わせで</a:t>
             </a:r>
             <a:r>
               <a:rPr lang="en-US" altLang="ja-JP" dirty="0"/>
@@ -7798,7 +7825,11 @@
             <a:pPr lvl="1"/>
             <a:r>
               <a:rPr kumimoji="1" lang="ja-JP" altLang="en-US" dirty="0"/>
-              <a:t>追加の学習を行わず、そのままのモデル</a:t>
+              <a:t>追加の学習を行わず、</a:t>
+            </a:r>
+            <a:r>
+              <a:rPr lang="ja-JP" altLang="en-US" dirty="0"/>
+              <a:t>ベースモデルをそのまま使う</a:t>
             </a:r>
             <a:endParaRPr kumimoji="1" lang="en-US" altLang="ja-JP" dirty="0"/>
           </a:p>
@@ -10561,483 +10592,6 @@
   <p:cSld>
     <p:spTree>
       <p:nvGrpSpPr>
-        <p:cNvPr id="1" name=""/>
-        <p:cNvGrpSpPr/>
-        <p:nvPr/>
-      </p:nvGrpSpPr>
-      <p:grpSpPr>
-        <a:xfrm>
-          <a:off x="0" y="0"/>
-          <a:ext cx="0" cy="0"/>
-          <a:chOff x="0" y="0"/>
-          <a:chExt cx="0" cy="0"/>
-        </a:xfrm>
-      </p:grpSpPr>
-      <p:sp>
-        <p:nvSpPr>
-          <p:cNvPr id="2" name="タイトル 1">
-            <a:extLst>
-              <a:ext uri="{FF2B5EF4-FFF2-40B4-BE49-F238E27FC236}">
-                <a16:creationId xmlns:a16="http://schemas.microsoft.com/office/drawing/2014/main" id="{1A1AAE79-F018-F4C9-B70B-A20BB0359BD1}"/>
-              </a:ext>
-            </a:extLst>
-          </p:cNvPr>
-          <p:cNvSpPr>
-            <a:spLocks noGrp="1"/>
-          </p:cNvSpPr>
-          <p:nvPr>
-            <p:ph type="title"/>
-          </p:nvPr>
-        </p:nvSpPr>
-        <p:spPr/>
-        <p:txBody>
-          <a:bodyPr/>
-          <a:lstStyle/>
-          <a:p>
-            <a:r>
-              <a:rPr lang="ja-JP" altLang="en-US" dirty="0"/>
-              <a:t>ベースモデルの結果の詳細</a:t>
-            </a:r>
-            <a:endParaRPr kumimoji="1" lang="ja-JP" altLang="en-US" dirty="0"/>
-          </a:p>
-        </p:txBody>
-      </p:sp>
-      <p:graphicFrame>
-        <p:nvGraphicFramePr>
-          <p:cNvPr id="5" name="コンテンツ プレースホルダー 4">
-            <a:extLst>
-              <a:ext uri="{FF2B5EF4-FFF2-40B4-BE49-F238E27FC236}">
-                <a16:creationId xmlns:a16="http://schemas.microsoft.com/office/drawing/2014/main" id="{4444872A-93EF-B0DE-059C-7AA2D217D043}"/>
-              </a:ext>
-            </a:extLst>
-          </p:cNvPr>
-          <p:cNvGraphicFramePr>
-            <a:graphicFrameLocks noGrp="1"/>
-          </p:cNvGraphicFramePr>
-          <p:nvPr>
-            <p:ph idx="1"/>
-            <p:extLst>
-              <p:ext uri="{D42A27DB-BD31-4B8C-83A1-F6EECF244321}">
-                <p14:modId xmlns:p14="http://schemas.microsoft.com/office/powerpoint/2010/main" val="4294731918"/>
-              </p:ext>
-            </p:extLst>
-          </p:nvPr>
-        </p:nvGraphicFramePr>
-        <p:xfrm>
-          <a:off x="838200" y="1825625"/>
-          <a:ext cx="10515597" cy="2777061"/>
-        </p:xfrm>
-        <a:graphic>
-          <a:graphicData uri="http://schemas.openxmlformats.org/drawingml/2006/table">
-            <a:tbl>
-              <a:tblPr firstRow="1" bandRow="1">
-                <a:tableStyleId>{5C22544A-7EE6-4342-B048-85BDC9FD1C3A}</a:tableStyleId>
-              </a:tblPr>
-              <a:tblGrid>
-                <a:gridCol w="3505199">
-                  <a:extLst>
-                    <a:ext uri="{9D8B030D-6E8A-4147-A177-3AD203B41FA5}">
-                      <a16:colId xmlns:a16="http://schemas.microsoft.com/office/drawing/2014/main" val="1400479776"/>
-                    </a:ext>
-                  </a:extLst>
-                </a:gridCol>
-                <a:gridCol w="3505199">
-                  <a:extLst>
-                    <a:ext uri="{9D8B030D-6E8A-4147-A177-3AD203B41FA5}">
-                      <a16:colId xmlns:a16="http://schemas.microsoft.com/office/drawing/2014/main" val="2466992613"/>
-                    </a:ext>
-                  </a:extLst>
-                </a:gridCol>
-                <a:gridCol w="3505199">
-                  <a:extLst>
-                    <a:ext uri="{9D8B030D-6E8A-4147-A177-3AD203B41FA5}">
-                      <a16:colId xmlns:a16="http://schemas.microsoft.com/office/drawing/2014/main" val="3550539996"/>
-                    </a:ext>
-                  </a:extLst>
-                </a:gridCol>
-              </a:tblGrid>
-              <a:tr h="925687">
-                <a:tc>
-                  <a:txBody>
-                    <a:bodyPr/>
-                    <a:lstStyle/>
-                    <a:p>
-                      <a:pPr algn="ctr"/>
-                      <a:endParaRPr kumimoji="1" lang="ja-JP" altLang="en-US"/>
-                    </a:p>
-                  </a:txBody>
-                  <a:tcPr anchor="ctr"/>
-                </a:tc>
-                <a:tc>
-                  <a:txBody>
-                    <a:bodyPr/>
-                    <a:lstStyle/>
-                    <a:p>
-                      <a:pPr algn="ctr"/>
-                      <a:r>
-                        <a:rPr kumimoji="1" lang="ja-JP" altLang="en-US" dirty="0"/>
-                        <a:t>通常終了</a:t>
-                      </a:r>
-                    </a:p>
-                  </a:txBody>
-                  <a:tcPr anchor="ctr"/>
-                </a:tc>
-                <a:tc>
-                  <a:txBody>
-                    <a:bodyPr/>
-                    <a:lstStyle/>
-                    <a:p>
-                      <a:pPr algn="ctr"/>
-                      <a:r>
-                        <a:rPr kumimoji="1" lang="ja-JP" altLang="en-US" dirty="0"/>
-                        <a:t>トークン上限到達</a:t>
-                      </a:r>
-                      <a:r>
-                        <a:rPr kumimoji="1" lang="en-US" altLang="ja-JP" dirty="0"/>
-                        <a:t>(</a:t>
-                      </a:r>
-                      <a:r>
-                        <a:rPr kumimoji="1" lang="ja-JP" altLang="en-US" dirty="0"/>
-                        <a:t>上限は</a:t>
-                      </a:r>
-                      <a:r>
-                        <a:rPr kumimoji="1" lang="en-US" altLang="ja-JP" dirty="0"/>
-                        <a:t>8192)</a:t>
-                      </a:r>
-                      <a:endParaRPr kumimoji="1" lang="ja-JP" altLang="en-US" dirty="0"/>
-                    </a:p>
-                  </a:txBody>
-                  <a:tcPr anchor="ctr"/>
-                </a:tc>
-                <a:extLst>
-                  <a:ext uri="{0D108BD9-81ED-4DB2-BD59-A6C34878D82A}">
-                    <a16:rowId xmlns:a16="http://schemas.microsoft.com/office/drawing/2014/main" val="275587262"/>
-                  </a:ext>
-                </a:extLst>
-              </a:tr>
-              <a:tr h="925687">
-                <a:tc>
-                  <a:txBody>
-                    <a:bodyPr/>
-                    <a:lstStyle/>
-                    <a:p>
-                      <a:pPr algn="ctr"/>
-                      <a:r>
-                        <a:rPr kumimoji="1" lang="ja-JP" altLang="en-US" dirty="0"/>
-                        <a:t>正解</a:t>
-                      </a:r>
-                    </a:p>
-                  </a:txBody>
-                  <a:tcPr anchor="ctr"/>
-                </a:tc>
-                <a:tc>
-                  <a:txBody>
-                    <a:bodyPr/>
-                    <a:lstStyle/>
-                    <a:p>
-                      <a:pPr algn="ctr"/>
-                      <a:r>
-                        <a:rPr kumimoji="1" lang="ja-JP" altLang="ja-JP" sz="1800" b="0" i="0" kern="1200" dirty="0">
-                          <a:solidFill>
-                            <a:schemeClr val="dk1"/>
-                          </a:solidFill>
-                          <a:effectLst/>
-                          <a:latin typeface="+mn-lt"/>
-                          <a:ea typeface="+mn-ea"/>
-                          <a:cs typeface="+mn-cs"/>
-                        </a:rPr>
-                        <a:t>309</a:t>
-                      </a:r>
-                      <a:endParaRPr kumimoji="1" lang="ja-JP" altLang="en-US" dirty="0"/>
-                    </a:p>
-                  </a:txBody>
-                  <a:tcPr anchor="ctr"/>
-                </a:tc>
-                <a:tc>
-                  <a:txBody>
-                    <a:bodyPr/>
-                    <a:lstStyle/>
-                    <a:p>
-                      <a:pPr algn="ctr"/>
-                      <a:r>
-                        <a:rPr kumimoji="1" lang="en-US" altLang="ja-JP" dirty="0"/>
-                        <a:t>2</a:t>
-                      </a:r>
-                      <a:endParaRPr kumimoji="1" lang="ja-JP" altLang="en-US" dirty="0"/>
-                    </a:p>
-                  </a:txBody>
-                  <a:tcPr anchor="ctr"/>
-                </a:tc>
-                <a:extLst>
-                  <a:ext uri="{0D108BD9-81ED-4DB2-BD59-A6C34878D82A}">
-                    <a16:rowId xmlns:a16="http://schemas.microsoft.com/office/drawing/2014/main" val="3511778032"/>
-                  </a:ext>
-                </a:extLst>
-              </a:tr>
-              <a:tr h="925687">
-                <a:tc>
-                  <a:txBody>
-                    <a:bodyPr/>
-                    <a:lstStyle/>
-                    <a:p>
-                      <a:pPr algn="ctr"/>
-                      <a:r>
-                        <a:rPr kumimoji="1" lang="ja-JP" altLang="en-US" dirty="0"/>
-                        <a:t>不正解</a:t>
-                      </a:r>
-                    </a:p>
-                  </a:txBody>
-                  <a:tcPr anchor="ctr"/>
-                </a:tc>
-                <a:tc>
-                  <a:txBody>
-                    <a:bodyPr/>
-                    <a:lstStyle/>
-                    <a:p>
-                      <a:pPr algn="ctr"/>
-                      <a:r>
-                        <a:rPr kumimoji="1" lang="ja-JP" altLang="ja-JP" sz="1800" b="0" i="0" kern="1200" dirty="0">
-                          <a:solidFill>
-                            <a:schemeClr val="dk1"/>
-                          </a:solidFill>
-                          <a:effectLst/>
-                          <a:latin typeface="+mn-lt"/>
-                          <a:ea typeface="+mn-ea"/>
-                          <a:cs typeface="+mn-cs"/>
-                        </a:rPr>
-                        <a:t>9</a:t>
-                      </a:r>
-                      <a:endParaRPr kumimoji="1" lang="ja-JP" altLang="en-US" dirty="0"/>
-                    </a:p>
-                  </a:txBody>
-                  <a:tcPr anchor="ctr"/>
-                </a:tc>
-                <a:tc>
-                  <a:txBody>
-                    <a:bodyPr/>
-                    <a:lstStyle/>
-                    <a:p>
-                      <a:pPr algn="ctr"/>
-                      <a:r>
-                        <a:rPr kumimoji="1" lang="en-US" altLang="ja-JP" dirty="0"/>
-                        <a:t>400</a:t>
-                      </a:r>
-                      <a:endParaRPr kumimoji="1" lang="ja-JP" altLang="en-US" dirty="0"/>
-                    </a:p>
-                  </a:txBody>
-                  <a:tcPr anchor="ctr"/>
-                </a:tc>
-                <a:extLst>
-                  <a:ext uri="{0D108BD9-81ED-4DB2-BD59-A6C34878D82A}">
-                    <a16:rowId xmlns:a16="http://schemas.microsoft.com/office/drawing/2014/main" val="2379152149"/>
-                  </a:ext>
-                </a:extLst>
-              </a:tr>
-            </a:tbl>
-          </a:graphicData>
-        </a:graphic>
-      </p:graphicFrame>
-      <p:sp>
-        <p:nvSpPr>
-          <p:cNvPr id="4" name="スライド番号プレースホルダー 3">
-            <a:extLst>
-              <a:ext uri="{FF2B5EF4-FFF2-40B4-BE49-F238E27FC236}">
-                <a16:creationId xmlns:a16="http://schemas.microsoft.com/office/drawing/2014/main" id="{71441BDE-AFD3-4444-24B2-3A8D033798CA}"/>
-              </a:ext>
-            </a:extLst>
-          </p:cNvPr>
-          <p:cNvSpPr>
-            <a:spLocks noGrp="1"/>
-          </p:cNvSpPr>
-          <p:nvPr>
-            <p:ph type="sldNum" sz="quarter" idx="12"/>
-          </p:nvPr>
-        </p:nvSpPr>
-        <p:spPr/>
-        <p:txBody>
-          <a:bodyPr/>
-          <a:lstStyle/>
-          <a:p>
-            <a:fld id="{10649E7B-FC1B-418B-9B6A-00859DB1DEE8}" type="slidenum">
-              <a:rPr kumimoji="1" lang="ja-JP" altLang="en-US" smtClean="0"/>
-              <a:t>29</a:t>
-            </a:fld>
-            <a:endParaRPr kumimoji="1" lang="ja-JP" altLang="en-US"/>
-          </a:p>
-        </p:txBody>
-      </p:sp>
-    </p:spTree>
-    <p:extLst>
-      <p:ext uri="{BB962C8B-B14F-4D97-AF65-F5344CB8AC3E}">
-        <p14:creationId xmlns:p14="http://schemas.microsoft.com/office/powerpoint/2010/main" val="52967334"/>
-      </p:ext>
-    </p:extLst>
-  </p:cSld>
-  <p:clrMapOvr>
-    <a:masterClrMapping/>
-  </p:clrMapOvr>
-</p:sld>
-</file>
-
-<file path=ppt/slides/slide3.xml><?xml version="1.0" encoding="utf-8"?>
-<p:sld xmlns:a="http://schemas.openxmlformats.org/drawingml/2006/main" xmlns:r="http://schemas.openxmlformats.org/officeDocument/2006/relationships" xmlns:p="http://schemas.openxmlformats.org/presentationml/2006/main">
-  <p:cSld>
-    <p:spTree>
-      <p:nvGrpSpPr>
-        <p:cNvPr id="1" name="">
-          <a:extLst>
-            <a:ext uri="{FF2B5EF4-FFF2-40B4-BE49-F238E27FC236}">
-              <a16:creationId xmlns:a16="http://schemas.microsoft.com/office/drawing/2014/main" id="{5B7F334B-FDBB-A672-2E4D-D6B5908C6482}"/>
-            </a:ext>
-          </a:extLst>
-        </p:cNvPr>
-        <p:cNvGrpSpPr/>
-        <p:nvPr/>
-      </p:nvGrpSpPr>
-      <p:grpSpPr>
-        <a:xfrm>
-          <a:off x="0" y="0"/>
-          <a:ext cx="0" cy="0"/>
-          <a:chOff x="0" y="0"/>
-          <a:chExt cx="0" cy="0"/>
-        </a:xfrm>
-      </p:grpSpPr>
-      <p:sp>
-        <p:nvSpPr>
-          <p:cNvPr id="2" name="タイトル 1">
-            <a:extLst>
-              <a:ext uri="{FF2B5EF4-FFF2-40B4-BE49-F238E27FC236}">
-                <a16:creationId xmlns:a16="http://schemas.microsoft.com/office/drawing/2014/main" id="{1EB85FF3-F6EE-4285-4091-0973186413EA}"/>
-              </a:ext>
-            </a:extLst>
-          </p:cNvPr>
-          <p:cNvSpPr>
-            <a:spLocks noGrp="1"/>
-          </p:cNvSpPr>
-          <p:nvPr>
-            <p:ph type="title"/>
-          </p:nvPr>
-        </p:nvSpPr>
-        <p:spPr/>
-        <p:txBody>
-          <a:bodyPr/>
-          <a:lstStyle/>
-          <a:p>
-            <a:r>
-              <a:rPr kumimoji="1" lang="ja-JP" altLang="en-US" dirty="0"/>
-              <a:t>目次</a:t>
-            </a:r>
-          </a:p>
-        </p:txBody>
-      </p:sp>
-      <p:sp>
-        <p:nvSpPr>
-          <p:cNvPr id="3" name="コンテンツ プレースホルダー 2">
-            <a:extLst>
-              <a:ext uri="{FF2B5EF4-FFF2-40B4-BE49-F238E27FC236}">
-                <a16:creationId xmlns:a16="http://schemas.microsoft.com/office/drawing/2014/main" id="{C33145C6-AA19-15B0-CB78-D3BECF4A947D}"/>
-              </a:ext>
-            </a:extLst>
-          </p:cNvPr>
-          <p:cNvSpPr>
-            <a:spLocks noGrp="1"/>
-          </p:cNvSpPr>
-          <p:nvPr>
-            <p:ph idx="1"/>
-          </p:nvPr>
-        </p:nvSpPr>
-        <p:spPr/>
-        <p:txBody>
-          <a:bodyPr/>
-          <a:lstStyle/>
-          <a:p>
-            <a:r>
-              <a:rPr kumimoji="1" lang="ja-JP" altLang="en-US" dirty="0">
-                <a:solidFill>
-                  <a:srgbClr val="FF0000"/>
-                </a:solidFill>
-              </a:rPr>
-              <a:t>研究背景</a:t>
-            </a:r>
-            <a:endParaRPr kumimoji="1" lang="en-US" altLang="ja-JP" dirty="0">
-              <a:solidFill>
-                <a:srgbClr val="FF0000"/>
-              </a:solidFill>
-            </a:endParaRPr>
-          </a:p>
-          <a:p>
-            <a:r>
-              <a:rPr lang="ja-JP" altLang="en-US" dirty="0"/>
-              <a:t>研究方法</a:t>
-            </a:r>
-            <a:endParaRPr lang="en-US" altLang="ja-JP" dirty="0"/>
-          </a:p>
-          <a:p>
-            <a:r>
-              <a:rPr kumimoji="1" lang="ja-JP" altLang="en-US" dirty="0"/>
-              <a:t>問題解決</a:t>
-            </a:r>
-            <a:r>
-              <a:rPr lang="ja-JP" altLang="en-US" dirty="0"/>
-              <a:t>能力の評価実験</a:t>
-            </a:r>
-            <a:endParaRPr lang="en-US" altLang="ja-JP" dirty="0"/>
-          </a:p>
-          <a:p>
-            <a:r>
-              <a:rPr kumimoji="1" lang="ja-JP" altLang="en-US" dirty="0"/>
-              <a:t>分析と考察</a:t>
-            </a:r>
-          </a:p>
-        </p:txBody>
-      </p:sp>
-      <p:sp>
-        <p:nvSpPr>
-          <p:cNvPr id="7" name="スライド番号プレースホルダー 6">
-            <a:extLst>
-              <a:ext uri="{FF2B5EF4-FFF2-40B4-BE49-F238E27FC236}">
-                <a16:creationId xmlns:a16="http://schemas.microsoft.com/office/drawing/2014/main" id="{665DCAC2-8785-1720-63B5-0814DF17D33C}"/>
-              </a:ext>
-            </a:extLst>
-          </p:cNvPr>
-          <p:cNvSpPr>
-            <a:spLocks noGrp="1"/>
-          </p:cNvSpPr>
-          <p:nvPr>
-            <p:ph type="sldNum" sz="quarter" idx="12"/>
-          </p:nvPr>
-        </p:nvSpPr>
-        <p:spPr/>
-        <p:txBody>
-          <a:bodyPr/>
-          <a:lstStyle/>
-          <a:p>
-            <a:fld id="{10649E7B-FC1B-418B-9B6A-00859DB1DEE8}" type="slidenum">
-              <a:rPr kumimoji="1" lang="ja-JP" altLang="en-US" smtClean="0"/>
-              <a:t>3</a:t>
-            </a:fld>
-            <a:endParaRPr kumimoji="1" lang="ja-JP" altLang="en-US"/>
-          </a:p>
-        </p:txBody>
-      </p:sp>
-    </p:spTree>
-    <p:extLst>
-      <p:ext uri="{BB962C8B-B14F-4D97-AF65-F5344CB8AC3E}">
-        <p14:creationId xmlns:p14="http://schemas.microsoft.com/office/powerpoint/2010/main" val="2417424630"/>
-      </p:ext>
-    </p:extLst>
-  </p:cSld>
-  <p:clrMapOvr>
-    <a:masterClrMapping/>
-  </p:clrMapOvr>
-</p:sld>
-</file>
-
-<file path=ppt/slides/slide30.xml><?xml version="1.0" encoding="utf-8"?>
-<p:sld xmlns:a="http://schemas.openxmlformats.org/drawingml/2006/main" xmlns:r="http://schemas.openxmlformats.org/officeDocument/2006/relationships" xmlns:p="http://schemas.openxmlformats.org/presentationml/2006/main">
-  <p:cSld>
-    <p:spTree>
-      <p:nvGrpSpPr>
         <p:cNvPr id="1" name="">
           <a:extLst>
             <a:ext uri="{FF2B5EF4-FFF2-40B4-BE49-F238E27FC236}">
@@ -11342,7 +10896,7 @@
           <a:p>
             <a:fld id="{10649E7B-FC1B-418B-9B6A-00859DB1DEE8}" type="slidenum">
               <a:rPr kumimoji="1" lang="ja-JP" altLang="en-US" smtClean="0"/>
-              <a:t>30</a:t>
+              <a:t>29</a:t>
             </a:fld>
             <a:endParaRPr kumimoji="1" lang="ja-JP" altLang="en-US"/>
           </a:p>
@@ -11409,7 +10963,161 @@
 </p:sld>
 </file>
 
-<file path=ppt/slides/slide31.xml><?xml version="1.0" encoding="utf-8"?>
+<file path=ppt/slides/slide3.xml><?xml version="1.0" encoding="utf-8"?>
+<p:sld xmlns:a="http://schemas.openxmlformats.org/drawingml/2006/main" xmlns:r="http://schemas.openxmlformats.org/officeDocument/2006/relationships" xmlns:p="http://schemas.openxmlformats.org/presentationml/2006/main">
+  <p:cSld>
+    <p:spTree>
+      <p:nvGrpSpPr>
+        <p:cNvPr id="1" name="">
+          <a:extLst>
+            <a:ext uri="{FF2B5EF4-FFF2-40B4-BE49-F238E27FC236}">
+              <a16:creationId xmlns:a16="http://schemas.microsoft.com/office/drawing/2014/main" id="{5B7F334B-FDBB-A672-2E4D-D6B5908C6482}"/>
+            </a:ext>
+          </a:extLst>
+        </p:cNvPr>
+        <p:cNvGrpSpPr/>
+        <p:nvPr/>
+      </p:nvGrpSpPr>
+      <p:grpSpPr>
+        <a:xfrm>
+          <a:off x="0" y="0"/>
+          <a:ext cx="0" cy="0"/>
+          <a:chOff x="0" y="0"/>
+          <a:chExt cx="0" cy="0"/>
+        </a:xfrm>
+      </p:grpSpPr>
+      <p:sp>
+        <p:nvSpPr>
+          <p:cNvPr id="2" name="タイトル 1">
+            <a:extLst>
+              <a:ext uri="{FF2B5EF4-FFF2-40B4-BE49-F238E27FC236}">
+                <a16:creationId xmlns:a16="http://schemas.microsoft.com/office/drawing/2014/main" id="{1EB85FF3-F6EE-4285-4091-0973186413EA}"/>
+              </a:ext>
+            </a:extLst>
+          </p:cNvPr>
+          <p:cNvSpPr>
+            <a:spLocks noGrp="1"/>
+          </p:cNvSpPr>
+          <p:nvPr>
+            <p:ph type="title"/>
+          </p:nvPr>
+        </p:nvSpPr>
+        <p:spPr/>
+        <p:txBody>
+          <a:bodyPr/>
+          <a:lstStyle/>
+          <a:p>
+            <a:r>
+              <a:rPr kumimoji="1" lang="ja-JP" altLang="en-US" dirty="0"/>
+              <a:t>目次</a:t>
+            </a:r>
+          </a:p>
+        </p:txBody>
+      </p:sp>
+      <p:sp>
+        <p:nvSpPr>
+          <p:cNvPr id="3" name="コンテンツ プレースホルダー 2">
+            <a:extLst>
+              <a:ext uri="{FF2B5EF4-FFF2-40B4-BE49-F238E27FC236}">
+                <a16:creationId xmlns:a16="http://schemas.microsoft.com/office/drawing/2014/main" id="{C33145C6-AA19-15B0-CB78-D3BECF4A947D}"/>
+              </a:ext>
+            </a:extLst>
+          </p:cNvPr>
+          <p:cNvSpPr>
+            <a:spLocks noGrp="1"/>
+          </p:cNvSpPr>
+          <p:nvPr>
+            <p:ph idx="1"/>
+          </p:nvPr>
+        </p:nvSpPr>
+        <p:spPr/>
+        <p:txBody>
+          <a:bodyPr/>
+          <a:lstStyle/>
+          <a:p>
+            <a:r>
+              <a:rPr kumimoji="1" lang="ja-JP" altLang="en-US" dirty="0">
+                <a:solidFill>
+                  <a:srgbClr val="FF0000"/>
+                </a:solidFill>
+              </a:rPr>
+              <a:t>研究背景</a:t>
+            </a:r>
+            <a:endParaRPr kumimoji="1" lang="en-US" altLang="ja-JP" dirty="0">
+              <a:solidFill>
+                <a:srgbClr val="FF0000"/>
+              </a:solidFill>
+            </a:endParaRPr>
+          </a:p>
+          <a:p>
+            <a:r>
+              <a:rPr lang="ja-JP" altLang="en-US" dirty="0"/>
+              <a:t>研究方法</a:t>
+            </a:r>
+            <a:endParaRPr lang="en-US" altLang="ja-JP" dirty="0"/>
+          </a:p>
+          <a:p>
+            <a:r>
+              <a:rPr kumimoji="1" lang="ja-JP" altLang="en-US" dirty="0"/>
+              <a:t>問題解決</a:t>
+            </a:r>
+            <a:r>
+              <a:rPr lang="ja-JP" altLang="en-US" dirty="0"/>
+              <a:t>能力の評価実験</a:t>
+            </a:r>
+            <a:endParaRPr lang="en-US" altLang="ja-JP" dirty="0"/>
+          </a:p>
+          <a:p>
+            <a:r>
+              <a:rPr kumimoji="1" lang="ja-JP" altLang="en-US" dirty="0"/>
+              <a:t>分析と考察</a:t>
+            </a:r>
+          </a:p>
+        </p:txBody>
+      </p:sp>
+      <p:sp>
+        <p:nvSpPr>
+          <p:cNvPr id="7" name="スライド番号プレースホルダー 6">
+            <a:extLst>
+              <a:ext uri="{FF2B5EF4-FFF2-40B4-BE49-F238E27FC236}">
+                <a16:creationId xmlns:a16="http://schemas.microsoft.com/office/drawing/2014/main" id="{665DCAC2-8785-1720-63B5-0814DF17D33C}"/>
+              </a:ext>
+            </a:extLst>
+          </p:cNvPr>
+          <p:cNvSpPr>
+            <a:spLocks noGrp="1"/>
+          </p:cNvSpPr>
+          <p:nvPr>
+            <p:ph type="sldNum" sz="quarter" idx="12"/>
+          </p:nvPr>
+        </p:nvSpPr>
+        <p:spPr/>
+        <p:txBody>
+          <a:bodyPr/>
+          <a:lstStyle/>
+          <a:p>
+            <a:fld id="{10649E7B-FC1B-418B-9B6A-00859DB1DEE8}" type="slidenum">
+              <a:rPr kumimoji="1" lang="ja-JP" altLang="en-US" smtClean="0"/>
+              <a:t>3</a:t>
+            </a:fld>
+            <a:endParaRPr kumimoji="1" lang="ja-JP" altLang="en-US"/>
+          </a:p>
+        </p:txBody>
+      </p:sp>
+    </p:spTree>
+    <p:extLst>
+      <p:ext uri="{BB962C8B-B14F-4D97-AF65-F5344CB8AC3E}">
+        <p14:creationId xmlns:p14="http://schemas.microsoft.com/office/powerpoint/2010/main" val="2417424630"/>
+      </p:ext>
+    </p:extLst>
+  </p:cSld>
+  <p:clrMapOvr>
+    <a:masterClrMapping/>
+  </p:clrMapOvr>
+</p:sld>
+</file>
+
+<file path=ppt/slides/slide30.xml><?xml version="1.0" encoding="utf-8"?>
 <p:sld xmlns:a="http://schemas.openxmlformats.org/drawingml/2006/main" xmlns:r="http://schemas.openxmlformats.org/officeDocument/2006/relationships" xmlns:p="http://schemas.openxmlformats.org/presentationml/2006/main">
   <p:cSld>
     <p:spTree>
@@ -11482,6 +11190,11 @@
           </p:cNvGraphicFramePr>
           <p:nvPr>
             <p:ph idx="1"/>
+            <p:extLst>
+              <p:ext uri="{D42A27DB-BD31-4B8C-83A1-F6EECF244321}">
+                <p14:modId xmlns:p14="http://schemas.microsoft.com/office/powerpoint/2010/main" val="283703905"/>
+              </p:ext>
+            </p:extLst>
           </p:nvPr>
         </p:nvGraphicFramePr>
         <p:xfrm>
@@ -11523,7 +11236,6 @@
                     <a:bodyPr/>
                     <a:lstStyle/>
                     <a:p>
-                      <a:pPr algn="ctr"/>
                       <a:endParaRPr kumimoji="1" lang="ja-JP" altLang="en-US" dirty="0"/>
                     </a:p>
                   </a:txBody>
@@ -11577,6 +11289,2841 @@
                       <a:r>
                         <a:rPr kumimoji="1" lang="en-US" altLang="ja-JP" dirty="0"/>
                         <a:t>1</a:t>
+                      </a:r>
+                      <a:endParaRPr kumimoji="1" lang="ja-JP" altLang="en-US" dirty="0"/>
+                    </a:p>
+                  </a:txBody>
+                  <a:tcPr anchor="ctr"/>
+                </a:tc>
+                <a:tc>
+                  <a:txBody>
+                    <a:bodyPr/>
+                    <a:lstStyle/>
+                    <a:p>
+                      <a:pPr algn="ctr"/>
+                      <a:r>
+                        <a:rPr kumimoji="1" lang="en-US" altLang="ja-JP" sz="1800" b="0" i="0" kern="1200" dirty="0">
+                          <a:solidFill>
+                            <a:schemeClr val="dk1"/>
+                          </a:solidFill>
+                          <a:effectLst/>
+                          <a:latin typeface="+mn-lt"/>
+                          <a:ea typeface="+mn-ea"/>
+                          <a:cs typeface="+mn-cs"/>
+                        </a:rPr>
+                        <a:t>201</a:t>
+                      </a:r>
+                      <a:r>
+                        <a:rPr kumimoji="1" lang="en-US" altLang="zh-TW" dirty="0"/>
+                        <a:t>/</a:t>
+                      </a:r>
+                      <a:r>
+                        <a:rPr kumimoji="1" lang="ja-JP" altLang="ja-JP" sz="1800" b="0" i="0" kern="1200" dirty="0">
+                          <a:solidFill>
+                            <a:schemeClr val="dk1"/>
+                          </a:solidFill>
+                          <a:effectLst/>
+                          <a:latin typeface="+mn-lt"/>
+                          <a:ea typeface="+mn-ea"/>
+                          <a:cs typeface="+mn-cs"/>
+                        </a:rPr>
+                        <a:t>240</a:t>
+                      </a:r>
+                      <a:endParaRPr kumimoji="1" lang="en-US" altLang="ja-JP" sz="1800" b="0" i="0" kern="1200" dirty="0">
+                        <a:solidFill>
+                          <a:schemeClr val="dk1"/>
+                        </a:solidFill>
+                        <a:effectLst/>
+                        <a:latin typeface="+mn-lt"/>
+                        <a:ea typeface="+mn-ea"/>
+                        <a:cs typeface="+mn-cs"/>
+                      </a:endParaRPr>
+                    </a:p>
+                    <a:p>
+                      <a:pPr algn="ctr"/>
+                      <a:r>
+                        <a:rPr kumimoji="1" lang="en-US" altLang="ja-JP" sz="1800" b="0" i="0" kern="1200" dirty="0">
+                          <a:solidFill>
+                            <a:schemeClr val="dk1"/>
+                          </a:solidFill>
+                          <a:effectLst/>
+                          <a:latin typeface="+mn-lt"/>
+                          <a:ea typeface="+mn-ea"/>
+                          <a:cs typeface="+mn-cs"/>
+                        </a:rPr>
+                        <a:t>83.7%</a:t>
+                      </a:r>
+                      <a:endParaRPr kumimoji="1" lang="ja-JP" altLang="en-US" dirty="0"/>
+                    </a:p>
+                  </a:txBody>
+                  <a:tcPr anchor="ctr"/>
+                </a:tc>
+                <a:tc>
+                  <a:txBody>
+                    <a:bodyPr/>
+                    <a:lstStyle/>
+                    <a:p>
+                      <a:pPr algn="ctr"/>
+                      <a:r>
+                        <a:rPr kumimoji="1" lang="en-US" altLang="ja-JP" sz="1800" b="0" i="0" kern="1200" dirty="0">
+                          <a:solidFill>
+                            <a:schemeClr val="dk1"/>
+                          </a:solidFill>
+                          <a:effectLst/>
+                          <a:latin typeface="+mn-lt"/>
+                          <a:ea typeface="+mn-ea"/>
+                          <a:cs typeface="+mn-cs"/>
+                        </a:rPr>
+                        <a:t>362</a:t>
+                      </a:r>
+                      <a:r>
+                        <a:rPr kumimoji="1" lang="en-US" altLang="zh-TW" dirty="0"/>
+                        <a:t>/4</a:t>
+                      </a:r>
+                      <a:r>
+                        <a:rPr kumimoji="1" lang="en-US" altLang="ja-JP" dirty="0"/>
+                        <a:t>60</a:t>
+                      </a:r>
+                      <a:endParaRPr kumimoji="1" lang="en-US" altLang="zh-TW" dirty="0"/>
+                    </a:p>
+                    <a:p>
+                      <a:pPr algn="ctr"/>
+                      <a:r>
+                        <a:rPr kumimoji="1" lang="en-US" altLang="ja-JP" dirty="0"/>
+                        <a:t>78.6%</a:t>
+                      </a:r>
+                      <a:endParaRPr kumimoji="1" lang="ja-JP" altLang="en-US" dirty="0"/>
+                    </a:p>
+                  </a:txBody>
+                  <a:tcPr anchor="ctr"/>
+                </a:tc>
+                <a:extLst>
+                  <a:ext uri="{0D108BD9-81ED-4DB2-BD59-A6C34878D82A}">
+                    <a16:rowId xmlns:a16="http://schemas.microsoft.com/office/drawing/2014/main" val="4205910191"/>
+                  </a:ext>
+                </a:extLst>
+              </a:tr>
+            </a:tbl>
+          </a:graphicData>
+        </a:graphic>
+      </p:graphicFrame>
+      <p:sp>
+        <p:nvSpPr>
+          <p:cNvPr id="4" name="スライド番号プレースホルダー 3">
+            <a:extLst>
+              <a:ext uri="{FF2B5EF4-FFF2-40B4-BE49-F238E27FC236}">
+                <a16:creationId xmlns:a16="http://schemas.microsoft.com/office/drawing/2014/main" id="{B493540B-A119-3FD0-F87F-84C1545AECC5}"/>
+              </a:ext>
+            </a:extLst>
+          </p:cNvPr>
+          <p:cNvSpPr>
+            <a:spLocks noGrp="1"/>
+          </p:cNvSpPr>
+          <p:nvPr>
+            <p:ph type="sldNum" sz="quarter" idx="12"/>
+          </p:nvPr>
+        </p:nvSpPr>
+        <p:spPr/>
+        <p:txBody>
+          <a:bodyPr/>
+          <a:lstStyle/>
+          <a:p>
+            <a:fld id="{10649E7B-FC1B-418B-9B6A-00859DB1DEE8}" type="slidenum">
+              <a:rPr kumimoji="1" lang="ja-JP" altLang="en-US" smtClean="0"/>
+              <a:t>30</a:t>
+            </a:fld>
+            <a:endParaRPr kumimoji="1" lang="ja-JP" altLang="en-US"/>
+          </a:p>
+        </p:txBody>
+      </p:sp>
+      <p:sp>
+        <p:nvSpPr>
+          <p:cNvPr id="7" name="テキスト ボックス 6">
+            <a:extLst>
+              <a:ext uri="{FF2B5EF4-FFF2-40B4-BE49-F238E27FC236}">
+                <a16:creationId xmlns:a16="http://schemas.microsoft.com/office/drawing/2014/main" id="{199EE5DD-4D38-045A-947D-B8B5063C9BBC}"/>
+              </a:ext>
+            </a:extLst>
+          </p:cNvPr>
+          <p:cNvSpPr txBox="1"/>
+          <p:nvPr/>
+        </p:nvSpPr>
+        <p:spPr>
+          <a:xfrm>
+            <a:off x="928255" y="6077247"/>
+            <a:ext cx="9985663" cy="369332"/>
+          </a:xfrm>
+          <a:prstGeom prst="rect">
+            <a:avLst/>
+          </a:prstGeom>
+          <a:noFill/>
+        </p:spPr>
+        <p:txBody>
+          <a:bodyPr wrap="square" rtlCol="0">
+            <a:spAutoFit/>
+          </a:bodyPr>
+          <a:lstStyle/>
+          <a:p>
+            <a:r>
+              <a:rPr kumimoji="1" lang="ja-JP" altLang="en-US" dirty="0"/>
+              <a:t>テストデータその</a:t>
+            </a:r>
+            <a:r>
+              <a:rPr kumimoji="1" lang="en-US" altLang="ja-JP" dirty="0"/>
+              <a:t>1</a:t>
+            </a:r>
+            <a:r>
+              <a:rPr kumimoji="1" lang="ja-JP" altLang="en-US" dirty="0"/>
+              <a:t>：</a:t>
+            </a:r>
+            <a:r>
+              <a:rPr lang="ja-JP" altLang="en-US" dirty="0"/>
+              <a:t>訓練用のデータの問題と同じルール</a:t>
+            </a:r>
+            <a:endParaRPr lang="en-US" altLang="ja-JP" dirty="0"/>
+          </a:p>
+        </p:txBody>
+      </p:sp>
+    </p:spTree>
+    <p:extLst>
+      <p:ext uri="{BB962C8B-B14F-4D97-AF65-F5344CB8AC3E}">
+        <p14:creationId xmlns:p14="http://schemas.microsoft.com/office/powerpoint/2010/main" val="3060401301"/>
+      </p:ext>
+    </p:extLst>
+  </p:cSld>
+  <p:clrMapOvr>
+    <a:masterClrMapping/>
+  </p:clrMapOvr>
+</p:sld>
+</file>
+
+<file path=ppt/slides/slide31.xml><?xml version="1.0" encoding="utf-8"?>
+<p:sld xmlns:a="http://schemas.openxmlformats.org/drawingml/2006/main" xmlns:r="http://schemas.openxmlformats.org/officeDocument/2006/relationships" xmlns:p="http://schemas.openxmlformats.org/presentationml/2006/main">
+  <p:cSld>
+    <p:spTree>
+      <p:nvGrpSpPr>
+        <p:cNvPr id="1" name="">
+          <a:extLst>
+            <a:ext uri="{FF2B5EF4-FFF2-40B4-BE49-F238E27FC236}">
+              <a16:creationId xmlns:a16="http://schemas.microsoft.com/office/drawing/2014/main" id="{AA36BEB3-1614-EE3B-8BD4-3419FE5DB783}"/>
+            </a:ext>
+          </a:extLst>
+        </p:cNvPr>
+        <p:cNvGrpSpPr/>
+        <p:nvPr/>
+      </p:nvGrpSpPr>
+      <p:grpSpPr>
+        <a:xfrm>
+          <a:off x="0" y="0"/>
+          <a:ext cx="0" cy="0"/>
+          <a:chOff x="0" y="0"/>
+          <a:chExt cx="0" cy="0"/>
+        </a:xfrm>
+      </p:grpSpPr>
+      <p:sp>
+        <p:nvSpPr>
+          <p:cNvPr id="2" name="タイトル 1">
+            <a:extLst>
+              <a:ext uri="{FF2B5EF4-FFF2-40B4-BE49-F238E27FC236}">
+                <a16:creationId xmlns:a16="http://schemas.microsoft.com/office/drawing/2014/main" id="{2990C79B-3332-C0C1-640A-AA6AA006F6ED}"/>
+              </a:ext>
+            </a:extLst>
+          </p:cNvPr>
+          <p:cNvSpPr>
+            <a:spLocks noGrp="1"/>
+          </p:cNvSpPr>
+          <p:nvPr>
+            <p:ph type="title"/>
+          </p:nvPr>
+        </p:nvSpPr>
+        <p:spPr/>
+        <p:txBody>
+          <a:bodyPr/>
+          <a:lstStyle/>
+          <a:p>
+            <a:r>
+              <a:rPr kumimoji="1" lang="ja-JP" altLang="en-US" dirty="0"/>
+              <a:t>目次</a:t>
+            </a:r>
+          </a:p>
+        </p:txBody>
+      </p:sp>
+      <p:sp>
+        <p:nvSpPr>
+          <p:cNvPr id="3" name="コンテンツ プレースホルダー 2">
+            <a:extLst>
+              <a:ext uri="{FF2B5EF4-FFF2-40B4-BE49-F238E27FC236}">
+                <a16:creationId xmlns:a16="http://schemas.microsoft.com/office/drawing/2014/main" id="{0190E8DC-BF4A-8564-B8AC-28209A35257F}"/>
+              </a:ext>
+            </a:extLst>
+          </p:cNvPr>
+          <p:cNvSpPr>
+            <a:spLocks noGrp="1"/>
+          </p:cNvSpPr>
+          <p:nvPr>
+            <p:ph idx="1"/>
+          </p:nvPr>
+        </p:nvSpPr>
+        <p:spPr/>
+        <p:txBody>
+          <a:bodyPr/>
+          <a:lstStyle/>
+          <a:p>
+            <a:r>
+              <a:rPr kumimoji="1" lang="ja-JP" altLang="en-US" dirty="0"/>
+              <a:t>研究背景</a:t>
+            </a:r>
+            <a:endParaRPr kumimoji="1" lang="en-US" altLang="ja-JP" dirty="0"/>
+          </a:p>
+          <a:p>
+            <a:r>
+              <a:rPr lang="ja-JP" altLang="en-US" dirty="0"/>
+              <a:t>研究方法</a:t>
+            </a:r>
+            <a:endParaRPr lang="en-US" altLang="ja-JP" dirty="0"/>
+          </a:p>
+          <a:p>
+            <a:r>
+              <a:rPr kumimoji="1" lang="ja-JP" altLang="en-US" dirty="0"/>
+              <a:t>問題解決</a:t>
+            </a:r>
+            <a:r>
+              <a:rPr lang="ja-JP" altLang="en-US" dirty="0"/>
+              <a:t>能力の評価実験</a:t>
+            </a:r>
+            <a:endParaRPr lang="en-US" altLang="ja-JP" dirty="0"/>
+          </a:p>
+          <a:p>
+            <a:r>
+              <a:rPr kumimoji="1" lang="ja-JP" altLang="en-US" dirty="0">
+                <a:solidFill>
+                  <a:srgbClr val="FF0000"/>
+                </a:solidFill>
+              </a:rPr>
+              <a:t>分析と考察</a:t>
+            </a:r>
+          </a:p>
+        </p:txBody>
+      </p:sp>
+      <p:sp>
+        <p:nvSpPr>
+          <p:cNvPr id="7" name="スライド番号プレースホルダー 6">
+            <a:extLst>
+              <a:ext uri="{FF2B5EF4-FFF2-40B4-BE49-F238E27FC236}">
+                <a16:creationId xmlns:a16="http://schemas.microsoft.com/office/drawing/2014/main" id="{23B21B16-1017-7EDA-FE9B-9EB2C4AAD8C8}"/>
+              </a:ext>
+            </a:extLst>
+          </p:cNvPr>
+          <p:cNvSpPr>
+            <a:spLocks noGrp="1"/>
+          </p:cNvSpPr>
+          <p:nvPr>
+            <p:ph type="sldNum" sz="quarter" idx="12"/>
+          </p:nvPr>
+        </p:nvSpPr>
+        <p:spPr/>
+        <p:txBody>
+          <a:bodyPr/>
+          <a:lstStyle/>
+          <a:p>
+            <a:fld id="{10649E7B-FC1B-418B-9B6A-00859DB1DEE8}" type="slidenum">
+              <a:rPr kumimoji="1" lang="ja-JP" altLang="en-US" smtClean="0"/>
+              <a:t>31</a:t>
+            </a:fld>
+            <a:endParaRPr kumimoji="1" lang="ja-JP" altLang="en-US"/>
+          </a:p>
+        </p:txBody>
+      </p:sp>
+    </p:spTree>
+    <p:extLst>
+      <p:ext uri="{BB962C8B-B14F-4D97-AF65-F5344CB8AC3E}">
+        <p14:creationId xmlns:p14="http://schemas.microsoft.com/office/powerpoint/2010/main" val="3063597359"/>
+      </p:ext>
+    </p:extLst>
+  </p:cSld>
+  <p:clrMapOvr>
+    <a:masterClrMapping/>
+  </p:clrMapOvr>
+</p:sld>
+</file>
+
+<file path=ppt/slides/slide32.xml><?xml version="1.0" encoding="utf-8"?>
+<p:sld xmlns:a="http://schemas.openxmlformats.org/drawingml/2006/main" xmlns:r="http://schemas.openxmlformats.org/officeDocument/2006/relationships" xmlns:p="http://schemas.openxmlformats.org/presentationml/2006/main">
+  <p:cSld>
+    <p:spTree>
+      <p:nvGrpSpPr>
+        <p:cNvPr id="1" name=""/>
+        <p:cNvGrpSpPr/>
+        <p:nvPr/>
+      </p:nvGrpSpPr>
+      <p:grpSpPr>
+        <a:xfrm>
+          <a:off x="0" y="0"/>
+          <a:ext cx="0" cy="0"/>
+          <a:chOff x="0" y="0"/>
+          <a:chExt cx="0" cy="0"/>
+        </a:xfrm>
+      </p:grpSpPr>
+      <p:sp>
+        <p:nvSpPr>
+          <p:cNvPr id="2" name="タイトル 1">
+            <a:extLst>
+              <a:ext uri="{FF2B5EF4-FFF2-40B4-BE49-F238E27FC236}">
+                <a16:creationId xmlns:a16="http://schemas.microsoft.com/office/drawing/2014/main" id="{FA9B0453-1EF8-57D9-240B-FEAF8876F59B}"/>
+              </a:ext>
+            </a:extLst>
+          </p:cNvPr>
+          <p:cNvSpPr>
+            <a:spLocks noGrp="1"/>
+          </p:cNvSpPr>
+          <p:nvPr>
+            <p:ph type="title"/>
+          </p:nvPr>
+        </p:nvSpPr>
+        <p:spPr/>
+        <p:txBody>
+          <a:bodyPr/>
+          <a:lstStyle/>
+          <a:p>
+            <a:r>
+              <a:rPr kumimoji="1" lang="ja-JP" altLang="en-US" dirty="0"/>
+              <a:t>ベースモデルの出力の分析</a:t>
+            </a:r>
+            <a:br>
+              <a:rPr kumimoji="1" lang="en-US" altLang="ja-JP" dirty="0"/>
+            </a:br>
+            <a:r>
+              <a:rPr kumimoji="1" lang="ja-JP" altLang="en-US" dirty="0"/>
+              <a:t>（テストデータその１）</a:t>
+            </a:r>
+          </a:p>
+        </p:txBody>
+      </p:sp>
+      <p:sp>
+        <p:nvSpPr>
+          <p:cNvPr id="4" name="スライド番号プレースホルダー 3">
+            <a:extLst>
+              <a:ext uri="{FF2B5EF4-FFF2-40B4-BE49-F238E27FC236}">
+                <a16:creationId xmlns:a16="http://schemas.microsoft.com/office/drawing/2014/main" id="{80675089-58CE-2302-96C7-F9F1AF37D915}"/>
+              </a:ext>
+            </a:extLst>
+          </p:cNvPr>
+          <p:cNvSpPr>
+            <a:spLocks noGrp="1"/>
+          </p:cNvSpPr>
+          <p:nvPr>
+            <p:ph type="sldNum" sz="quarter" idx="12"/>
+          </p:nvPr>
+        </p:nvSpPr>
+        <p:spPr/>
+        <p:txBody>
+          <a:bodyPr/>
+          <a:lstStyle/>
+          <a:p>
+            <a:fld id="{10649E7B-FC1B-418B-9B6A-00859DB1DEE8}" type="slidenum">
+              <a:rPr kumimoji="1" lang="ja-JP" altLang="en-US" smtClean="0"/>
+              <a:t>32</a:t>
+            </a:fld>
+            <a:endParaRPr kumimoji="1" lang="ja-JP" altLang="en-US"/>
+          </a:p>
+        </p:txBody>
+      </p:sp>
+      <p:sp>
+        <p:nvSpPr>
+          <p:cNvPr id="6" name="テキスト ボックス 5">
+            <a:extLst>
+              <a:ext uri="{FF2B5EF4-FFF2-40B4-BE49-F238E27FC236}">
+                <a16:creationId xmlns:a16="http://schemas.microsoft.com/office/drawing/2014/main" id="{96451853-0C40-454C-99E8-E13DF3D0CA32}"/>
+              </a:ext>
+            </a:extLst>
+          </p:cNvPr>
+          <p:cNvSpPr txBox="1"/>
+          <p:nvPr/>
+        </p:nvSpPr>
+        <p:spPr>
+          <a:xfrm>
+            <a:off x="838200" y="6352143"/>
+            <a:ext cx="6097022" cy="369332"/>
+          </a:xfrm>
+          <a:prstGeom prst="rect">
+            <a:avLst/>
+          </a:prstGeom>
+          <a:noFill/>
+        </p:spPr>
+        <p:txBody>
+          <a:bodyPr wrap="square">
+            <a:spAutoFit/>
+          </a:bodyPr>
+          <a:lstStyle/>
+          <a:p>
+            <a:r>
+              <a:rPr kumimoji="1" lang="ja-JP" altLang="en-US" sz="1800" dirty="0"/>
+              <a:t>テストデータその</a:t>
+            </a:r>
+            <a:r>
+              <a:rPr kumimoji="1" lang="en-US" altLang="ja-JP" sz="1800" dirty="0"/>
+              <a:t>1</a:t>
+            </a:r>
+            <a:r>
+              <a:rPr kumimoji="1" lang="ja-JP" altLang="en-US" sz="1800" dirty="0"/>
+              <a:t>：</a:t>
+            </a:r>
+            <a:r>
+              <a:rPr lang="ja-JP" altLang="en-US" sz="1800" dirty="0"/>
+              <a:t>訓練用のデータの問題と同じルール</a:t>
+            </a:r>
+            <a:endParaRPr lang="en-US" altLang="ja-JP" sz="1800" dirty="0"/>
+          </a:p>
+        </p:txBody>
+      </p:sp>
+      <p:graphicFrame>
+        <p:nvGraphicFramePr>
+          <p:cNvPr id="7" name="コンテンツ プレースホルダー 4">
+            <a:extLst>
+              <a:ext uri="{FF2B5EF4-FFF2-40B4-BE49-F238E27FC236}">
+                <a16:creationId xmlns:a16="http://schemas.microsoft.com/office/drawing/2014/main" id="{4444872A-93EF-B0DE-059C-7AA2D217D043}"/>
+              </a:ext>
+            </a:extLst>
+          </p:cNvPr>
+          <p:cNvGraphicFramePr>
+            <a:graphicFrameLocks noGrp="1"/>
+          </p:cNvGraphicFramePr>
+          <p:nvPr>
+            <p:ph idx="1"/>
+            <p:extLst>
+              <p:ext uri="{D42A27DB-BD31-4B8C-83A1-F6EECF244321}">
+                <p14:modId xmlns:p14="http://schemas.microsoft.com/office/powerpoint/2010/main" val="117485199"/>
+              </p:ext>
+            </p:extLst>
+          </p:nvPr>
+        </p:nvGraphicFramePr>
+        <p:xfrm>
+          <a:off x="838200" y="1825625"/>
+          <a:ext cx="10515597" cy="2777061"/>
+        </p:xfrm>
+        <a:graphic>
+          <a:graphicData uri="http://schemas.openxmlformats.org/drawingml/2006/table">
+            <a:tbl>
+              <a:tblPr firstRow="1" bandRow="1">
+                <a:tableStyleId>{5C22544A-7EE6-4342-B048-85BDC9FD1C3A}</a:tableStyleId>
+              </a:tblPr>
+              <a:tblGrid>
+                <a:gridCol w="3505199">
+                  <a:extLst>
+                    <a:ext uri="{9D8B030D-6E8A-4147-A177-3AD203B41FA5}">
+                      <a16:colId xmlns:a16="http://schemas.microsoft.com/office/drawing/2014/main" val="1400479776"/>
+                    </a:ext>
+                  </a:extLst>
+                </a:gridCol>
+                <a:gridCol w="3505199">
+                  <a:extLst>
+                    <a:ext uri="{9D8B030D-6E8A-4147-A177-3AD203B41FA5}">
+                      <a16:colId xmlns:a16="http://schemas.microsoft.com/office/drawing/2014/main" val="2466992613"/>
+                    </a:ext>
+                  </a:extLst>
+                </a:gridCol>
+                <a:gridCol w="3505199">
+                  <a:extLst>
+                    <a:ext uri="{9D8B030D-6E8A-4147-A177-3AD203B41FA5}">
+                      <a16:colId xmlns:a16="http://schemas.microsoft.com/office/drawing/2014/main" val="3550539996"/>
+                    </a:ext>
+                  </a:extLst>
+                </a:gridCol>
+              </a:tblGrid>
+              <a:tr h="925687">
+                <a:tc>
+                  <a:txBody>
+                    <a:bodyPr/>
+                    <a:lstStyle/>
+                    <a:p>
+                      <a:pPr algn="ctr"/>
+                      <a:endParaRPr kumimoji="1" lang="ja-JP" altLang="en-US" dirty="0"/>
+                    </a:p>
+                  </a:txBody>
+                  <a:tcPr anchor="ctr"/>
+                </a:tc>
+                <a:tc>
+                  <a:txBody>
+                    <a:bodyPr/>
+                    <a:lstStyle/>
+                    <a:p>
+                      <a:pPr algn="ctr"/>
+                      <a:r>
+                        <a:rPr kumimoji="1" lang="ja-JP" altLang="en-US" dirty="0"/>
+                        <a:t>通常終了</a:t>
+                      </a:r>
+                    </a:p>
+                  </a:txBody>
+                  <a:tcPr anchor="ctr"/>
+                </a:tc>
+                <a:tc>
+                  <a:txBody>
+                    <a:bodyPr/>
+                    <a:lstStyle/>
+                    <a:p>
+                      <a:pPr algn="ctr"/>
+                      <a:r>
+                        <a:rPr kumimoji="1" lang="ja-JP" altLang="en-US" dirty="0"/>
+                        <a:t>トークン上限到達</a:t>
+                      </a:r>
+                      <a:r>
+                        <a:rPr kumimoji="1" lang="en-US" altLang="ja-JP" dirty="0"/>
+                        <a:t>(</a:t>
+                      </a:r>
+                      <a:r>
+                        <a:rPr kumimoji="1" lang="ja-JP" altLang="en-US" dirty="0"/>
+                        <a:t>上限は</a:t>
+                      </a:r>
+                      <a:r>
+                        <a:rPr kumimoji="1" lang="en-US" altLang="ja-JP" dirty="0"/>
+                        <a:t>8192)</a:t>
+                      </a:r>
+                      <a:endParaRPr kumimoji="1" lang="ja-JP" altLang="en-US" dirty="0"/>
+                    </a:p>
+                  </a:txBody>
+                  <a:tcPr anchor="ctr"/>
+                </a:tc>
+                <a:extLst>
+                  <a:ext uri="{0D108BD9-81ED-4DB2-BD59-A6C34878D82A}">
+                    <a16:rowId xmlns:a16="http://schemas.microsoft.com/office/drawing/2014/main" val="275587262"/>
+                  </a:ext>
+                </a:extLst>
+              </a:tr>
+              <a:tr h="925687">
+                <a:tc>
+                  <a:txBody>
+                    <a:bodyPr/>
+                    <a:lstStyle/>
+                    <a:p>
+                      <a:pPr algn="ctr"/>
+                      <a:r>
+                        <a:rPr kumimoji="1" lang="ja-JP" altLang="en-US" dirty="0"/>
+                        <a:t>正解</a:t>
+                      </a:r>
+                    </a:p>
+                  </a:txBody>
+                  <a:tcPr anchor="ctr"/>
+                </a:tc>
+                <a:tc>
+                  <a:txBody>
+                    <a:bodyPr/>
+                    <a:lstStyle/>
+                    <a:p>
+                      <a:pPr algn="ctr"/>
+                      <a:r>
+                        <a:rPr kumimoji="1" lang="ja-JP" altLang="ja-JP" sz="1800" b="0" i="0" kern="1200" dirty="0">
+                          <a:solidFill>
+                            <a:schemeClr val="dk1"/>
+                          </a:solidFill>
+                          <a:effectLst/>
+                          <a:latin typeface="+mn-lt"/>
+                          <a:ea typeface="+mn-ea"/>
+                          <a:cs typeface="+mn-cs"/>
+                        </a:rPr>
+                        <a:t>254</a:t>
+                      </a:r>
+                      <a:endParaRPr kumimoji="1" lang="ja-JP" altLang="en-US" dirty="0"/>
+                    </a:p>
+                  </a:txBody>
+                  <a:tcPr anchor="ctr"/>
+                </a:tc>
+                <a:tc>
+                  <a:txBody>
+                    <a:bodyPr/>
+                    <a:lstStyle/>
+                    <a:p>
+                      <a:pPr algn="ctr"/>
+                      <a:r>
+                        <a:rPr kumimoji="1" lang="ja-JP" altLang="ja-JP" sz="1800" b="0" i="0" kern="1200" dirty="0">
+                          <a:solidFill>
+                            <a:schemeClr val="dk1"/>
+                          </a:solidFill>
+                          <a:effectLst/>
+                          <a:latin typeface="+mn-lt"/>
+                          <a:ea typeface="+mn-ea"/>
+                          <a:cs typeface="+mn-cs"/>
+                        </a:rPr>
+                        <a:t>13</a:t>
+                      </a:r>
+                      <a:endParaRPr kumimoji="1" lang="ja-JP" altLang="en-US" dirty="0"/>
+                    </a:p>
+                  </a:txBody>
+                  <a:tcPr anchor="ctr"/>
+                </a:tc>
+                <a:extLst>
+                  <a:ext uri="{0D108BD9-81ED-4DB2-BD59-A6C34878D82A}">
+                    <a16:rowId xmlns:a16="http://schemas.microsoft.com/office/drawing/2014/main" val="3511778032"/>
+                  </a:ext>
+                </a:extLst>
+              </a:tr>
+              <a:tr h="925687">
+                <a:tc>
+                  <a:txBody>
+                    <a:bodyPr/>
+                    <a:lstStyle/>
+                    <a:p>
+                      <a:pPr algn="ctr"/>
+                      <a:r>
+                        <a:rPr kumimoji="1" lang="ja-JP" altLang="en-US" dirty="0"/>
+                        <a:t>不正解</a:t>
+                      </a:r>
+                    </a:p>
+                  </a:txBody>
+                  <a:tcPr anchor="ctr"/>
+                </a:tc>
+                <a:tc>
+                  <a:txBody>
+                    <a:bodyPr/>
+                    <a:lstStyle/>
+                    <a:p>
+                      <a:pPr algn="ctr"/>
+                      <a:r>
+                        <a:rPr kumimoji="1" lang="ja-JP" altLang="ja-JP" sz="1800" b="0" i="0" kern="1200" dirty="0">
+                          <a:solidFill>
+                            <a:schemeClr val="dk1"/>
+                          </a:solidFill>
+                          <a:effectLst/>
+                          <a:latin typeface="+mn-lt"/>
+                          <a:ea typeface="+mn-ea"/>
+                          <a:cs typeface="+mn-cs"/>
+                        </a:rPr>
+                        <a:t>3</a:t>
+                      </a:r>
+                      <a:endParaRPr kumimoji="1" lang="ja-JP" altLang="en-US" dirty="0"/>
+                    </a:p>
+                  </a:txBody>
+                  <a:tcPr anchor="ctr"/>
+                </a:tc>
+                <a:tc>
+                  <a:txBody>
+                    <a:bodyPr/>
+                    <a:lstStyle/>
+                    <a:p>
+                      <a:pPr algn="ctr"/>
+                      <a:r>
+                        <a:rPr kumimoji="1" lang="ja-JP" altLang="ja-JP" sz="1800" b="0" i="0" kern="1200" dirty="0">
+                          <a:solidFill>
+                            <a:schemeClr val="dk1"/>
+                          </a:solidFill>
+                          <a:effectLst/>
+                          <a:latin typeface="+mn-lt"/>
+                          <a:ea typeface="+mn-ea"/>
+                          <a:cs typeface="+mn-cs"/>
+                        </a:rPr>
+                        <a:t>430</a:t>
+                      </a:r>
+                      <a:endParaRPr kumimoji="1" lang="ja-JP" altLang="en-US" dirty="0"/>
+                    </a:p>
+                  </a:txBody>
+                  <a:tcPr anchor="ctr"/>
+                </a:tc>
+                <a:extLst>
+                  <a:ext uri="{0D108BD9-81ED-4DB2-BD59-A6C34878D82A}">
+                    <a16:rowId xmlns:a16="http://schemas.microsoft.com/office/drawing/2014/main" val="2379152149"/>
+                  </a:ext>
+                </a:extLst>
+              </a:tr>
+            </a:tbl>
+          </a:graphicData>
+        </a:graphic>
+      </p:graphicFrame>
+    </p:spTree>
+    <p:extLst>
+      <p:ext uri="{BB962C8B-B14F-4D97-AF65-F5344CB8AC3E}">
+        <p14:creationId xmlns:p14="http://schemas.microsoft.com/office/powerpoint/2010/main" val="2773183216"/>
+      </p:ext>
+    </p:extLst>
+  </p:cSld>
+  <p:clrMapOvr>
+    <a:masterClrMapping/>
+  </p:clrMapOvr>
+</p:sld>
+</file>
+
+<file path=ppt/slides/slide33.xml><?xml version="1.0" encoding="utf-8"?>
+<p:sld xmlns:a="http://schemas.openxmlformats.org/drawingml/2006/main" xmlns:r="http://schemas.openxmlformats.org/officeDocument/2006/relationships" xmlns:p="http://schemas.openxmlformats.org/presentationml/2006/main">
+  <p:cSld>
+    <p:spTree>
+      <p:nvGrpSpPr>
+        <p:cNvPr id="1" name="">
+          <a:extLst>
+            <a:ext uri="{FF2B5EF4-FFF2-40B4-BE49-F238E27FC236}">
+              <a16:creationId xmlns:a16="http://schemas.microsoft.com/office/drawing/2014/main" id="{9FC6718C-5937-7369-22BF-F53104E169E5}"/>
+            </a:ext>
+          </a:extLst>
+        </p:cNvPr>
+        <p:cNvGrpSpPr/>
+        <p:nvPr/>
+      </p:nvGrpSpPr>
+      <p:grpSpPr>
+        <a:xfrm>
+          <a:off x="0" y="0"/>
+          <a:ext cx="0" cy="0"/>
+          <a:chOff x="0" y="0"/>
+          <a:chExt cx="0" cy="0"/>
+        </a:xfrm>
+      </p:grpSpPr>
+      <p:sp>
+        <p:nvSpPr>
+          <p:cNvPr id="2" name="タイトル 1">
+            <a:extLst>
+              <a:ext uri="{FF2B5EF4-FFF2-40B4-BE49-F238E27FC236}">
+                <a16:creationId xmlns:a16="http://schemas.microsoft.com/office/drawing/2014/main" id="{A44FFD9B-0337-3592-34EF-4B5504396138}"/>
+              </a:ext>
+            </a:extLst>
+          </p:cNvPr>
+          <p:cNvSpPr>
+            <a:spLocks noGrp="1"/>
+          </p:cNvSpPr>
+          <p:nvPr>
+            <p:ph type="title"/>
+          </p:nvPr>
+        </p:nvSpPr>
+        <p:spPr/>
+        <p:txBody>
+          <a:bodyPr/>
+          <a:lstStyle/>
+          <a:p>
+            <a:r>
+              <a:rPr kumimoji="1" lang="ja-JP" altLang="en-US" dirty="0"/>
+              <a:t>ベースモデルの出力の分析</a:t>
+            </a:r>
+            <a:br>
+              <a:rPr kumimoji="1" lang="en-US" altLang="ja-JP" dirty="0"/>
+            </a:br>
+            <a:r>
+              <a:rPr kumimoji="1" lang="ja-JP" altLang="en-US" dirty="0"/>
+              <a:t>（テストデータその</a:t>
+            </a:r>
+            <a:r>
+              <a:rPr kumimoji="1" lang="en-US" altLang="ja-JP" dirty="0"/>
+              <a:t>2</a:t>
+            </a:r>
+            <a:r>
+              <a:rPr kumimoji="1" lang="ja-JP" altLang="en-US" dirty="0"/>
+              <a:t>）</a:t>
+            </a:r>
+          </a:p>
+        </p:txBody>
+      </p:sp>
+      <p:sp>
+        <p:nvSpPr>
+          <p:cNvPr id="4" name="スライド番号プレースホルダー 3">
+            <a:extLst>
+              <a:ext uri="{FF2B5EF4-FFF2-40B4-BE49-F238E27FC236}">
+                <a16:creationId xmlns:a16="http://schemas.microsoft.com/office/drawing/2014/main" id="{DCC90AF0-E5A4-53A9-EC28-02CC6F9A0827}"/>
+              </a:ext>
+            </a:extLst>
+          </p:cNvPr>
+          <p:cNvSpPr>
+            <a:spLocks noGrp="1"/>
+          </p:cNvSpPr>
+          <p:nvPr>
+            <p:ph type="sldNum" sz="quarter" idx="12"/>
+          </p:nvPr>
+        </p:nvSpPr>
+        <p:spPr/>
+        <p:txBody>
+          <a:bodyPr/>
+          <a:lstStyle/>
+          <a:p>
+            <a:fld id="{10649E7B-FC1B-418B-9B6A-00859DB1DEE8}" type="slidenum">
+              <a:rPr kumimoji="1" lang="ja-JP" altLang="en-US" smtClean="0"/>
+              <a:t>33</a:t>
+            </a:fld>
+            <a:endParaRPr kumimoji="1" lang="ja-JP" altLang="en-US"/>
+          </a:p>
+        </p:txBody>
+      </p:sp>
+      <p:sp>
+        <p:nvSpPr>
+          <p:cNvPr id="6" name="テキスト ボックス 5">
+            <a:extLst>
+              <a:ext uri="{FF2B5EF4-FFF2-40B4-BE49-F238E27FC236}">
+                <a16:creationId xmlns:a16="http://schemas.microsoft.com/office/drawing/2014/main" id="{E11B6A02-0542-22BC-72C8-BF5662A034F4}"/>
+              </a:ext>
+            </a:extLst>
+          </p:cNvPr>
+          <p:cNvSpPr txBox="1"/>
+          <p:nvPr/>
+        </p:nvSpPr>
+        <p:spPr>
+          <a:xfrm>
+            <a:off x="838199" y="6352143"/>
+            <a:ext cx="10005725" cy="369332"/>
+          </a:xfrm>
+          <a:prstGeom prst="rect">
+            <a:avLst/>
+          </a:prstGeom>
+          <a:noFill/>
+        </p:spPr>
+        <p:txBody>
+          <a:bodyPr wrap="square">
+            <a:spAutoFit/>
+          </a:bodyPr>
+          <a:lstStyle/>
+          <a:p>
+            <a:r>
+              <a:rPr lang="ja-JP" altLang="en-US" dirty="0"/>
+              <a:t>テストデータその</a:t>
+            </a:r>
+            <a:r>
+              <a:rPr lang="en-US" altLang="ja-JP" dirty="0"/>
+              <a:t>2</a:t>
+            </a:r>
+            <a:r>
+              <a:rPr lang="ja-JP" altLang="en-US" dirty="0"/>
+              <a:t>：</a:t>
+            </a:r>
+            <a:r>
+              <a:rPr lang="ja-JP" altLang="ja-JP" dirty="0"/>
+              <a:t>処理単体としては同じだけど</a:t>
+            </a:r>
+            <a:r>
+              <a:rPr lang="ja-JP" altLang="en-US" dirty="0"/>
+              <a:t>訓練用のデータでは出なかった組み合わせ</a:t>
+            </a:r>
+            <a:endParaRPr lang="en-US" altLang="ja-JP" dirty="0"/>
+          </a:p>
+        </p:txBody>
+      </p:sp>
+      <p:graphicFrame>
+        <p:nvGraphicFramePr>
+          <p:cNvPr id="7" name="コンテンツ プレースホルダー 4">
+            <a:extLst>
+              <a:ext uri="{FF2B5EF4-FFF2-40B4-BE49-F238E27FC236}">
+                <a16:creationId xmlns:a16="http://schemas.microsoft.com/office/drawing/2014/main" id="{E7FF6952-A4BE-D78E-1382-CD19DE733891}"/>
+              </a:ext>
+            </a:extLst>
+          </p:cNvPr>
+          <p:cNvGraphicFramePr>
+            <a:graphicFrameLocks noGrp="1"/>
+          </p:cNvGraphicFramePr>
+          <p:nvPr>
+            <p:ph idx="1"/>
+            <p:extLst>
+              <p:ext uri="{D42A27DB-BD31-4B8C-83A1-F6EECF244321}">
+                <p14:modId xmlns:p14="http://schemas.microsoft.com/office/powerpoint/2010/main" val="3686343880"/>
+              </p:ext>
+            </p:extLst>
+          </p:nvPr>
+        </p:nvGraphicFramePr>
+        <p:xfrm>
+          <a:off x="838200" y="1825625"/>
+          <a:ext cx="10515597" cy="2777061"/>
+        </p:xfrm>
+        <a:graphic>
+          <a:graphicData uri="http://schemas.openxmlformats.org/drawingml/2006/table">
+            <a:tbl>
+              <a:tblPr firstRow="1" bandRow="1">
+                <a:tableStyleId>{5C22544A-7EE6-4342-B048-85BDC9FD1C3A}</a:tableStyleId>
+              </a:tblPr>
+              <a:tblGrid>
+                <a:gridCol w="3505199">
+                  <a:extLst>
+                    <a:ext uri="{9D8B030D-6E8A-4147-A177-3AD203B41FA5}">
+                      <a16:colId xmlns:a16="http://schemas.microsoft.com/office/drawing/2014/main" val="1400479776"/>
+                    </a:ext>
+                  </a:extLst>
+                </a:gridCol>
+                <a:gridCol w="3505199">
+                  <a:extLst>
+                    <a:ext uri="{9D8B030D-6E8A-4147-A177-3AD203B41FA5}">
+                      <a16:colId xmlns:a16="http://schemas.microsoft.com/office/drawing/2014/main" val="2466992613"/>
+                    </a:ext>
+                  </a:extLst>
+                </a:gridCol>
+                <a:gridCol w="3505199">
+                  <a:extLst>
+                    <a:ext uri="{9D8B030D-6E8A-4147-A177-3AD203B41FA5}">
+                      <a16:colId xmlns:a16="http://schemas.microsoft.com/office/drawing/2014/main" val="3550539996"/>
+                    </a:ext>
+                  </a:extLst>
+                </a:gridCol>
+              </a:tblGrid>
+              <a:tr h="925687">
+                <a:tc>
+                  <a:txBody>
+                    <a:bodyPr/>
+                    <a:lstStyle/>
+                    <a:p>
+                      <a:pPr algn="ctr"/>
+                      <a:endParaRPr kumimoji="1" lang="ja-JP" altLang="en-US" dirty="0"/>
+                    </a:p>
+                  </a:txBody>
+                  <a:tcPr anchor="ctr"/>
+                </a:tc>
+                <a:tc>
+                  <a:txBody>
+                    <a:bodyPr/>
+                    <a:lstStyle/>
+                    <a:p>
+                      <a:pPr algn="ctr"/>
+                      <a:r>
+                        <a:rPr kumimoji="1" lang="ja-JP" altLang="en-US" dirty="0"/>
+                        <a:t>通常終了</a:t>
+                      </a:r>
+                    </a:p>
+                  </a:txBody>
+                  <a:tcPr anchor="ctr"/>
+                </a:tc>
+                <a:tc>
+                  <a:txBody>
+                    <a:bodyPr/>
+                    <a:lstStyle/>
+                    <a:p>
+                      <a:pPr algn="ctr"/>
+                      <a:r>
+                        <a:rPr kumimoji="1" lang="ja-JP" altLang="en-US" dirty="0"/>
+                        <a:t>トークン上限到達</a:t>
+                      </a:r>
+                      <a:r>
+                        <a:rPr kumimoji="1" lang="en-US" altLang="ja-JP" dirty="0"/>
+                        <a:t>(</a:t>
+                      </a:r>
+                      <a:r>
+                        <a:rPr kumimoji="1" lang="ja-JP" altLang="en-US" dirty="0"/>
+                        <a:t>上限は</a:t>
+                      </a:r>
+                      <a:r>
+                        <a:rPr kumimoji="1" lang="en-US" altLang="ja-JP" dirty="0"/>
+                        <a:t>8192)</a:t>
+                      </a:r>
+                      <a:endParaRPr kumimoji="1" lang="ja-JP" altLang="en-US" dirty="0"/>
+                    </a:p>
+                  </a:txBody>
+                  <a:tcPr anchor="ctr"/>
+                </a:tc>
+                <a:extLst>
+                  <a:ext uri="{0D108BD9-81ED-4DB2-BD59-A6C34878D82A}">
+                    <a16:rowId xmlns:a16="http://schemas.microsoft.com/office/drawing/2014/main" val="275587262"/>
+                  </a:ext>
+                </a:extLst>
+              </a:tr>
+              <a:tr h="925687">
+                <a:tc>
+                  <a:txBody>
+                    <a:bodyPr/>
+                    <a:lstStyle/>
+                    <a:p>
+                      <a:pPr algn="ctr"/>
+                      <a:r>
+                        <a:rPr kumimoji="1" lang="ja-JP" altLang="en-US" dirty="0"/>
+                        <a:t>正解</a:t>
+                      </a:r>
+                    </a:p>
+                  </a:txBody>
+                  <a:tcPr anchor="ctr"/>
+                </a:tc>
+                <a:tc>
+                  <a:txBody>
+                    <a:bodyPr/>
+                    <a:lstStyle/>
+                    <a:p>
+                      <a:pPr algn="ctr"/>
+                      <a:r>
+                        <a:rPr kumimoji="1" lang="en-US" altLang="ja-JP" dirty="0"/>
+                        <a:t>38</a:t>
+                      </a:r>
+                      <a:endParaRPr kumimoji="1" lang="ja-JP" altLang="en-US" dirty="0"/>
+                    </a:p>
+                  </a:txBody>
+                  <a:tcPr anchor="ctr"/>
+                </a:tc>
+                <a:tc>
+                  <a:txBody>
+                    <a:bodyPr/>
+                    <a:lstStyle/>
+                    <a:p>
+                      <a:pPr algn="ctr"/>
+                      <a:r>
+                        <a:rPr kumimoji="1" lang="en-US" altLang="ja-JP" dirty="0"/>
+                        <a:t>6</a:t>
+                      </a:r>
+                      <a:endParaRPr kumimoji="1" lang="ja-JP" altLang="en-US" dirty="0"/>
+                    </a:p>
+                  </a:txBody>
+                  <a:tcPr anchor="ctr"/>
+                </a:tc>
+                <a:extLst>
+                  <a:ext uri="{0D108BD9-81ED-4DB2-BD59-A6C34878D82A}">
+                    <a16:rowId xmlns:a16="http://schemas.microsoft.com/office/drawing/2014/main" val="3511778032"/>
+                  </a:ext>
+                </a:extLst>
+              </a:tr>
+              <a:tr h="925687">
+                <a:tc>
+                  <a:txBody>
+                    <a:bodyPr/>
+                    <a:lstStyle/>
+                    <a:p>
+                      <a:pPr algn="ctr"/>
+                      <a:r>
+                        <a:rPr kumimoji="1" lang="ja-JP" altLang="en-US" dirty="0"/>
+                        <a:t>不正解</a:t>
+                      </a:r>
+                    </a:p>
+                  </a:txBody>
+                  <a:tcPr anchor="ctr"/>
+                </a:tc>
+                <a:tc>
+                  <a:txBody>
+                    <a:bodyPr/>
+                    <a:lstStyle/>
+                    <a:p>
+                      <a:pPr algn="ctr"/>
+                      <a:r>
+                        <a:rPr kumimoji="1" lang="en-US" altLang="ja-JP" sz="1800" b="0" i="0" kern="1200" dirty="0">
+                          <a:solidFill>
+                            <a:schemeClr val="dk1"/>
+                          </a:solidFill>
+                          <a:effectLst/>
+                          <a:latin typeface="+mn-lt"/>
+                          <a:ea typeface="+mn-ea"/>
+                          <a:cs typeface="+mn-cs"/>
+                        </a:rPr>
+                        <a:t>1</a:t>
+                      </a:r>
+                      <a:endParaRPr kumimoji="1" lang="ja-JP" altLang="en-US" dirty="0"/>
+                    </a:p>
+                  </a:txBody>
+                  <a:tcPr anchor="ctr"/>
+                </a:tc>
+                <a:tc>
+                  <a:txBody>
+                    <a:bodyPr/>
+                    <a:lstStyle/>
+                    <a:p>
+                      <a:pPr algn="ctr"/>
+                      <a:r>
+                        <a:rPr kumimoji="1" lang="en-US" altLang="ja-JP" dirty="0"/>
+                        <a:t>405</a:t>
+                      </a:r>
+                      <a:endParaRPr kumimoji="1" lang="ja-JP" altLang="en-US" dirty="0"/>
+                    </a:p>
+                  </a:txBody>
+                  <a:tcPr anchor="ctr"/>
+                </a:tc>
+                <a:extLst>
+                  <a:ext uri="{0D108BD9-81ED-4DB2-BD59-A6C34878D82A}">
+                    <a16:rowId xmlns:a16="http://schemas.microsoft.com/office/drawing/2014/main" val="2379152149"/>
+                  </a:ext>
+                </a:extLst>
+              </a:tr>
+            </a:tbl>
+          </a:graphicData>
+        </a:graphic>
+      </p:graphicFrame>
+    </p:spTree>
+    <p:extLst>
+      <p:ext uri="{BB962C8B-B14F-4D97-AF65-F5344CB8AC3E}">
+        <p14:creationId xmlns:p14="http://schemas.microsoft.com/office/powerpoint/2010/main" val="2494493196"/>
+      </p:ext>
+    </p:extLst>
+  </p:cSld>
+  <p:clrMapOvr>
+    <a:masterClrMapping/>
+  </p:clrMapOvr>
+</p:sld>
+</file>
+
+<file path=ppt/slides/slide34.xml><?xml version="1.0" encoding="utf-8"?>
+<p:sld xmlns:a="http://schemas.openxmlformats.org/drawingml/2006/main" xmlns:r="http://schemas.openxmlformats.org/officeDocument/2006/relationships" xmlns:p="http://schemas.openxmlformats.org/presentationml/2006/main">
+  <p:cSld>
+    <p:spTree>
+      <p:nvGrpSpPr>
+        <p:cNvPr id="1" name=""/>
+        <p:cNvGrpSpPr/>
+        <p:nvPr/>
+      </p:nvGrpSpPr>
+      <p:grpSpPr>
+        <a:xfrm>
+          <a:off x="0" y="0"/>
+          <a:ext cx="0" cy="0"/>
+          <a:chOff x="0" y="0"/>
+          <a:chExt cx="0" cy="0"/>
+        </a:xfrm>
+      </p:grpSpPr>
+      <p:sp>
+        <p:nvSpPr>
+          <p:cNvPr id="2" name="タイトル 1">
+            <a:extLst>
+              <a:ext uri="{FF2B5EF4-FFF2-40B4-BE49-F238E27FC236}">
+                <a16:creationId xmlns:a16="http://schemas.microsoft.com/office/drawing/2014/main" id="{62436C12-48D4-2A86-00EB-8D52E6418A26}"/>
+              </a:ext>
+            </a:extLst>
+          </p:cNvPr>
+          <p:cNvSpPr>
+            <a:spLocks noGrp="1"/>
+          </p:cNvSpPr>
+          <p:nvPr>
+            <p:ph type="title"/>
+          </p:nvPr>
+        </p:nvSpPr>
+        <p:spPr/>
+        <p:txBody>
+          <a:bodyPr/>
+          <a:lstStyle/>
+          <a:p>
+            <a:r>
+              <a:rPr lang="ja-JP" altLang="en-US" dirty="0"/>
+              <a:t>分析できること</a:t>
+            </a:r>
+            <a:endParaRPr kumimoji="1" lang="ja-JP" altLang="en-US" dirty="0"/>
+          </a:p>
+        </p:txBody>
+      </p:sp>
+      <p:sp>
+        <p:nvSpPr>
+          <p:cNvPr id="3" name="コンテンツ プレースホルダー 2">
+            <a:extLst>
+              <a:ext uri="{FF2B5EF4-FFF2-40B4-BE49-F238E27FC236}">
+                <a16:creationId xmlns:a16="http://schemas.microsoft.com/office/drawing/2014/main" id="{BB68F986-9364-4C10-9454-A1FA20958982}"/>
+              </a:ext>
+            </a:extLst>
+          </p:cNvPr>
+          <p:cNvSpPr>
+            <a:spLocks noGrp="1"/>
+          </p:cNvSpPr>
+          <p:nvPr>
+            <p:ph idx="1"/>
+          </p:nvPr>
+        </p:nvSpPr>
+        <p:spPr/>
+        <p:txBody>
+          <a:bodyPr/>
+          <a:lstStyle/>
+          <a:p>
+            <a:r>
+              <a:rPr kumimoji="1" lang="ja-JP" altLang="en-US" dirty="0"/>
+              <a:t>ベースモデルの失敗要因：推論の長大化</a:t>
+            </a:r>
+            <a:endParaRPr kumimoji="1" lang="en-US" altLang="ja-JP" dirty="0"/>
+          </a:p>
+          <a:p>
+            <a:r>
+              <a:rPr kumimoji="1" lang="ja-JP" altLang="en-US" dirty="0"/>
+              <a:t>推論過程を確認</a:t>
+            </a:r>
+            <a:endParaRPr kumimoji="1" lang="en-US" altLang="ja-JP" dirty="0"/>
+          </a:p>
+          <a:p>
+            <a:pPr lvl="1"/>
+            <a:r>
+              <a:rPr lang="ja-JP" altLang="en-US" dirty="0"/>
+              <a:t>トークンの上限に到達した</a:t>
+            </a:r>
+            <a:r>
+              <a:rPr kumimoji="1" lang="ja-JP" altLang="en-US" dirty="0"/>
+              <a:t>事例では、複数の仮説を繰り返し検討し、ルールを確定できないまま推論が長大化する傾向が見られた。</a:t>
+            </a:r>
+            <a:endParaRPr kumimoji="1" lang="en-US" altLang="ja-JP" dirty="0"/>
+          </a:p>
+          <a:p>
+            <a:r>
+              <a:rPr kumimoji="1" lang="ja-JP" altLang="en-US" dirty="0"/>
+              <a:t>考察</a:t>
+            </a:r>
+            <a:endParaRPr kumimoji="1" lang="en-US" altLang="ja-JP" dirty="0"/>
+          </a:p>
+          <a:p>
+            <a:pPr lvl="1"/>
+            <a:r>
+              <a:rPr kumimoji="1" lang="ja-JP" altLang="en-US" dirty="0"/>
+              <a:t>ベースモデルでは、仮説を収束させることが困難であり、これが問題解決の失敗につながっている可能性がある。</a:t>
+            </a:r>
+          </a:p>
+        </p:txBody>
+      </p:sp>
+      <p:sp>
+        <p:nvSpPr>
+          <p:cNvPr id="4" name="スライド番号プレースホルダー 3">
+            <a:extLst>
+              <a:ext uri="{FF2B5EF4-FFF2-40B4-BE49-F238E27FC236}">
+                <a16:creationId xmlns:a16="http://schemas.microsoft.com/office/drawing/2014/main" id="{FCA3773B-7945-6BF7-F457-326DEE3F0C55}"/>
+              </a:ext>
+            </a:extLst>
+          </p:cNvPr>
+          <p:cNvSpPr>
+            <a:spLocks noGrp="1"/>
+          </p:cNvSpPr>
+          <p:nvPr>
+            <p:ph type="sldNum" sz="quarter" idx="12"/>
+          </p:nvPr>
+        </p:nvSpPr>
+        <p:spPr/>
+        <p:txBody>
+          <a:bodyPr/>
+          <a:lstStyle/>
+          <a:p>
+            <a:fld id="{10649E7B-FC1B-418B-9B6A-00859DB1DEE8}" type="slidenum">
+              <a:rPr kumimoji="1" lang="ja-JP" altLang="en-US" smtClean="0"/>
+              <a:t>34</a:t>
+            </a:fld>
+            <a:endParaRPr kumimoji="1" lang="ja-JP" altLang="en-US"/>
+          </a:p>
+        </p:txBody>
+      </p:sp>
+    </p:spTree>
+    <p:extLst>
+      <p:ext uri="{BB962C8B-B14F-4D97-AF65-F5344CB8AC3E}">
+        <p14:creationId xmlns:p14="http://schemas.microsoft.com/office/powerpoint/2010/main" val="2655585712"/>
+      </p:ext>
+    </p:extLst>
+  </p:cSld>
+  <p:clrMapOvr>
+    <a:masterClrMapping/>
+  </p:clrMapOvr>
+</p:sld>
+</file>
+
+<file path=ppt/slides/slide35.xml><?xml version="1.0" encoding="utf-8"?>
+<p:sld xmlns:a="http://schemas.openxmlformats.org/drawingml/2006/main" xmlns:r="http://schemas.openxmlformats.org/officeDocument/2006/relationships" xmlns:p="http://schemas.openxmlformats.org/presentationml/2006/main">
+  <p:cSld>
+    <p:spTree>
+      <p:nvGrpSpPr>
+        <p:cNvPr id="1" name=""/>
+        <p:cNvGrpSpPr/>
+        <p:nvPr/>
+      </p:nvGrpSpPr>
+      <p:grpSpPr>
+        <a:xfrm>
+          <a:off x="0" y="0"/>
+          <a:ext cx="0" cy="0"/>
+          <a:chOff x="0" y="0"/>
+          <a:chExt cx="0" cy="0"/>
+        </a:xfrm>
+      </p:grpSpPr>
+      <p:sp>
+        <p:nvSpPr>
+          <p:cNvPr id="2" name="タイトル 1">
+            <a:extLst>
+              <a:ext uri="{FF2B5EF4-FFF2-40B4-BE49-F238E27FC236}">
+                <a16:creationId xmlns:a16="http://schemas.microsoft.com/office/drawing/2014/main" id="{9A892AD4-21A6-D69C-046C-02B50AC7DB0D}"/>
+              </a:ext>
+            </a:extLst>
+          </p:cNvPr>
+          <p:cNvSpPr>
+            <a:spLocks noGrp="1"/>
+          </p:cNvSpPr>
+          <p:nvPr>
+            <p:ph type="title"/>
+          </p:nvPr>
+        </p:nvSpPr>
+        <p:spPr/>
+        <p:txBody>
+          <a:bodyPr/>
+          <a:lstStyle/>
+          <a:p>
+            <a:r>
+              <a:rPr kumimoji="1" lang="ja-JP" altLang="en-US" dirty="0"/>
+              <a:t>ベースモデルの出力の分析</a:t>
+            </a:r>
+          </a:p>
+        </p:txBody>
+      </p:sp>
+      <p:sp>
+        <p:nvSpPr>
+          <p:cNvPr id="4" name="スライド番号プレースホルダー 3">
+            <a:extLst>
+              <a:ext uri="{FF2B5EF4-FFF2-40B4-BE49-F238E27FC236}">
+                <a16:creationId xmlns:a16="http://schemas.microsoft.com/office/drawing/2014/main" id="{FD1010AE-37CE-B821-DB04-8C3FEE321771}"/>
+              </a:ext>
+            </a:extLst>
+          </p:cNvPr>
+          <p:cNvSpPr>
+            <a:spLocks noGrp="1"/>
+          </p:cNvSpPr>
+          <p:nvPr>
+            <p:ph type="sldNum" sz="quarter" idx="12"/>
+          </p:nvPr>
+        </p:nvSpPr>
+        <p:spPr/>
+        <p:txBody>
+          <a:bodyPr/>
+          <a:lstStyle/>
+          <a:p>
+            <a:fld id="{10649E7B-FC1B-418B-9B6A-00859DB1DEE8}" type="slidenum">
+              <a:rPr kumimoji="1" lang="ja-JP" altLang="en-US" smtClean="0"/>
+              <a:t>35</a:t>
+            </a:fld>
+            <a:endParaRPr kumimoji="1" lang="ja-JP" altLang="en-US"/>
+          </a:p>
+        </p:txBody>
+      </p:sp>
+      <p:sp>
+        <p:nvSpPr>
+          <p:cNvPr id="8" name="テキスト ボックス 7">
+            <a:extLst>
+              <a:ext uri="{FF2B5EF4-FFF2-40B4-BE49-F238E27FC236}">
+                <a16:creationId xmlns:a16="http://schemas.microsoft.com/office/drawing/2014/main" id="{85587719-75EA-F396-DC4F-55EB0A6BB458}"/>
+              </a:ext>
+            </a:extLst>
+          </p:cNvPr>
+          <p:cNvSpPr txBox="1"/>
+          <p:nvPr/>
+        </p:nvSpPr>
+        <p:spPr>
+          <a:xfrm>
+            <a:off x="838200" y="6352143"/>
+            <a:ext cx="6097022" cy="369332"/>
+          </a:xfrm>
+          <a:prstGeom prst="rect">
+            <a:avLst/>
+          </a:prstGeom>
+          <a:noFill/>
+        </p:spPr>
+        <p:txBody>
+          <a:bodyPr wrap="square">
+            <a:spAutoFit/>
+          </a:bodyPr>
+          <a:lstStyle/>
+          <a:p>
+            <a:r>
+              <a:rPr kumimoji="1" lang="ja-JP" altLang="en-US" sz="1800" dirty="0"/>
+              <a:t>テストデータその</a:t>
+            </a:r>
+            <a:r>
+              <a:rPr kumimoji="1" lang="en-US" altLang="ja-JP" sz="1800" dirty="0"/>
+              <a:t>1</a:t>
+            </a:r>
+            <a:r>
+              <a:rPr kumimoji="1" lang="ja-JP" altLang="en-US" sz="1800" dirty="0"/>
+              <a:t>：</a:t>
+            </a:r>
+            <a:r>
+              <a:rPr lang="ja-JP" altLang="en-US" sz="1800" dirty="0"/>
+              <a:t>訓練用のデータの問題と同じルール</a:t>
+            </a:r>
+            <a:endParaRPr lang="en-US" altLang="ja-JP" sz="1800" dirty="0"/>
+          </a:p>
+        </p:txBody>
+      </p:sp>
+      <p:graphicFrame>
+        <p:nvGraphicFramePr>
+          <p:cNvPr id="11" name="コンテンツ プレースホルダー 4">
+            <a:extLst>
+              <a:ext uri="{FF2B5EF4-FFF2-40B4-BE49-F238E27FC236}">
+                <a16:creationId xmlns:a16="http://schemas.microsoft.com/office/drawing/2014/main" id="{B3D7523E-F6C9-1793-DB90-72E87124726E}"/>
+              </a:ext>
+            </a:extLst>
+          </p:cNvPr>
+          <p:cNvGraphicFramePr>
+            <a:graphicFrameLocks/>
+          </p:cNvGraphicFramePr>
+          <p:nvPr>
+            <p:extLst>
+              <p:ext uri="{D42A27DB-BD31-4B8C-83A1-F6EECF244321}">
+                <p14:modId xmlns:p14="http://schemas.microsoft.com/office/powerpoint/2010/main" val="3356973427"/>
+              </p:ext>
+            </p:extLst>
+          </p:nvPr>
+        </p:nvGraphicFramePr>
+        <p:xfrm>
+          <a:off x="1468390" y="1811398"/>
+          <a:ext cx="9255219" cy="1638975"/>
+        </p:xfrm>
+        <a:graphic>
+          <a:graphicData uri="http://schemas.openxmlformats.org/drawingml/2006/table">
+            <a:tbl>
+              <a:tblPr firstRow="1" bandRow="1">
+                <a:tableStyleId>{5C22544A-7EE6-4342-B048-85BDC9FD1C3A}</a:tableStyleId>
+              </a:tblPr>
+              <a:tblGrid>
+                <a:gridCol w="3085073">
+                  <a:extLst>
+                    <a:ext uri="{9D8B030D-6E8A-4147-A177-3AD203B41FA5}">
+                      <a16:colId xmlns:a16="http://schemas.microsoft.com/office/drawing/2014/main" val="2394308489"/>
+                    </a:ext>
+                  </a:extLst>
+                </a:gridCol>
+                <a:gridCol w="3085073">
+                  <a:extLst>
+                    <a:ext uri="{9D8B030D-6E8A-4147-A177-3AD203B41FA5}">
+                      <a16:colId xmlns:a16="http://schemas.microsoft.com/office/drawing/2014/main" val="867807463"/>
+                    </a:ext>
+                  </a:extLst>
+                </a:gridCol>
+                <a:gridCol w="3085073">
+                  <a:extLst>
+                    <a:ext uri="{9D8B030D-6E8A-4147-A177-3AD203B41FA5}">
+                      <a16:colId xmlns:a16="http://schemas.microsoft.com/office/drawing/2014/main" val="2499767942"/>
+                    </a:ext>
+                  </a:extLst>
+                </a:gridCol>
+              </a:tblGrid>
+              <a:tr h="940635">
+                <a:tc>
+                  <a:txBody>
+                    <a:bodyPr/>
+                    <a:lstStyle/>
+                    <a:p>
+                      <a:pPr algn="ctr"/>
+                      <a:endParaRPr kumimoji="1" lang="ja-JP" altLang="en-US" dirty="0"/>
+                    </a:p>
+                  </a:txBody>
+                  <a:tcPr anchor="ctr"/>
+                </a:tc>
+                <a:tc>
+                  <a:txBody>
+                    <a:bodyPr/>
+                    <a:lstStyle/>
+                    <a:p>
+                      <a:pPr algn="ctr"/>
+                      <a:r>
+                        <a:rPr kumimoji="1" lang="ja-JP" altLang="en-US" dirty="0"/>
+                        <a:t>処理単体</a:t>
+                      </a:r>
+                    </a:p>
+                  </a:txBody>
+                  <a:tcPr anchor="ctr"/>
+                </a:tc>
+                <a:tc>
+                  <a:txBody>
+                    <a:bodyPr/>
+                    <a:lstStyle/>
+                    <a:p>
+                      <a:pPr algn="ctr"/>
+                      <a:r>
+                        <a:rPr kumimoji="1" lang="ja-JP" altLang="en-US" dirty="0"/>
+                        <a:t>２つの処理の組み合わせ</a:t>
+                      </a:r>
+                    </a:p>
+                  </a:txBody>
+                  <a:tcPr anchor="ctr"/>
+                </a:tc>
+                <a:extLst>
+                  <a:ext uri="{0D108BD9-81ED-4DB2-BD59-A6C34878D82A}">
+                    <a16:rowId xmlns:a16="http://schemas.microsoft.com/office/drawing/2014/main" val="2407331181"/>
+                  </a:ext>
+                </a:extLst>
+              </a:tr>
+              <a:tr h="698340">
+                <a:tc>
+                  <a:txBody>
+                    <a:bodyPr/>
+                    <a:lstStyle/>
+                    <a:p>
+                      <a:pPr algn="ctr"/>
+                      <a:r>
+                        <a:rPr kumimoji="1" lang="ja-JP" altLang="en-US" dirty="0"/>
+                        <a:t>テストデータその</a:t>
+                      </a:r>
+                      <a:r>
+                        <a:rPr kumimoji="1" lang="en-US" altLang="ja-JP" dirty="0"/>
+                        <a:t>1</a:t>
+                      </a:r>
+                      <a:endParaRPr kumimoji="1" lang="ja-JP" altLang="en-US" dirty="0"/>
+                    </a:p>
+                  </a:txBody>
+                  <a:tcPr anchor="ctr"/>
+                </a:tc>
+                <a:tc>
+                  <a:txBody>
+                    <a:bodyPr/>
+                    <a:lstStyle/>
+                    <a:p>
+                      <a:pPr algn="ctr"/>
+                      <a:r>
+                        <a:rPr kumimoji="1" lang="en-US" altLang="zh-TW" dirty="0"/>
+                        <a:t>205/</a:t>
+                      </a:r>
+                      <a:r>
+                        <a:rPr kumimoji="1" lang="ja-JP" altLang="ja-JP" sz="1800" b="0" i="0" kern="1200" dirty="0">
+                          <a:solidFill>
+                            <a:schemeClr val="dk1"/>
+                          </a:solidFill>
+                          <a:effectLst/>
+                          <a:latin typeface="+mn-lt"/>
+                          <a:ea typeface="+mn-ea"/>
+                          <a:cs typeface="+mn-cs"/>
+                        </a:rPr>
+                        <a:t>240</a:t>
+                      </a:r>
+                      <a:endParaRPr kumimoji="1" lang="en-US" altLang="ja-JP" sz="1800" b="0" i="0" kern="1200" dirty="0">
+                        <a:solidFill>
+                          <a:schemeClr val="dk1"/>
+                        </a:solidFill>
+                        <a:effectLst/>
+                        <a:latin typeface="+mn-lt"/>
+                        <a:ea typeface="+mn-ea"/>
+                        <a:cs typeface="+mn-cs"/>
+                      </a:endParaRPr>
+                    </a:p>
+                    <a:p>
+                      <a:pPr algn="ctr"/>
+                      <a:r>
+                        <a:rPr kumimoji="1" lang="en-US" altLang="ja-JP" sz="1800" b="0" i="0" kern="1200" dirty="0">
+                          <a:solidFill>
+                            <a:schemeClr val="dk1"/>
+                          </a:solidFill>
+                          <a:effectLst/>
+                          <a:latin typeface="+mn-lt"/>
+                          <a:ea typeface="+mn-ea"/>
+                          <a:cs typeface="+mn-cs"/>
+                        </a:rPr>
+                        <a:t>85.4%</a:t>
+                      </a:r>
+                      <a:endParaRPr kumimoji="1" lang="ja-JP" altLang="en-US" dirty="0"/>
+                    </a:p>
+                  </a:txBody>
+                  <a:tcPr anchor="ctr"/>
+                </a:tc>
+                <a:tc>
+                  <a:txBody>
+                    <a:bodyPr/>
+                    <a:lstStyle/>
+                    <a:p>
+                      <a:pPr algn="ctr"/>
+                      <a:r>
+                        <a:rPr kumimoji="1" lang="en-US" altLang="zh-TW" dirty="0"/>
+                        <a:t>106/480</a:t>
+                      </a:r>
+                    </a:p>
+                    <a:p>
+                      <a:pPr algn="ctr"/>
+                      <a:r>
+                        <a:rPr kumimoji="1" lang="en-US" altLang="ja-JP" dirty="0"/>
+                        <a:t>22.0%</a:t>
+                      </a:r>
+                      <a:endParaRPr kumimoji="1" lang="ja-JP" altLang="en-US" dirty="0"/>
+                    </a:p>
+                  </a:txBody>
+                  <a:tcPr anchor="ctr"/>
+                </a:tc>
+                <a:extLst>
+                  <a:ext uri="{0D108BD9-81ED-4DB2-BD59-A6C34878D82A}">
+                    <a16:rowId xmlns:a16="http://schemas.microsoft.com/office/drawing/2014/main" val="4205910191"/>
+                  </a:ext>
+                </a:extLst>
+              </a:tr>
+            </a:tbl>
+          </a:graphicData>
+        </a:graphic>
+      </p:graphicFrame>
+    </p:spTree>
+    <p:extLst>
+      <p:ext uri="{BB962C8B-B14F-4D97-AF65-F5344CB8AC3E}">
+        <p14:creationId xmlns:p14="http://schemas.microsoft.com/office/powerpoint/2010/main" val="1395125965"/>
+      </p:ext>
+    </p:extLst>
+  </p:cSld>
+  <p:clrMapOvr>
+    <a:masterClrMapping/>
+  </p:clrMapOvr>
+</p:sld>
+</file>
+
+<file path=ppt/slides/slide36.xml><?xml version="1.0" encoding="utf-8"?>
+<p:sld xmlns:a="http://schemas.openxmlformats.org/drawingml/2006/main" xmlns:r="http://schemas.openxmlformats.org/officeDocument/2006/relationships" xmlns:p="http://schemas.openxmlformats.org/presentationml/2006/main">
+  <p:cSld>
+    <p:spTree>
+      <p:nvGrpSpPr>
+        <p:cNvPr id="1" name=""/>
+        <p:cNvGrpSpPr/>
+        <p:nvPr/>
+      </p:nvGrpSpPr>
+      <p:grpSpPr>
+        <a:xfrm>
+          <a:off x="0" y="0"/>
+          <a:ext cx="0" cy="0"/>
+          <a:chOff x="0" y="0"/>
+          <a:chExt cx="0" cy="0"/>
+        </a:xfrm>
+      </p:grpSpPr>
+      <p:sp>
+        <p:nvSpPr>
+          <p:cNvPr id="2" name="タイトル 1">
+            <a:extLst>
+              <a:ext uri="{FF2B5EF4-FFF2-40B4-BE49-F238E27FC236}">
+                <a16:creationId xmlns:a16="http://schemas.microsoft.com/office/drawing/2014/main" id="{C7A74595-3729-BE4C-1B0E-489A7DAD46E5}"/>
+              </a:ext>
+            </a:extLst>
+          </p:cNvPr>
+          <p:cNvSpPr>
+            <a:spLocks noGrp="1"/>
+          </p:cNvSpPr>
+          <p:nvPr>
+            <p:ph type="title"/>
+          </p:nvPr>
+        </p:nvSpPr>
+        <p:spPr/>
+        <p:txBody>
+          <a:bodyPr/>
+          <a:lstStyle/>
+          <a:p>
+            <a:r>
+              <a:rPr kumimoji="1" lang="ja-JP" altLang="en-US" dirty="0"/>
+              <a:t>分析できること</a:t>
+            </a:r>
+          </a:p>
+        </p:txBody>
+      </p:sp>
+      <p:sp>
+        <p:nvSpPr>
+          <p:cNvPr id="3" name="コンテンツ プレースホルダー 2">
+            <a:extLst>
+              <a:ext uri="{FF2B5EF4-FFF2-40B4-BE49-F238E27FC236}">
+                <a16:creationId xmlns:a16="http://schemas.microsoft.com/office/drawing/2014/main" id="{10CCD66B-AA9B-F603-4BF5-3E4F7592D178}"/>
+              </a:ext>
+            </a:extLst>
+          </p:cNvPr>
+          <p:cNvSpPr>
+            <a:spLocks noGrp="1"/>
+          </p:cNvSpPr>
+          <p:nvPr>
+            <p:ph idx="1"/>
+          </p:nvPr>
+        </p:nvSpPr>
+        <p:spPr/>
+        <p:txBody>
+          <a:bodyPr/>
+          <a:lstStyle/>
+          <a:p>
+            <a:r>
+              <a:rPr kumimoji="1" lang="ja-JP" altLang="en-US" dirty="0"/>
+              <a:t>ベースモデルは、単一の変換処理を推定・適用する問題と比較して、複数の処理を組み合わせる問題で性能が低下する</a:t>
+            </a:r>
+            <a:endParaRPr kumimoji="1" lang="en-US" altLang="ja-JP" dirty="0"/>
+          </a:p>
+          <a:p>
+            <a:endParaRPr lang="en-US" altLang="ja-JP" dirty="0"/>
+          </a:p>
+          <a:p>
+            <a:r>
+              <a:rPr kumimoji="1" lang="ja-JP" altLang="en-US" dirty="0"/>
+              <a:t>同じ処理を含む問題について、単体では解けているのに、その処理を組み合わせると解けなくなるケース</a:t>
+            </a:r>
+            <a:endParaRPr kumimoji="1" lang="en-US" altLang="ja-JP" dirty="0"/>
+          </a:p>
+          <a:p>
+            <a:endParaRPr lang="en-US" altLang="ja-JP" dirty="0"/>
+          </a:p>
+          <a:p>
+            <a:r>
+              <a:rPr kumimoji="1" lang="ja-JP" altLang="en-US" dirty="0"/>
+              <a:t>個々の処理そのものを実行する能力はあるが、複数の処理を組み合わせて実行することには困難がある</a:t>
+            </a:r>
+          </a:p>
+        </p:txBody>
+      </p:sp>
+      <p:sp>
+        <p:nvSpPr>
+          <p:cNvPr id="4" name="スライド番号プレースホルダー 3">
+            <a:extLst>
+              <a:ext uri="{FF2B5EF4-FFF2-40B4-BE49-F238E27FC236}">
+                <a16:creationId xmlns:a16="http://schemas.microsoft.com/office/drawing/2014/main" id="{BB84D93F-4B8A-764B-C52C-7C8E7D359836}"/>
+              </a:ext>
+            </a:extLst>
+          </p:cNvPr>
+          <p:cNvSpPr>
+            <a:spLocks noGrp="1"/>
+          </p:cNvSpPr>
+          <p:nvPr>
+            <p:ph type="sldNum" sz="quarter" idx="12"/>
+          </p:nvPr>
+        </p:nvSpPr>
+        <p:spPr/>
+        <p:txBody>
+          <a:bodyPr/>
+          <a:lstStyle/>
+          <a:p>
+            <a:fld id="{10649E7B-FC1B-418B-9B6A-00859DB1DEE8}" type="slidenum">
+              <a:rPr kumimoji="1" lang="ja-JP" altLang="en-US" smtClean="0"/>
+              <a:t>36</a:t>
+            </a:fld>
+            <a:endParaRPr kumimoji="1" lang="ja-JP" altLang="en-US"/>
+          </a:p>
+        </p:txBody>
+      </p:sp>
+    </p:spTree>
+    <p:extLst>
+      <p:ext uri="{BB962C8B-B14F-4D97-AF65-F5344CB8AC3E}">
+        <p14:creationId xmlns:p14="http://schemas.microsoft.com/office/powerpoint/2010/main" val="96754191"/>
+      </p:ext>
+    </p:extLst>
+  </p:cSld>
+  <p:clrMapOvr>
+    <a:masterClrMapping/>
+  </p:clrMapOvr>
+</p:sld>
+</file>
+
+<file path=ppt/slides/slide37.xml><?xml version="1.0" encoding="utf-8"?>
+<p:sld xmlns:a="http://schemas.openxmlformats.org/drawingml/2006/main" xmlns:r="http://schemas.openxmlformats.org/officeDocument/2006/relationships" xmlns:p="http://schemas.openxmlformats.org/presentationml/2006/main">
+  <p:cSld>
+    <p:spTree>
+      <p:nvGrpSpPr>
+        <p:cNvPr id="1" name=""/>
+        <p:cNvGrpSpPr/>
+        <p:nvPr/>
+      </p:nvGrpSpPr>
+      <p:grpSpPr>
+        <a:xfrm>
+          <a:off x="0" y="0"/>
+          <a:ext cx="0" cy="0"/>
+          <a:chOff x="0" y="0"/>
+          <a:chExt cx="0" cy="0"/>
+        </a:xfrm>
+      </p:grpSpPr>
+      <p:sp>
+        <p:nvSpPr>
+          <p:cNvPr id="2" name="タイトル 1">
+            <a:extLst>
+              <a:ext uri="{FF2B5EF4-FFF2-40B4-BE49-F238E27FC236}">
+                <a16:creationId xmlns:a16="http://schemas.microsoft.com/office/drawing/2014/main" id="{408FE1EB-3637-0234-65CB-C7797291FA6D}"/>
+              </a:ext>
+            </a:extLst>
+          </p:cNvPr>
+          <p:cNvSpPr>
+            <a:spLocks noGrp="1"/>
+          </p:cNvSpPr>
+          <p:nvPr>
+            <p:ph type="title"/>
+          </p:nvPr>
+        </p:nvSpPr>
+        <p:spPr/>
+        <p:txBody>
+          <a:bodyPr/>
+          <a:lstStyle/>
+          <a:p>
+            <a:r>
+              <a:rPr kumimoji="1" lang="ja-JP" altLang="en-US" dirty="0"/>
+              <a:t>答えのみの</a:t>
+            </a:r>
+            <a:r>
+              <a:rPr kumimoji="1" lang="en-US" altLang="ja-JP" dirty="0"/>
+              <a:t>SFT</a:t>
+            </a:r>
+            <a:r>
+              <a:rPr kumimoji="1" lang="ja-JP" altLang="en-US" dirty="0"/>
+              <a:t>の分析</a:t>
+            </a:r>
+          </a:p>
+        </p:txBody>
+      </p:sp>
+      <p:sp>
+        <p:nvSpPr>
+          <p:cNvPr id="3" name="コンテンツ プレースホルダー 2">
+            <a:extLst>
+              <a:ext uri="{FF2B5EF4-FFF2-40B4-BE49-F238E27FC236}">
+                <a16:creationId xmlns:a16="http://schemas.microsoft.com/office/drawing/2014/main" id="{68D21EFB-AF50-0045-DB21-55C62FD98317}"/>
+              </a:ext>
+            </a:extLst>
+          </p:cNvPr>
+          <p:cNvSpPr>
+            <a:spLocks noGrp="1"/>
+          </p:cNvSpPr>
+          <p:nvPr>
+            <p:ph idx="1"/>
+          </p:nvPr>
+        </p:nvSpPr>
+        <p:spPr/>
+        <p:txBody>
+          <a:bodyPr/>
+          <a:lstStyle/>
+          <a:p>
+            <a:endParaRPr kumimoji="1" lang="ja-JP" altLang="en-US" dirty="0"/>
+          </a:p>
+        </p:txBody>
+      </p:sp>
+      <p:sp>
+        <p:nvSpPr>
+          <p:cNvPr id="4" name="スライド番号プレースホルダー 3">
+            <a:extLst>
+              <a:ext uri="{FF2B5EF4-FFF2-40B4-BE49-F238E27FC236}">
+                <a16:creationId xmlns:a16="http://schemas.microsoft.com/office/drawing/2014/main" id="{CC6CA538-DED6-8ACF-9DB4-13C855ACD8FD}"/>
+              </a:ext>
+            </a:extLst>
+          </p:cNvPr>
+          <p:cNvSpPr>
+            <a:spLocks noGrp="1"/>
+          </p:cNvSpPr>
+          <p:nvPr>
+            <p:ph type="sldNum" sz="quarter" idx="12"/>
+          </p:nvPr>
+        </p:nvSpPr>
+        <p:spPr/>
+        <p:txBody>
+          <a:bodyPr/>
+          <a:lstStyle/>
+          <a:p>
+            <a:fld id="{10649E7B-FC1B-418B-9B6A-00859DB1DEE8}" type="slidenum">
+              <a:rPr kumimoji="1" lang="ja-JP" altLang="en-US" smtClean="0"/>
+              <a:t>37</a:t>
+            </a:fld>
+            <a:endParaRPr kumimoji="1" lang="ja-JP" altLang="en-US"/>
+          </a:p>
+        </p:txBody>
+      </p:sp>
+      <p:graphicFrame>
+        <p:nvGraphicFramePr>
+          <p:cNvPr id="6" name="表 5">
+            <a:extLst>
+              <a:ext uri="{FF2B5EF4-FFF2-40B4-BE49-F238E27FC236}">
+                <a16:creationId xmlns:a16="http://schemas.microsoft.com/office/drawing/2014/main" id="{3A78D084-DC3E-2D90-A751-9C56E958BFE0}"/>
+              </a:ext>
+            </a:extLst>
+          </p:cNvPr>
+          <p:cNvGraphicFramePr>
+            <a:graphicFrameLocks noGrp="1"/>
+          </p:cNvGraphicFramePr>
+          <p:nvPr>
+            <p:extLst>
+              <p:ext uri="{D42A27DB-BD31-4B8C-83A1-F6EECF244321}">
+                <p14:modId xmlns:p14="http://schemas.microsoft.com/office/powerpoint/2010/main" val="3879682956"/>
+              </p:ext>
+            </p:extLst>
+          </p:nvPr>
+        </p:nvGraphicFramePr>
+        <p:xfrm>
+          <a:off x="838200" y="1583169"/>
+          <a:ext cx="10515600" cy="4351337"/>
+        </p:xfrm>
+        <a:graphic>
+          <a:graphicData uri="http://schemas.openxmlformats.org/drawingml/2006/table">
+            <a:tbl>
+              <a:tblPr firstRow="1" bandRow="1">
+                <a:tableStyleId>{5C22544A-7EE6-4342-B048-85BDC9FD1C3A}</a:tableStyleId>
+              </a:tblPr>
+              <a:tblGrid>
+                <a:gridCol w="2628900">
+                  <a:extLst>
+                    <a:ext uri="{9D8B030D-6E8A-4147-A177-3AD203B41FA5}">
+                      <a16:colId xmlns:a16="http://schemas.microsoft.com/office/drawing/2014/main" val="2577893348"/>
+                    </a:ext>
+                  </a:extLst>
+                </a:gridCol>
+                <a:gridCol w="2628900">
+                  <a:extLst>
+                    <a:ext uri="{9D8B030D-6E8A-4147-A177-3AD203B41FA5}">
+                      <a16:colId xmlns:a16="http://schemas.microsoft.com/office/drawing/2014/main" val="2053877159"/>
+                    </a:ext>
+                  </a:extLst>
+                </a:gridCol>
+                <a:gridCol w="2628900">
+                  <a:extLst>
+                    <a:ext uri="{9D8B030D-6E8A-4147-A177-3AD203B41FA5}">
+                      <a16:colId xmlns:a16="http://schemas.microsoft.com/office/drawing/2014/main" val="2672482506"/>
+                    </a:ext>
+                  </a:extLst>
+                </a:gridCol>
+                <a:gridCol w="2628900">
+                  <a:extLst>
+                    <a:ext uri="{9D8B030D-6E8A-4147-A177-3AD203B41FA5}">
+                      <a16:colId xmlns:a16="http://schemas.microsoft.com/office/drawing/2014/main" val="1596151943"/>
+                    </a:ext>
+                  </a:extLst>
+                </a:gridCol>
+              </a:tblGrid>
+              <a:tr h="1811409">
+                <a:tc>
+                  <a:txBody>
+                    <a:bodyPr/>
+                    <a:lstStyle/>
+                    <a:p>
+                      <a:pPr algn="ctr"/>
+                      <a:endParaRPr kumimoji="1" lang="ja-JP" altLang="en-US" sz="2100" dirty="0"/>
+                    </a:p>
+                  </a:txBody>
+                  <a:tcPr anchor="ctr"/>
+                </a:tc>
+                <a:tc>
+                  <a:txBody>
+                    <a:bodyPr/>
+                    <a:lstStyle/>
+                    <a:p>
+                      <a:pPr algn="ctr"/>
+                      <a:r>
+                        <a:rPr kumimoji="1" lang="ja-JP" altLang="en-US" sz="2100" dirty="0"/>
+                        <a:t>ベースモデル</a:t>
+                      </a:r>
+                    </a:p>
+                  </a:txBody>
+                  <a:tcPr anchor="ctr"/>
+                </a:tc>
+                <a:tc>
+                  <a:txBody>
+                    <a:bodyPr/>
+                    <a:lstStyle/>
+                    <a:p>
+                      <a:pPr algn="ctr"/>
+                      <a:r>
+                        <a:rPr kumimoji="1" lang="ja-JP" altLang="en-US" sz="2100" dirty="0"/>
+                        <a:t>答えのみ</a:t>
+                      </a:r>
+                      <a:r>
+                        <a:rPr kumimoji="1" lang="en-US" altLang="ja-JP" sz="2100" dirty="0"/>
+                        <a:t>SFT</a:t>
+                      </a:r>
+                      <a:endParaRPr kumimoji="1" lang="ja-JP" altLang="en-US" sz="2100" dirty="0"/>
+                    </a:p>
+                  </a:txBody>
+                  <a:tcPr anchor="ctr"/>
+                </a:tc>
+                <a:tc>
+                  <a:txBody>
+                    <a:bodyPr/>
+                    <a:lstStyle/>
+                    <a:p>
+                      <a:pPr algn="ctr"/>
+                      <a:r>
+                        <a:rPr lang="ja-JP" altLang="ja-JP" sz="2100" dirty="0"/>
+                        <a:t>答え＋処理過程SFT</a:t>
+                      </a:r>
+                      <a:endParaRPr kumimoji="1" lang="ja-JP" altLang="en-US" sz="2100" dirty="0"/>
+                    </a:p>
+                  </a:txBody>
+                  <a:tcPr anchor="ctr"/>
+                </a:tc>
+                <a:extLst>
+                  <a:ext uri="{0D108BD9-81ED-4DB2-BD59-A6C34878D82A}">
+                    <a16:rowId xmlns:a16="http://schemas.microsoft.com/office/drawing/2014/main" val="3196805259"/>
+                  </a:ext>
+                </a:extLst>
+              </a:tr>
+              <a:tr h="1269964">
+                <a:tc>
+                  <a:txBody>
+                    <a:bodyPr/>
+                    <a:lstStyle/>
+                    <a:p>
+                      <a:pPr marL="0" marR="0" lvl="0" indent="0" algn="ctr" defTabSz="914400" rtl="0" eaLnBrk="1" fontAlgn="auto" latinLnBrk="0" hangingPunct="1">
+                        <a:lnSpc>
+                          <a:spcPct val="100000"/>
+                        </a:lnSpc>
+                        <a:spcBef>
+                          <a:spcPts val="0"/>
+                        </a:spcBef>
+                        <a:spcAft>
+                          <a:spcPts val="0"/>
+                        </a:spcAft>
+                        <a:buClrTx/>
+                        <a:buSzTx/>
+                        <a:buFontTx/>
+                        <a:buNone/>
+                        <a:tabLst/>
+                        <a:defRPr/>
+                      </a:pPr>
+                      <a:r>
+                        <a:rPr lang="ja-JP" altLang="en-US" sz="2100" dirty="0"/>
+                        <a:t>テストデータその</a:t>
+                      </a:r>
+                      <a:r>
+                        <a:rPr lang="en-US" altLang="ja-JP" sz="2100" dirty="0"/>
+                        <a:t>1</a:t>
+                      </a:r>
+                    </a:p>
+                  </a:txBody>
+                  <a:tcPr anchor="ctr"/>
+                </a:tc>
+                <a:tc>
+                  <a:txBody>
+                    <a:bodyPr/>
+                    <a:lstStyle/>
+                    <a:p>
+                      <a:pPr algn="ctr"/>
+                      <a:r>
+                        <a:rPr kumimoji="1" lang="en-US" altLang="ja-JP" sz="2100" dirty="0"/>
+                        <a:t>277/680</a:t>
+                      </a:r>
+                    </a:p>
+                    <a:p>
+                      <a:pPr algn="ctr"/>
+                      <a:r>
+                        <a:rPr kumimoji="1" lang="ja-JP" altLang="en-US" sz="2100" dirty="0"/>
+                        <a:t>約</a:t>
+                      </a:r>
+                      <a:r>
+                        <a:rPr kumimoji="1" lang="en-US" altLang="ja-JP" sz="2100" dirty="0"/>
+                        <a:t>40</a:t>
+                      </a:r>
+                      <a:r>
+                        <a:rPr kumimoji="1" lang="ja-JP" altLang="en-US" sz="2100" dirty="0"/>
+                        <a:t>％</a:t>
+                      </a:r>
+                    </a:p>
+                  </a:txBody>
+                  <a:tcPr anchor="ctr"/>
+                </a:tc>
+                <a:tc>
+                  <a:txBody>
+                    <a:bodyPr/>
+                    <a:lstStyle/>
+                    <a:p>
+                      <a:pPr algn="ctr"/>
+                      <a:r>
+                        <a:rPr kumimoji="1" lang="en-US" altLang="ja-JP" sz="2100" dirty="0"/>
+                        <a:t>484/680</a:t>
+                      </a:r>
+                    </a:p>
+                    <a:p>
+                      <a:pPr algn="ctr"/>
+                      <a:r>
+                        <a:rPr kumimoji="1" lang="ja-JP" altLang="en-US" sz="2100" dirty="0"/>
+                        <a:t>約</a:t>
+                      </a:r>
+                      <a:r>
+                        <a:rPr kumimoji="1" lang="en-US" altLang="ja-JP" sz="2100" dirty="0"/>
+                        <a:t>71</a:t>
+                      </a:r>
+                      <a:r>
+                        <a:rPr kumimoji="1" lang="ja-JP" altLang="en-US" sz="2100" dirty="0"/>
+                        <a:t>％</a:t>
+                      </a:r>
+                    </a:p>
+                  </a:txBody>
+                  <a:tcPr anchor="ctr"/>
+                </a:tc>
+                <a:tc>
+                  <a:txBody>
+                    <a:bodyPr/>
+                    <a:lstStyle/>
+                    <a:p>
+                      <a:pPr algn="ctr"/>
+                      <a:r>
+                        <a:rPr kumimoji="1" lang="ja-JP" altLang="ja-JP" sz="2100" b="0" i="0" kern="1200" dirty="0">
+                          <a:solidFill>
+                            <a:schemeClr val="dk1"/>
+                          </a:solidFill>
+                          <a:effectLst/>
+                          <a:latin typeface="+mn-lt"/>
+                          <a:ea typeface="+mn-ea"/>
+                          <a:cs typeface="+mn-cs"/>
+                        </a:rPr>
+                        <a:t>548</a:t>
+                      </a:r>
+                      <a:r>
+                        <a:rPr kumimoji="1" lang="en-US" altLang="ja-JP" sz="2100" b="0" i="0" kern="1200" dirty="0">
+                          <a:solidFill>
+                            <a:schemeClr val="dk1"/>
+                          </a:solidFill>
+                          <a:effectLst/>
+                          <a:latin typeface="+mn-lt"/>
+                          <a:ea typeface="+mn-ea"/>
+                          <a:cs typeface="+mn-cs"/>
+                        </a:rPr>
+                        <a:t>/680</a:t>
+                      </a:r>
+                    </a:p>
+                    <a:p>
+                      <a:pPr algn="ctr"/>
+                      <a:r>
+                        <a:rPr kumimoji="1" lang="ja-JP" altLang="en-US" sz="2100" b="0" i="0" kern="1200" dirty="0">
+                          <a:solidFill>
+                            <a:schemeClr val="dk1"/>
+                          </a:solidFill>
+                          <a:effectLst/>
+                          <a:latin typeface="+mn-lt"/>
+                          <a:ea typeface="+mn-ea"/>
+                          <a:cs typeface="+mn-cs"/>
+                        </a:rPr>
+                        <a:t>約</a:t>
+                      </a:r>
+                      <a:r>
+                        <a:rPr kumimoji="1" lang="en-US" altLang="ja-JP" sz="2100" b="0" i="0" kern="1200" dirty="0">
+                          <a:solidFill>
+                            <a:schemeClr val="dk1"/>
+                          </a:solidFill>
+                          <a:effectLst/>
+                          <a:latin typeface="+mn-lt"/>
+                          <a:ea typeface="+mn-ea"/>
+                          <a:cs typeface="+mn-cs"/>
+                        </a:rPr>
+                        <a:t>80</a:t>
+                      </a:r>
+                      <a:r>
+                        <a:rPr kumimoji="1" lang="ja-JP" altLang="en-US" sz="2100" b="0" i="0" kern="1200" dirty="0">
+                          <a:solidFill>
+                            <a:schemeClr val="dk1"/>
+                          </a:solidFill>
+                          <a:effectLst/>
+                          <a:latin typeface="+mn-lt"/>
+                          <a:ea typeface="+mn-ea"/>
+                          <a:cs typeface="+mn-cs"/>
+                        </a:rPr>
+                        <a:t>％</a:t>
+                      </a:r>
+                      <a:endParaRPr kumimoji="1" lang="ja-JP" altLang="en-US" sz="2100" dirty="0"/>
+                    </a:p>
+                  </a:txBody>
+                  <a:tcPr anchor="ctr"/>
+                </a:tc>
+                <a:extLst>
+                  <a:ext uri="{0D108BD9-81ED-4DB2-BD59-A6C34878D82A}">
+                    <a16:rowId xmlns:a16="http://schemas.microsoft.com/office/drawing/2014/main" val="2722267845"/>
+                  </a:ext>
+                </a:extLst>
+              </a:tr>
+              <a:tr h="1269964">
+                <a:tc>
+                  <a:txBody>
+                    <a:bodyPr/>
+                    <a:lstStyle/>
+                    <a:p>
+                      <a:pPr marL="0" marR="0" lvl="0" indent="0" algn="ctr" defTabSz="914400" rtl="0" eaLnBrk="1" fontAlgn="auto" latinLnBrk="0" hangingPunct="1">
+                        <a:lnSpc>
+                          <a:spcPct val="100000"/>
+                        </a:lnSpc>
+                        <a:spcBef>
+                          <a:spcPts val="0"/>
+                        </a:spcBef>
+                        <a:spcAft>
+                          <a:spcPts val="0"/>
+                        </a:spcAft>
+                        <a:buClrTx/>
+                        <a:buSzTx/>
+                        <a:buFontTx/>
+                        <a:buNone/>
+                        <a:tabLst/>
+                        <a:defRPr/>
+                      </a:pPr>
+                      <a:r>
+                        <a:rPr lang="ja-JP" altLang="en-US" sz="2100" dirty="0"/>
+                        <a:t>テストデータその</a:t>
+                      </a:r>
+                      <a:r>
+                        <a:rPr lang="en-US" altLang="ja-JP" sz="2100" dirty="0"/>
+                        <a:t>2</a:t>
+                      </a:r>
+                    </a:p>
+                  </a:txBody>
+                  <a:tcPr anchor="ctr"/>
+                </a:tc>
+                <a:tc>
+                  <a:txBody>
+                    <a:bodyPr/>
+                    <a:lstStyle/>
+                    <a:p>
+                      <a:pPr algn="ctr"/>
+                      <a:r>
+                        <a:rPr kumimoji="1" lang="ja-JP" altLang="ja-JP" sz="2100" b="0" i="0" kern="1200" dirty="0">
+                          <a:solidFill>
+                            <a:schemeClr val="dk1"/>
+                          </a:solidFill>
+                          <a:effectLst/>
+                          <a:latin typeface="+mn-lt"/>
+                          <a:ea typeface="+mn-ea"/>
+                          <a:cs typeface="+mn-cs"/>
+                        </a:rPr>
+                        <a:t>67</a:t>
+                      </a:r>
+                      <a:r>
+                        <a:rPr kumimoji="1" lang="en-US" altLang="ja-JP" sz="2100" dirty="0"/>
+                        <a:t>/480</a:t>
+                      </a:r>
+                    </a:p>
+                    <a:p>
+                      <a:pPr algn="ctr"/>
+                      <a:r>
+                        <a:rPr kumimoji="1" lang="ja-JP" altLang="en-US" sz="2100" dirty="0"/>
+                        <a:t>約</a:t>
+                      </a:r>
+                      <a:r>
+                        <a:rPr kumimoji="1" lang="en-US" altLang="ja-JP" sz="2100" dirty="0"/>
+                        <a:t>13</a:t>
+                      </a:r>
+                      <a:r>
+                        <a:rPr kumimoji="1" lang="ja-JP" altLang="en-US" sz="2100" dirty="0"/>
+                        <a:t>％</a:t>
+                      </a:r>
+                    </a:p>
+                  </a:txBody>
+                  <a:tcPr anchor="ctr"/>
+                </a:tc>
+                <a:tc>
+                  <a:txBody>
+                    <a:bodyPr/>
+                    <a:lstStyle/>
+                    <a:p>
+                      <a:pPr algn="ctr"/>
+                      <a:r>
+                        <a:rPr kumimoji="1" lang="en-US" altLang="ja-JP" sz="2100" dirty="0"/>
+                        <a:t>201/480</a:t>
+                      </a:r>
+                    </a:p>
+                    <a:p>
+                      <a:pPr algn="ctr"/>
+                      <a:r>
+                        <a:rPr kumimoji="1" lang="ja-JP" altLang="en-US" sz="2100" dirty="0"/>
+                        <a:t>約</a:t>
+                      </a:r>
+                      <a:r>
+                        <a:rPr kumimoji="1" lang="en-US" altLang="ja-JP" sz="2100" dirty="0"/>
+                        <a:t>41</a:t>
+                      </a:r>
+                      <a:r>
+                        <a:rPr kumimoji="1" lang="ja-JP" altLang="en-US" sz="2100" dirty="0"/>
+                        <a:t>％</a:t>
+                      </a:r>
+                    </a:p>
+                  </a:txBody>
+                  <a:tcPr anchor="ctr"/>
+                </a:tc>
+                <a:tc>
+                  <a:txBody>
+                    <a:bodyPr/>
+                    <a:lstStyle/>
+                    <a:p>
+                      <a:pPr algn="ctr"/>
+                      <a:r>
+                        <a:rPr kumimoji="1" lang="ja-JP" altLang="ja-JP" sz="2100" b="0" i="0" kern="1200" dirty="0">
+                          <a:solidFill>
+                            <a:schemeClr val="dk1"/>
+                          </a:solidFill>
+                          <a:effectLst/>
+                          <a:latin typeface="+mn-lt"/>
+                          <a:ea typeface="+mn-ea"/>
+                          <a:cs typeface="+mn-cs"/>
+                        </a:rPr>
+                        <a:t>98</a:t>
+                      </a:r>
+                      <a:r>
+                        <a:rPr kumimoji="1" lang="en-US" altLang="ja-JP" sz="2100" b="0" i="0" kern="1200" dirty="0">
+                          <a:solidFill>
+                            <a:schemeClr val="dk1"/>
+                          </a:solidFill>
+                          <a:effectLst/>
+                          <a:latin typeface="+mn-lt"/>
+                          <a:ea typeface="+mn-ea"/>
+                          <a:cs typeface="+mn-cs"/>
+                        </a:rPr>
+                        <a:t>/480</a:t>
+                      </a:r>
+                    </a:p>
+                    <a:p>
+                      <a:pPr algn="ctr"/>
+                      <a:r>
+                        <a:rPr kumimoji="1" lang="ja-JP" altLang="en-US" sz="2100" b="0" i="0" kern="1200" dirty="0">
+                          <a:solidFill>
+                            <a:schemeClr val="dk1"/>
+                          </a:solidFill>
+                          <a:effectLst/>
+                          <a:latin typeface="+mn-lt"/>
+                          <a:ea typeface="+mn-ea"/>
+                          <a:cs typeface="+mn-cs"/>
+                        </a:rPr>
+                        <a:t>約</a:t>
+                      </a:r>
+                      <a:r>
+                        <a:rPr kumimoji="1" lang="en-US" altLang="ja-JP" sz="2100" b="0" i="0" kern="1200" dirty="0">
+                          <a:solidFill>
+                            <a:schemeClr val="dk1"/>
+                          </a:solidFill>
+                          <a:effectLst/>
+                          <a:latin typeface="+mn-lt"/>
+                          <a:ea typeface="+mn-ea"/>
+                          <a:cs typeface="+mn-cs"/>
+                        </a:rPr>
+                        <a:t>20</a:t>
+                      </a:r>
+                      <a:r>
+                        <a:rPr kumimoji="1" lang="ja-JP" altLang="en-US" sz="2100" b="0" i="0" kern="1200" dirty="0">
+                          <a:solidFill>
+                            <a:schemeClr val="dk1"/>
+                          </a:solidFill>
+                          <a:effectLst/>
+                          <a:latin typeface="+mn-lt"/>
+                          <a:ea typeface="+mn-ea"/>
+                          <a:cs typeface="+mn-cs"/>
+                        </a:rPr>
+                        <a:t>％</a:t>
+                      </a:r>
+                      <a:endParaRPr kumimoji="1" lang="ja-JP" altLang="en-US" sz="2100" dirty="0"/>
+                    </a:p>
+                  </a:txBody>
+                  <a:tcPr anchor="ctr"/>
+                </a:tc>
+                <a:extLst>
+                  <a:ext uri="{0D108BD9-81ED-4DB2-BD59-A6C34878D82A}">
+                    <a16:rowId xmlns:a16="http://schemas.microsoft.com/office/drawing/2014/main" val="2618271811"/>
+                  </a:ext>
+                </a:extLst>
+              </a:tr>
+            </a:tbl>
+          </a:graphicData>
+        </a:graphic>
+      </p:graphicFrame>
+    </p:spTree>
+    <p:extLst>
+      <p:ext uri="{BB962C8B-B14F-4D97-AF65-F5344CB8AC3E}">
+        <p14:creationId xmlns:p14="http://schemas.microsoft.com/office/powerpoint/2010/main" val="55717265"/>
+      </p:ext>
+    </p:extLst>
+  </p:cSld>
+  <p:clrMapOvr>
+    <a:masterClrMapping/>
+  </p:clrMapOvr>
+</p:sld>
+</file>
+
+<file path=ppt/slides/slide38.xml><?xml version="1.0" encoding="utf-8"?>
+<p:sld xmlns:a="http://schemas.openxmlformats.org/drawingml/2006/main" xmlns:r="http://schemas.openxmlformats.org/officeDocument/2006/relationships" xmlns:p="http://schemas.openxmlformats.org/presentationml/2006/main">
+  <p:cSld>
+    <p:spTree>
+      <p:nvGrpSpPr>
+        <p:cNvPr id="1" name=""/>
+        <p:cNvGrpSpPr/>
+        <p:nvPr/>
+      </p:nvGrpSpPr>
+      <p:grpSpPr>
+        <a:xfrm>
+          <a:off x="0" y="0"/>
+          <a:ext cx="0" cy="0"/>
+          <a:chOff x="0" y="0"/>
+          <a:chExt cx="0" cy="0"/>
+        </a:xfrm>
+      </p:grpSpPr>
+      <p:sp>
+        <p:nvSpPr>
+          <p:cNvPr id="2" name="タイトル 1">
+            <a:extLst>
+              <a:ext uri="{FF2B5EF4-FFF2-40B4-BE49-F238E27FC236}">
+                <a16:creationId xmlns:a16="http://schemas.microsoft.com/office/drawing/2014/main" id="{CD563CB8-538E-9EF2-043E-56B0C385C19E}"/>
+              </a:ext>
+            </a:extLst>
+          </p:cNvPr>
+          <p:cNvSpPr>
+            <a:spLocks noGrp="1"/>
+          </p:cNvSpPr>
+          <p:nvPr>
+            <p:ph type="title"/>
+          </p:nvPr>
+        </p:nvSpPr>
+        <p:spPr/>
+        <p:txBody>
+          <a:bodyPr/>
+          <a:lstStyle/>
+          <a:p>
+            <a:r>
+              <a:rPr kumimoji="1" lang="ja-JP" altLang="en-US" dirty="0"/>
+              <a:t>分析できること</a:t>
+            </a:r>
+          </a:p>
+        </p:txBody>
+      </p:sp>
+      <p:sp>
+        <p:nvSpPr>
+          <p:cNvPr id="3" name="コンテンツ プレースホルダー 2">
+            <a:extLst>
+              <a:ext uri="{FF2B5EF4-FFF2-40B4-BE49-F238E27FC236}">
+                <a16:creationId xmlns:a16="http://schemas.microsoft.com/office/drawing/2014/main" id="{C5A069E9-49F2-A50A-C2B1-0932A202A91D}"/>
+              </a:ext>
+            </a:extLst>
+          </p:cNvPr>
+          <p:cNvSpPr>
+            <a:spLocks noGrp="1"/>
+          </p:cNvSpPr>
+          <p:nvPr>
+            <p:ph idx="1"/>
+          </p:nvPr>
+        </p:nvSpPr>
+        <p:spPr/>
+        <p:txBody>
+          <a:bodyPr/>
+          <a:lstStyle/>
+          <a:p>
+            <a:r>
+              <a:rPr kumimoji="1" lang="ja-JP" altLang="en-US" dirty="0"/>
+              <a:t>答えのみを学習させることで、</a:t>
+            </a:r>
+            <a:r>
+              <a:rPr lang="ja-JP" altLang="en-US" dirty="0"/>
+              <a:t>テストデータその</a:t>
+            </a:r>
+            <a:r>
+              <a:rPr lang="en-US" altLang="ja-JP" dirty="0"/>
+              <a:t>1</a:t>
+            </a:r>
+            <a:r>
+              <a:rPr kumimoji="1" lang="ja-JP" altLang="en-US" dirty="0"/>
+              <a:t>だけでなく</a:t>
+            </a:r>
+            <a:r>
+              <a:rPr lang="ja-JP" altLang="en-US" dirty="0"/>
+              <a:t>テストデータその</a:t>
+            </a:r>
+            <a:r>
+              <a:rPr lang="en-US" altLang="ja-JP" dirty="0"/>
+              <a:t>2</a:t>
+            </a:r>
+            <a:r>
+              <a:rPr kumimoji="1" lang="ja-JP" altLang="en-US" dirty="0"/>
+              <a:t>の正解率も大きく向上した</a:t>
+            </a:r>
+          </a:p>
+        </p:txBody>
+      </p:sp>
+      <p:sp>
+        <p:nvSpPr>
+          <p:cNvPr id="4" name="スライド番号プレースホルダー 3">
+            <a:extLst>
+              <a:ext uri="{FF2B5EF4-FFF2-40B4-BE49-F238E27FC236}">
+                <a16:creationId xmlns:a16="http://schemas.microsoft.com/office/drawing/2014/main" id="{0CF76C9C-540E-E99B-E311-B25D00ED33DB}"/>
+              </a:ext>
+            </a:extLst>
+          </p:cNvPr>
+          <p:cNvSpPr>
+            <a:spLocks noGrp="1"/>
+          </p:cNvSpPr>
+          <p:nvPr>
+            <p:ph type="sldNum" sz="quarter" idx="12"/>
+          </p:nvPr>
+        </p:nvSpPr>
+        <p:spPr/>
+        <p:txBody>
+          <a:bodyPr/>
+          <a:lstStyle/>
+          <a:p>
+            <a:fld id="{10649E7B-FC1B-418B-9B6A-00859DB1DEE8}" type="slidenum">
+              <a:rPr kumimoji="1" lang="ja-JP" altLang="en-US" smtClean="0"/>
+              <a:t>38</a:t>
+            </a:fld>
+            <a:endParaRPr kumimoji="1" lang="ja-JP" altLang="en-US"/>
+          </a:p>
+        </p:txBody>
+      </p:sp>
+    </p:spTree>
+    <p:extLst>
+      <p:ext uri="{BB962C8B-B14F-4D97-AF65-F5344CB8AC3E}">
+        <p14:creationId xmlns:p14="http://schemas.microsoft.com/office/powerpoint/2010/main" val="3865649838"/>
+      </p:ext>
+    </p:extLst>
+  </p:cSld>
+  <p:clrMapOvr>
+    <a:masterClrMapping/>
+  </p:clrMapOvr>
+</p:sld>
+</file>
+
+<file path=ppt/slides/slide39.xml><?xml version="1.0" encoding="utf-8"?>
+<p:sld xmlns:a="http://schemas.openxmlformats.org/drawingml/2006/main" xmlns:r="http://schemas.openxmlformats.org/officeDocument/2006/relationships" xmlns:p="http://schemas.openxmlformats.org/presentationml/2006/main">
+  <p:cSld>
+    <p:spTree>
+      <p:nvGrpSpPr>
+        <p:cNvPr id="1" name=""/>
+        <p:cNvGrpSpPr/>
+        <p:nvPr/>
+      </p:nvGrpSpPr>
+      <p:grpSpPr>
+        <a:xfrm>
+          <a:off x="0" y="0"/>
+          <a:ext cx="0" cy="0"/>
+          <a:chOff x="0" y="0"/>
+          <a:chExt cx="0" cy="0"/>
+        </a:xfrm>
+      </p:grpSpPr>
+      <p:sp>
+        <p:nvSpPr>
+          <p:cNvPr id="2" name="タイトル 1">
+            <a:extLst>
+              <a:ext uri="{FF2B5EF4-FFF2-40B4-BE49-F238E27FC236}">
+                <a16:creationId xmlns:a16="http://schemas.microsoft.com/office/drawing/2014/main" id="{65B530C0-CBA9-CB0C-EB02-3E71ACC86F6F}"/>
+              </a:ext>
+            </a:extLst>
+          </p:cNvPr>
+          <p:cNvSpPr>
+            <a:spLocks noGrp="1"/>
+          </p:cNvSpPr>
+          <p:nvPr>
+            <p:ph type="title"/>
+          </p:nvPr>
+        </p:nvSpPr>
+        <p:spPr/>
+        <p:txBody>
+          <a:bodyPr/>
+          <a:lstStyle/>
+          <a:p>
+            <a:r>
+              <a:rPr kumimoji="1" lang="ja-JP" altLang="en-US" dirty="0"/>
+              <a:t>テストデータその</a:t>
+            </a:r>
+            <a:r>
+              <a:rPr kumimoji="1" lang="en-US" altLang="ja-JP" dirty="0"/>
+              <a:t>1</a:t>
+            </a:r>
+            <a:r>
+              <a:rPr kumimoji="1" lang="ja-JP" altLang="en-US" dirty="0"/>
+              <a:t>に対しての</a:t>
+            </a:r>
+            <a:br>
+              <a:rPr kumimoji="1" lang="en-US" altLang="ja-JP" dirty="0"/>
+            </a:br>
+            <a:r>
+              <a:rPr kumimoji="1" lang="ja-JP" altLang="en-US" dirty="0"/>
+              <a:t>各モデルの出力</a:t>
+            </a:r>
+          </a:p>
+        </p:txBody>
+      </p:sp>
+      <p:sp>
+        <p:nvSpPr>
+          <p:cNvPr id="4" name="スライド番号プレースホルダー 3">
+            <a:extLst>
+              <a:ext uri="{FF2B5EF4-FFF2-40B4-BE49-F238E27FC236}">
+                <a16:creationId xmlns:a16="http://schemas.microsoft.com/office/drawing/2014/main" id="{3A62CC01-8D68-BD66-E9E8-6B18B13C20DE}"/>
+              </a:ext>
+            </a:extLst>
+          </p:cNvPr>
+          <p:cNvSpPr>
+            <a:spLocks noGrp="1"/>
+          </p:cNvSpPr>
+          <p:nvPr>
+            <p:ph type="sldNum" sz="quarter" idx="12"/>
+          </p:nvPr>
+        </p:nvSpPr>
+        <p:spPr/>
+        <p:txBody>
+          <a:bodyPr/>
+          <a:lstStyle/>
+          <a:p>
+            <a:fld id="{10649E7B-FC1B-418B-9B6A-00859DB1DEE8}" type="slidenum">
+              <a:rPr kumimoji="1" lang="ja-JP" altLang="en-US" smtClean="0"/>
+              <a:t>39</a:t>
+            </a:fld>
+            <a:endParaRPr kumimoji="1" lang="ja-JP" altLang="en-US"/>
+          </a:p>
+        </p:txBody>
+      </p:sp>
+      <p:sp>
+        <p:nvSpPr>
+          <p:cNvPr id="7" name="テキスト ボックス 6">
+            <a:extLst>
+              <a:ext uri="{FF2B5EF4-FFF2-40B4-BE49-F238E27FC236}">
+                <a16:creationId xmlns:a16="http://schemas.microsoft.com/office/drawing/2014/main" id="{7EDA49D0-BA3F-4234-44C2-F8FF08D326A4}"/>
+              </a:ext>
+            </a:extLst>
+          </p:cNvPr>
+          <p:cNvSpPr txBox="1"/>
+          <p:nvPr/>
+        </p:nvSpPr>
+        <p:spPr>
+          <a:xfrm>
+            <a:off x="838200" y="6352143"/>
+            <a:ext cx="6097022" cy="369332"/>
+          </a:xfrm>
+          <a:prstGeom prst="rect">
+            <a:avLst/>
+          </a:prstGeom>
+          <a:noFill/>
+        </p:spPr>
+        <p:txBody>
+          <a:bodyPr wrap="square">
+            <a:spAutoFit/>
+          </a:bodyPr>
+          <a:lstStyle/>
+          <a:p>
+            <a:r>
+              <a:rPr kumimoji="1" lang="ja-JP" altLang="en-US" sz="1800" dirty="0"/>
+              <a:t>テストデータその</a:t>
+            </a:r>
+            <a:r>
+              <a:rPr kumimoji="1" lang="en-US" altLang="ja-JP" sz="1800" dirty="0"/>
+              <a:t>1</a:t>
+            </a:r>
+            <a:r>
+              <a:rPr kumimoji="1" lang="ja-JP" altLang="en-US" sz="1800" dirty="0"/>
+              <a:t>：</a:t>
+            </a:r>
+            <a:r>
+              <a:rPr lang="ja-JP" altLang="en-US" sz="1800" dirty="0"/>
+              <a:t>訓練用のデータの問題と同じルール</a:t>
+            </a:r>
+            <a:endParaRPr lang="en-US" altLang="ja-JP" sz="1800" dirty="0"/>
+          </a:p>
+        </p:txBody>
+      </p:sp>
+      <p:graphicFrame>
+        <p:nvGraphicFramePr>
+          <p:cNvPr id="10" name="コンテンツ プレースホルダー 9">
+            <a:extLst>
+              <a:ext uri="{FF2B5EF4-FFF2-40B4-BE49-F238E27FC236}">
+                <a16:creationId xmlns:a16="http://schemas.microsoft.com/office/drawing/2014/main" id="{1BE589D7-8141-2098-F5A7-E7D28D92037F}"/>
+              </a:ext>
+            </a:extLst>
+          </p:cNvPr>
+          <p:cNvGraphicFramePr>
+            <a:graphicFrameLocks noGrp="1"/>
+          </p:cNvGraphicFramePr>
+          <p:nvPr>
+            <p:ph idx="1"/>
+            <p:extLst>
+              <p:ext uri="{D42A27DB-BD31-4B8C-83A1-F6EECF244321}">
+                <p14:modId xmlns:p14="http://schemas.microsoft.com/office/powerpoint/2010/main" val="2930662736"/>
+              </p:ext>
+            </p:extLst>
+          </p:nvPr>
+        </p:nvGraphicFramePr>
+        <p:xfrm>
+          <a:off x="618806" y="1825624"/>
+          <a:ext cx="10954388" cy="3746694"/>
+        </p:xfrm>
+        <a:graphic>
+          <a:graphicData uri="http://schemas.openxmlformats.org/drawingml/2006/table">
+            <a:tbl>
+              <a:tblPr firstRow="1" bandRow="1">
+                <a:tableStyleId>{5C22544A-7EE6-4342-B048-85BDC9FD1C3A}</a:tableStyleId>
+              </a:tblPr>
+              <a:tblGrid>
+                <a:gridCol w="2738597">
+                  <a:extLst>
+                    <a:ext uri="{9D8B030D-6E8A-4147-A177-3AD203B41FA5}">
+                      <a16:colId xmlns:a16="http://schemas.microsoft.com/office/drawing/2014/main" val="1237701002"/>
+                    </a:ext>
+                  </a:extLst>
+                </a:gridCol>
+                <a:gridCol w="2738597">
+                  <a:extLst>
+                    <a:ext uri="{9D8B030D-6E8A-4147-A177-3AD203B41FA5}">
+                      <a16:colId xmlns:a16="http://schemas.microsoft.com/office/drawing/2014/main" val="736347099"/>
+                    </a:ext>
+                  </a:extLst>
+                </a:gridCol>
+                <a:gridCol w="2738597">
+                  <a:extLst>
+                    <a:ext uri="{9D8B030D-6E8A-4147-A177-3AD203B41FA5}">
+                      <a16:colId xmlns:a16="http://schemas.microsoft.com/office/drawing/2014/main" val="2868542704"/>
+                    </a:ext>
+                  </a:extLst>
+                </a:gridCol>
+                <a:gridCol w="2738597">
+                  <a:extLst>
+                    <a:ext uri="{9D8B030D-6E8A-4147-A177-3AD203B41FA5}">
+                      <a16:colId xmlns:a16="http://schemas.microsoft.com/office/drawing/2014/main" val="2140889208"/>
+                    </a:ext>
+                  </a:extLst>
+                </a:gridCol>
+              </a:tblGrid>
+              <a:tr h="1248898">
+                <a:tc>
+                  <a:txBody>
+                    <a:bodyPr/>
+                    <a:lstStyle/>
+                    <a:p>
+                      <a:pPr algn="ctr"/>
+                      <a:endParaRPr kumimoji="1" lang="ja-JP" altLang="en-US"/>
+                    </a:p>
+                  </a:txBody>
+                  <a:tcPr anchor="ctr"/>
+                </a:tc>
+                <a:tc>
+                  <a:txBody>
+                    <a:bodyPr/>
+                    <a:lstStyle/>
+                    <a:p>
+                      <a:pPr algn="ctr"/>
+                      <a:r>
+                        <a:rPr kumimoji="1" lang="ja-JP" altLang="en-US" dirty="0"/>
+                        <a:t>ベースモデル</a:t>
+                      </a:r>
+                    </a:p>
+                  </a:txBody>
+                  <a:tcPr anchor="ctr"/>
+                </a:tc>
+                <a:tc>
+                  <a:txBody>
+                    <a:bodyPr/>
+                    <a:lstStyle/>
+                    <a:p>
+                      <a:pPr algn="ctr"/>
+                      <a:r>
+                        <a:rPr kumimoji="1" lang="ja-JP" altLang="en-US" dirty="0"/>
+                        <a:t>答えのみの</a:t>
+                      </a:r>
+                      <a:r>
+                        <a:rPr kumimoji="1" lang="en-US" altLang="ja-JP" dirty="0"/>
+                        <a:t>SFT</a:t>
+                      </a:r>
+                      <a:endParaRPr kumimoji="1" lang="ja-JP" altLang="en-US" dirty="0"/>
+                    </a:p>
+                  </a:txBody>
+                  <a:tcPr anchor="ctr"/>
+                </a:tc>
+                <a:tc>
+                  <a:txBody>
+                    <a:bodyPr/>
+                    <a:lstStyle/>
+                    <a:p>
+                      <a:pPr algn="ctr"/>
+                      <a:r>
+                        <a:rPr kumimoji="1" lang="ja-JP" altLang="en-US" dirty="0"/>
+                        <a:t>答え＋処理過程の</a:t>
+                      </a:r>
+                      <a:r>
+                        <a:rPr kumimoji="1" lang="en-US" altLang="ja-JP" dirty="0"/>
+                        <a:t>SFT</a:t>
+                      </a:r>
+                      <a:endParaRPr kumimoji="1" lang="ja-JP" altLang="en-US" dirty="0"/>
+                    </a:p>
+                  </a:txBody>
+                  <a:tcPr anchor="ctr"/>
+                </a:tc>
+                <a:extLst>
+                  <a:ext uri="{0D108BD9-81ED-4DB2-BD59-A6C34878D82A}">
+                    <a16:rowId xmlns:a16="http://schemas.microsoft.com/office/drawing/2014/main" val="2128046640"/>
+                  </a:ext>
+                </a:extLst>
+              </a:tr>
+              <a:tr h="1248898">
+                <a:tc>
+                  <a:txBody>
+                    <a:bodyPr/>
+                    <a:lstStyle/>
+                    <a:p>
+                      <a:pPr algn="ctr"/>
+                      <a:r>
+                        <a:rPr kumimoji="1" lang="ja-JP" altLang="en-US" dirty="0"/>
+                        <a:t>処理単体</a:t>
+                      </a:r>
+                    </a:p>
+                  </a:txBody>
+                  <a:tcPr anchor="ctr"/>
+                </a:tc>
+                <a:tc>
+                  <a:txBody>
+                    <a:bodyPr/>
+                    <a:lstStyle/>
+                    <a:p>
+                      <a:pPr algn="ctr"/>
+                      <a:r>
+                        <a:rPr kumimoji="1" lang="en-US" altLang="zh-TW" dirty="0"/>
+                        <a:t>205/</a:t>
+                      </a:r>
+                      <a:r>
+                        <a:rPr kumimoji="1" lang="ja-JP" altLang="ja-JP" sz="1800" b="0" i="0" kern="1200" dirty="0">
+                          <a:solidFill>
+                            <a:schemeClr val="dk1"/>
+                          </a:solidFill>
+                          <a:effectLst/>
+                          <a:latin typeface="+mn-lt"/>
+                          <a:ea typeface="+mn-ea"/>
+                          <a:cs typeface="+mn-cs"/>
+                        </a:rPr>
+                        <a:t>240</a:t>
+                      </a:r>
+                      <a:endParaRPr kumimoji="1" lang="en-US" altLang="ja-JP" sz="1800" b="0" i="0" kern="1200" dirty="0">
+                        <a:solidFill>
+                          <a:schemeClr val="dk1"/>
+                        </a:solidFill>
+                        <a:effectLst/>
+                        <a:latin typeface="+mn-lt"/>
+                        <a:ea typeface="+mn-ea"/>
+                        <a:cs typeface="+mn-cs"/>
+                      </a:endParaRPr>
+                    </a:p>
+                    <a:p>
+                      <a:pPr algn="ctr"/>
+                      <a:r>
+                        <a:rPr kumimoji="1" lang="en-US" altLang="ja-JP" sz="1800" b="0" i="0" kern="1200" dirty="0">
+                          <a:solidFill>
+                            <a:schemeClr val="dk1"/>
+                          </a:solidFill>
+                          <a:effectLst/>
+                          <a:latin typeface="+mn-lt"/>
+                          <a:ea typeface="+mn-ea"/>
+                          <a:cs typeface="+mn-cs"/>
+                        </a:rPr>
+                        <a:t>85.4%</a:t>
                       </a:r>
                       <a:endParaRPr kumimoji="1" lang="ja-JP" altLang="en-US" dirty="0"/>
                     </a:p>
@@ -11653,6 +14200,132 @@
                     <a:p>
                       <a:pPr algn="ctr"/>
                       <a:r>
+                        <a:rPr kumimoji="1" lang="en-US" altLang="ja-JP" sz="1800" b="0" i="0" kern="1200" dirty="0">
+                          <a:solidFill>
+                            <a:schemeClr val="dk1"/>
+                          </a:solidFill>
+                          <a:effectLst/>
+                          <a:latin typeface="+mn-lt"/>
+                          <a:ea typeface="+mn-ea"/>
+                          <a:cs typeface="+mn-cs"/>
+                        </a:rPr>
+                        <a:t>201</a:t>
+                      </a:r>
+                      <a:r>
+                        <a:rPr kumimoji="1" lang="en-US" altLang="zh-TW" dirty="0"/>
+                        <a:t>/</a:t>
+                      </a:r>
+                      <a:r>
+                        <a:rPr kumimoji="1" lang="ja-JP" altLang="ja-JP" sz="1800" b="0" i="0" kern="1200" dirty="0">
+                          <a:solidFill>
+                            <a:schemeClr val="dk1"/>
+                          </a:solidFill>
+                          <a:effectLst/>
+                          <a:latin typeface="+mn-lt"/>
+                          <a:ea typeface="+mn-ea"/>
+                          <a:cs typeface="+mn-cs"/>
+                        </a:rPr>
+                        <a:t>240</a:t>
+                      </a:r>
+                      <a:endParaRPr kumimoji="1" lang="en-US" altLang="ja-JP" sz="1800" b="0" i="0" kern="1200" dirty="0">
+                        <a:solidFill>
+                          <a:schemeClr val="dk1"/>
+                        </a:solidFill>
+                        <a:effectLst/>
+                        <a:latin typeface="+mn-lt"/>
+                        <a:ea typeface="+mn-ea"/>
+                        <a:cs typeface="+mn-cs"/>
+                      </a:endParaRPr>
+                    </a:p>
+                    <a:p>
+                      <a:pPr algn="ctr"/>
+                      <a:r>
+                        <a:rPr kumimoji="1" lang="en-US" altLang="ja-JP" sz="1800" b="0" i="0" kern="1200" dirty="0">
+                          <a:solidFill>
+                            <a:schemeClr val="dk1"/>
+                          </a:solidFill>
+                          <a:effectLst/>
+                          <a:latin typeface="+mn-lt"/>
+                          <a:ea typeface="+mn-ea"/>
+                          <a:cs typeface="+mn-cs"/>
+                        </a:rPr>
+                        <a:t>83.7%</a:t>
+                      </a:r>
+                      <a:endParaRPr kumimoji="1" lang="ja-JP" altLang="en-US" dirty="0"/>
+                    </a:p>
+                  </a:txBody>
+                  <a:tcPr anchor="ctr"/>
+                </a:tc>
+                <a:extLst>
+                  <a:ext uri="{0D108BD9-81ED-4DB2-BD59-A6C34878D82A}">
+                    <a16:rowId xmlns:a16="http://schemas.microsoft.com/office/drawing/2014/main" val="677950247"/>
+                  </a:ext>
+                </a:extLst>
+              </a:tr>
+              <a:tr h="1248898">
+                <a:tc>
+                  <a:txBody>
+                    <a:bodyPr/>
+                    <a:lstStyle/>
+                    <a:p>
+                      <a:pPr marL="0" marR="0" lvl="0" indent="0" algn="ctr" defTabSz="914400" rtl="0" eaLnBrk="1" fontAlgn="auto" latinLnBrk="0" hangingPunct="1">
+                        <a:lnSpc>
+                          <a:spcPct val="100000"/>
+                        </a:lnSpc>
+                        <a:spcBef>
+                          <a:spcPts val="0"/>
+                        </a:spcBef>
+                        <a:spcAft>
+                          <a:spcPts val="0"/>
+                        </a:spcAft>
+                        <a:buClrTx/>
+                        <a:buSzTx/>
+                        <a:buFontTx/>
+                        <a:buNone/>
+                        <a:tabLst/>
+                        <a:defRPr/>
+                      </a:pPr>
+                      <a:r>
+                        <a:rPr kumimoji="1" lang="ja-JP" altLang="en-US" dirty="0"/>
+                        <a:t>２つの処理の組み合わせ</a:t>
+                      </a:r>
+                    </a:p>
+                    <a:p>
+                      <a:pPr algn="ctr"/>
+                      <a:endParaRPr kumimoji="1" lang="ja-JP" altLang="en-US" dirty="0"/>
+                    </a:p>
+                  </a:txBody>
+                  <a:tcPr anchor="ctr"/>
+                </a:tc>
+                <a:tc>
+                  <a:txBody>
+                    <a:bodyPr/>
+                    <a:lstStyle/>
+                    <a:p>
+                      <a:pPr algn="ctr"/>
+                      <a:r>
+                        <a:rPr kumimoji="1" lang="en-US" altLang="zh-TW" dirty="0"/>
+                        <a:t>106/480</a:t>
+                      </a:r>
+                    </a:p>
+                    <a:p>
+                      <a:pPr algn="ctr"/>
+                      <a:r>
+                        <a:rPr kumimoji="1" lang="en-US" altLang="ja-JP" dirty="0"/>
+                        <a:t>22.0%</a:t>
+                      </a:r>
+                      <a:endParaRPr kumimoji="1" lang="ja-JP" altLang="en-US" dirty="0"/>
+                    </a:p>
+                  </a:txBody>
+                  <a:tcPr anchor="ctr"/>
+                </a:tc>
+                <a:tc>
+                  <a:txBody>
+                    <a:bodyPr/>
+                    <a:lstStyle/>
+                    <a:p>
+                      <a:pPr algn="ctr"/>
+                      <a:r>
                         <a:rPr kumimoji="1" lang="ja-JP" altLang="ja-JP" sz="1800" b="0" i="0" kern="1200" dirty="0">
                           <a:solidFill>
                             <a:schemeClr val="dk1"/>
@@ -11680,9 +14353,48 @@
                   </a:txBody>
                   <a:tcPr anchor="ctr"/>
                 </a:tc>
+                <a:tc>
+                  <a:txBody>
+                    <a:bodyPr/>
+                    <a:lstStyle/>
+                    <a:p>
+                      <a:pPr algn="ctr"/>
+                      <a:r>
+                        <a:rPr kumimoji="1" lang="en-US" altLang="ja-JP" sz="1800" b="0" i="0" kern="1200" dirty="0">
+                          <a:solidFill>
+                            <a:schemeClr val="dk1"/>
+                          </a:solidFill>
+                          <a:effectLst/>
+                          <a:latin typeface="+mn-lt"/>
+                          <a:ea typeface="+mn-ea"/>
+                          <a:cs typeface="+mn-cs"/>
+                        </a:rPr>
+                        <a:t>362</a:t>
+                      </a:r>
+                      <a:r>
+                        <a:rPr kumimoji="1" lang="en-US" altLang="zh-TW" dirty="0"/>
+                        <a:t>/4</a:t>
+                      </a:r>
+                      <a:r>
+                        <a:rPr kumimoji="1" lang="en-US" altLang="ja-JP" dirty="0"/>
+                        <a:t>60</a:t>
+                      </a:r>
+                      <a:endParaRPr kumimoji="1" lang="en-US" altLang="zh-TW" dirty="0"/>
+                    </a:p>
+                    <a:p>
+                      <a:pPr algn="ctr"/>
+                      <a:r>
+                        <a:rPr kumimoji="1" lang="en-US" altLang="ja-JP" dirty="0"/>
+                        <a:t>78.6%</a:t>
+                      </a:r>
+                      <a:endParaRPr kumimoji="1" lang="ja-JP" altLang="en-US" dirty="0"/>
+                    </a:p>
+                  </a:txBody>
+                  <a:tcPr anchor="ctr"/>
+                </a:tc>
                 <a:extLst>
                   <a:ext uri="{0D108BD9-81ED-4DB2-BD59-A6C34878D82A}">
-                    <a16:rowId xmlns:a16="http://schemas.microsoft.com/office/drawing/2014/main" val="4205910191"/>
+                    <a16:rowId xmlns:a16="http://schemas.microsoft.com/office/drawing/2014/main" val="3114305922"/>
                   </a:ext>
                 </a:extLst>
               </a:tr>
@@ -11690,246 +14402,10 @@
           </a:graphicData>
         </a:graphic>
       </p:graphicFrame>
-      <p:sp>
-        <p:nvSpPr>
-          <p:cNvPr id="4" name="スライド番号プレースホルダー 3">
-            <a:extLst>
-              <a:ext uri="{FF2B5EF4-FFF2-40B4-BE49-F238E27FC236}">
-                <a16:creationId xmlns:a16="http://schemas.microsoft.com/office/drawing/2014/main" id="{B493540B-A119-3FD0-F87F-84C1545AECC5}"/>
-              </a:ext>
-            </a:extLst>
-          </p:cNvPr>
-          <p:cNvSpPr>
-            <a:spLocks noGrp="1"/>
-          </p:cNvSpPr>
-          <p:nvPr>
-            <p:ph type="sldNum" sz="quarter" idx="12"/>
-          </p:nvPr>
-        </p:nvSpPr>
-        <p:spPr/>
-        <p:txBody>
-          <a:bodyPr/>
-          <a:lstStyle/>
-          <a:p>
-            <a:fld id="{10649E7B-FC1B-418B-9B6A-00859DB1DEE8}" type="slidenum">
-              <a:rPr kumimoji="1" lang="ja-JP" altLang="en-US" smtClean="0"/>
-              <a:t>31</a:t>
-            </a:fld>
-            <a:endParaRPr kumimoji="1" lang="ja-JP" altLang="en-US"/>
-          </a:p>
-        </p:txBody>
-      </p:sp>
-      <p:sp>
-        <p:nvSpPr>
-          <p:cNvPr id="7" name="テキスト ボックス 6">
-            <a:extLst>
-              <a:ext uri="{FF2B5EF4-FFF2-40B4-BE49-F238E27FC236}">
-                <a16:creationId xmlns:a16="http://schemas.microsoft.com/office/drawing/2014/main" id="{199EE5DD-4D38-045A-947D-B8B5063C9BBC}"/>
-              </a:ext>
-            </a:extLst>
-          </p:cNvPr>
-          <p:cNvSpPr txBox="1"/>
-          <p:nvPr/>
-        </p:nvSpPr>
-        <p:spPr>
-          <a:xfrm>
-            <a:off x="928255" y="6077247"/>
-            <a:ext cx="9985663" cy="369332"/>
-          </a:xfrm>
-          <a:prstGeom prst="rect">
-            <a:avLst/>
-          </a:prstGeom>
-          <a:noFill/>
-        </p:spPr>
-        <p:txBody>
-          <a:bodyPr wrap="square" rtlCol="0">
-            <a:spAutoFit/>
-          </a:bodyPr>
-          <a:lstStyle/>
-          <a:p>
-            <a:r>
-              <a:rPr kumimoji="1" lang="ja-JP" altLang="en-US" dirty="0"/>
-              <a:t>テストデータその</a:t>
-            </a:r>
-            <a:r>
-              <a:rPr kumimoji="1" lang="en-US" altLang="ja-JP" dirty="0"/>
-              <a:t>1</a:t>
-            </a:r>
-            <a:r>
-              <a:rPr kumimoji="1" lang="ja-JP" altLang="en-US" dirty="0"/>
-              <a:t>：</a:t>
-            </a:r>
-            <a:r>
-              <a:rPr lang="ja-JP" altLang="en-US" dirty="0"/>
-              <a:t>訓練用のデータの問題と同じルール</a:t>
-            </a:r>
-            <a:endParaRPr lang="en-US" altLang="ja-JP" dirty="0"/>
-          </a:p>
-        </p:txBody>
-      </p:sp>
     </p:spTree>
     <p:extLst>
       <p:ext uri="{BB962C8B-B14F-4D97-AF65-F5344CB8AC3E}">
-        <p14:creationId xmlns:p14="http://schemas.microsoft.com/office/powerpoint/2010/main" val="3060401301"/>
-      </p:ext>
-    </p:extLst>
-  </p:cSld>
-  <p:clrMapOvr>
-    <a:masterClrMapping/>
-  </p:clrMapOvr>
-</p:sld>
-</file>
-
-<file path=ppt/slides/slide32.xml><?xml version="1.0" encoding="utf-8"?>
-<p:sld xmlns:a="http://schemas.openxmlformats.org/drawingml/2006/main" xmlns:r="http://schemas.openxmlformats.org/officeDocument/2006/relationships" xmlns:p="http://schemas.openxmlformats.org/presentationml/2006/main">
-  <p:cSld>
-    <p:spTree>
-      <p:nvGrpSpPr>
-        <p:cNvPr id="1" name=""/>
-        <p:cNvGrpSpPr/>
-        <p:nvPr/>
-      </p:nvGrpSpPr>
-      <p:grpSpPr>
-        <a:xfrm>
-          <a:off x="0" y="0"/>
-          <a:ext cx="0" cy="0"/>
-          <a:chOff x="0" y="0"/>
-          <a:chExt cx="0" cy="0"/>
-        </a:xfrm>
-      </p:grpSpPr>
-      <p:sp>
-        <p:nvSpPr>
-          <p:cNvPr id="2" name="タイトル 1">
-            <a:extLst>
-              <a:ext uri="{FF2B5EF4-FFF2-40B4-BE49-F238E27FC236}">
-                <a16:creationId xmlns:a16="http://schemas.microsoft.com/office/drawing/2014/main" id="{38720CD7-B6E9-2737-5BF2-761BCC0B12C2}"/>
-              </a:ext>
-            </a:extLst>
-          </p:cNvPr>
-          <p:cNvSpPr>
-            <a:spLocks noGrp="1"/>
-          </p:cNvSpPr>
-          <p:nvPr>
-            <p:ph type="title"/>
-          </p:nvPr>
-        </p:nvSpPr>
-        <p:spPr/>
-        <p:txBody>
-          <a:bodyPr/>
-          <a:lstStyle/>
-          <a:p>
-            <a:r>
-              <a:rPr kumimoji="1" lang="ja-JP" altLang="en-US">
-                <a:solidFill>
-                  <a:srgbClr val="FF0000"/>
-                </a:solidFill>
-              </a:rPr>
-              <a:t>改善点</a:t>
-            </a:r>
-          </a:p>
-        </p:txBody>
-      </p:sp>
-      <p:sp>
-        <p:nvSpPr>
-          <p:cNvPr id="3" name="コンテンツ プレースホルダー 2">
-            <a:extLst>
-              <a:ext uri="{FF2B5EF4-FFF2-40B4-BE49-F238E27FC236}">
-                <a16:creationId xmlns:a16="http://schemas.microsoft.com/office/drawing/2014/main" id="{017B691A-46C7-600E-7022-890D1BEC509F}"/>
-              </a:ext>
-            </a:extLst>
-          </p:cNvPr>
-          <p:cNvSpPr>
-            <a:spLocks noGrp="1"/>
-          </p:cNvSpPr>
-          <p:nvPr>
-            <p:ph idx="1"/>
-          </p:nvPr>
-        </p:nvSpPr>
-        <p:spPr/>
-        <p:txBody>
-          <a:bodyPr/>
-          <a:lstStyle/>
-          <a:p>
-            <a:r>
-              <a:rPr kumimoji="1" lang="ja-JP" altLang="en-US" dirty="0"/>
-              <a:t>口語を改善</a:t>
-            </a:r>
-            <a:endParaRPr kumimoji="1" lang="en-US" altLang="ja-JP" dirty="0"/>
-          </a:p>
-          <a:p>
-            <a:r>
-              <a:rPr lang="ja-JP" altLang="en-US" dirty="0"/>
-              <a:t>全部→全体</a:t>
-            </a:r>
-            <a:endParaRPr lang="en-US" altLang="ja-JP" dirty="0"/>
-          </a:p>
-          <a:p>
-            <a:r>
-              <a:rPr kumimoji="1" lang="ja-JP" altLang="en-US" dirty="0"/>
-              <a:t>図版を入れる</a:t>
-            </a:r>
-            <a:endParaRPr kumimoji="1" lang="en-US" altLang="ja-JP" dirty="0"/>
-          </a:p>
-          <a:p>
-            <a:r>
-              <a:rPr kumimoji="1" lang="ja-JP" altLang="en-US" dirty="0"/>
-              <a:t>参考文献の引用の仕方を長くてもいいから、正式な形で</a:t>
-            </a:r>
-            <a:endParaRPr kumimoji="1" lang="en-US" altLang="ja-JP" dirty="0"/>
-          </a:p>
-          <a:p>
-            <a:r>
-              <a:rPr kumimoji="1" lang="ja-JP" altLang="en-US" dirty="0">
-                <a:solidFill>
-                  <a:srgbClr val="FF0000"/>
-                </a:solidFill>
-              </a:rPr>
-              <a:t>今のところばらばらの実験でやってるから最後はちゃんと同じ結果を入れる</a:t>
-            </a:r>
-            <a:endParaRPr kumimoji="1" lang="en-US" altLang="ja-JP" dirty="0">
-              <a:solidFill>
-                <a:srgbClr val="FF0000"/>
-              </a:solidFill>
-            </a:endParaRPr>
-          </a:p>
-          <a:p>
-            <a:endParaRPr kumimoji="1" lang="ja-JP" altLang="en-US" dirty="0"/>
-          </a:p>
-        </p:txBody>
-      </p:sp>
-      <p:sp>
-        <p:nvSpPr>
-          <p:cNvPr id="4" name="スライド番号プレースホルダー 3">
-            <a:extLst>
-              <a:ext uri="{FF2B5EF4-FFF2-40B4-BE49-F238E27FC236}">
-                <a16:creationId xmlns:a16="http://schemas.microsoft.com/office/drawing/2014/main" id="{93BC64FA-8AD0-6880-8F88-5A3BAAA07F95}"/>
-              </a:ext>
-            </a:extLst>
-          </p:cNvPr>
-          <p:cNvSpPr>
-            <a:spLocks noGrp="1"/>
-          </p:cNvSpPr>
-          <p:nvPr>
-            <p:ph type="sldNum" sz="quarter" idx="12"/>
-          </p:nvPr>
-        </p:nvSpPr>
-        <p:spPr/>
-        <p:txBody>
-          <a:bodyPr/>
-          <a:lstStyle/>
-          <a:p>
-            <a:fld id="{10649E7B-FC1B-418B-9B6A-00859DB1DEE8}" type="slidenum">
-              <a:rPr kumimoji="1" lang="ja-JP" altLang="en-US" smtClean="0"/>
-              <a:t>32</a:t>
-            </a:fld>
-            <a:endParaRPr kumimoji="1" lang="ja-JP" altLang="en-US"/>
-          </a:p>
-        </p:txBody>
-      </p:sp>
-    </p:spTree>
-    <p:extLst>
-      <p:ext uri="{BB962C8B-B14F-4D97-AF65-F5344CB8AC3E}">
-        <p14:creationId xmlns:p14="http://schemas.microsoft.com/office/powerpoint/2010/main" val="3091403255"/>
+        <p14:creationId xmlns:p14="http://schemas.microsoft.com/office/powerpoint/2010/main" val="4198288446"/>
       </p:ext>
     </p:extLst>
   </p:cSld>
@@ -12244,6 +14720,1406 @@
     <p:extLst>
       <p:ext uri="{BB962C8B-B14F-4D97-AF65-F5344CB8AC3E}">
         <p14:creationId xmlns:p14="http://schemas.microsoft.com/office/powerpoint/2010/main" val="2632587778"/>
+      </p:ext>
+    </p:extLst>
+  </p:cSld>
+  <p:clrMapOvr>
+    <a:masterClrMapping/>
+  </p:clrMapOvr>
+</p:sld>
+</file>
+
+<file path=ppt/slides/slide40.xml><?xml version="1.0" encoding="utf-8"?>
+<p:sld xmlns:a="http://schemas.openxmlformats.org/drawingml/2006/main" xmlns:r="http://schemas.openxmlformats.org/officeDocument/2006/relationships" xmlns:p="http://schemas.openxmlformats.org/presentationml/2006/main">
+  <p:cSld>
+    <p:spTree>
+      <p:nvGrpSpPr>
+        <p:cNvPr id="1" name=""/>
+        <p:cNvGrpSpPr/>
+        <p:nvPr/>
+      </p:nvGrpSpPr>
+      <p:grpSpPr>
+        <a:xfrm>
+          <a:off x="0" y="0"/>
+          <a:ext cx="0" cy="0"/>
+          <a:chOff x="0" y="0"/>
+          <a:chExt cx="0" cy="0"/>
+        </a:xfrm>
+      </p:grpSpPr>
+      <p:sp>
+        <p:nvSpPr>
+          <p:cNvPr id="2" name="タイトル 1">
+            <a:extLst>
+              <a:ext uri="{FF2B5EF4-FFF2-40B4-BE49-F238E27FC236}">
+                <a16:creationId xmlns:a16="http://schemas.microsoft.com/office/drawing/2014/main" id="{85E95172-AF67-7C88-98C7-A10247FEBCA5}"/>
+              </a:ext>
+            </a:extLst>
+          </p:cNvPr>
+          <p:cNvSpPr>
+            <a:spLocks noGrp="1"/>
+          </p:cNvSpPr>
+          <p:nvPr>
+            <p:ph type="title"/>
+          </p:nvPr>
+        </p:nvSpPr>
+        <p:spPr/>
+        <p:txBody>
+          <a:bodyPr/>
+          <a:lstStyle/>
+          <a:p>
+            <a:r>
+              <a:rPr kumimoji="1" lang="ja-JP" altLang="en-US" dirty="0"/>
+              <a:t>分析できること</a:t>
+            </a:r>
+          </a:p>
+        </p:txBody>
+      </p:sp>
+      <p:sp>
+        <p:nvSpPr>
+          <p:cNvPr id="3" name="コンテンツ プレースホルダー 2">
+            <a:extLst>
+              <a:ext uri="{FF2B5EF4-FFF2-40B4-BE49-F238E27FC236}">
+                <a16:creationId xmlns:a16="http://schemas.microsoft.com/office/drawing/2014/main" id="{CA6CE885-8DBC-E747-9845-225A2B15BC22}"/>
+              </a:ext>
+            </a:extLst>
+          </p:cNvPr>
+          <p:cNvSpPr>
+            <a:spLocks noGrp="1"/>
+          </p:cNvSpPr>
+          <p:nvPr>
+            <p:ph idx="1"/>
+          </p:nvPr>
+        </p:nvSpPr>
+        <p:spPr/>
+        <p:txBody>
+          <a:bodyPr/>
+          <a:lstStyle/>
+          <a:p>
+            <a:r>
+              <a:rPr kumimoji="1" lang="ja-JP" altLang="en-US" dirty="0"/>
+              <a:t>処理単体では学習なしのベースモデルでも解ける。追加で学習を行ってももとから解ける問題は解けるし、解けない問題は解けない</a:t>
+            </a:r>
+          </a:p>
+        </p:txBody>
+      </p:sp>
+      <p:sp>
+        <p:nvSpPr>
+          <p:cNvPr id="4" name="スライド番号プレースホルダー 3">
+            <a:extLst>
+              <a:ext uri="{FF2B5EF4-FFF2-40B4-BE49-F238E27FC236}">
+                <a16:creationId xmlns:a16="http://schemas.microsoft.com/office/drawing/2014/main" id="{038C309C-91F2-5131-F793-FDA8527EFF37}"/>
+              </a:ext>
+            </a:extLst>
+          </p:cNvPr>
+          <p:cNvSpPr>
+            <a:spLocks noGrp="1"/>
+          </p:cNvSpPr>
+          <p:nvPr>
+            <p:ph type="sldNum" sz="quarter" idx="12"/>
+          </p:nvPr>
+        </p:nvSpPr>
+        <p:spPr/>
+        <p:txBody>
+          <a:bodyPr/>
+          <a:lstStyle/>
+          <a:p>
+            <a:fld id="{10649E7B-FC1B-418B-9B6A-00859DB1DEE8}" type="slidenum">
+              <a:rPr kumimoji="1" lang="ja-JP" altLang="en-US" smtClean="0"/>
+              <a:t>40</a:t>
+            </a:fld>
+            <a:endParaRPr kumimoji="1" lang="ja-JP" altLang="en-US"/>
+          </a:p>
+        </p:txBody>
+      </p:sp>
+    </p:spTree>
+    <p:extLst>
+      <p:ext uri="{BB962C8B-B14F-4D97-AF65-F5344CB8AC3E}">
+        <p14:creationId xmlns:p14="http://schemas.microsoft.com/office/powerpoint/2010/main" val="1051237912"/>
+      </p:ext>
+    </p:extLst>
+  </p:cSld>
+  <p:clrMapOvr>
+    <a:masterClrMapping/>
+  </p:clrMapOvr>
+</p:sld>
+</file>
+
+<file path=ppt/slides/slide41.xml><?xml version="1.0" encoding="utf-8"?>
+<p:sld xmlns:a="http://schemas.openxmlformats.org/drawingml/2006/main" xmlns:r="http://schemas.openxmlformats.org/officeDocument/2006/relationships" xmlns:p="http://schemas.openxmlformats.org/presentationml/2006/main">
+  <p:cSld>
+    <p:spTree>
+      <p:nvGrpSpPr>
+        <p:cNvPr id="1" name=""/>
+        <p:cNvGrpSpPr/>
+        <p:nvPr/>
+      </p:nvGrpSpPr>
+      <p:grpSpPr>
+        <a:xfrm>
+          <a:off x="0" y="0"/>
+          <a:ext cx="0" cy="0"/>
+          <a:chOff x="0" y="0"/>
+          <a:chExt cx="0" cy="0"/>
+        </a:xfrm>
+      </p:grpSpPr>
+      <p:sp>
+        <p:nvSpPr>
+          <p:cNvPr id="2" name="タイトル 1">
+            <a:extLst>
+              <a:ext uri="{FF2B5EF4-FFF2-40B4-BE49-F238E27FC236}">
+                <a16:creationId xmlns:a16="http://schemas.microsoft.com/office/drawing/2014/main" id="{4907106D-5D22-8081-FEBC-F96763DAFB84}"/>
+              </a:ext>
+            </a:extLst>
+          </p:cNvPr>
+          <p:cNvSpPr>
+            <a:spLocks noGrp="1"/>
+          </p:cNvSpPr>
+          <p:nvPr>
+            <p:ph type="title"/>
+          </p:nvPr>
+        </p:nvSpPr>
+        <p:spPr/>
+        <p:txBody>
+          <a:bodyPr/>
+          <a:lstStyle/>
+          <a:p>
+            <a:r>
+              <a:rPr lang="ja-JP" altLang="en-US" dirty="0"/>
+              <a:t>答え＋処理過程の</a:t>
+            </a:r>
+            <a:r>
+              <a:rPr lang="en-US" altLang="ja-JP" dirty="0"/>
+              <a:t>SFT</a:t>
+            </a:r>
+            <a:r>
+              <a:rPr lang="ja-JP" altLang="en-US" dirty="0"/>
+              <a:t>の分析</a:t>
+            </a:r>
+            <a:endParaRPr kumimoji="1" lang="ja-JP" altLang="en-US" dirty="0"/>
+          </a:p>
+        </p:txBody>
+      </p:sp>
+      <p:sp>
+        <p:nvSpPr>
+          <p:cNvPr id="3" name="コンテンツ プレースホルダー 2">
+            <a:extLst>
+              <a:ext uri="{FF2B5EF4-FFF2-40B4-BE49-F238E27FC236}">
+                <a16:creationId xmlns:a16="http://schemas.microsoft.com/office/drawing/2014/main" id="{6F05C153-5D87-DE5B-7B0D-11F581868F08}"/>
+              </a:ext>
+            </a:extLst>
+          </p:cNvPr>
+          <p:cNvSpPr>
+            <a:spLocks noGrp="1"/>
+          </p:cNvSpPr>
+          <p:nvPr>
+            <p:ph idx="1"/>
+          </p:nvPr>
+        </p:nvSpPr>
+        <p:spPr/>
+        <p:txBody>
+          <a:bodyPr/>
+          <a:lstStyle/>
+          <a:p>
+            <a:r>
+              <a:rPr kumimoji="1" lang="en-US" altLang="ja-JP" dirty="0"/>
+              <a:t>2</a:t>
+            </a:r>
+            <a:r>
+              <a:rPr kumimoji="1" lang="ja-JP" altLang="en-US" dirty="0"/>
+              <a:t>つの処理を組み合わせた問題の中には、処理の順番は関係ないものもある。</a:t>
+            </a:r>
+            <a:endParaRPr kumimoji="1" lang="en-US" altLang="ja-JP" dirty="0"/>
+          </a:p>
+          <a:p>
+            <a:endParaRPr lang="en-US" altLang="ja-JP" dirty="0"/>
+          </a:p>
+          <a:p>
+            <a:r>
+              <a:rPr kumimoji="1" lang="ja-JP" altLang="en-US" dirty="0"/>
+              <a:t>教師データを作成する際には、順番が関係ない処理過程については、</a:t>
+            </a:r>
+            <a:r>
+              <a:rPr kumimoji="1" lang="en-US" altLang="ja-JP" dirty="0"/>
+              <a:t>2</a:t>
+            </a:r>
+            <a:r>
+              <a:rPr kumimoji="1" lang="ja-JP" altLang="en-US" dirty="0"/>
+              <a:t>通りある中のどちらか一方だけを選んで作成</a:t>
+            </a:r>
+          </a:p>
+        </p:txBody>
+      </p:sp>
+      <p:sp>
+        <p:nvSpPr>
+          <p:cNvPr id="4" name="スライド番号プレースホルダー 3">
+            <a:extLst>
+              <a:ext uri="{FF2B5EF4-FFF2-40B4-BE49-F238E27FC236}">
+                <a16:creationId xmlns:a16="http://schemas.microsoft.com/office/drawing/2014/main" id="{8E7D758F-266B-8C57-317F-EB0CB8E96F16}"/>
+              </a:ext>
+            </a:extLst>
+          </p:cNvPr>
+          <p:cNvSpPr>
+            <a:spLocks noGrp="1"/>
+          </p:cNvSpPr>
+          <p:nvPr>
+            <p:ph type="sldNum" sz="quarter" idx="12"/>
+          </p:nvPr>
+        </p:nvSpPr>
+        <p:spPr/>
+        <p:txBody>
+          <a:bodyPr/>
+          <a:lstStyle/>
+          <a:p>
+            <a:fld id="{10649E7B-FC1B-418B-9B6A-00859DB1DEE8}" type="slidenum">
+              <a:rPr kumimoji="1" lang="ja-JP" altLang="en-US" smtClean="0"/>
+              <a:t>41</a:t>
+            </a:fld>
+            <a:endParaRPr kumimoji="1" lang="ja-JP" altLang="en-US"/>
+          </a:p>
+        </p:txBody>
+      </p:sp>
+    </p:spTree>
+    <p:extLst>
+      <p:ext uri="{BB962C8B-B14F-4D97-AF65-F5344CB8AC3E}">
+        <p14:creationId xmlns:p14="http://schemas.microsoft.com/office/powerpoint/2010/main" val="2538359784"/>
+      </p:ext>
+    </p:extLst>
+  </p:cSld>
+  <p:clrMapOvr>
+    <a:masterClrMapping/>
+  </p:clrMapOvr>
+</p:sld>
+</file>
+
+<file path=ppt/slides/slide42.xml><?xml version="1.0" encoding="utf-8"?>
+<p:sld xmlns:a="http://schemas.openxmlformats.org/drawingml/2006/main" xmlns:r="http://schemas.openxmlformats.org/officeDocument/2006/relationships" xmlns:p="http://schemas.openxmlformats.org/presentationml/2006/main">
+  <p:cSld>
+    <p:spTree>
+      <p:nvGrpSpPr>
+        <p:cNvPr id="1" name=""/>
+        <p:cNvGrpSpPr/>
+        <p:nvPr/>
+      </p:nvGrpSpPr>
+      <p:grpSpPr>
+        <a:xfrm>
+          <a:off x="0" y="0"/>
+          <a:ext cx="0" cy="0"/>
+          <a:chOff x="0" y="0"/>
+          <a:chExt cx="0" cy="0"/>
+        </a:xfrm>
+      </p:grpSpPr>
+      <p:sp>
+        <p:nvSpPr>
+          <p:cNvPr id="2" name="タイトル 1">
+            <a:extLst>
+              <a:ext uri="{FF2B5EF4-FFF2-40B4-BE49-F238E27FC236}">
+                <a16:creationId xmlns:a16="http://schemas.microsoft.com/office/drawing/2014/main" id="{BC6D295F-C2E3-63D1-257D-C480C24560FE}"/>
+              </a:ext>
+            </a:extLst>
+          </p:cNvPr>
+          <p:cNvSpPr>
+            <a:spLocks noGrp="1"/>
+          </p:cNvSpPr>
+          <p:nvPr>
+            <p:ph type="title"/>
+          </p:nvPr>
+        </p:nvSpPr>
+        <p:spPr>
+          <a:xfrm>
+            <a:off x="838200" y="18255"/>
+            <a:ext cx="10515600" cy="1325563"/>
+          </a:xfrm>
+        </p:spPr>
+        <p:txBody>
+          <a:bodyPr/>
+          <a:lstStyle/>
+          <a:p>
+            <a:r>
+              <a:rPr kumimoji="1" lang="ja-JP" altLang="en-US" dirty="0"/>
+              <a:t>答え＋処理過程の</a:t>
+            </a:r>
+            <a:r>
+              <a:rPr kumimoji="1" lang="en-US" altLang="ja-JP" dirty="0"/>
+              <a:t>SFT</a:t>
+            </a:r>
+            <a:r>
+              <a:rPr kumimoji="1" lang="ja-JP" altLang="en-US" dirty="0"/>
+              <a:t>の分析</a:t>
+            </a:r>
+          </a:p>
+        </p:txBody>
+      </p:sp>
+      <p:sp>
+        <p:nvSpPr>
+          <p:cNvPr id="4" name="スライド番号プレースホルダー 3">
+            <a:extLst>
+              <a:ext uri="{FF2B5EF4-FFF2-40B4-BE49-F238E27FC236}">
+                <a16:creationId xmlns:a16="http://schemas.microsoft.com/office/drawing/2014/main" id="{471933A0-AA2D-72FD-C0A8-95535660B21A}"/>
+              </a:ext>
+            </a:extLst>
+          </p:cNvPr>
+          <p:cNvSpPr>
+            <a:spLocks noGrp="1"/>
+          </p:cNvSpPr>
+          <p:nvPr>
+            <p:ph type="sldNum" sz="quarter" idx="12"/>
+          </p:nvPr>
+        </p:nvSpPr>
+        <p:spPr/>
+        <p:txBody>
+          <a:bodyPr/>
+          <a:lstStyle/>
+          <a:p>
+            <a:fld id="{10649E7B-FC1B-418B-9B6A-00859DB1DEE8}" type="slidenum">
+              <a:rPr kumimoji="1" lang="ja-JP" altLang="en-US" smtClean="0"/>
+              <a:t>42</a:t>
+            </a:fld>
+            <a:endParaRPr kumimoji="1" lang="ja-JP" altLang="en-US"/>
+          </a:p>
+        </p:txBody>
+      </p:sp>
+      <p:sp>
+        <p:nvSpPr>
+          <p:cNvPr id="5" name="四角形: 角を丸くする 4">
+            <a:extLst>
+              <a:ext uri="{FF2B5EF4-FFF2-40B4-BE49-F238E27FC236}">
+                <a16:creationId xmlns:a16="http://schemas.microsoft.com/office/drawing/2014/main" id="{9107CE5A-FCD2-4705-7479-C800FE5915B9}"/>
+              </a:ext>
+            </a:extLst>
+          </p:cNvPr>
+          <p:cNvSpPr/>
+          <p:nvPr/>
+        </p:nvSpPr>
+        <p:spPr>
+          <a:xfrm>
+            <a:off x="1000317" y="975769"/>
+            <a:ext cx="4394029" cy="5817793"/>
+          </a:xfrm>
+          <a:prstGeom prst="roundRect">
+            <a:avLst/>
+          </a:prstGeom>
+        </p:spPr>
+        <p:style>
+          <a:lnRef idx="2">
+            <a:schemeClr val="accent5"/>
+          </a:lnRef>
+          <a:fillRef idx="1">
+            <a:schemeClr val="lt1"/>
+          </a:fillRef>
+          <a:effectRef idx="0">
+            <a:schemeClr val="accent5"/>
+          </a:effectRef>
+          <a:fontRef idx="minor">
+            <a:schemeClr val="dk1"/>
+          </a:fontRef>
+        </p:style>
+        <p:txBody>
+          <a:bodyPr rtlCol="0" anchor="ctr"/>
+          <a:lstStyle/>
+          <a:p>
+            <a:r>
+              <a:rPr kumimoji="1" lang="en-US" altLang="ja-JP" dirty="0"/>
+              <a:t>Example 1:</a:t>
+            </a:r>
+          </a:p>
+          <a:p>
+            <a:r>
+              <a:rPr kumimoji="1" lang="en-US" altLang="ja-JP" dirty="0"/>
+              <a:t>Input: [6, 9, 3, 8, 2, 1, 3, 8, 1, 7]</a:t>
+            </a:r>
+          </a:p>
+          <a:p>
+            <a:r>
+              <a:rPr kumimoji="1" lang="en-US" altLang="ja-JP" dirty="0"/>
+              <a:t>Step 1 (reverse): [7, 1, 8, 3, 1, 2, 8, 3, 9, 6]</a:t>
+            </a:r>
+          </a:p>
+          <a:p>
+            <a:r>
+              <a:rPr kumimoji="1" lang="en-US" altLang="ja-JP" dirty="0"/>
+              <a:t>Step 2 (add_1): [8, 2, 9, 4, 2, 3, 9, 4, 10, 7]</a:t>
+            </a:r>
+          </a:p>
+          <a:p>
+            <a:r>
+              <a:rPr kumimoji="1" lang="en-US" altLang="ja-JP" dirty="0"/>
+              <a:t>Output: [8, 2, 9, 4, 2, 3, 9, 4, 10, 7]</a:t>
+            </a:r>
+          </a:p>
+          <a:p>
+            <a:endParaRPr kumimoji="1" lang="en-US" altLang="ja-JP" dirty="0"/>
+          </a:p>
+          <a:p>
+            <a:r>
+              <a:rPr kumimoji="1" lang="en-US" altLang="ja-JP" dirty="0"/>
+              <a:t>Example 2:</a:t>
+            </a:r>
+          </a:p>
+          <a:p>
+            <a:r>
+              <a:rPr kumimoji="1" lang="en-US" altLang="ja-JP" dirty="0"/>
+              <a:t>Input: [0, 7, 8, 0, 8]</a:t>
+            </a:r>
+          </a:p>
+          <a:p>
+            <a:r>
+              <a:rPr kumimoji="1" lang="en-US" altLang="ja-JP" dirty="0"/>
+              <a:t>Step 1 (reverse): [8, 0, 8, 7, 0]</a:t>
+            </a:r>
+          </a:p>
+          <a:p>
+            <a:r>
+              <a:rPr kumimoji="1" lang="en-US" altLang="ja-JP" dirty="0"/>
+              <a:t>Step 2 (add_1): [9, 1, 9, 8, 1]</a:t>
+            </a:r>
+          </a:p>
+          <a:p>
+            <a:r>
+              <a:rPr kumimoji="1" lang="en-US" altLang="ja-JP" dirty="0"/>
+              <a:t>Output: [9, 1, 9, 8, 1]</a:t>
+            </a:r>
+          </a:p>
+          <a:p>
+            <a:endParaRPr kumimoji="1" lang="en-US" altLang="ja-JP" dirty="0"/>
+          </a:p>
+          <a:p>
+            <a:r>
+              <a:rPr kumimoji="1" lang="en-US" altLang="ja-JP" dirty="0"/>
+              <a:t>Query :</a:t>
+            </a:r>
+          </a:p>
+          <a:p>
+            <a:r>
+              <a:rPr kumimoji="1" lang="en-US" altLang="ja-JP" dirty="0"/>
+              <a:t>Input: [7, 3, 8, 4, 2]</a:t>
+            </a:r>
+          </a:p>
+          <a:p>
+            <a:r>
+              <a:rPr kumimoji="1" lang="en-US" altLang="ja-JP" dirty="0"/>
+              <a:t>Step 1 (reverse): [2, 4, 8, 3, 7]</a:t>
+            </a:r>
+          </a:p>
+          <a:p>
+            <a:r>
+              <a:rPr kumimoji="1" lang="en-US" altLang="ja-JP" dirty="0"/>
+              <a:t>Step 2 (add_1): [3, 5, 9, 4, 8]</a:t>
+            </a:r>
+          </a:p>
+          <a:p>
+            <a:r>
+              <a:rPr kumimoji="1" lang="en-US" altLang="ja-JP" dirty="0"/>
+              <a:t>Final Answer: [3, 5, 9, 4, 8]</a:t>
+            </a:r>
+            <a:endParaRPr kumimoji="1" lang="ja-JP" altLang="en-US" dirty="0"/>
+          </a:p>
+        </p:txBody>
+      </p:sp>
+      <p:sp>
+        <p:nvSpPr>
+          <p:cNvPr id="6" name="四角形: 角を丸くする 5">
+            <a:extLst>
+              <a:ext uri="{FF2B5EF4-FFF2-40B4-BE49-F238E27FC236}">
+                <a16:creationId xmlns:a16="http://schemas.microsoft.com/office/drawing/2014/main" id="{5F306A08-BA8C-AB68-953E-777DAB94A03A}"/>
+              </a:ext>
+            </a:extLst>
+          </p:cNvPr>
+          <p:cNvSpPr/>
+          <p:nvPr/>
+        </p:nvSpPr>
+        <p:spPr>
+          <a:xfrm>
+            <a:off x="6797654" y="975770"/>
+            <a:ext cx="4394029" cy="5817792"/>
+          </a:xfrm>
+          <a:prstGeom prst="roundRect">
+            <a:avLst/>
+          </a:prstGeom>
+        </p:spPr>
+        <p:style>
+          <a:lnRef idx="2">
+            <a:schemeClr val="accent6"/>
+          </a:lnRef>
+          <a:fillRef idx="1">
+            <a:schemeClr val="lt1"/>
+          </a:fillRef>
+          <a:effectRef idx="0">
+            <a:schemeClr val="accent6"/>
+          </a:effectRef>
+          <a:fontRef idx="minor">
+            <a:schemeClr val="dk1"/>
+          </a:fontRef>
+        </p:style>
+        <p:txBody>
+          <a:bodyPr rtlCol="0" anchor="ctr"/>
+          <a:lstStyle/>
+          <a:p>
+            <a:r>
+              <a:rPr kumimoji="1" lang="en-US" altLang="ja-JP" dirty="0"/>
+              <a:t>Example 1:</a:t>
+            </a:r>
+          </a:p>
+          <a:p>
+            <a:r>
+              <a:rPr kumimoji="1" lang="en-US" altLang="ja-JP" dirty="0"/>
+              <a:t>Input: [6, 9, 3, 8, 2, 1, 3, 8, 1, 7]</a:t>
+            </a:r>
+          </a:p>
+          <a:p>
+            <a:r>
+              <a:rPr kumimoji="1" lang="en-US" altLang="ja-JP" dirty="0"/>
+              <a:t>Step 1 (add_1): [7, 10, 4, 9, 3, 2, 4, 9, 2, 8]</a:t>
+            </a:r>
+          </a:p>
+          <a:p>
+            <a:r>
+              <a:rPr kumimoji="1" lang="en-US" altLang="ja-JP" dirty="0"/>
+              <a:t>Step 2 (reverse): [8, 2, 9, 4, 2, 3, 9, 4, 10, 7]</a:t>
+            </a:r>
+          </a:p>
+          <a:p>
+            <a:r>
+              <a:rPr kumimoji="1" lang="en-US" altLang="ja-JP" dirty="0"/>
+              <a:t>Output: [8, 2, 9, 4, 2, 3, 9, 4, 10, 7]</a:t>
+            </a:r>
+          </a:p>
+          <a:p>
+            <a:endParaRPr kumimoji="1" lang="en-US" altLang="ja-JP" dirty="0"/>
+          </a:p>
+          <a:p>
+            <a:r>
+              <a:rPr kumimoji="1" lang="en-US" altLang="ja-JP" dirty="0"/>
+              <a:t>Example 2:</a:t>
+            </a:r>
+          </a:p>
+          <a:p>
+            <a:r>
+              <a:rPr kumimoji="1" lang="en-US" altLang="ja-JP" dirty="0"/>
+              <a:t>Input: [0, 7, 8, 0, 8]</a:t>
+            </a:r>
+          </a:p>
+          <a:p>
+            <a:r>
+              <a:rPr kumimoji="1" lang="en-US" altLang="ja-JP" dirty="0"/>
+              <a:t>Step 1 (add_1): [1, 8, 9, 1, 9]</a:t>
+            </a:r>
+          </a:p>
+          <a:p>
+            <a:r>
+              <a:rPr kumimoji="1" lang="en-US" altLang="ja-JP" dirty="0"/>
+              <a:t>Step 2 (reverse): [9, 1, 9, 8, 1]</a:t>
+            </a:r>
+          </a:p>
+          <a:p>
+            <a:r>
+              <a:rPr kumimoji="1" lang="en-US" altLang="ja-JP" dirty="0"/>
+              <a:t>Output: [9, 1, 9, 8, 1]</a:t>
+            </a:r>
+          </a:p>
+          <a:p>
+            <a:endParaRPr kumimoji="1" lang="en-US" altLang="ja-JP" dirty="0"/>
+          </a:p>
+          <a:p>
+            <a:r>
+              <a:rPr kumimoji="1" lang="en-US" altLang="ja-JP" dirty="0"/>
+              <a:t>Query :</a:t>
+            </a:r>
+          </a:p>
+          <a:p>
+            <a:r>
+              <a:rPr kumimoji="1" lang="en-US" altLang="ja-JP" dirty="0"/>
+              <a:t>Input: [7, 3, 8, 4, 2]</a:t>
+            </a:r>
+          </a:p>
+          <a:p>
+            <a:r>
+              <a:rPr kumimoji="1" lang="en-US" altLang="ja-JP" dirty="0"/>
+              <a:t>Step 1 (add_1): [8, 4, 9, 5, 3]</a:t>
+            </a:r>
+          </a:p>
+          <a:p>
+            <a:r>
+              <a:rPr kumimoji="1" lang="en-US" altLang="ja-JP" dirty="0"/>
+              <a:t>Step 2 (reverse): [3, 5, 9, 4, 8]</a:t>
+            </a:r>
+          </a:p>
+          <a:p>
+            <a:r>
+              <a:rPr kumimoji="1" lang="en-US" altLang="ja-JP" dirty="0"/>
+              <a:t>Final Answer: [3, 5, 9, 4, 8]</a:t>
+            </a:r>
+            <a:endParaRPr kumimoji="1" lang="ja-JP" altLang="en-US" dirty="0"/>
+          </a:p>
+        </p:txBody>
+      </p:sp>
+      <p:sp>
+        <p:nvSpPr>
+          <p:cNvPr id="7" name="テキスト ボックス 6">
+            <a:extLst>
+              <a:ext uri="{FF2B5EF4-FFF2-40B4-BE49-F238E27FC236}">
+                <a16:creationId xmlns:a16="http://schemas.microsoft.com/office/drawing/2014/main" id="{36FD67BD-B907-CFFA-72D7-049ABEC38B83}"/>
+              </a:ext>
+            </a:extLst>
+          </p:cNvPr>
+          <p:cNvSpPr txBox="1"/>
+          <p:nvPr/>
+        </p:nvSpPr>
+        <p:spPr>
+          <a:xfrm>
+            <a:off x="5865167" y="1626282"/>
+            <a:ext cx="461665" cy="3093154"/>
+          </a:xfrm>
+          <a:prstGeom prst="rect">
+            <a:avLst/>
+          </a:prstGeom>
+          <a:noFill/>
+        </p:spPr>
+        <p:txBody>
+          <a:bodyPr vert="eaVert" wrap="none" rtlCol="0">
+            <a:spAutoFit/>
+          </a:bodyPr>
+          <a:lstStyle/>
+          <a:p>
+            <a:r>
+              <a:rPr kumimoji="1" lang="ja-JP" altLang="en-US" dirty="0"/>
+              <a:t>教師データに使うのは↓</a:t>
+            </a:r>
+            <a:r>
+              <a:rPr lang="ja-JP" altLang="en-US" dirty="0"/>
+              <a:t>だけ</a:t>
+            </a:r>
+            <a:endParaRPr lang="en-US" altLang="ja-JP" dirty="0"/>
+          </a:p>
+        </p:txBody>
+      </p:sp>
+    </p:spTree>
+    <p:extLst>
+      <p:ext uri="{BB962C8B-B14F-4D97-AF65-F5344CB8AC3E}">
+        <p14:creationId xmlns:p14="http://schemas.microsoft.com/office/powerpoint/2010/main" val="3606986017"/>
+      </p:ext>
+    </p:extLst>
+  </p:cSld>
+  <p:clrMapOvr>
+    <a:masterClrMapping/>
+  </p:clrMapOvr>
+</p:sld>
+</file>
+
+<file path=ppt/slides/slide43.xml><?xml version="1.0" encoding="utf-8"?>
+<p:sld xmlns:a="http://schemas.openxmlformats.org/drawingml/2006/main" xmlns:r="http://schemas.openxmlformats.org/officeDocument/2006/relationships" xmlns:p="http://schemas.openxmlformats.org/presentationml/2006/main">
+  <p:cSld>
+    <p:spTree>
+      <p:nvGrpSpPr>
+        <p:cNvPr id="1" name=""/>
+        <p:cNvGrpSpPr/>
+        <p:nvPr/>
+      </p:nvGrpSpPr>
+      <p:grpSpPr>
+        <a:xfrm>
+          <a:off x="0" y="0"/>
+          <a:ext cx="0" cy="0"/>
+          <a:chOff x="0" y="0"/>
+          <a:chExt cx="0" cy="0"/>
+        </a:xfrm>
+      </p:grpSpPr>
+      <p:sp>
+        <p:nvSpPr>
+          <p:cNvPr id="2" name="タイトル 1">
+            <a:extLst>
+              <a:ext uri="{FF2B5EF4-FFF2-40B4-BE49-F238E27FC236}">
+                <a16:creationId xmlns:a16="http://schemas.microsoft.com/office/drawing/2014/main" id="{A1A8955F-0692-9D88-021C-3573EB69FC6C}"/>
+              </a:ext>
+            </a:extLst>
+          </p:cNvPr>
+          <p:cNvSpPr>
+            <a:spLocks noGrp="1"/>
+          </p:cNvSpPr>
+          <p:nvPr>
+            <p:ph type="title"/>
+          </p:nvPr>
+        </p:nvSpPr>
+        <p:spPr/>
+        <p:txBody>
+          <a:bodyPr/>
+          <a:lstStyle/>
+          <a:p>
+            <a:r>
+              <a:rPr lang="ja-JP" altLang="en-US" dirty="0"/>
+              <a:t>答え＋処理過程の</a:t>
+            </a:r>
+            <a:r>
+              <a:rPr lang="en-US" altLang="ja-JP" dirty="0"/>
+              <a:t>SFT</a:t>
+            </a:r>
+            <a:r>
+              <a:rPr lang="ja-JP" altLang="en-US" dirty="0"/>
+              <a:t>の分析</a:t>
+            </a:r>
+            <a:endParaRPr kumimoji="1" lang="ja-JP" altLang="en-US" dirty="0"/>
+          </a:p>
+        </p:txBody>
+      </p:sp>
+      <p:sp>
+        <p:nvSpPr>
+          <p:cNvPr id="3" name="コンテンツ プレースホルダー 2">
+            <a:extLst>
+              <a:ext uri="{FF2B5EF4-FFF2-40B4-BE49-F238E27FC236}">
+                <a16:creationId xmlns:a16="http://schemas.microsoft.com/office/drawing/2014/main" id="{48F8B874-D2E5-BBC3-D5EB-7E35884B07FD}"/>
+              </a:ext>
+            </a:extLst>
+          </p:cNvPr>
+          <p:cNvSpPr>
+            <a:spLocks noGrp="1"/>
+          </p:cNvSpPr>
+          <p:nvPr>
+            <p:ph idx="1"/>
+          </p:nvPr>
+        </p:nvSpPr>
+        <p:spPr/>
+        <p:txBody>
+          <a:bodyPr/>
+          <a:lstStyle/>
+          <a:p>
+            <a:r>
+              <a:rPr lang="ja-JP" altLang="ja-JP" dirty="0"/>
+              <a:t>学習時に提示していない処理順序の適用</a:t>
+            </a:r>
+            <a:endParaRPr lang="en-US" altLang="ja-JP" dirty="0"/>
+          </a:p>
+          <a:p>
+            <a:endParaRPr kumimoji="1" lang="en-US" altLang="ja-JP" dirty="0"/>
+          </a:p>
+          <a:p>
+            <a:r>
+              <a:rPr lang="ja-JP" altLang="en-US" dirty="0"/>
+              <a:t>処理の順序が関係ない問題の内、</a:t>
+            </a:r>
+            <a:r>
+              <a:rPr lang="en-US" altLang="ja-JP" dirty="0"/>
+              <a:t>7</a:t>
+            </a:r>
+            <a:r>
+              <a:rPr lang="ja-JP" altLang="en-US" dirty="0"/>
+              <a:t>例だけ学習時に教えていない順序を適用</a:t>
+            </a:r>
+            <a:endParaRPr lang="en-US" altLang="ja-JP" dirty="0"/>
+          </a:p>
+          <a:p>
+            <a:endParaRPr kumimoji="1" lang="en-US" altLang="ja-JP" dirty="0"/>
+          </a:p>
+          <a:p>
+            <a:r>
+              <a:rPr lang="en-US" altLang="ja-JP" dirty="0"/>
+              <a:t>7</a:t>
+            </a:r>
+            <a:r>
+              <a:rPr lang="ja-JP" altLang="en-US" dirty="0"/>
+              <a:t>例中</a:t>
+            </a:r>
+            <a:r>
+              <a:rPr lang="en-US" altLang="ja-JP" dirty="0"/>
+              <a:t>6</a:t>
+            </a:r>
+            <a:r>
+              <a:rPr lang="ja-JP" altLang="en-US" dirty="0"/>
+              <a:t>例が最終的な回答まで合っていた。</a:t>
+            </a:r>
+            <a:endParaRPr lang="en-US" altLang="ja-JP" dirty="0"/>
+          </a:p>
+          <a:p>
+            <a:endParaRPr lang="en-US" altLang="ja-JP" dirty="0"/>
+          </a:p>
+          <a:p>
+            <a:r>
+              <a:rPr lang="ja-JP" altLang="ja-JP" dirty="0"/>
+              <a:t>学習時に与えられた処理順序の単純な再現だけでは説明できない出力が確認された</a:t>
+            </a:r>
+            <a:endParaRPr lang="en-US" altLang="ja-JP" dirty="0"/>
+          </a:p>
+        </p:txBody>
+      </p:sp>
+      <p:sp>
+        <p:nvSpPr>
+          <p:cNvPr id="4" name="スライド番号プレースホルダー 3">
+            <a:extLst>
+              <a:ext uri="{FF2B5EF4-FFF2-40B4-BE49-F238E27FC236}">
+                <a16:creationId xmlns:a16="http://schemas.microsoft.com/office/drawing/2014/main" id="{76BB1565-D6C7-D64C-7FA1-C47E6995DED9}"/>
+              </a:ext>
+            </a:extLst>
+          </p:cNvPr>
+          <p:cNvSpPr>
+            <a:spLocks noGrp="1"/>
+          </p:cNvSpPr>
+          <p:nvPr>
+            <p:ph type="sldNum" sz="quarter" idx="12"/>
+          </p:nvPr>
+        </p:nvSpPr>
+        <p:spPr/>
+        <p:txBody>
+          <a:bodyPr/>
+          <a:lstStyle/>
+          <a:p>
+            <a:fld id="{10649E7B-FC1B-418B-9B6A-00859DB1DEE8}" type="slidenum">
+              <a:rPr kumimoji="1" lang="ja-JP" altLang="en-US" smtClean="0"/>
+              <a:t>43</a:t>
+            </a:fld>
+            <a:endParaRPr kumimoji="1" lang="ja-JP" altLang="en-US"/>
+          </a:p>
+        </p:txBody>
+      </p:sp>
+    </p:spTree>
+    <p:extLst>
+      <p:ext uri="{BB962C8B-B14F-4D97-AF65-F5344CB8AC3E}">
+        <p14:creationId xmlns:p14="http://schemas.microsoft.com/office/powerpoint/2010/main" val="2474344463"/>
+      </p:ext>
+    </p:extLst>
+  </p:cSld>
+  <p:clrMapOvr>
+    <a:masterClrMapping/>
+  </p:clrMapOvr>
+</p:sld>
+</file>
+
+<file path=ppt/slides/slide44.xml><?xml version="1.0" encoding="utf-8"?>
+<p:sld xmlns:a="http://schemas.openxmlformats.org/drawingml/2006/main" xmlns:r="http://schemas.openxmlformats.org/officeDocument/2006/relationships" xmlns:p="http://schemas.openxmlformats.org/presentationml/2006/main">
+  <p:cSld>
+    <p:spTree>
+      <p:nvGrpSpPr>
+        <p:cNvPr id="1" name=""/>
+        <p:cNvGrpSpPr/>
+        <p:nvPr/>
+      </p:nvGrpSpPr>
+      <p:grpSpPr>
+        <a:xfrm>
+          <a:off x="0" y="0"/>
+          <a:ext cx="0" cy="0"/>
+          <a:chOff x="0" y="0"/>
+          <a:chExt cx="0" cy="0"/>
+        </a:xfrm>
+      </p:grpSpPr>
+      <p:sp>
+        <p:nvSpPr>
+          <p:cNvPr id="2" name="タイトル 1">
+            <a:extLst>
+              <a:ext uri="{FF2B5EF4-FFF2-40B4-BE49-F238E27FC236}">
+                <a16:creationId xmlns:a16="http://schemas.microsoft.com/office/drawing/2014/main" id="{12CDF5E8-C1FA-5CA7-FC1E-00606DD71FAD}"/>
+              </a:ext>
+            </a:extLst>
+          </p:cNvPr>
+          <p:cNvSpPr>
+            <a:spLocks noGrp="1"/>
+          </p:cNvSpPr>
+          <p:nvPr>
+            <p:ph type="title"/>
+          </p:nvPr>
+        </p:nvSpPr>
+        <p:spPr/>
+        <p:txBody>
+          <a:bodyPr/>
+          <a:lstStyle/>
+          <a:p>
+            <a:r>
+              <a:rPr lang="ja-JP" altLang="en-US" dirty="0"/>
+              <a:t>答え＋処理過程の</a:t>
+            </a:r>
+            <a:r>
+              <a:rPr lang="en-US" altLang="ja-JP" dirty="0"/>
+              <a:t>SFT</a:t>
+            </a:r>
+            <a:r>
+              <a:rPr lang="ja-JP" altLang="en-US" dirty="0"/>
+              <a:t>の分析</a:t>
+            </a:r>
+            <a:endParaRPr kumimoji="1" lang="ja-JP" altLang="en-US" dirty="0"/>
+          </a:p>
+        </p:txBody>
+      </p:sp>
+      <p:sp>
+        <p:nvSpPr>
+          <p:cNvPr id="3" name="コンテンツ プレースホルダー 2">
+            <a:extLst>
+              <a:ext uri="{FF2B5EF4-FFF2-40B4-BE49-F238E27FC236}">
+                <a16:creationId xmlns:a16="http://schemas.microsoft.com/office/drawing/2014/main" id="{E2EC9FD6-FE96-F5EF-0F7F-7DCFB2009033}"/>
+              </a:ext>
+            </a:extLst>
+          </p:cNvPr>
+          <p:cNvSpPr>
+            <a:spLocks noGrp="1"/>
+          </p:cNvSpPr>
+          <p:nvPr>
+            <p:ph idx="1"/>
+          </p:nvPr>
+        </p:nvSpPr>
+        <p:spPr/>
+        <p:txBody>
+          <a:bodyPr/>
+          <a:lstStyle/>
+          <a:p>
+            <a:r>
+              <a:rPr lang="ja-JP" altLang="ja-JP" dirty="0"/>
+              <a:t>問題を解くために、モデルが学習データに存在しない処理を自発的に生成してしまう</a:t>
+            </a:r>
+            <a:endParaRPr kumimoji="1" lang="ja-JP" altLang="en-US" dirty="0"/>
+          </a:p>
+        </p:txBody>
+      </p:sp>
+      <p:sp>
+        <p:nvSpPr>
+          <p:cNvPr id="4" name="スライド番号プレースホルダー 3">
+            <a:extLst>
+              <a:ext uri="{FF2B5EF4-FFF2-40B4-BE49-F238E27FC236}">
+                <a16:creationId xmlns:a16="http://schemas.microsoft.com/office/drawing/2014/main" id="{D46D4B86-F39C-20B1-C581-7B5E07F236BE}"/>
+              </a:ext>
+            </a:extLst>
+          </p:cNvPr>
+          <p:cNvSpPr>
+            <a:spLocks noGrp="1"/>
+          </p:cNvSpPr>
+          <p:nvPr>
+            <p:ph type="sldNum" sz="quarter" idx="12"/>
+          </p:nvPr>
+        </p:nvSpPr>
+        <p:spPr/>
+        <p:txBody>
+          <a:bodyPr/>
+          <a:lstStyle/>
+          <a:p>
+            <a:fld id="{10649E7B-FC1B-418B-9B6A-00859DB1DEE8}" type="slidenum">
+              <a:rPr kumimoji="1" lang="ja-JP" altLang="en-US" smtClean="0"/>
+              <a:t>44</a:t>
+            </a:fld>
+            <a:endParaRPr kumimoji="1" lang="ja-JP" altLang="en-US"/>
+          </a:p>
+        </p:txBody>
+      </p:sp>
+    </p:spTree>
+    <p:extLst>
+      <p:ext uri="{BB962C8B-B14F-4D97-AF65-F5344CB8AC3E}">
+        <p14:creationId xmlns:p14="http://schemas.microsoft.com/office/powerpoint/2010/main" val="794349261"/>
+      </p:ext>
+    </p:extLst>
+  </p:cSld>
+  <p:clrMapOvr>
+    <a:masterClrMapping/>
+  </p:clrMapOvr>
+</p:sld>
+</file>
+
+<file path=ppt/slides/slide45.xml><?xml version="1.0" encoding="utf-8"?>
+<p:sld xmlns:a="http://schemas.openxmlformats.org/drawingml/2006/main" xmlns:r="http://schemas.openxmlformats.org/officeDocument/2006/relationships" xmlns:p="http://schemas.openxmlformats.org/presentationml/2006/main">
+  <p:cSld>
+    <p:spTree>
+      <p:nvGrpSpPr>
+        <p:cNvPr id="1" name=""/>
+        <p:cNvGrpSpPr/>
+        <p:nvPr/>
+      </p:nvGrpSpPr>
+      <p:grpSpPr>
+        <a:xfrm>
+          <a:off x="0" y="0"/>
+          <a:ext cx="0" cy="0"/>
+          <a:chOff x="0" y="0"/>
+          <a:chExt cx="0" cy="0"/>
+        </a:xfrm>
+      </p:grpSpPr>
+      <p:sp>
+        <p:nvSpPr>
+          <p:cNvPr id="2" name="タイトル 1">
+            <a:extLst>
+              <a:ext uri="{FF2B5EF4-FFF2-40B4-BE49-F238E27FC236}">
+                <a16:creationId xmlns:a16="http://schemas.microsoft.com/office/drawing/2014/main" id="{049BDB96-C268-100B-6F50-ED62A66CC727}"/>
+              </a:ext>
+            </a:extLst>
+          </p:cNvPr>
+          <p:cNvSpPr>
+            <a:spLocks noGrp="1"/>
+          </p:cNvSpPr>
+          <p:nvPr>
+            <p:ph type="title"/>
+          </p:nvPr>
+        </p:nvSpPr>
+        <p:spPr/>
+        <p:txBody>
+          <a:bodyPr/>
+          <a:lstStyle/>
+          <a:p>
+            <a:r>
+              <a:rPr lang="ja-JP" altLang="en-US" dirty="0"/>
+              <a:t>答え＋処理過程の</a:t>
+            </a:r>
+            <a:r>
+              <a:rPr lang="en-US" altLang="ja-JP" dirty="0"/>
+              <a:t>SFT</a:t>
+            </a:r>
+            <a:r>
+              <a:rPr lang="ja-JP" altLang="en-US" dirty="0"/>
+              <a:t>の分析</a:t>
+            </a:r>
+            <a:endParaRPr kumimoji="1" lang="ja-JP" altLang="en-US" dirty="0"/>
+          </a:p>
+        </p:txBody>
+      </p:sp>
+      <p:sp>
+        <p:nvSpPr>
+          <p:cNvPr id="3" name="コンテンツ プレースホルダー 2">
+            <a:extLst>
+              <a:ext uri="{FF2B5EF4-FFF2-40B4-BE49-F238E27FC236}">
+                <a16:creationId xmlns:a16="http://schemas.microsoft.com/office/drawing/2014/main" id="{2DE4EE0D-3BA3-2E70-633B-89F9383A0A0C}"/>
+              </a:ext>
+            </a:extLst>
+          </p:cNvPr>
+          <p:cNvSpPr>
+            <a:spLocks noGrp="1"/>
+          </p:cNvSpPr>
+          <p:nvPr>
+            <p:ph idx="1"/>
+          </p:nvPr>
+        </p:nvSpPr>
+        <p:spPr/>
+        <p:txBody>
+          <a:bodyPr/>
+          <a:lstStyle/>
+          <a:p>
+            <a:r>
+              <a:rPr kumimoji="1" lang="ja-JP" altLang="en-US" dirty="0"/>
+              <a:t>処理単体として学習データではそもそも教えてない処理を生成してるものが</a:t>
+            </a:r>
+            <a:r>
+              <a:rPr kumimoji="1" lang="en-US" altLang="ja-JP" dirty="0"/>
+              <a:t>2</a:t>
+            </a:r>
+            <a:r>
+              <a:rPr kumimoji="1" lang="ja-JP" altLang="en-US" dirty="0"/>
+              <a:t>例存在した</a:t>
+            </a:r>
+            <a:endParaRPr kumimoji="1" lang="en-US" altLang="ja-JP" dirty="0"/>
+          </a:p>
+          <a:p>
+            <a:endParaRPr lang="en-US" altLang="ja-JP" dirty="0"/>
+          </a:p>
+          <a:p>
+            <a:r>
+              <a:rPr kumimoji="1" lang="ja-JP" altLang="en-US" dirty="0"/>
+              <a:t>実際に、どんな処理をしているか確認したが、どのようなしょりなのかわからなかった。</a:t>
+            </a:r>
+          </a:p>
+        </p:txBody>
+      </p:sp>
+      <p:sp>
+        <p:nvSpPr>
+          <p:cNvPr id="4" name="スライド番号プレースホルダー 3">
+            <a:extLst>
+              <a:ext uri="{FF2B5EF4-FFF2-40B4-BE49-F238E27FC236}">
+                <a16:creationId xmlns:a16="http://schemas.microsoft.com/office/drawing/2014/main" id="{C5416714-865B-2C9A-83BF-59458CAAD869}"/>
+              </a:ext>
+            </a:extLst>
+          </p:cNvPr>
+          <p:cNvSpPr>
+            <a:spLocks noGrp="1"/>
+          </p:cNvSpPr>
+          <p:nvPr>
+            <p:ph type="sldNum" sz="quarter" idx="12"/>
+          </p:nvPr>
+        </p:nvSpPr>
+        <p:spPr/>
+        <p:txBody>
+          <a:bodyPr/>
+          <a:lstStyle/>
+          <a:p>
+            <a:fld id="{10649E7B-FC1B-418B-9B6A-00859DB1DEE8}" type="slidenum">
+              <a:rPr kumimoji="1" lang="ja-JP" altLang="en-US" smtClean="0"/>
+              <a:t>45</a:t>
+            </a:fld>
+            <a:endParaRPr kumimoji="1" lang="ja-JP" altLang="en-US"/>
+          </a:p>
+        </p:txBody>
+      </p:sp>
+    </p:spTree>
+    <p:extLst>
+      <p:ext uri="{BB962C8B-B14F-4D97-AF65-F5344CB8AC3E}">
+        <p14:creationId xmlns:p14="http://schemas.microsoft.com/office/powerpoint/2010/main" val="4085321792"/>
+      </p:ext>
+    </p:extLst>
+  </p:cSld>
+  <p:clrMapOvr>
+    <a:masterClrMapping/>
+  </p:clrMapOvr>
+</p:sld>
+</file>
+
+<file path=ppt/slides/slide46.xml><?xml version="1.0" encoding="utf-8"?>
+<p:sld xmlns:a="http://schemas.openxmlformats.org/drawingml/2006/main" xmlns:r="http://schemas.openxmlformats.org/officeDocument/2006/relationships" xmlns:p="http://schemas.openxmlformats.org/presentationml/2006/main">
+  <p:cSld>
+    <p:spTree>
+      <p:nvGrpSpPr>
+        <p:cNvPr id="1" name=""/>
+        <p:cNvGrpSpPr/>
+        <p:nvPr/>
+      </p:nvGrpSpPr>
+      <p:grpSpPr>
+        <a:xfrm>
+          <a:off x="0" y="0"/>
+          <a:ext cx="0" cy="0"/>
+          <a:chOff x="0" y="0"/>
+          <a:chExt cx="0" cy="0"/>
+        </a:xfrm>
+      </p:grpSpPr>
+      <p:sp>
+        <p:nvSpPr>
+          <p:cNvPr id="2" name="タイトル 1">
+            <a:extLst>
+              <a:ext uri="{FF2B5EF4-FFF2-40B4-BE49-F238E27FC236}">
+                <a16:creationId xmlns:a16="http://schemas.microsoft.com/office/drawing/2014/main" id="{C4C0C567-A8E0-180C-C545-A8E6827D0017}"/>
+              </a:ext>
+            </a:extLst>
+          </p:cNvPr>
+          <p:cNvSpPr>
+            <a:spLocks noGrp="1"/>
+          </p:cNvSpPr>
+          <p:nvPr>
+            <p:ph type="title"/>
+          </p:nvPr>
+        </p:nvSpPr>
+        <p:spPr/>
+        <p:txBody>
+          <a:bodyPr/>
+          <a:lstStyle/>
+          <a:p>
+            <a:r>
+              <a:rPr lang="ja-JP" altLang="en-US" dirty="0"/>
+              <a:t>答え＋処理過程の</a:t>
+            </a:r>
+            <a:r>
+              <a:rPr lang="en-US" altLang="ja-JP" dirty="0"/>
+              <a:t>SFT</a:t>
+            </a:r>
+            <a:r>
+              <a:rPr lang="ja-JP" altLang="en-US" dirty="0"/>
+              <a:t>の分析</a:t>
+            </a:r>
+            <a:endParaRPr kumimoji="1" lang="ja-JP" altLang="en-US" dirty="0"/>
+          </a:p>
+        </p:txBody>
+      </p:sp>
+      <p:sp>
+        <p:nvSpPr>
+          <p:cNvPr id="3" name="コンテンツ プレースホルダー 2">
+            <a:extLst>
+              <a:ext uri="{FF2B5EF4-FFF2-40B4-BE49-F238E27FC236}">
+                <a16:creationId xmlns:a16="http://schemas.microsoft.com/office/drawing/2014/main" id="{5D9A55D6-7BDC-E221-9586-98AE5C2A732B}"/>
+              </a:ext>
+            </a:extLst>
+          </p:cNvPr>
+          <p:cNvSpPr>
+            <a:spLocks noGrp="1"/>
+          </p:cNvSpPr>
+          <p:nvPr>
+            <p:ph idx="1"/>
+          </p:nvPr>
+        </p:nvSpPr>
+        <p:spPr/>
+        <p:txBody>
+          <a:bodyPr/>
+          <a:lstStyle/>
+          <a:p>
+            <a:r>
+              <a:rPr kumimoji="1" lang="ja-JP" altLang="en-US" dirty="0"/>
+              <a:t>正しいルールを選べていたか</a:t>
+            </a:r>
+          </a:p>
+        </p:txBody>
+      </p:sp>
+      <p:sp>
+        <p:nvSpPr>
+          <p:cNvPr id="4" name="スライド番号プレースホルダー 3">
+            <a:extLst>
+              <a:ext uri="{FF2B5EF4-FFF2-40B4-BE49-F238E27FC236}">
+                <a16:creationId xmlns:a16="http://schemas.microsoft.com/office/drawing/2014/main" id="{9560F741-8262-D35A-6020-176468344617}"/>
+              </a:ext>
+            </a:extLst>
+          </p:cNvPr>
+          <p:cNvSpPr>
+            <a:spLocks noGrp="1"/>
+          </p:cNvSpPr>
+          <p:nvPr>
+            <p:ph type="sldNum" sz="quarter" idx="12"/>
+          </p:nvPr>
+        </p:nvSpPr>
+        <p:spPr/>
+        <p:txBody>
+          <a:bodyPr/>
+          <a:lstStyle/>
+          <a:p>
+            <a:fld id="{10649E7B-FC1B-418B-9B6A-00859DB1DEE8}" type="slidenum">
+              <a:rPr kumimoji="1" lang="ja-JP" altLang="en-US" smtClean="0"/>
+              <a:t>46</a:t>
+            </a:fld>
+            <a:endParaRPr kumimoji="1" lang="ja-JP" altLang="en-US"/>
+          </a:p>
+        </p:txBody>
+      </p:sp>
+    </p:spTree>
+    <p:extLst>
+      <p:ext uri="{BB962C8B-B14F-4D97-AF65-F5344CB8AC3E}">
+        <p14:creationId xmlns:p14="http://schemas.microsoft.com/office/powerpoint/2010/main" val="3193772322"/>
+      </p:ext>
+    </p:extLst>
+  </p:cSld>
+  <p:clrMapOvr>
+    <a:masterClrMapping/>
+  </p:clrMapOvr>
+</p:sld>
+</file>
+
+<file path=ppt/slides/slide47.xml><?xml version="1.0" encoding="utf-8"?>
+<p:sld xmlns:a="http://schemas.openxmlformats.org/drawingml/2006/main" xmlns:r="http://schemas.openxmlformats.org/officeDocument/2006/relationships" xmlns:p="http://schemas.openxmlformats.org/presentationml/2006/main">
+  <p:cSld>
+    <p:spTree>
+      <p:nvGrpSpPr>
+        <p:cNvPr id="1" name=""/>
+        <p:cNvGrpSpPr/>
+        <p:nvPr/>
+      </p:nvGrpSpPr>
+      <p:grpSpPr>
+        <a:xfrm>
+          <a:off x="0" y="0"/>
+          <a:ext cx="0" cy="0"/>
+          <a:chOff x="0" y="0"/>
+          <a:chExt cx="0" cy="0"/>
+        </a:xfrm>
+      </p:grpSpPr>
+      <p:sp>
+        <p:nvSpPr>
+          <p:cNvPr id="2" name="タイトル 1">
+            <a:extLst>
+              <a:ext uri="{FF2B5EF4-FFF2-40B4-BE49-F238E27FC236}">
+                <a16:creationId xmlns:a16="http://schemas.microsoft.com/office/drawing/2014/main" id="{38720CD7-B6E9-2737-5BF2-761BCC0B12C2}"/>
+              </a:ext>
+            </a:extLst>
+          </p:cNvPr>
+          <p:cNvSpPr>
+            <a:spLocks noGrp="1"/>
+          </p:cNvSpPr>
+          <p:nvPr>
+            <p:ph type="title"/>
+          </p:nvPr>
+        </p:nvSpPr>
+        <p:spPr/>
+        <p:txBody>
+          <a:bodyPr/>
+          <a:lstStyle/>
+          <a:p>
+            <a:r>
+              <a:rPr kumimoji="1" lang="ja-JP" altLang="en-US">
+                <a:solidFill>
+                  <a:srgbClr val="FF0000"/>
+                </a:solidFill>
+              </a:rPr>
+              <a:t>改善点</a:t>
+            </a:r>
+          </a:p>
+        </p:txBody>
+      </p:sp>
+      <p:sp>
+        <p:nvSpPr>
+          <p:cNvPr id="3" name="コンテンツ プレースホルダー 2">
+            <a:extLst>
+              <a:ext uri="{FF2B5EF4-FFF2-40B4-BE49-F238E27FC236}">
+                <a16:creationId xmlns:a16="http://schemas.microsoft.com/office/drawing/2014/main" id="{017B691A-46C7-600E-7022-890D1BEC509F}"/>
+              </a:ext>
+            </a:extLst>
+          </p:cNvPr>
+          <p:cNvSpPr>
+            <a:spLocks noGrp="1"/>
+          </p:cNvSpPr>
+          <p:nvPr>
+            <p:ph idx="1"/>
+          </p:nvPr>
+        </p:nvSpPr>
+        <p:spPr/>
+        <p:txBody>
+          <a:bodyPr/>
+          <a:lstStyle/>
+          <a:p>
+            <a:r>
+              <a:rPr kumimoji="1" lang="ja-JP" altLang="en-US" dirty="0"/>
+              <a:t>口語を改善</a:t>
+            </a:r>
+            <a:endParaRPr kumimoji="1" lang="en-US" altLang="ja-JP" dirty="0"/>
+          </a:p>
+          <a:p>
+            <a:r>
+              <a:rPr lang="ja-JP" altLang="en-US" dirty="0"/>
+              <a:t>全部→全体</a:t>
+            </a:r>
+            <a:endParaRPr lang="en-US" altLang="ja-JP" dirty="0"/>
+          </a:p>
+          <a:p>
+            <a:r>
+              <a:rPr kumimoji="1" lang="ja-JP" altLang="en-US" dirty="0"/>
+              <a:t>図版を入れる</a:t>
+            </a:r>
+            <a:endParaRPr kumimoji="1" lang="en-US" altLang="ja-JP" dirty="0"/>
+          </a:p>
+          <a:p>
+            <a:r>
+              <a:rPr kumimoji="1" lang="ja-JP" altLang="en-US" dirty="0"/>
+              <a:t>参考文献の引用の仕方を長くてもいいから、正式な形で</a:t>
+            </a:r>
+            <a:endParaRPr kumimoji="1" lang="en-US" altLang="ja-JP" dirty="0"/>
+          </a:p>
+          <a:p>
+            <a:r>
+              <a:rPr kumimoji="1" lang="ja-JP" altLang="en-US" dirty="0">
+                <a:solidFill>
+                  <a:srgbClr val="FF0000"/>
+                </a:solidFill>
+              </a:rPr>
+              <a:t>今のところばらばらの実験でやってるから最後はちゃんと同じ結果を入れる</a:t>
+            </a:r>
+            <a:endParaRPr kumimoji="1" lang="en-US" altLang="ja-JP" dirty="0">
+              <a:solidFill>
+                <a:srgbClr val="FF0000"/>
+              </a:solidFill>
+            </a:endParaRPr>
+          </a:p>
+          <a:p>
+            <a:endParaRPr kumimoji="1" lang="ja-JP" altLang="en-US" dirty="0"/>
+          </a:p>
+        </p:txBody>
+      </p:sp>
+      <p:sp>
+        <p:nvSpPr>
+          <p:cNvPr id="4" name="スライド番号プレースホルダー 3">
+            <a:extLst>
+              <a:ext uri="{FF2B5EF4-FFF2-40B4-BE49-F238E27FC236}">
+                <a16:creationId xmlns:a16="http://schemas.microsoft.com/office/drawing/2014/main" id="{93BC64FA-8AD0-6880-8F88-5A3BAAA07F95}"/>
+              </a:ext>
+            </a:extLst>
+          </p:cNvPr>
+          <p:cNvSpPr>
+            <a:spLocks noGrp="1"/>
+          </p:cNvSpPr>
+          <p:nvPr>
+            <p:ph type="sldNum" sz="quarter" idx="12"/>
+          </p:nvPr>
+        </p:nvSpPr>
+        <p:spPr/>
+        <p:txBody>
+          <a:bodyPr/>
+          <a:lstStyle/>
+          <a:p>
+            <a:fld id="{10649E7B-FC1B-418B-9B6A-00859DB1DEE8}" type="slidenum">
+              <a:rPr kumimoji="1" lang="ja-JP" altLang="en-US" smtClean="0"/>
+              <a:t>47</a:t>
+            </a:fld>
+            <a:endParaRPr kumimoji="1" lang="ja-JP" altLang="en-US"/>
+          </a:p>
+        </p:txBody>
+      </p:sp>
+    </p:spTree>
+    <p:extLst>
+      <p:ext uri="{BB962C8B-B14F-4D97-AF65-F5344CB8AC3E}">
+        <p14:creationId xmlns:p14="http://schemas.microsoft.com/office/powerpoint/2010/main" val="3091403255"/>
       </p:ext>
     </p:extLst>
   </p:cSld>
